--- a/church_media_generator/outputs/mass_presentation.pptx
+++ b/church_media_generator/outputs/mass_presentation.pptx
@@ -6,8 +6,12 @@
   </p:sldMasterIdLst>
   <p:sldIdLst>
     <p:sldId id="256" r:id="rId7"/>
+    <p:sldId id="257" r:id="rId8"/>
+    <p:sldId id="258" r:id="rId9"/>
+    <p:sldId id="259" r:id="rId10"/>
+    <p:sldId id="260" r:id="rId11"/>
   </p:sldIdLst>
-  <p:sldSz cx="9144000" cy="6858000" type="screen4x3"/>
+  <p:sldSz cx="18288000" cy="10287000" type="screen4x3"/>
   <p:notesSz cx="6858000" cy="9144000"/>
   <p:defaultTextStyle>
     <a:defPPr>
@@ -3081,6 +3085,14 @@
 <file path=ppt/slides/slide1.xml><?xml version="1.0" encoding="utf-8"?>
 <p:sld xmlns:a="http://schemas.openxmlformats.org/drawingml/2006/main" xmlns:p="http://schemas.openxmlformats.org/presentationml/2006/main" xmlns:r="http://schemas.openxmlformats.org/officeDocument/2006/relationships">
   <p:cSld>
+    <p:bg>
+      <p:bgPr>
+        <a:solidFill>
+          <a:srgbClr val="121216"/>
+        </a:solidFill>
+        <a:effectLst/>
+      </p:bgPr>
+    </p:bg>
     <p:spTree>
       <p:nvGrpSpPr>
         <p:cNvPr id="1" name=""/>
@@ -3090,19 +3102,34 @@
       <p:grpSpPr/>
       <p:sp>
         <p:nvSpPr>
-          <p:cNvPr id="2" name="Title 1"/>
-          <p:cNvSpPr>
-            <a:spLocks noGrp="1"/>
-          </p:cNvSpPr>
-          <p:nvPr>
-            <p:ph type="ctrTitle"/>
-          </p:nvPr>
-        </p:nvSpPr>
-        <p:spPr/>
-        <p:txBody>
-          <a:bodyPr/>
-          <a:lstStyle/>
-          <a:p>
+          <p:cNvPr id="2" name="TextBox 1"/>
+          <p:cNvSpPr txBox="1"/>
+          <p:nvPr/>
+        </p:nvSpPr>
+        <p:spPr>
+          <a:xfrm>
+            <a:off x="685800" y="1051560"/>
+            <a:ext cx="16916400" cy="1188720"/>
+          </a:xfrm>
+          <a:prstGeom prst="rect">
+            <a:avLst/>
+          </a:prstGeom>
+          <a:noFill/>
+        </p:spPr>
+        <p:txBody>
+          <a:bodyPr wrap="square" lIns="109728" rIns="109728" tIns="91440" bIns="91440">
+            <a:noAutofit/>
+          </a:bodyPr>
+          <a:lstStyle/>
+          <a:p>
+            <a:pPr>
+              <a:defRPr sz="3800" b="1">
+                <a:solidFill>
+                  <a:srgbClr val="DCAA5A"/>
+                </a:solidFill>
+                <a:latin typeface="Calibri"/>
+              </a:defRPr>
+            </a:pPr>
             <a:r>
               <a:t>Eastertide Celebration</a:t>
             </a:r>
@@ -3111,49 +3138,631 @@
       </p:sp>
       <p:sp>
         <p:nvSpPr>
-          <p:cNvPr id="3" name="Subtitle 2"/>
-          <p:cNvSpPr>
-            <a:spLocks noGrp="1"/>
-          </p:cNvSpPr>
-          <p:nvPr>
-            <p:ph type="subTitle" idx="1"/>
-          </p:nvPr>
-        </p:nvSpPr>
-        <p:spPr/>
-        <p:txBody>
-          <a:bodyPr/>
-          <a:lstStyle/>
-          <a:p>
-            <a:r>
-              <a:t>Gospel: John 14:15-21</a:t>
-            </a:r>
-          </a:p>
-          <a:p/>
-          <a:p>
-            <a:r>
-              <a:t>If you love me, you will keep my commandments.</a:t>
-            </a:r>
-          </a:p>
-          <a:p/>
-          <a:p>
+          <p:cNvPr id="3" name="TextBox 2"/>
+          <p:cNvSpPr txBox="1"/>
+          <p:nvPr/>
+        </p:nvSpPr>
+        <p:spPr>
+          <a:xfrm>
+            <a:off x="685800" y="2377440"/>
+            <a:ext cx="16916400" cy="1691640"/>
+          </a:xfrm>
+          <a:prstGeom prst="rect">
+            <a:avLst/>
+          </a:prstGeom>
+          <a:noFill/>
+        </p:spPr>
+        <p:txBody>
+          <a:bodyPr wrap="square" lIns="109728" rIns="109728" tIns="91440" bIns="91440">
+            <a:noAutofit/>
+          </a:bodyPr>
+          <a:lstStyle/>
+          <a:p>
+            <a:pPr>
+              <a:spcAft>
+                <a:spcPts val="400"/>
+              </a:spcAft>
+              <a:defRPr sz="2100" b="0">
+                <a:solidFill>
+                  <a:srgbClr val="F5F5F5"/>
+                </a:solidFill>
+                <a:latin typeface="Calibri"/>
+              </a:defRPr>
+            </a:pPr>
+            <a:r>
+              <a:t>Celebrant: yuhu</a:t>
+            </a:r>
+            <a:br/>
+            <a:r>
+              <a:t>Date: 2026-05-10</a:t>
+            </a:r>
+          </a:p>
+          <a:p>
+            <a:pPr>
+              <a:spcAft>
+                <a:spcPts val="400"/>
+              </a:spcAft>
+              <a:defRPr sz="2100" b="0">
+                <a:solidFill>
+                  <a:srgbClr val="F5F5F5"/>
+                </a:solidFill>
+                <a:latin typeface="Calibri"/>
+              </a:defRPr>
+            </a:pPr>
+            <a:r>
+              <a:t>Season: Eastertide</a:t>
+            </a:r>
+            <a:br/>
             <a:r>
               <a:t>Sunday Lectionary: Year A</a:t>
             </a:r>
           </a:p>
           <a:p>
-            <a:r>
-              <a:t>Liturgical season: Eastertide</a:t>
-            </a:r>
-          </a:p>
-          <a:p/>
-          <a:p>
-            <a:r>
-              <a:t>Celebrant: runny</a:t>
-            </a:r>
-          </a:p>
-          <a:p>
-            <a:r>
-              <a:t>Date: 2026-05-10</a:t>
+            <a:pPr>
+              <a:spcAft>
+                <a:spcPts val="400"/>
+              </a:spcAft>
+              <a:defRPr sz="2100" b="0">
+                <a:solidFill>
+                  <a:srgbClr val="F5F5F5"/>
+                </a:solidFill>
+                <a:latin typeface="Calibri"/>
+              </a:defRPr>
+            </a:pPr>
+            <a:r>
+              <a:t>Gospel (John 14:15-21) — excerpt</a:t>
+            </a:r>
+            <a:br/>
+            <a:r>
+              <a:t>“If you love me, you will keep my commandments.”</a:t>
+            </a:r>
+          </a:p>
+        </p:txBody>
+      </p:sp>
+    </p:spTree>
+  </p:cSld>
+  <p:clrMapOvr>
+    <a:masterClrMapping/>
+  </p:clrMapOvr>
+</p:sld>
+</file>
+
+<file path=ppt/slides/slide2.xml><?xml version="1.0" encoding="utf-8"?>
+<p:sld xmlns:a="http://schemas.openxmlformats.org/drawingml/2006/main" xmlns:p="http://schemas.openxmlformats.org/presentationml/2006/main" xmlns:r="http://schemas.openxmlformats.org/officeDocument/2006/relationships">
+  <p:cSld>
+    <p:bg>
+      <p:bgPr>
+        <a:solidFill>
+          <a:srgbClr val="121216"/>
+        </a:solidFill>
+        <a:effectLst/>
+      </p:bgPr>
+    </p:bg>
+    <p:spTree>
+      <p:nvGrpSpPr>
+        <p:cNvPr id="1" name=""/>
+        <p:cNvGrpSpPr/>
+        <p:nvPr/>
+      </p:nvGrpSpPr>
+      <p:grpSpPr/>
+      <p:sp>
+        <p:nvSpPr>
+          <p:cNvPr id="2" name="TextBox 1"/>
+          <p:cNvSpPr txBox="1"/>
+          <p:nvPr/>
+        </p:nvSpPr>
+        <p:spPr>
+          <a:xfrm>
+            <a:off x="685800" y="457200"/>
+            <a:ext cx="16916400" cy="822960"/>
+          </a:xfrm>
+          <a:prstGeom prst="rect">
+            <a:avLst/>
+          </a:prstGeom>
+          <a:noFill/>
+        </p:spPr>
+        <p:txBody>
+          <a:bodyPr wrap="square" lIns="109728" rIns="109728" tIns="91440" bIns="91440">
+            <a:noAutofit/>
+          </a:bodyPr>
+          <a:lstStyle/>
+          <a:p>
+            <a:pPr>
+              <a:defRPr sz="3200" b="1">
+                <a:solidFill>
+                  <a:srgbClr val="DCAA5A"/>
+                </a:solidFill>
+                <a:latin typeface="Calibri"/>
+              </a:defRPr>
+            </a:pPr>
+            <a:r>
+              <a:t>First Reading</a:t>
+            </a:r>
+          </a:p>
+        </p:txBody>
+      </p:sp>
+      <p:sp>
+        <p:nvSpPr>
+          <p:cNvPr id="3" name="TextBox 2"/>
+          <p:cNvSpPr txBox="1"/>
+          <p:nvPr/>
+        </p:nvSpPr>
+        <p:spPr>
+          <a:xfrm>
+            <a:off x="685800" y="1298448"/>
+            <a:ext cx="16916400" cy="475488"/>
+          </a:xfrm>
+          <a:prstGeom prst="rect">
+            <a:avLst/>
+          </a:prstGeom>
+          <a:noFill/>
+        </p:spPr>
+        <p:txBody>
+          <a:bodyPr wrap="square" lIns="109728" rIns="109728" tIns="91440" bIns="91440">
+            <a:noAutofit/>
+          </a:bodyPr>
+          <a:lstStyle/>
+          <a:p>
+            <a:pPr>
+              <a:defRPr sz="1500" b="0">
+                <a:solidFill>
+                  <a:srgbClr val="9B9BA5"/>
+                </a:solidFill>
+                <a:latin typeface="Calibri"/>
+              </a:defRPr>
+            </a:pPr>
+            <a:r>
+              <a:t>Acts 8:5-8, 14-17</a:t>
+            </a:r>
+          </a:p>
+        </p:txBody>
+      </p:sp>
+      <p:sp>
+        <p:nvSpPr>
+          <p:cNvPr id="4" name="TextBox 3"/>
+          <p:cNvSpPr txBox="1"/>
+          <p:nvPr/>
+        </p:nvSpPr>
+        <p:spPr>
+          <a:xfrm>
+            <a:off x="685800" y="1874520"/>
+            <a:ext cx="16916400" cy="7726680"/>
+          </a:xfrm>
+          <a:prstGeom prst="rect">
+            <a:avLst/>
+          </a:prstGeom>
+          <a:noFill/>
+        </p:spPr>
+        <p:txBody>
+          <a:bodyPr wrap="square" lIns="109728" rIns="109728" tIns="91440" bIns="91440">
+            <a:noAutofit/>
+          </a:bodyPr>
+          <a:lstStyle/>
+          <a:p>
+            <a:pPr>
+              <a:spcAft>
+                <a:spcPts val="400"/>
+              </a:spcAft>
+              <a:defRPr sz="2000" b="0">
+                <a:solidFill>
+                  <a:srgbClr val="F5F5F5"/>
+                </a:solidFill>
+                <a:latin typeface="Calibri"/>
+              </a:defRPr>
+            </a:pPr>
+            <a:r>
+              <a:t>Philip went down to the city of Samaria and proclaimed the Christ to them. With one accord, the crowds paid attention to what was said by Philip when they heard it and saw the signs he was doing. For unclean spirits, crying out in a loud voice, came out of many possessed people, and many paralyzed or crippled people were cured. There was great joy in that city. Now when the apostles in Jerusalem heard that Samaria had accepted the word of God, they sent them Peter and John, who went down and prayed for them, that they might receive the Holy Spirit, for it had not yet fallen upon any of them; they had only been baptized in the name of the Lord Jesus. Then they laid hands on them and they received the Holy Spirit.</a:t>
+            </a:r>
+          </a:p>
+        </p:txBody>
+      </p:sp>
+    </p:spTree>
+  </p:cSld>
+  <p:clrMapOvr>
+    <a:masterClrMapping/>
+  </p:clrMapOvr>
+</p:sld>
+</file>
+
+<file path=ppt/slides/slide3.xml><?xml version="1.0" encoding="utf-8"?>
+<p:sld xmlns:a="http://schemas.openxmlformats.org/drawingml/2006/main" xmlns:p="http://schemas.openxmlformats.org/presentationml/2006/main" xmlns:r="http://schemas.openxmlformats.org/officeDocument/2006/relationships">
+  <p:cSld>
+    <p:bg>
+      <p:bgPr>
+        <a:solidFill>
+          <a:srgbClr val="121216"/>
+        </a:solidFill>
+        <a:effectLst/>
+      </p:bgPr>
+    </p:bg>
+    <p:spTree>
+      <p:nvGrpSpPr>
+        <p:cNvPr id="1" name=""/>
+        <p:cNvGrpSpPr/>
+        <p:nvPr/>
+      </p:nvGrpSpPr>
+      <p:grpSpPr/>
+      <p:sp>
+        <p:nvSpPr>
+          <p:cNvPr id="2" name="TextBox 1"/>
+          <p:cNvSpPr txBox="1"/>
+          <p:nvPr/>
+        </p:nvSpPr>
+        <p:spPr>
+          <a:xfrm>
+            <a:off x="685800" y="457200"/>
+            <a:ext cx="16916400" cy="822960"/>
+          </a:xfrm>
+          <a:prstGeom prst="rect">
+            <a:avLst/>
+          </a:prstGeom>
+          <a:noFill/>
+        </p:spPr>
+        <p:txBody>
+          <a:bodyPr wrap="square" lIns="109728" rIns="109728" tIns="91440" bIns="91440">
+            <a:noAutofit/>
+          </a:bodyPr>
+          <a:lstStyle/>
+          <a:p>
+            <a:pPr>
+              <a:defRPr sz="3200" b="1">
+                <a:solidFill>
+                  <a:srgbClr val="DCAA5A"/>
+                </a:solidFill>
+                <a:latin typeface="Calibri"/>
+              </a:defRPr>
+            </a:pPr>
+            <a:r>
+              <a:t>Responsorial Psalm</a:t>
+            </a:r>
+          </a:p>
+        </p:txBody>
+      </p:sp>
+      <p:sp>
+        <p:nvSpPr>
+          <p:cNvPr id="3" name="TextBox 2"/>
+          <p:cNvSpPr txBox="1"/>
+          <p:nvPr/>
+        </p:nvSpPr>
+        <p:spPr>
+          <a:xfrm>
+            <a:off x="685800" y="1298448"/>
+            <a:ext cx="16916400" cy="475488"/>
+          </a:xfrm>
+          <a:prstGeom prst="rect">
+            <a:avLst/>
+          </a:prstGeom>
+          <a:noFill/>
+        </p:spPr>
+        <p:txBody>
+          <a:bodyPr wrap="square" lIns="109728" rIns="109728" tIns="91440" bIns="91440">
+            <a:noAutofit/>
+          </a:bodyPr>
+          <a:lstStyle/>
+          <a:p>
+            <a:pPr>
+              <a:defRPr sz="1500" b="0">
+                <a:solidFill>
+                  <a:srgbClr val="9B9BA5"/>
+                </a:solidFill>
+                <a:latin typeface="Calibri"/>
+              </a:defRPr>
+            </a:pPr>
+            <a:r>
+              <a:t>Psalm 66:1-3, 4-5, 6-7, 16, 20</a:t>
+            </a:r>
+          </a:p>
+        </p:txBody>
+      </p:sp>
+      <p:sp>
+        <p:nvSpPr>
+          <p:cNvPr id="4" name="TextBox 3"/>
+          <p:cNvSpPr txBox="1"/>
+          <p:nvPr/>
+        </p:nvSpPr>
+        <p:spPr>
+          <a:xfrm>
+            <a:off x="685800" y="1874520"/>
+            <a:ext cx="16916400" cy="7726680"/>
+          </a:xfrm>
+          <a:prstGeom prst="rect">
+            <a:avLst/>
+          </a:prstGeom>
+          <a:noFill/>
+        </p:spPr>
+        <p:txBody>
+          <a:bodyPr wrap="square" lIns="109728" rIns="109728" tIns="91440" bIns="91440">
+            <a:noAutofit/>
+          </a:bodyPr>
+          <a:lstStyle/>
+          <a:p>
+            <a:pPr>
+              <a:spcAft>
+                <a:spcPts val="400"/>
+              </a:spcAft>
+              <a:defRPr sz="2000" b="0">
+                <a:solidFill>
+                  <a:srgbClr val="F5F5F5"/>
+                </a:solidFill>
+                <a:latin typeface="Calibri"/>
+              </a:defRPr>
+            </a:pPr>
+            <a:r>
+              <a:t>R. (1) Let all the earth cry out to God with joy. or: R. Alleluia. Shout joyfully to God, all the earth, sing praise to the glory of his name; proclaim his glorious praise. Say to God, “How tremendous are your deeds!” R. Let all the earth cry out to God with joy. or: R. Alleluia. “Let all on earth worship and sing praise to you, sing praise to your name!” Come and see the works of God, his tremendous deeds among the children of Adam. R. Let all the earth cry out to God with joy. or: R. Alleluia. He has changed the sea into dry land; through the river they passed on foot; therefore let us rejoice in him. He rules by his might forever. R. Let all the earth cry out to God with joy. or: R. Alleluia. Hear now, all you who fear God, while I declare what he has done for me. Blessed be God who refused me not my prayer or his kindness! R. Let all the earth cry out to God with joy. or: R. Alleluia.</a:t>
+            </a:r>
+          </a:p>
+        </p:txBody>
+      </p:sp>
+    </p:spTree>
+  </p:cSld>
+  <p:clrMapOvr>
+    <a:masterClrMapping/>
+  </p:clrMapOvr>
+</p:sld>
+</file>
+
+<file path=ppt/slides/slide4.xml><?xml version="1.0" encoding="utf-8"?>
+<p:sld xmlns:a="http://schemas.openxmlformats.org/drawingml/2006/main" xmlns:p="http://schemas.openxmlformats.org/presentationml/2006/main" xmlns:r="http://schemas.openxmlformats.org/officeDocument/2006/relationships">
+  <p:cSld>
+    <p:bg>
+      <p:bgPr>
+        <a:solidFill>
+          <a:srgbClr val="121216"/>
+        </a:solidFill>
+        <a:effectLst/>
+      </p:bgPr>
+    </p:bg>
+    <p:spTree>
+      <p:nvGrpSpPr>
+        <p:cNvPr id="1" name=""/>
+        <p:cNvGrpSpPr/>
+        <p:nvPr/>
+      </p:nvGrpSpPr>
+      <p:grpSpPr/>
+      <p:sp>
+        <p:nvSpPr>
+          <p:cNvPr id="2" name="TextBox 1"/>
+          <p:cNvSpPr txBox="1"/>
+          <p:nvPr/>
+        </p:nvSpPr>
+        <p:spPr>
+          <a:xfrm>
+            <a:off x="685800" y="457200"/>
+            <a:ext cx="16916400" cy="822960"/>
+          </a:xfrm>
+          <a:prstGeom prst="rect">
+            <a:avLst/>
+          </a:prstGeom>
+          <a:noFill/>
+        </p:spPr>
+        <p:txBody>
+          <a:bodyPr wrap="square" lIns="109728" rIns="109728" tIns="91440" bIns="91440">
+            <a:noAutofit/>
+          </a:bodyPr>
+          <a:lstStyle/>
+          <a:p>
+            <a:pPr>
+              <a:defRPr sz="3200" b="1">
+                <a:solidFill>
+                  <a:srgbClr val="DCAA5A"/>
+                </a:solidFill>
+                <a:latin typeface="Calibri"/>
+              </a:defRPr>
+            </a:pPr>
+            <a:r>
+              <a:t>Second Reading</a:t>
+            </a:r>
+          </a:p>
+        </p:txBody>
+      </p:sp>
+      <p:sp>
+        <p:nvSpPr>
+          <p:cNvPr id="3" name="TextBox 2"/>
+          <p:cNvSpPr txBox="1"/>
+          <p:nvPr/>
+        </p:nvSpPr>
+        <p:spPr>
+          <a:xfrm>
+            <a:off x="685800" y="1298448"/>
+            <a:ext cx="16916400" cy="475488"/>
+          </a:xfrm>
+          <a:prstGeom prst="rect">
+            <a:avLst/>
+          </a:prstGeom>
+          <a:noFill/>
+        </p:spPr>
+        <p:txBody>
+          <a:bodyPr wrap="square" lIns="109728" rIns="109728" tIns="91440" bIns="91440">
+            <a:noAutofit/>
+          </a:bodyPr>
+          <a:lstStyle/>
+          <a:p>
+            <a:pPr>
+              <a:defRPr sz="1500" b="0">
+                <a:solidFill>
+                  <a:srgbClr val="9B9BA5"/>
+                </a:solidFill>
+                <a:latin typeface="Calibri"/>
+              </a:defRPr>
+            </a:pPr>
+            <a:r>
+              <a:t>1 Peter 3:15-18</a:t>
+            </a:r>
+          </a:p>
+        </p:txBody>
+      </p:sp>
+      <p:sp>
+        <p:nvSpPr>
+          <p:cNvPr id="4" name="TextBox 3"/>
+          <p:cNvSpPr txBox="1"/>
+          <p:nvPr/>
+        </p:nvSpPr>
+        <p:spPr>
+          <a:xfrm>
+            <a:off x="685800" y="1874520"/>
+            <a:ext cx="16916400" cy="7726680"/>
+          </a:xfrm>
+          <a:prstGeom prst="rect">
+            <a:avLst/>
+          </a:prstGeom>
+          <a:noFill/>
+        </p:spPr>
+        <p:txBody>
+          <a:bodyPr wrap="square" lIns="109728" rIns="109728" tIns="91440" bIns="91440">
+            <a:noAutofit/>
+          </a:bodyPr>
+          <a:lstStyle/>
+          <a:p>
+            <a:pPr>
+              <a:spcAft>
+                <a:spcPts val="400"/>
+              </a:spcAft>
+              <a:defRPr sz="2000" b="0">
+                <a:solidFill>
+                  <a:srgbClr val="F5F5F5"/>
+                </a:solidFill>
+                <a:latin typeface="Calibri"/>
+              </a:defRPr>
+            </a:pPr>
+            <a:r>
+              <a:t>Beloved: Sanctify Christ as Lord in your hearts. Always be ready to give an explanation to anyone who asks you for a reason for your hope, but do it with gentleness and reverence, keeping your conscience clear, so that, when you are maligned, those who defame your good conduct in Christ may themselves be put to shame. For it is better to suffer for doing good, if that be the will of God, than for doing evil. For Christ also suffered for sins once, the righteous for the sake of the unrighteous, that he might lead you to God. Put to death in the flesh, he was brought to life in the Spirit.</a:t>
+            </a:r>
+          </a:p>
+        </p:txBody>
+      </p:sp>
+    </p:spTree>
+  </p:cSld>
+  <p:clrMapOvr>
+    <a:masterClrMapping/>
+  </p:clrMapOvr>
+</p:sld>
+</file>
+
+<file path=ppt/slides/slide5.xml><?xml version="1.0" encoding="utf-8"?>
+<p:sld xmlns:a="http://schemas.openxmlformats.org/drawingml/2006/main" xmlns:p="http://schemas.openxmlformats.org/presentationml/2006/main" xmlns:r="http://schemas.openxmlformats.org/officeDocument/2006/relationships">
+  <p:cSld>
+    <p:bg>
+      <p:bgPr>
+        <a:solidFill>
+          <a:srgbClr val="121216"/>
+        </a:solidFill>
+        <a:effectLst/>
+      </p:bgPr>
+    </p:bg>
+    <p:spTree>
+      <p:nvGrpSpPr>
+        <p:cNvPr id="1" name=""/>
+        <p:cNvGrpSpPr/>
+        <p:nvPr/>
+      </p:nvGrpSpPr>
+      <p:grpSpPr/>
+      <p:sp>
+        <p:nvSpPr>
+          <p:cNvPr id="2" name="TextBox 1"/>
+          <p:cNvSpPr txBox="1"/>
+          <p:nvPr/>
+        </p:nvSpPr>
+        <p:spPr>
+          <a:xfrm>
+            <a:off x="685800" y="457200"/>
+            <a:ext cx="16916400" cy="822960"/>
+          </a:xfrm>
+          <a:prstGeom prst="rect">
+            <a:avLst/>
+          </a:prstGeom>
+          <a:noFill/>
+        </p:spPr>
+        <p:txBody>
+          <a:bodyPr wrap="square" lIns="109728" rIns="109728" tIns="91440" bIns="91440">
+            <a:noAutofit/>
+          </a:bodyPr>
+          <a:lstStyle/>
+          <a:p>
+            <a:pPr>
+              <a:defRPr sz="3200" b="1">
+                <a:solidFill>
+                  <a:srgbClr val="DCAA5A"/>
+                </a:solidFill>
+                <a:latin typeface="Calibri"/>
+              </a:defRPr>
+            </a:pPr>
+            <a:r>
+              <a:t>Gospel</a:t>
+            </a:r>
+          </a:p>
+        </p:txBody>
+      </p:sp>
+      <p:sp>
+        <p:nvSpPr>
+          <p:cNvPr id="3" name="TextBox 2"/>
+          <p:cNvSpPr txBox="1"/>
+          <p:nvPr/>
+        </p:nvSpPr>
+        <p:spPr>
+          <a:xfrm>
+            <a:off x="685800" y="1298448"/>
+            <a:ext cx="16916400" cy="475488"/>
+          </a:xfrm>
+          <a:prstGeom prst="rect">
+            <a:avLst/>
+          </a:prstGeom>
+          <a:noFill/>
+        </p:spPr>
+        <p:txBody>
+          <a:bodyPr wrap="square" lIns="109728" rIns="109728" tIns="91440" bIns="91440">
+            <a:noAutofit/>
+          </a:bodyPr>
+          <a:lstStyle/>
+          <a:p>
+            <a:pPr>
+              <a:defRPr sz="1500" b="0">
+                <a:solidFill>
+                  <a:srgbClr val="9B9BA5"/>
+                </a:solidFill>
+                <a:latin typeface="Calibri"/>
+              </a:defRPr>
+            </a:pPr>
+            <a:r>
+              <a:t>John 14:15-21</a:t>
+            </a:r>
+          </a:p>
+        </p:txBody>
+      </p:sp>
+      <p:sp>
+        <p:nvSpPr>
+          <p:cNvPr id="4" name="TextBox 3"/>
+          <p:cNvSpPr txBox="1"/>
+          <p:nvPr/>
+        </p:nvSpPr>
+        <p:spPr>
+          <a:xfrm>
+            <a:off x="685800" y="1874520"/>
+            <a:ext cx="16916400" cy="7726680"/>
+          </a:xfrm>
+          <a:prstGeom prst="rect">
+            <a:avLst/>
+          </a:prstGeom>
+          <a:noFill/>
+        </p:spPr>
+        <p:txBody>
+          <a:bodyPr wrap="square" lIns="109728" rIns="109728" tIns="91440" bIns="91440">
+            <a:noAutofit/>
+          </a:bodyPr>
+          <a:lstStyle/>
+          <a:p>
+            <a:pPr>
+              <a:spcAft>
+                <a:spcPts val="400"/>
+              </a:spcAft>
+              <a:defRPr sz="2000" b="0">
+                <a:solidFill>
+                  <a:srgbClr val="F5F5F5"/>
+                </a:solidFill>
+                <a:latin typeface="Calibri"/>
+              </a:defRPr>
+            </a:pPr>
+            <a:r>
+              <a:t>Jesus said to his disciples: “If you love me, you will keep my commandments. And I will ask the Father, and he will give you another Advocate to be with you always, the Spirit of truth, whom the world cannot accept, because it neither sees nor knows him. But you know him, because he remains with you, and will be in you. I will not leave you orphans; I will come to you. In a little while the world will no longer see me, but you will see me, because I live and you will live. On that day you will realize that I am in my Father and you are in me and I in you. Whoever has my commandments and observes them is the one who loves me. And whoever loves me will be loved by my Father, and I will love him and reveal myself to him.”</a:t>
             </a:r>
           </a:p>
         </p:txBody>

--- a/church_media_generator/outputs/mass_presentation.pptx
+++ b/church_media_generator/outputs/mass_presentation.pptx
@@ -63,6 +63,9 @@
     <p:sldId id="311" r:id="rId62"/>
     <p:sldId id="312" r:id="rId63"/>
     <p:sldId id="313" r:id="rId64"/>
+    <p:sldId id="314" r:id="rId65"/>
+    <p:sldId id="315" r:id="rId66"/>
+    <p:sldId id="316" r:id="rId67"/>
   </p:sldIdLst>
   <p:sldSz cx="18288000" cy="10287000" type="screen4x3"/>
   <p:notesSz cx="6858000" cy="9144000"/>
@@ -3162,7 +3165,7 @@
         <p:spPr>
           <a:xfrm>
             <a:off x="685800" y="457200"/>
-            <a:ext cx="16916400" cy="8778240"/>
+            <a:ext cx="16916400" cy="8823960"/>
           </a:xfrm>
           <a:prstGeom prst="rect">
             <a:avLst/>
@@ -3197,7 +3200,7 @@
               </a:spcAft>
               <a:defRPr sz="1500" b="0" i="1">
                 <a:solidFill>
-                  <a:srgbClr val="DCAA5A"/>
+                  <a:srgbClr val="F2F0E8"/>
                 </a:solidFill>
                 <a:latin typeface="Calibri"/>
               </a:defRPr>
@@ -3249,7 +3252,7 @@
               </a:spcBef>
               <a:defRPr sz="1200" b="0" i="0">
                 <a:solidFill>
-                  <a:srgbClr val="DCAA5A"/>
+                  <a:srgbClr val="F2F0E8"/>
                 </a:solidFill>
                 <a:latin typeface="Calibri"/>
               </a:defRPr>
@@ -3295,7 +3298,7 @@
         <p:spPr>
           <a:xfrm>
             <a:off x="685800" y="457200"/>
-            <a:ext cx="16916400" cy="8778240"/>
+            <a:ext cx="16916400" cy="8823960"/>
           </a:xfrm>
           <a:prstGeom prst="rect">
             <a:avLst/>
@@ -3398,7 +3401,7 @@
               </a:spcBef>
               <a:defRPr sz="1200" b="0" i="0">
                 <a:solidFill>
-                  <a:srgbClr val="DCAA5A"/>
+                  <a:srgbClr val="F2F0E8"/>
                 </a:solidFill>
                 <a:latin typeface="Calibri"/>
               </a:defRPr>
@@ -3444,7 +3447,7 @@
         <p:spPr>
           <a:xfrm>
             <a:off x="685800" y="457200"/>
-            <a:ext cx="16916400" cy="8778240"/>
+            <a:ext cx="16916400" cy="8823960"/>
           </a:xfrm>
           <a:prstGeom prst="rect">
             <a:avLst/>
@@ -3463,7 +3466,7 @@
               </a:spcAft>
               <a:defRPr sz="2000" b="1" i="0">
                 <a:solidFill>
-                  <a:srgbClr val="DCAA5A"/>
+                  <a:srgbClr val="F2F0E8"/>
                 </a:solidFill>
                 <a:latin typeface="Calibri"/>
               </a:defRPr>
@@ -3495,7 +3498,7 @@
               </a:spcAft>
               <a:defRPr sz="1500" b="0" i="1">
                 <a:solidFill>
-                  <a:srgbClr val="DCAA5A"/>
+                  <a:srgbClr val="F2F0E8"/>
                 </a:solidFill>
                 <a:latin typeface="Calibri"/>
               </a:defRPr>
@@ -3547,7 +3550,7 @@
               </a:spcBef>
               <a:defRPr sz="1200" b="0" i="0">
                 <a:solidFill>
-                  <a:srgbClr val="DCAA5A"/>
+                  <a:srgbClr val="F2F0E8"/>
                 </a:solidFill>
                 <a:latin typeface="Calibri"/>
               </a:defRPr>
@@ -3592,8 +3595,8 @@
         </p:nvSpPr>
         <p:spPr>
           <a:xfrm>
-            <a:off x="685800" y="1554480"/>
-            <a:ext cx="16916400" cy="3657600"/>
+            <a:off x="685800" y="1508760"/>
+            <a:ext cx="16916400" cy="4114800"/>
           </a:xfrm>
           <a:prstGeom prst="rect">
             <a:avLst/>
@@ -3609,7 +3612,7 @@
             <a:pPr algn="ctr">
               <a:defRPr sz="4400" b="1" i="0">
                 <a:solidFill>
-                  <a:srgbClr val="DCAA5A"/>
+                  <a:srgbClr val="F2F0E8"/>
                 </a:solidFill>
                 <a:latin typeface="Calibri"/>
               </a:defRPr>
@@ -3665,7 +3668,7 @@
               </a:spcBef>
               <a:defRPr sz="1200" b="0" i="0">
                 <a:solidFill>
-                  <a:srgbClr val="DCAA5A"/>
+                  <a:srgbClr val="F2F0E8"/>
                 </a:solidFill>
                 <a:latin typeface="Calibri"/>
               </a:defRPr>
@@ -3711,7 +3714,7 @@
         <p:spPr>
           <a:xfrm>
             <a:off x="685800" y="457200"/>
-            <a:ext cx="16916400" cy="1051560"/>
+            <a:ext cx="16916400" cy="1024128"/>
           </a:xfrm>
           <a:prstGeom prst="rect">
             <a:avLst/>
@@ -3727,7 +3730,7 @@
             <a:pPr>
               <a:defRPr sz="2800" b="1" i="0">
                 <a:solidFill>
-                  <a:srgbClr val="DCAA5A"/>
+                  <a:srgbClr val="F2F0E8"/>
                 </a:solidFill>
                 <a:latin typeface="Calibri"/>
               </a:defRPr>
@@ -3746,7 +3749,7 @@
               </a:defRPr>
             </a:pPr>
             <a:r>
-              <a:t>First Reading (Acts 8:5-8, 14-17)</a:t>
+              <a:t>First Reading (Acts 2:14a, 36-41)</a:t>
             </a:r>
           </a:p>
         </p:txBody>
@@ -3759,7 +3762,7 @@
         </p:nvSpPr>
         <p:spPr>
           <a:xfrm>
-            <a:off x="685800" y="1563624"/>
+            <a:off x="685800" y="1536192"/>
             <a:ext cx="16916400" cy="438912"/>
           </a:xfrm>
           <a:prstGeom prst="rect">
@@ -3792,8 +3795,8 @@
         </p:nvSpPr>
         <p:spPr>
           <a:xfrm>
-            <a:off x="685800" y="2112264"/>
-            <a:ext cx="16916400" cy="7260336"/>
+            <a:off x="685800" y="2084832"/>
+            <a:ext cx="16916400" cy="7287768"/>
           </a:xfrm>
           <a:prstGeom prst="rect">
             <a:avLst/>
@@ -3808,7 +3811,7 @@
           <a:p>
             <a:pPr>
               <a:spcAft>
-                <a:spcPts val="400"/>
+                <a:spcPts val="500"/>
               </a:spcAft>
               <a:defRPr sz="1900" b="0" i="0">
                 <a:solidFill>
@@ -3818,7 +3821,7 @@
               </a:defRPr>
             </a:pPr>
             <a:r>
-              <a:t>Philip went down to the city of Samaria and proclaimed the Christ to them. With one accord, the crowds paid attention to what was said by Philip when they heard it and saw the signs he was doing. For unclean spirits, crying out in a loud voice, came out of many possessed people, and many paralyzed or crippled people were cured. There was great joy in that city. Now when the apostles in Jerusalem heard that Samaria had accepted the word of God, they sent them Peter and John, who went down and prayed for them, that they might receive the Holy Spirit, for it had not yet fallen upon any of them; they had only been baptized in the name of the Lord Jesus. Then they laid hands on them and they received the Holy Spirit.</a:t>
+              <a:t>Then Peter stood up with the Eleven, raised his voice, and proclaimed: "Let the whole house of Israel know for certain that God has made both Lord and Christ, this Jesus whom you crucified." Now when they heard this, they were cut to the heart, and they asked Peter and the other apostles, "What are we to do, my brothers?" Peter said to them, "Repent and be baptized, every one of you, in the name of Jesus Christ for the forgiveness of your sins; and you will receive the gift of the Holy Spirit. For the promise is made to you and to your children and to all those far off, whomever the Lord our God will call." He testified with many other arguments, and was exhorting them, "Save yourselves from this corrupt generation." Those who accepted his message were baptized, and about three thousand persons were added that day.</a:t>
             </a:r>
           </a:p>
         </p:txBody>
@@ -3864,7 +3867,7 @@
               </a:spcBef>
               <a:defRPr sz="1200" b="0" i="0">
                 <a:solidFill>
-                  <a:srgbClr val="DCAA5A"/>
+                  <a:srgbClr val="F2F0E8"/>
                 </a:solidFill>
                 <a:latin typeface="Calibri"/>
               </a:defRPr>
@@ -3910,7 +3913,7 @@
         <p:spPr>
           <a:xfrm>
             <a:off x="685800" y="457200"/>
-            <a:ext cx="16916400" cy="1051560"/>
+            <a:ext cx="16916400" cy="1024128"/>
           </a:xfrm>
           <a:prstGeom prst="rect">
             <a:avLst/>
@@ -3926,7 +3929,7 @@
             <a:pPr>
               <a:defRPr sz="2800" b="1" i="0">
                 <a:solidFill>
-                  <a:srgbClr val="DCAA5A"/>
+                  <a:srgbClr val="F2F0E8"/>
                 </a:solidFill>
                 <a:latin typeface="Calibri"/>
               </a:defRPr>
@@ -3945,7 +3948,7 @@
               </a:defRPr>
             </a:pPr>
             <a:r>
-              <a:t>Responsorial Psalm (Psalm 66:1-3, 4-5, 6-7, 16, 20)</a:t>
+              <a:t>Responsorial Psalm (Psalm 23: 1-3a, 3b4, 5, 6)</a:t>
             </a:r>
           </a:p>
         </p:txBody>
@@ -3958,7 +3961,7 @@
         </p:nvSpPr>
         <p:spPr>
           <a:xfrm>
-            <a:off x="685800" y="1563624"/>
+            <a:off x="685800" y="1536192"/>
             <a:ext cx="16916400" cy="438912"/>
           </a:xfrm>
           <a:prstGeom prst="rect">
@@ -3994,8 +3997,8 @@
         </p:nvSpPr>
         <p:spPr>
           <a:xfrm>
-            <a:off x="685800" y="2112264"/>
-            <a:ext cx="16916400" cy="7260336"/>
+            <a:off x="685800" y="2084832"/>
+            <a:ext cx="16916400" cy="7287768"/>
           </a:xfrm>
           <a:prstGeom prst="rect">
             <a:avLst/>
@@ -4010,7 +4013,7 @@
           <a:p>
             <a:pPr>
               <a:spcAft>
-                <a:spcPts val="400"/>
+                <a:spcPts val="500"/>
               </a:spcAft>
               <a:defRPr sz="1900" b="0" i="0">
                 <a:solidFill>
@@ -4020,7 +4023,7 @@
               </a:defRPr>
             </a:pPr>
             <a:r>
-              <a:t>R. (1) Let all the earth cry out to God with joy. or: R. Alleluia. Shout joyfully to God, all the earth, sing praise to the glory of his name; proclaim his glorious praise. Say to God, “How tremendous are your deeds!” R. Let all the earth cry out to God with joy. or: R. Alleluia. “Let all on earth worship and sing praise to you, sing praise to your name!” Come and see the works of God, his tremendous deeds among the children of Adam. R. Let all the earth cry out to God with joy. or: R. Alleluia. He has changed the sea into dry land; through the river they passed on foot; therefore let us rejoice in him. He rules by his might forever. R. Let all the earth cry out to God with joy. or: R. Alleluia. Hear now, all you who fear God, while I declare what he has done for me. Blessed be God who refused me not my prayer or his kindness! R. Let all the earth cry out to God with joy. or: R.</a:t>
+              <a:t>R. (1) The Lord is my shepherd; there is nothing I shall want. or: R. Alleluia. The LORD is my shepherd; I shall not want. In verdant pastures he gives me repose; beside restful waters he leads me; he refreshes my soul. R. The Lord is my shepherd; there is nothing I shall want. or: R. Alleluia. He guides me in right paths for his name's sake. Even though I walk in the dark valley I fear no evil; for you are at my side. With your rod and your staff that give me courage. R. The Lord is my shepherd; there is nothing I shall want. or: R. Alleluia. You spread the table before me in the sight of my foes; you anoint my head with oil; my cup overflows. R. The Lord is my shepherd; there is nothing I shall want. or: R. Alleluia. Only goodness and kindness follow me all the days of my life; and I shall dwell in the house of the LORD for years to come. R.</a:t>
             </a:r>
           </a:p>
         </p:txBody>
@@ -4066,7 +4069,7 @@
               </a:spcBef>
               <a:defRPr sz="1200" b="0" i="0">
                 <a:solidFill>
-                  <a:srgbClr val="DCAA5A"/>
+                  <a:srgbClr val="F2F0E8"/>
                 </a:solidFill>
                 <a:latin typeface="Calibri"/>
               </a:defRPr>
@@ -4112,7 +4115,7 @@
         <p:spPr>
           <a:xfrm>
             <a:off x="685800" y="457200"/>
-            <a:ext cx="16916400" cy="1051560"/>
+            <a:ext cx="16916400" cy="1024128"/>
           </a:xfrm>
           <a:prstGeom prst="rect">
             <a:avLst/>
@@ -4128,7 +4131,7 @@
             <a:pPr>
               <a:defRPr sz="2800" b="1" i="0">
                 <a:solidFill>
-                  <a:srgbClr val="DCAA5A"/>
+                  <a:srgbClr val="F2F0E8"/>
                 </a:solidFill>
                 <a:latin typeface="Calibri"/>
               </a:defRPr>
@@ -4160,7 +4163,7 @@
         </p:nvSpPr>
         <p:spPr>
           <a:xfrm>
-            <a:off x="685800" y="1563624"/>
+            <a:off x="685800" y="1536192"/>
             <a:ext cx="16916400" cy="438912"/>
           </a:xfrm>
           <a:prstGeom prst="rect">
@@ -4196,8 +4199,8 @@
         </p:nvSpPr>
         <p:spPr>
           <a:xfrm>
-            <a:off x="685800" y="2112264"/>
-            <a:ext cx="16916400" cy="7260336"/>
+            <a:off x="685800" y="2084832"/>
+            <a:ext cx="16916400" cy="7287768"/>
           </a:xfrm>
           <a:prstGeom prst="rect">
             <a:avLst/>
@@ -4212,7 +4215,7 @@
           <a:p>
             <a:pPr>
               <a:spcAft>
-                <a:spcPts val="400"/>
+                <a:spcPts val="500"/>
               </a:spcAft>
               <a:defRPr sz="1900" b="0" i="0">
                 <a:solidFill>
@@ -4222,7 +4225,7 @@
               </a:defRPr>
             </a:pPr>
             <a:r>
-              <a:t>Alleluia.</a:t>
+              <a:t>The Lord is my shepherd; there is nothing I shall want. or: R. Alleluia.</a:t>
             </a:r>
           </a:p>
         </p:txBody>
@@ -4268,7 +4271,7 @@
               </a:spcBef>
               <a:defRPr sz="1200" b="0" i="0">
                 <a:solidFill>
-                  <a:srgbClr val="DCAA5A"/>
+                  <a:srgbClr val="F2F0E8"/>
                 </a:solidFill>
                 <a:latin typeface="Calibri"/>
               </a:defRPr>
@@ -4314,7 +4317,7 @@
         <p:spPr>
           <a:xfrm>
             <a:off x="685800" y="457200"/>
-            <a:ext cx="16916400" cy="1051560"/>
+            <a:ext cx="16916400" cy="1024128"/>
           </a:xfrm>
           <a:prstGeom prst="rect">
             <a:avLst/>
@@ -4330,7 +4333,7 @@
             <a:pPr>
               <a:defRPr sz="2800" b="1" i="0">
                 <a:solidFill>
-                  <a:srgbClr val="DCAA5A"/>
+                  <a:srgbClr val="F2F0E8"/>
                 </a:solidFill>
                 <a:latin typeface="Calibri"/>
               </a:defRPr>
@@ -4349,7 +4352,7 @@
               </a:defRPr>
             </a:pPr>
             <a:r>
-              <a:t>Second Reading (1 Peter 3:15-18)</a:t>
+              <a:t>Second Reading (1 Peter 2:20b-25)</a:t>
             </a:r>
           </a:p>
         </p:txBody>
@@ -4362,7 +4365,7 @@
         </p:nvSpPr>
         <p:spPr>
           <a:xfrm>
-            <a:off x="685800" y="1563624"/>
+            <a:off x="685800" y="1536192"/>
             <a:ext cx="16916400" cy="438912"/>
           </a:xfrm>
           <a:prstGeom prst="rect">
@@ -4395,8 +4398,8 @@
         </p:nvSpPr>
         <p:spPr>
           <a:xfrm>
-            <a:off x="685800" y="2112264"/>
-            <a:ext cx="16916400" cy="7260336"/>
+            <a:off x="685800" y="2084832"/>
+            <a:ext cx="16916400" cy="7287768"/>
           </a:xfrm>
           <a:prstGeom prst="rect">
             <a:avLst/>
@@ -4411,7 +4414,7 @@
           <a:p>
             <a:pPr>
               <a:spcAft>
-                <a:spcPts val="400"/>
+                <a:spcPts val="500"/>
               </a:spcAft>
               <a:defRPr sz="1900" b="0" i="0">
                 <a:solidFill>
@@ -4421,7 +4424,7 @@
               </a:defRPr>
             </a:pPr>
             <a:r>
-              <a:t>Beloved: Sanctify Christ as Lord in your hearts. Always be ready to give an explanation to anyone who asks you for a reason for your hope, but do it with gentleness and reverence, keeping your conscience clear, so that, when you are maligned, those who defame your good conduct in Christ may themselves be put to shame. For it is better to suffer for doing good, if that be the will of God, than for doing evil. For Christ also suffered for sins once, the righteous for the sake of the unrighteous, that he might lead you to God. Put to death in the flesh, he was brought to life in the Spirit.</a:t>
+              <a:t>Beloved: If you are patient when you suffer for doing what is good, this is a grace before God. For to this you have been called, because Christ also suffered for you, leaving you an example that you should follow in his footsteps. He committed no sin, and no deceit was found in his mouth. When he was insulted, he returned no insult; when he suffered, he did not threaten; instead, he handed himself over to the one who judges justly. He himself bore our sins in his body upon the cross, so that, free from sin, we might live for righteousness. By his wounds you have been healed. For you had gone astray like sheep, but you have now returned to the shepherd and guardian of your souls.</a:t>
             </a:r>
           </a:p>
         </p:txBody>
@@ -4467,7 +4470,7 @@
               </a:spcBef>
               <a:defRPr sz="1200" b="0" i="0">
                 <a:solidFill>
-                  <a:srgbClr val="DCAA5A"/>
+                  <a:srgbClr val="F2F0E8"/>
                 </a:solidFill>
                 <a:latin typeface="Calibri"/>
               </a:defRPr>
@@ -4513,7 +4516,7 @@
         <p:spPr>
           <a:xfrm>
             <a:off x="685800" y="457200"/>
-            <a:ext cx="16916400" cy="8778240"/>
+            <a:ext cx="16916400" cy="8823960"/>
           </a:xfrm>
           <a:prstGeom prst="rect">
             <a:avLst/>
@@ -4548,7 +4551,7 @@
               </a:spcAft>
               <a:defRPr sz="1500" b="0" i="1">
                 <a:solidFill>
-                  <a:srgbClr val="DCAA5A"/>
+                  <a:srgbClr val="F2F0E8"/>
                 </a:solidFill>
                 <a:latin typeface="Calibri"/>
               </a:defRPr>
@@ -4600,7 +4603,7 @@
               </a:spcBef>
               <a:defRPr sz="1200" b="0" i="0">
                 <a:solidFill>
-                  <a:srgbClr val="DCAA5A"/>
+                  <a:srgbClr val="F2F0E8"/>
                 </a:solidFill>
                 <a:latin typeface="Calibri"/>
               </a:defRPr>
@@ -4646,7 +4649,7 @@
         <p:spPr>
           <a:xfrm>
             <a:off x="685800" y="457200"/>
-            <a:ext cx="16916400" cy="8778240"/>
+            <a:ext cx="16916400" cy="8823960"/>
           </a:xfrm>
           <a:prstGeom prst="rect">
             <a:avLst/>
@@ -4665,7 +4668,7 @@
               </a:spcAft>
               <a:defRPr sz="1500" b="0" i="1">
                 <a:solidFill>
-                  <a:srgbClr val="DCAA5A"/>
+                  <a:srgbClr val="F2F0E8"/>
                 </a:solidFill>
                 <a:latin typeface="Calibri"/>
               </a:defRPr>
@@ -4717,7 +4720,7 @@
               </a:spcBef>
               <a:defRPr sz="1200" b="0" i="0">
                 <a:solidFill>
-                  <a:srgbClr val="DCAA5A"/>
+                  <a:srgbClr val="F2F0E8"/>
                 </a:solidFill>
                 <a:latin typeface="Calibri"/>
               </a:defRPr>
@@ -4763,7 +4766,7 @@
         <p:spPr>
           <a:xfrm>
             <a:off x="685800" y="457200"/>
-            <a:ext cx="16916400" cy="8778240"/>
+            <a:ext cx="16916400" cy="8823960"/>
           </a:xfrm>
           <a:prstGeom prst="rect">
             <a:avLst/>
@@ -4782,7 +4785,7 @@
               </a:spcAft>
               <a:defRPr sz="2000" b="1" i="0">
                 <a:solidFill>
-                  <a:srgbClr val="DCAA5A"/>
+                  <a:srgbClr val="F2F0E8"/>
                 </a:solidFill>
                 <a:latin typeface="Calibri"/>
               </a:defRPr>
@@ -4814,7 +4817,7 @@
               </a:spcAft>
               <a:defRPr sz="2000" b="1" i="0">
                 <a:solidFill>
-                  <a:srgbClr val="DCAA5A"/>
+                  <a:srgbClr val="F2F0E8"/>
                 </a:solidFill>
                 <a:latin typeface="Calibri"/>
               </a:defRPr>
@@ -4882,7 +4885,7 @@
               </a:spcBef>
               <a:defRPr sz="1200" b="0" i="0">
                 <a:solidFill>
-                  <a:srgbClr val="DCAA5A"/>
+                  <a:srgbClr val="F2F0E8"/>
                 </a:solidFill>
                 <a:latin typeface="Calibri"/>
               </a:defRPr>
@@ -4927,8 +4930,8 @@
         </p:nvSpPr>
         <p:spPr>
           <a:xfrm>
-            <a:off x="685800" y="960120"/>
-            <a:ext cx="16916400" cy="1051560"/>
+            <a:off x="685800" y="777240"/>
+            <a:ext cx="16916400" cy="960120"/>
           </a:xfrm>
           <a:prstGeom prst="rect">
             <a:avLst/>
@@ -4944,7 +4947,7 @@
             <a:pPr>
               <a:defRPr sz="3800" b="1" i="0">
                 <a:solidFill>
-                  <a:srgbClr val="DCAA5A"/>
+                  <a:srgbClr val="F2F0E8"/>
                 </a:solidFill>
                 <a:latin typeface="Calibri"/>
               </a:defRPr>
@@ -4963,8 +4966,8 @@
         </p:nvSpPr>
         <p:spPr>
           <a:xfrm>
-            <a:off x="685800" y="2103120"/>
-            <a:ext cx="16916400" cy="2011680"/>
+            <a:off x="685800" y="1828800"/>
+            <a:ext cx="16916400" cy="3108960"/>
           </a:xfrm>
           <a:prstGeom prst="rect">
             <a:avLst/>
@@ -4979,23 +4982,7 @@
           <a:p>
             <a:pPr>
               <a:spcAft>
-                <a:spcPts val="200"/>
-              </a:spcAft>
-              <a:defRPr sz="2100" b="1" i="0">
-                <a:solidFill>
-                  <a:srgbClr val="F5F5F5"/>
-                </a:solidFill>
-                <a:latin typeface="Calibri"/>
-              </a:defRPr>
-            </a:pPr>
-            <a:r>
-              <a:t>MASS CELEBRANT: Rev. Fr. Jonrey Lauron, RCJ</a:t>
-            </a:r>
-          </a:p>
-          <a:p>
-            <a:pPr>
-              <a:spcAft>
-                <a:spcPts val="200"/>
+                <a:spcPts val="500"/>
               </a:spcAft>
               <a:defRPr sz="2100" b="0" i="0">
                 <a:solidFill>
@@ -5004,11 +4991,14 @@
                 <a:latin typeface="Calibri"/>
               </a:defRPr>
             </a:pPr>
-          </a:p>
-          <a:p>
-            <a:pPr>
-              <a:spcAft>
-                <a:spcPts val="200"/>
+            <a:r>
+              <a:t>2026-04-26</a:t>
+            </a:r>
+          </a:p>
+          <a:p>
+            <a:pPr>
+              <a:spcAft>
+                <a:spcPts val="500"/>
               </a:spcAft>
               <a:defRPr sz="2100" b="0" i="0">
                 <a:solidFill>
@@ -5018,25 +5008,53 @@
               </a:defRPr>
             </a:pPr>
             <a:r>
-              <a:t>GWANGJU</a:t>
+              <a:t>Celebrant: Hye</a:t>
+            </a:r>
+          </a:p>
+          <a:p>
+            <a:pPr>
+              <a:spcAft>
+                <a:spcPts val="500"/>
+              </a:spcAft>
+              <a:defRPr sz="2100" b="0" i="0">
+                <a:solidFill>
+                  <a:srgbClr val="F5F5F5"/>
+                </a:solidFill>
+                <a:latin typeface="Calibri"/>
+              </a:defRPr>
+            </a:pPr>
+            <a:r>
+              <a:t>Gospel: John 10:1-10</a:t>
             </a:r>
             <a:br/>
             <a:r>
-              <a:t>FILIPINO</a:t>
+              <a:t>Season: Eastertide · Sunday Lectionary Year A</a:t>
+            </a:r>
+          </a:p>
+          <a:p>
+            <a:pPr>
+              <a:spcAft>
+                <a:spcPts val="500"/>
+              </a:spcAft>
+              <a:defRPr sz="2100" b="0" i="0">
+                <a:solidFill>
+                  <a:srgbClr val="F5F5F5"/>
+                </a:solidFill>
+                <a:latin typeface="Calibri"/>
+              </a:defRPr>
+            </a:pPr>
+            <a:r>
+              <a:t>Excerpt:</a:t>
             </a:r>
             <a:br/>
             <a:r>
-              <a:t>CATHOLIC</a:t>
-            </a:r>
-            <a:br/>
-            <a:r>
-              <a:t>COMMUNITY</a:t>
-            </a:r>
-          </a:p>
-          <a:p>
-            <a:pPr>
-              <a:spcAft>
-                <a:spcPts val="200"/>
+              <a:t>“Amen, amen, I say to you, whoever does not enter a sheepfold through the gate but climbs over elsewhere is a thief and a robber.”</a:t>
+            </a:r>
+          </a:p>
+          <a:p>
+            <a:pPr>
+              <a:spcAft>
+                <a:spcPts val="500"/>
               </a:spcAft>
               <a:defRPr sz="2100" b="0" i="0">
                 <a:solidFill>
@@ -5045,82 +5063,8 @@
                 <a:latin typeface="Calibri"/>
               </a:defRPr>
             </a:pPr>
-          </a:p>
-          <a:p>
-            <a:pPr>
-              <a:spcAft>
-                <a:spcPts val="200"/>
-              </a:spcAft>
-              <a:defRPr sz="2100" b="0" i="0">
-                <a:solidFill>
-                  <a:srgbClr val="F5F5F5"/>
-                </a:solidFill>
-                <a:latin typeface="Calibri"/>
-              </a:defRPr>
-            </a:pPr>
-            <a:r>
-              <a:t>Gospel (John 14:15-21)</a:t>
-            </a:r>
-          </a:p>
-          <a:p>
-            <a:pPr>
-              <a:spcAft>
-                <a:spcPts val="200"/>
-              </a:spcAft>
-              <a:defRPr sz="2100" b="0" i="0">
-                <a:solidFill>
-                  <a:srgbClr val="F5F5F5"/>
-                </a:solidFill>
-                <a:latin typeface="Calibri"/>
-              </a:defRPr>
-            </a:pPr>
-            <a:r>
-              <a:t>“If you love me, you will keep my commandments.”</a:t>
-            </a:r>
-          </a:p>
-          <a:p>
-            <a:pPr>
-              <a:spcAft>
-                <a:spcPts val="200"/>
-              </a:spcAft>
-              <a:defRPr sz="2100" b="0" i="0">
-                <a:solidFill>
-                  <a:srgbClr val="F5F5F5"/>
-                </a:solidFill>
-                <a:latin typeface="Calibri"/>
-              </a:defRPr>
-            </a:pPr>
-          </a:p>
-          <a:p>
-            <a:pPr>
-              <a:spcAft>
-                <a:spcPts val="200"/>
-              </a:spcAft>
-              <a:defRPr sz="2100" b="0" i="0">
-                <a:solidFill>
-                  <a:srgbClr val="F5F5F5"/>
-                </a:solidFill>
-                <a:latin typeface="Calibri"/>
-              </a:defRPr>
-            </a:pPr>
-            <a:r>
-              <a:t>YEAR A</a:t>
-            </a:r>
-          </a:p>
-          <a:p>
-            <a:pPr>
-              <a:spcAft>
-                <a:spcPts val="200"/>
-              </a:spcAft>
-              <a:defRPr sz="2100" b="0" i="0">
-                <a:solidFill>
-                  <a:srgbClr val="F5F5F5"/>
-                </a:solidFill>
-                <a:latin typeface="Calibri"/>
-              </a:defRPr>
-            </a:pPr>
-            <a:r>
-              <a:t>2026-05-10 · Eastertide</a:t>
+            <a:r>
+              <a:t>Liturgical color: White (easter)</a:t>
             </a:r>
           </a:p>
         </p:txBody>
@@ -5166,13 +5110,13 @@
               </a:spcBef>
               <a:defRPr sz="1200" b="0" i="0">
                 <a:solidFill>
-                  <a:srgbClr val="DCAA5A"/>
-                </a:solidFill>
-                <a:latin typeface="Calibri"/>
-              </a:defRPr>
-            </a:pPr>
-            <a:r>
-              <a:t>Mass poster / divider</a:t>
+                  <a:srgbClr val="F2F0E8"/>
+                </a:solidFill>
+                <a:latin typeface="Calibri"/>
+              </a:defRPr>
+            </a:pPr>
+            <a:r>
+              <a:t>Title</a:t>
             </a:r>
           </a:p>
         </p:txBody>
@@ -5212,7 +5156,7 @@
         <p:spPr>
           <a:xfrm>
             <a:off x="685800" y="457200"/>
-            <a:ext cx="16916400" cy="868680"/>
+            <a:ext cx="16916400" cy="841248"/>
           </a:xfrm>
           <a:prstGeom prst="rect">
             <a:avLst/>
@@ -5228,7 +5172,7 @@
             <a:pPr>
               <a:defRPr sz="3000" b="1" i="0">
                 <a:solidFill>
-                  <a:srgbClr val="DCAA5A"/>
+                  <a:srgbClr val="F2F0E8"/>
                 </a:solidFill>
                 <a:latin typeface="Calibri"/>
               </a:defRPr>
@@ -5247,7 +5191,7 @@
         </p:nvSpPr>
         <p:spPr>
           <a:xfrm>
-            <a:off x="685800" y="1380744"/>
+            <a:off x="685800" y="1353312"/>
             <a:ext cx="16916400" cy="438912"/>
           </a:xfrm>
           <a:prstGeom prst="rect">
@@ -5270,7 +5214,7 @@
               </a:defRPr>
             </a:pPr>
             <a:r>
-              <a:t>John 14:15-21</a:t>
+              <a:t>John 10:1-10  ·  slide 1 of 2</a:t>
             </a:r>
           </a:p>
         </p:txBody>
@@ -5283,8 +5227,8 @@
         </p:nvSpPr>
         <p:spPr>
           <a:xfrm>
-            <a:off x="685800" y="1929384"/>
-            <a:ext cx="16916400" cy="7443216"/>
+            <a:off x="685800" y="1901952"/>
+            <a:ext cx="16916400" cy="7470648"/>
           </a:xfrm>
           <a:prstGeom prst="rect">
             <a:avLst/>
@@ -5299,7 +5243,7 @@
           <a:p>
             <a:pPr>
               <a:spcAft>
-                <a:spcPts val="400"/>
+                <a:spcPts val="500"/>
               </a:spcAft>
               <a:defRPr sz="1900" b="0" i="0">
                 <a:solidFill>
@@ -5309,7 +5253,7 @@
               </a:defRPr>
             </a:pPr>
             <a:r>
-              <a:t>Jesus said to his disciples: “If you love me, you will keep my commandments. And I will ask the Father, and he will give you another Advocate to be with you always, the Spirit of truth, whom the world cannot accept, because it neither sees nor knows him. But you know him, because he remains with you, and will be in you. I will not leave you orphans; I will come to you. In a little while the world will no longer see me, but you will see me, because I live and you will live. On that day you will realize that I am in my Father and you are in me and I in you. Whoever has my commandments and observes them is the one who loves me. And whoever loves me will be loved by my Father, and I will love him and reveal myself to him.”</a:t>
+              <a:t>Jesus said: "Amen, amen, I say to you, whoever does not enter a sheepfold through the gate but climbs over elsewhere is a thief and a robber. But whoever enters through the gate is the shepherd of the sheep. The gatekeeper opens it for him, and the sheep hear his voice, as the shepherd calls his own sheep by name and leads them out. When he has driven out all his own, he walks ahead of them, and the sheep follow him, because they recognize his voice. But they will not follow a stranger; they will run away from him, because they do not recognize the voice of strangers." Although Jesus used this figure of speech, the Pharisees did not realize what he was trying to tell them. So Jesus said again, "Amen, amen, I say to you, I am the gate for the sheep. All who came before me are thieves and robbers, but the sheep did not listen to them. I am the gate.</a:t>
             </a:r>
           </a:p>
         </p:txBody>
@@ -5355,7 +5299,7 @@
               </a:spcBef>
               <a:defRPr sz="1200" b="0" i="0">
                 <a:solidFill>
-                  <a:srgbClr val="DCAA5A"/>
+                  <a:srgbClr val="F2F0E8"/>
                 </a:solidFill>
                 <a:latin typeface="Calibri"/>
               </a:defRPr>
@@ -5401,7 +5345,7 @@
         <p:spPr>
           <a:xfrm>
             <a:off x="685800" y="457200"/>
-            <a:ext cx="16916400" cy="8778240"/>
+            <a:ext cx="16916400" cy="841248"/>
           </a:xfrm>
           <a:prstGeom prst="rect">
             <a:avLst/>
@@ -5415,41 +5359,97 @@
           <a:lstStyle/>
           <a:p>
             <a:pPr>
+              <a:defRPr sz="3000" b="1" i="0">
+                <a:solidFill>
+                  <a:srgbClr val="F2F0E8"/>
+                </a:solidFill>
+                <a:latin typeface="Calibri"/>
+              </a:defRPr>
+            </a:pPr>
+            <a:r>
+              <a:t>Gospel (continued)</a:t>
+            </a:r>
+          </a:p>
+        </p:txBody>
+      </p:sp>
+      <p:sp>
+        <p:nvSpPr>
+          <p:cNvPr id="3" name="TextBox 2"/>
+          <p:cNvSpPr txBox="1"/>
+          <p:nvPr/>
+        </p:nvSpPr>
+        <p:spPr>
+          <a:xfrm>
+            <a:off x="685800" y="1353312"/>
+            <a:ext cx="16916400" cy="438912"/>
+          </a:xfrm>
+          <a:prstGeom prst="rect">
+            <a:avLst/>
+          </a:prstGeom>
+          <a:noFill/>
+        </p:spPr>
+        <p:txBody>
+          <a:bodyPr wrap="square" lIns="109728" rIns="109728" tIns="73152" bIns="73152">
+            <a:noAutofit/>
+          </a:bodyPr>
+          <a:lstStyle/>
+          <a:p>
+            <a:pPr>
+              <a:defRPr sz="1400" b="0" i="0">
+                <a:solidFill>
+                  <a:srgbClr val="9B9BA5"/>
+                </a:solidFill>
+                <a:latin typeface="Calibri"/>
+              </a:defRPr>
+            </a:pPr>
+            <a:r>
+              <a:t>John 10:1-10  ·  slide 2 of 2</a:t>
+            </a:r>
+          </a:p>
+        </p:txBody>
+      </p:sp>
+      <p:sp>
+        <p:nvSpPr>
+          <p:cNvPr id="4" name="TextBox 3"/>
+          <p:cNvSpPr txBox="1"/>
+          <p:nvPr/>
+        </p:nvSpPr>
+        <p:spPr>
+          <a:xfrm>
+            <a:off x="685800" y="1901952"/>
+            <a:ext cx="16916400" cy="7470648"/>
+          </a:xfrm>
+          <a:prstGeom prst="rect">
+            <a:avLst/>
+          </a:prstGeom>
+          <a:noFill/>
+        </p:spPr>
+        <p:txBody>
+          <a:bodyPr wrap="square" lIns="109728" rIns="109728" tIns="73152" bIns="73152">
+            <a:noAutofit/>
+          </a:bodyPr>
+          <a:lstStyle/>
+          <a:p>
+            <a:pPr>
               <a:spcAft>
                 <a:spcPts val="500"/>
               </a:spcAft>
-              <a:defRPr sz="2000" b="1" i="0">
-                <a:solidFill>
-                  <a:srgbClr val="DCAA5A"/>
-                </a:solidFill>
-                <a:latin typeface="Calibri"/>
-              </a:defRPr>
-            </a:pPr>
-            <a:r>
-              <a:t>The Gospel of the Lord.</a:t>
-            </a:r>
-          </a:p>
-          <a:p>
-            <a:pPr>
-              <a:spcAft>
-                <a:spcPts val="500"/>
-              </a:spcAft>
-              <a:defRPr sz="2000" b="1" i="0">
-                <a:solidFill>
-                  <a:srgbClr val="F5F5F5"/>
-                </a:solidFill>
-                <a:latin typeface="Calibri"/>
-              </a:defRPr>
-            </a:pPr>
-            <a:r>
-              <a:t>Praise to you, Lord Jesus Christ!</a:t>
-            </a:r>
-          </a:p>
-        </p:txBody>
-      </p:sp>
-      <p:sp>
-        <p:nvSpPr>
-          <p:cNvPr id="3" name="TextBox 2"/>
+              <a:defRPr sz="1900" b="0" i="0">
+                <a:solidFill>
+                  <a:srgbClr val="F5F5F5"/>
+                </a:solidFill>
+                <a:latin typeface="Calibri"/>
+              </a:defRPr>
+            </a:pPr>
+            <a:r>
+              <a:t>Whoever enters through me will be saved, and will come in and go out and find pasture. A thief comes only to steal and slaughter and destroy; I came so that they might have life and have it more abundantly."</a:t>
+            </a:r>
+          </a:p>
+        </p:txBody>
+      </p:sp>
+      <p:sp>
+        <p:nvSpPr>
+          <p:cNvPr id="5" name="TextBox 4"/>
           <p:cNvSpPr txBox="1"/>
           <p:nvPr/>
         </p:nvSpPr>
@@ -5488,13 +5488,13 @@
               </a:spcBef>
               <a:defRPr sz="1200" b="0" i="0">
                 <a:solidFill>
-                  <a:srgbClr val="DCAA5A"/>
-                </a:solidFill>
-                <a:latin typeface="Calibri"/>
-              </a:defRPr>
-            </a:pPr>
-            <a:r>
-              <a:t>Gospel Acclamation</a:t>
+                  <a:srgbClr val="F2F0E8"/>
+                </a:solidFill>
+                <a:latin typeface="Calibri"/>
+              </a:defRPr>
+            </a:pPr>
+            <a:r>
+              <a:t>Gospel</a:t>
             </a:r>
           </a:p>
         </p:txBody>
@@ -5533,8 +5533,8 @@
         </p:nvSpPr>
         <p:spPr>
           <a:xfrm>
-            <a:off x="685800" y="960120"/>
-            <a:ext cx="16916400" cy="1051560"/>
+            <a:off x="685800" y="457200"/>
+            <a:ext cx="16916400" cy="8823960"/>
           </a:xfrm>
           <a:prstGeom prst="rect">
             <a:avLst/>
@@ -5548,15 +5548,34 @@
           <a:lstStyle/>
           <a:p>
             <a:pPr>
-              <a:defRPr sz="3800" b="1" i="0">
-                <a:solidFill>
-                  <a:srgbClr val="DCAA5A"/>
-                </a:solidFill>
-                <a:latin typeface="Calibri"/>
-              </a:defRPr>
-            </a:pPr>
-            <a:r>
-              <a:t>Eastertide Celebration</a:t>
+              <a:spcAft>
+                <a:spcPts val="500"/>
+              </a:spcAft>
+              <a:defRPr sz="2000" b="1" i="0">
+                <a:solidFill>
+                  <a:srgbClr val="F2F0E8"/>
+                </a:solidFill>
+                <a:latin typeface="Calibri"/>
+              </a:defRPr>
+            </a:pPr>
+            <a:r>
+              <a:t>The Gospel of the Lord.</a:t>
+            </a:r>
+          </a:p>
+          <a:p>
+            <a:pPr>
+              <a:spcAft>
+                <a:spcPts val="500"/>
+              </a:spcAft>
+              <a:defRPr sz="2000" b="1" i="0">
+                <a:solidFill>
+                  <a:srgbClr val="F5F5F5"/>
+                </a:solidFill>
+                <a:latin typeface="Calibri"/>
+              </a:defRPr>
+            </a:pPr>
+            <a:r>
+              <a:t>Praise to you, Lord Jesus Christ!</a:t>
             </a:r>
           </a:p>
         </p:txBody>
@@ -5564,176 +5583,6 @@
       <p:sp>
         <p:nvSpPr>
           <p:cNvPr id="3" name="TextBox 2"/>
-          <p:cNvSpPr txBox="1"/>
-          <p:nvPr/>
-        </p:nvSpPr>
-        <p:spPr>
-          <a:xfrm>
-            <a:off x="685800" y="2103120"/>
-            <a:ext cx="16916400" cy="2011680"/>
-          </a:xfrm>
-          <a:prstGeom prst="rect">
-            <a:avLst/>
-          </a:prstGeom>
-          <a:noFill/>
-        </p:spPr>
-        <p:txBody>
-          <a:bodyPr wrap="square" lIns="109728" rIns="109728" tIns="73152" bIns="73152">
-            <a:noAutofit/>
-          </a:bodyPr>
-          <a:lstStyle/>
-          <a:p>
-            <a:pPr>
-              <a:spcAft>
-                <a:spcPts val="200"/>
-              </a:spcAft>
-              <a:defRPr sz="2100" b="1" i="0">
-                <a:solidFill>
-                  <a:srgbClr val="F5F5F5"/>
-                </a:solidFill>
-                <a:latin typeface="Calibri"/>
-              </a:defRPr>
-            </a:pPr>
-            <a:r>
-              <a:t>MASS CELEBRANT: Rev. Fr. Jonrey Lauron, RCJ</a:t>
-            </a:r>
-          </a:p>
-          <a:p>
-            <a:pPr>
-              <a:spcAft>
-                <a:spcPts val="200"/>
-              </a:spcAft>
-              <a:defRPr sz="2100" b="0" i="0">
-                <a:solidFill>
-                  <a:srgbClr val="F5F5F5"/>
-                </a:solidFill>
-                <a:latin typeface="Calibri"/>
-              </a:defRPr>
-            </a:pPr>
-          </a:p>
-          <a:p>
-            <a:pPr>
-              <a:spcAft>
-                <a:spcPts val="200"/>
-              </a:spcAft>
-              <a:defRPr sz="2100" b="0" i="0">
-                <a:solidFill>
-                  <a:srgbClr val="F5F5F5"/>
-                </a:solidFill>
-                <a:latin typeface="Calibri"/>
-              </a:defRPr>
-            </a:pPr>
-            <a:r>
-              <a:t>GWANGJU</a:t>
-            </a:r>
-            <a:br/>
-            <a:r>
-              <a:t>FILIPINO</a:t>
-            </a:r>
-            <a:br/>
-            <a:r>
-              <a:t>CATHOLIC</a:t>
-            </a:r>
-            <a:br/>
-            <a:r>
-              <a:t>COMMUNITY</a:t>
-            </a:r>
-          </a:p>
-          <a:p>
-            <a:pPr>
-              <a:spcAft>
-                <a:spcPts val="200"/>
-              </a:spcAft>
-              <a:defRPr sz="2100" b="0" i="0">
-                <a:solidFill>
-                  <a:srgbClr val="F5F5F5"/>
-                </a:solidFill>
-                <a:latin typeface="Calibri"/>
-              </a:defRPr>
-            </a:pPr>
-          </a:p>
-          <a:p>
-            <a:pPr>
-              <a:spcAft>
-                <a:spcPts val="200"/>
-              </a:spcAft>
-              <a:defRPr sz="2100" b="0" i="0">
-                <a:solidFill>
-                  <a:srgbClr val="F5F5F5"/>
-                </a:solidFill>
-                <a:latin typeface="Calibri"/>
-              </a:defRPr>
-            </a:pPr>
-            <a:r>
-              <a:t>Gospel (John 14:15-21)</a:t>
-            </a:r>
-          </a:p>
-          <a:p>
-            <a:pPr>
-              <a:spcAft>
-                <a:spcPts val="200"/>
-              </a:spcAft>
-              <a:defRPr sz="2100" b="0" i="0">
-                <a:solidFill>
-                  <a:srgbClr val="F5F5F5"/>
-                </a:solidFill>
-                <a:latin typeface="Calibri"/>
-              </a:defRPr>
-            </a:pPr>
-            <a:r>
-              <a:t>“If you love me, you will keep my commandments.”</a:t>
-            </a:r>
-          </a:p>
-          <a:p>
-            <a:pPr>
-              <a:spcAft>
-                <a:spcPts val="200"/>
-              </a:spcAft>
-              <a:defRPr sz="2100" b="0" i="0">
-                <a:solidFill>
-                  <a:srgbClr val="F5F5F5"/>
-                </a:solidFill>
-                <a:latin typeface="Calibri"/>
-              </a:defRPr>
-            </a:pPr>
-          </a:p>
-          <a:p>
-            <a:pPr>
-              <a:spcAft>
-                <a:spcPts val="200"/>
-              </a:spcAft>
-              <a:defRPr sz="2100" b="0" i="0">
-                <a:solidFill>
-                  <a:srgbClr val="F5F5F5"/>
-                </a:solidFill>
-                <a:latin typeface="Calibri"/>
-              </a:defRPr>
-            </a:pPr>
-            <a:r>
-              <a:t>YEAR A</a:t>
-            </a:r>
-          </a:p>
-          <a:p>
-            <a:pPr>
-              <a:spcAft>
-                <a:spcPts val="200"/>
-              </a:spcAft>
-              <a:defRPr sz="2100" b="0" i="0">
-                <a:solidFill>
-                  <a:srgbClr val="F5F5F5"/>
-                </a:solidFill>
-                <a:latin typeface="Calibri"/>
-              </a:defRPr>
-            </a:pPr>
-            <a:r>
-              <a:t>2026-05-10 · Eastertide</a:t>
-            </a:r>
-          </a:p>
-        </p:txBody>
-      </p:sp>
-      <p:sp>
-        <p:nvSpPr>
-          <p:cNvPr id="4" name="TextBox 3"/>
           <p:cNvSpPr txBox="1"/>
           <p:nvPr/>
         </p:nvSpPr>
@@ -5772,13 +5621,13 @@
               </a:spcBef>
               <a:defRPr sz="1200" b="0" i="0">
                 <a:solidFill>
-                  <a:srgbClr val="DCAA5A"/>
-                </a:solidFill>
-                <a:latin typeface="Calibri"/>
-              </a:defRPr>
-            </a:pPr>
-            <a:r>
-              <a:t>Mass poster / divider</a:t>
+                  <a:srgbClr val="F2F0E8"/>
+                </a:solidFill>
+                <a:latin typeface="Calibri"/>
+              </a:defRPr>
+            </a:pPr>
+            <a:r>
+              <a:t>Gospel Acclamation</a:t>
             </a:r>
           </a:p>
         </p:txBody>
@@ -5818,7 +5667,7 @@
         <p:spPr>
           <a:xfrm>
             <a:off x="685800" y="457200"/>
-            <a:ext cx="16916400" cy="8778240"/>
+            <a:ext cx="16916400" cy="8823960"/>
           </a:xfrm>
           <a:prstGeom prst="rect">
             <a:avLst/>
@@ -5835,15 +5684,15 @@
               <a:spcAft>
                 <a:spcPts val="500"/>
               </a:spcAft>
-              <a:defRPr sz="2000" b="1" i="0">
-                <a:solidFill>
-                  <a:srgbClr val="F5F5F5"/>
-                </a:solidFill>
-                <a:latin typeface="Calibri"/>
-              </a:defRPr>
-            </a:pPr>
-            <a:r>
-              <a:t>I believe in one God, the Father almighty, maker of heaven and earth, of all things visible and invisible. I believe in one Lord Jesus Christ, the Only Begotten Son of God, born of the Father before all ages…</a:t>
+              <a:defRPr sz="1500" b="0" i="1">
+                <a:solidFill>
+                  <a:srgbClr val="F2F0E8"/>
+                </a:solidFill>
+                <a:latin typeface="Calibri"/>
+              </a:defRPr>
+            </a:pPr>
+            <a:r>
+              <a:t>Time for the homily — Father will now preach.</a:t>
             </a:r>
           </a:p>
           <a:p>
@@ -5851,31 +5700,15 @@
               <a:spcAft>
                 <a:spcPts val="500"/>
               </a:spcAft>
-              <a:defRPr sz="2000" b="1" i="0">
-                <a:solidFill>
-                  <a:srgbClr val="F5F5F5"/>
-                </a:solidFill>
-                <a:latin typeface="Calibri"/>
-              </a:defRPr>
-            </a:pPr>
-            <a:r>
-              <a:t>For us men and for our salvation he came down from heaven, (all bow) and by the Holy Spirit was incarnate of the Virgin Mary, and became man. For our sake he was crucified under Pontius Pilate, he suffered death and was buried, and rose again on the third day in accordance with the Scriptures.</a:t>
-            </a:r>
-          </a:p>
-          <a:p>
-            <a:pPr>
-              <a:spcAft>
-                <a:spcPts val="500"/>
-              </a:spcAft>
-              <a:defRPr sz="2000" b="1" i="0">
-                <a:solidFill>
-                  <a:srgbClr val="F5F5F5"/>
-                </a:solidFill>
-                <a:latin typeface="Calibri"/>
-              </a:defRPr>
-            </a:pPr>
-            <a:r>
-              <a:t>He ascended into heaven and is seated at the right hand of the Father… I believe in the Holy Spirit… I confess one Baptism for the forgiveness of sins and I look forward to the resurrection of the dead and the life of the world to come. Amen.</a:t>
+              <a:defRPr sz="1500" b="0" i="1">
+                <a:solidFill>
+                  <a:srgbClr val="F2F0E8"/>
+                </a:solidFill>
+                <a:latin typeface="Calibri"/>
+              </a:defRPr>
+            </a:pPr>
+            <a:r>
+              <a:t>Commentator may introduce the theme.</a:t>
             </a:r>
           </a:p>
         </p:txBody>
@@ -5921,13 +5754,13 @@
               </a:spcBef>
               <a:defRPr sz="1200" b="0" i="0">
                 <a:solidFill>
-                  <a:srgbClr val="DCAA5A"/>
-                </a:solidFill>
-                <a:latin typeface="Calibri"/>
-              </a:defRPr>
-            </a:pPr>
-            <a:r>
-              <a:t>Nicene Creed</a:t>
+                  <a:srgbClr val="F2F0E8"/>
+                </a:solidFill>
+                <a:latin typeface="Calibri"/>
+              </a:defRPr>
+            </a:pPr>
+            <a:r>
+              <a:t>Homily</a:t>
             </a:r>
           </a:p>
         </p:txBody>
@@ -5966,8 +5799,8 @@
         </p:nvSpPr>
         <p:spPr>
           <a:xfrm>
-            <a:off x="685800" y="960120"/>
-            <a:ext cx="16916400" cy="1051560"/>
+            <a:off x="685800" y="914400"/>
+            <a:ext cx="16916400" cy="5943600"/>
           </a:xfrm>
           <a:prstGeom prst="rect">
             <a:avLst/>
@@ -5981,15 +5814,165 @@
           <a:lstStyle/>
           <a:p>
             <a:pPr>
-              <a:defRPr sz="3800" b="1" i="0">
-                <a:solidFill>
-                  <a:srgbClr val="DCAA5A"/>
-                </a:solidFill>
-                <a:latin typeface="Calibri"/>
-              </a:defRPr>
-            </a:pPr>
-            <a:r>
-              <a:t>Eastertide Celebration</a:t>
+              <a:spcAft>
+                <a:spcPts val="300"/>
+              </a:spcAft>
+              <a:defRPr sz="2100" b="1" i="0">
+                <a:solidFill>
+                  <a:srgbClr val="F2F0E8"/>
+                </a:solidFill>
+                <a:latin typeface="Calibri"/>
+              </a:defRPr>
+            </a:pPr>
+            <a:r>
+              <a:t>MASS CELEBRANT:</a:t>
+            </a:r>
+          </a:p>
+          <a:p>
+            <a:pPr>
+              <a:spcAft>
+                <a:spcPts val="300"/>
+              </a:spcAft>
+              <a:defRPr sz="2100" b="0" i="0">
+                <a:solidFill>
+                  <a:srgbClr val="F5F5F5"/>
+                </a:solidFill>
+                <a:latin typeface="Calibri"/>
+              </a:defRPr>
+            </a:pPr>
+            <a:r>
+              <a:t>Hye</a:t>
+            </a:r>
+          </a:p>
+          <a:p>
+            <a:pPr>
+              <a:spcAft>
+                <a:spcPts val="300"/>
+              </a:spcAft>
+              <a:defRPr sz="2100" b="0" i="0">
+                <a:solidFill>
+                  <a:srgbClr val="F5F5F5"/>
+                </a:solidFill>
+                <a:latin typeface="Calibri"/>
+              </a:defRPr>
+            </a:pPr>
+          </a:p>
+          <a:p>
+            <a:pPr>
+              <a:spcAft>
+                <a:spcPts val="300"/>
+              </a:spcAft>
+              <a:defRPr sz="2100" b="0" i="0">
+                <a:solidFill>
+                  <a:srgbClr val="F5F5F5"/>
+                </a:solidFill>
+                <a:latin typeface="Calibri"/>
+              </a:defRPr>
+            </a:pPr>
+            <a:r>
+              <a:t>GWANGJU</a:t>
+            </a:r>
+            <a:br/>
+            <a:r>
+              <a:t>FILIPINO</a:t>
+            </a:r>
+            <a:br/>
+            <a:r>
+              <a:t>CATHOLIC</a:t>
+            </a:r>
+            <a:br/>
+            <a:r>
+              <a:t>COMMUNITY</a:t>
+            </a:r>
+          </a:p>
+          <a:p>
+            <a:pPr>
+              <a:spcAft>
+                <a:spcPts val="300"/>
+              </a:spcAft>
+              <a:defRPr sz="2100" b="0" i="0">
+                <a:solidFill>
+                  <a:srgbClr val="F5F5F5"/>
+                </a:solidFill>
+                <a:latin typeface="Calibri"/>
+              </a:defRPr>
+            </a:pPr>
+          </a:p>
+          <a:p>
+            <a:pPr>
+              <a:spcAft>
+                <a:spcPts val="300"/>
+              </a:spcAft>
+              <a:defRPr sz="2100" b="0" i="0">
+                <a:solidFill>
+                  <a:srgbClr val="F5F5F5"/>
+                </a:solidFill>
+                <a:latin typeface="Calibri"/>
+              </a:defRPr>
+            </a:pPr>
+            <a:r>
+              <a:t>Gospel (John 10:1-10)</a:t>
+            </a:r>
+          </a:p>
+          <a:p>
+            <a:pPr>
+              <a:spcAft>
+                <a:spcPts val="300"/>
+              </a:spcAft>
+              <a:defRPr sz="2100" b="0" i="0">
+                <a:solidFill>
+                  <a:srgbClr val="F5F5F5"/>
+                </a:solidFill>
+                <a:latin typeface="Calibri"/>
+              </a:defRPr>
+            </a:pPr>
+            <a:r>
+              <a:t>“Amen, amen, I say to you, whoever does not enter a sheepfold through the gate but climbs over elsewhere is a thief and a robber.”</a:t>
+            </a:r>
+          </a:p>
+          <a:p>
+            <a:pPr>
+              <a:spcAft>
+                <a:spcPts val="300"/>
+              </a:spcAft>
+              <a:defRPr sz="2100" b="0" i="0">
+                <a:solidFill>
+                  <a:srgbClr val="F5F5F5"/>
+                </a:solidFill>
+                <a:latin typeface="Calibri"/>
+              </a:defRPr>
+            </a:pPr>
+          </a:p>
+          <a:p>
+            <a:pPr>
+              <a:spcAft>
+                <a:spcPts val="300"/>
+              </a:spcAft>
+              <a:defRPr sz="2100" b="0" i="0">
+                <a:solidFill>
+                  <a:srgbClr val="F5F5F5"/>
+                </a:solidFill>
+                <a:latin typeface="Calibri"/>
+              </a:defRPr>
+            </a:pPr>
+            <a:r>
+              <a:t>YEAR A</a:t>
+            </a:r>
+          </a:p>
+          <a:p>
+            <a:pPr>
+              <a:spcAft>
+                <a:spcPts val="300"/>
+              </a:spcAft>
+              <a:defRPr sz="2100" b="0" i="0">
+                <a:solidFill>
+                  <a:srgbClr val="F5F5F5"/>
+                </a:solidFill>
+                <a:latin typeface="Calibri"/>
+              </a:defRPr>
+            </a:pPr>
+            <a:r>
+              <a:t>2026-04-26 · Eastertide</a:t>
             </a:r>
           </a:p>
         </p:txBody>
@@ -5997,176 +5980,6 @@
       <p:sp>
         <p:nvSpPr>
           <p:cNvPr id="3" name="TextBox 2"/>
-          <p:cNvSpPr txBox="1"/>
-          <p:nvPr/>
-        </p:nvSpPr>
-        <p:spPr>
-          <a:xfrm>
-            <a:off x="685800" y="2103120"/>
-            <a:ext cx="16916400" cy="2011680"/>
-          </a:xfrm>
-          <a:prstGeom prst="rect">
-            <a:avLst/>
-          </a:prstGeom>
-          <a:noFill/>
-        </p:spPr>
-        <p:txBody>
-          <a:bodyPr wrap="square" lIns="109728" rIns="109728" tIns="73152" bIns="73152">
-            <a:noAutofit/>
-          </a:bodyPr>
-          <a:lstStyle/>
-          <a:p>
-            <a:pPr>
-              <a:spcAft>
-                <a:spcPts val="200"/>
-              </a:spcAft>
-              <a:defRPr sz="2100" b="1" i="0">
-                <a:solidFill>
-                  <a:srgbClr val="F5F5F5"/>
-                </a:solidFill>
-                <a:latin typeface="Calibri"/>
-              </a:defRPr>
-            </a:pPr>
-            <a:r>
-              <a:t>MASS CELEBRANT: Rev. Fr. Jonrey Lauron, RCJ</a:t>
-            </a:r>
-          </a:p>
-          <a:p>
-            <a:pPr>
-              <a:spcAft>
-                <a:spcPts val="200"/>
-              </a:spcAft>
-              <a:defRPr sz="2100" b="0" i="0">
-                <a:solidFill>
-                  <a:srgbClr val="F5F5F5"/>
-                </a:solidFill>
-                <a:latin typeface="Calibri"/>
-              </a:defRPr>
-            </a:pPr>
-          </a:p>
-          <a:p>
-            <a:pPr>
-              <a:spcAft>
-                <a:spcPts val="200"/>
-              </a:spcAft>
-              <a:defRPr sz="2100" b="0" i="0">
-                <a:solidFill>
-                  <a:srgbClr val="F5F5F5"/>
-                </a:solidFill>
-                <a:latin typeface="Calibri"/>
-              </a:defRPr>
-            </a:pPr>
-            <a:r>
-              <a:t>GWANGJU</a:t>
-            </a:r>
-            <a:br/>
-            <a:r>
-              <a:t>FILIPINO</a:t>
-            </a:r>
-            <a:br/>
-            <a:r>
-              <a:t>CATHOLIC</a:t>
-            </a:r>
-            <a:br/>
-            <a:r>
-              <a:t>COMMUNITY</a:t>
-            </a:r>
-          </a:p>
-          <a:p>
-            <a:pPr>
-              <a:spcAft>
-                <a:spcPts val="200"/>
-              </a:spcAft>
-              <a:defRPr sz="2100" b="0" i="0">
-                <a:solidFill>
-                  <a:srgbClr val="F5F5F5"/>
-                </a:solidFill>
-                <a:latin typeface="Calibri"/>
-              </a:defRPr>
-            </a:pPr>
-          </a:p>
-          <a:p>
-            <a:pPr>
-              <a:spcAft>
-                <a:spcPts val="200"/>
-              </a:spcAft>
-              <a:defRPr sz="2100" b="0" i="0">
-                <a:solidFill>
-                  <a:srgbClr val="F5F5F5"/>
-                </a:solidFill>
-                <a:latin typeface="Calibri"/>
-              </a:defRPr>
-            </a:pPr>
-            <a:r>
-              <a:t>Gospel (John 14:15-21)</a:t>
-            </a:r>
-          </a:p>
-          <a:p>
-            <a:pPr>
-              <a:spcAft>
-                <a:spcPts val="200"/>
-              </a:spcAft>
-              <a:defRPr sz="2100" b="0" i="0">
-                <a:solidFill>
-                  <a:srgbClr val="F5F5F5"/>
-                </a:solidFill>
-                <a:latin typeface="Calibri"/>
-              </a:defRPr>
-            </a:pPr>
-            <a:r>
-              <a:t>“If you love me, you will keep my commandments.”</a:t>
-            </a:r>
-          </a:p>
-          <a:p>
-            <a:pPr>
-              <a:spcAft>
-                <a:spcPts val="200"/>
-              </a:spcAft>
-              <a:defRPr sz="2100" b="0" i="0">
-                <a:solidFill>
-                  <a:srgbClr val="F5F5F5"/>
-                </a:solidFill>
-                <a:latin typeface="Calibri"/>
-              </a:defRPr>
-            </a:pPr>
-          </a:p>
-          <a:p>
-            <a:pPr>
-              <a:spcAft>
-                <a:spcPts val="200"/>
-              </a:spcAft>
-              <a:defRPr sz="2100" b="0" i="0">
-                <a:solidFill>
-                  <a:srgbClr val="F5F5F5"/>
-                </a:solidFill>
-                <a:latin typeface="Calibri"/>
-              </a:defRPr>
-            </a:pPr>
-            <a:r>
-              <a:t>YEAR A</a:t>
-            </a:r>
-          </a:p>
-          <a:p>
-            <a:pPr>
-              <a:spcAft>
-                <a:spcPts val="200"/>
-              </a:spcAft>
-              <a:defRPr sz="2100" b="0" i="0">
-                <a:solidFill>
-                  <a:srgbClr val="F5F5F5"/>
-                </a:solidFill>
-                <a:latin typeface="Calibri"/>
-              </a:defRPr>
-            </a:pPr>
-            <a:r>
-              <a:t>2026-05-10 · Eastertide</a:t>
-            </a:r>
-          </a:p>
-        </p:txBody>
-      </p:sp>
-      <p:sp>
-        <p:nvSpPr>
-          <p:cNvPr id="4" name="TextBox 3"/>
           <p:cNvSpPr txBox="1"/>
           <p:nvPr/>
         </p:nvSpPr>
@@ -6205,7 +6018,7 @@
               </a:spcBef>
               <a:defRPr sz="1200" b="0" i="0">
                 <a:solidFill>
-                  <a:srgbClr val="DCAA5A"/>
+                  <a:srgbClr val="F2F0E8"/>
                 </a:solidFill>
                 <a:latin typeface="Calibri"/>
               </a:defRPr>
@@ -6251,7 +6064,7 @@
         <p:spPr>
           <a:xfrm>
             <a:off x="685800" y="457200"/>
-            <a:ext cx="16916400" cy="8778240"/>
+            <a:ext cx="16916400" cy="8823960"/>
           </a:xfrm>
           <a:prstGeom prst="rect">
             <a:avLst/>
@@ -6268,15 +6081,15 @@
               <a:spcAft>
                 <a:spcPts val="500"/>
               </a:spcAft>
-              <a:defRPr sz="1500" b="0" i="1">
-                <a:solidFill>
-                  <a:srgbClr val="DCAA5A"/>
-                </a:solidFill>
-                <a:latin typeface="Calibri"/>
-              </a:defRPr>
-            </a:pPr>
-            <a:r>
-              <a:t>Prayer of the Faithful — insert petitions for your community.</a:t>
+              <a:defRPr sz="2000" b="1" i="0">
+                <a:solidFill>
+                  <a:srgbClr val="F5F5F5"/>
+                </a:solidFill>
+                <a:latin typeface="Calibri"/>
+              </a:defRPr>
+            </a:pPr>
+            <a:r>
+              <a:t>I believe in one God, the Father almighty, maker of heaven and earth, of all things visible and invisible. I believe in one Lord Jesus Christ, the Only Begotten Son of God, born of the Father before all ages…</a:t>
             </a:r>
           </a:p>
           <a:p>
@@ -6286,13 +6099,13 @@
               </a:spcAft>
               <a:defRPr sz="2000" b="1" i="0">
                 <a:solidFill>
-                  <a:srgbClr val="DCAA5A"/>
-                </a:solidFill>
-                <a:latin typeface="Calibri"/>
-              </a:defRPr>
-            </a:pPr>
-            <a:r>
-              <a:t>Father, bless your children.</a:t>
+                  <a:srgbClr val="F5F5F5"/>
+                </a:solidFill>
+                <a:latin typeface="Calibri"/>
+              </a:defRPr>
+            </a:pPr>
+            <a:r>
+              <a:t>For us men and for our salvation he came down from heaven, (all bow) and by the Holy Spirit was incarnate of the Virgin Mary, and became man. For our sake he was crucified under Pontius Pilate, he suffered death and was buried, and rose again on the third day in accordance with the Scriptures.</a:t>
             </a:r>
           </a:p>
           <a:p>
@@ -6308,7 +6121,7 @@
               </a:defRPr>
             </a:pPr>
             <a:r>
-              <a:t>Lord, hear our prayer.</a:t>
+              <a:t>He ascended into heaven and is seated at the right hand of the Father… I believe in the Holy Spirit… I confess one Baptism for the forgiveness of sins and I look forward to the resurrection of the dead and the life of the world to come. Amen.</a:t>
             </a:r>
           </a:p>
         </p:txBody>
@@ -6354,13 +6167,13 @@
               </a:spcBef>
               <a:defRPr sz="1200" b="0" i="0">
                 <a:solidFill>
-                  <a:srgbClr val="DCAA5A"/>
-                </a:solidFill>
-                <a:latin typeface="Calibri"/>
-              </a:defRPr>
-            </a:pPr>
-            <a:r>
-              <a:t>Prayer of the Faithful</a:t>
+                  <a:srgbClr val="F2F0E8"/>
+                </a:solidFill>
+                <a:latin typeface="Calibri"/>
+              </a:defRPr>
+            </a:pPr>
+            <a:r>
+              <a:t>Nicene Creed</a:t>
             </a:r>
           </a:p>
         </p:txBody>
@@ -6399,8 +6212,8 @@
         </p:nvSpPr>
         <p:spPr>
           <a:xfrm>
-            <a:off x="685800" y="457200"/>
-            <a:ext cx="16916400" cy="8778240"/>
+            <a:off x="685800" y="914400"/>
+            <a:ext cx="16916400" cy="5943600"/>
           </a:xfrm>
           <a:prstGeom prst="rect">
             <a:avLst/>
@@ -6415,33 +6228,164 @@
           <a:p>
             <a:pPr>
               <a:spcAft>
-                <a:spcPts val="500"/>
-              </a:spcAft>
-              <a:defRPr sz="2000" b="1" i="0">
-                <a:solidFill>
-                  <a:srgbClr val="DCAA5A"/>
-                </a:solidFill>
-                <a:latin typeface="Calibri"/>
-              </a:defRPr>
-            </a:pPr>
-            <a:r>
-              <a:t>Heavenly Father… We ask this through Christ our Lord.</a:t>
-            </a:r>
-          </a:p>
-          <a:p>
-            <a:pPr>
-              <a:spcAft>
-                <a:spcPts val="500"/>
-              </a:spcAft>
-              <a:defRPr sz="2000" b="1" i="0">
-                <a:solidFill>
-                  <a:srgbClr val="F5F5F5"/>
-                </a:solidFill>
-                <a:latin typeface="Calibri"/>
-              </a:defRPr>
-            </a:pPr>
-            <a:r>
-              <a:t>Amen.</a:t>
+                <a:spcPts val="300"/>
+              </a:spcAft>
+              <a:defRPr sz="2100" b="1" i="0">
+                <a:solidFill>
+                  <a:srgbClr val="F2F0E8"/>
+                </a:solidFill>
+                <a:latin typeface="Calibri"/>
+              </a:defRPr>
+            </a:pPr>
+            <a:r>
+              <a:t>MASS CELEBRANT:</a:t>
+            </a:r>
+          </a:p>
+          <a:p>
+            <a:pPr>
+              <a:spcAft>
+                <a:spcPts val="300"/>
+              </a:spcAft>
+              <a:defRPr sz="2100" b="0" i="0">
+                <a:solidFill>
+                  <a:srgbClr val="F5F5F5"/>
+                </a:solidFill>
+                <a:latin typeface="Calibri"/>
+              </a:defRPr>
+            </a:pPr>
+            <a:r>
+              <a:t>Hye</a:t>
+            </a:r>
+          </a:p>
+          <a:p>
+            <a:pPr>
+              <a:spcAft>
+                <a:spcPts val="300"/>
+              </a:spcAft>
+              <a:defRPr sz="2100" b="0" i="0">
+                <a:solidFill>
+                  <a:srgbClr val="F5F5F5"/>
+                </a:solidFill>
+                <a:latin typeface="Calibri"/>
+              </a:defRPr>
+            </a:pPr>
+          </a:p>
+          <a:p>
+            <a:pPr>
+              <a:spcAft>
+                <a:spcPts val="300"/>
+              </a:spcAft>
+              <a:defRPr sz="2100" b="0" i="0">
+                <a:solidFill>
+                  <a:srgbClr val="F5F5F5"/>
+                </a:solidFill>
+                <a:latin typeface="Calibri"/>
+              </a:defRPr>
+            </a:pPr>
+            <a:r>
+              <a:t>GWANGJU</a:t>
+            </a:r>
+            <a:br/>
+            <a:r>
+              <a:t>FILIPINO</a:t>
+            </a:r>
+            <a:br/>
+            <a:r>
+              <a:t>CATHOLIC</a:t>
+            </a:r>
+            <a:br/>
+            <a:r>
+              <a:t>COMMUNITY</a:t>
+            </a:r>
+          </a:p>
+          <a:p>
+            <a:pPr>
+              <a:spcAft>
+                <a:spcPts val="300"/>
+              </a:spcAft>
+              <a:defRPr sz="2100" b="0" i="0">
+                <a:solidFill>
+                  <a:srgbClr val="F5F5F5"/>
+                </a:solidFill>
+                <a:latin typeface="Calibri"/>
+              </a:defRPr>
+            </a:pPr>
+          </a:p>
+          <a:p>
+            <a:pPr>
+              <a:spcAft>
+                <a:spcPts val="300"/>
+              </a:spcAft>
+              <a:defRPr sz="2100" b="0" i="0">
+                <a:solidFill>
+                  <a:srgbClr val="F5F5F5"/>
+                </a:solidFill>
+                <a:latin typeface="Calibri"/>
+              </a:defRPr>
+            </a:pPr>
+            <a:r>
+              <a:t>Gospel (John 10:1-10)</a:t>
+            </a:r>
+          </a:p>
+          <a:p>
+            <a:pPr>
+              <a:spcAft>
+                <a:spcPts val="300"/>
+              </a:spcAft>
+              <a:defRPr sz="2100" b="0" i="0">
+                <a:solidFill>
+                  <a:srgbClr val="F5F5F5"/>
+                </a:solidFill>
+                <a:latin typeface="Calibri"/>
+              </a:defRPr>
+            </a:pPr>
+            <a:r>
+              <a:t>“Amen, amen, I say to you, whoever does not enter a sheepfold through the gate but climbs over elsewhere is a thief and a robber.”</a:t>
+            </a:r>
+          </a:p>
+          <a:p>
+            <a:pPr>
+              <a:spcAft>
+                <a:spcPts val="300"/>
+              </a:spcAft>
+              <a:defRPr sz="2100" b="0" i="0">
+                <a:solidFill>
+                  <a:srgbClr val="F5F5F5"/>
+                </a:solidFill>
+                <a:latin typeface="Calibri"/>
+              </a:defRPr>
+            </a:pPr>
+          </a:p>
+          <a:p>
+            <a:pPr>
+              <a:spcAft>
+                <a:spcPts val="300"/>
+              </a:spcAft>
+              <a:defRPr sz="2100" b="0" i="0">
+                <a:solidFill>
+                  <a:srgbClr val="F5F5F5"/>
+                </a:solidFill>
+                <a:latin typeface="Calibri"/>
+              </a:defRPr>
+            </a:pPr>
+            <a:r>
+              <a:t>YEAR A</a:t>
+            </a:r>
+          </a:p>
+          <a:p>
+            <a:pPr>
+              <a:spcAft>
+                <a:spcPts val="300"/>
+              </a:spcAft>
+              <a:defRPr sz="2100" b="0" i="0">
+                <a:solidFill>
+                  <a:srgbClr val="F5F5F5"/>
+                </a:solidFill>
+                <a:latin typeface="Calibri"/>
+              </a:defRPr>
+            </a:pPr>
+            <a:r>
+              <a:t>2026-04-26 · Eastertide</a:t>
             </a:r>
           </a:p>
         </p:txBody>
@@ -6487,13 +6431,13 @@
               </a:spcBef>
               <a:defRPr sz="1200" b="0" i="0">
                 <a:solidFill>
-                  <a:srgbClr val="DCAA5A"/>
-                </a:solidFill>
-                <a:latin typeface="Calibri"/>
-              </a:defRPr>
-            </a:pPr>
-            <a:r>
-              <a:t>Prayer of the Faithful</a:t>
+                  <a:srgbClr val="F2F0E8"/>
+                </a:solidFill>
+                <a:latin typeface="Calibri"/>
+              </a:defRPr>
+            </a:pPr>
+            <a:r>
+              <a:t>Mass poster / divider</a:t>
             </a:r>
           </a:p>
         </p:txBody>
@@ -6532,8 +6476,8 @@
         </p:nvSpPr>
         <p:spPr>
           <a:xfrm>
-            <a:off x="685800" y="960120"/>
-            <a:ext cx="16916400" cy="1051560"/>
+            <a:off x="685800" y="457200"/>
+            <a:ext cx="16916400" cy="8823960"/>
           </a:xfrm>
           <a:prstGeom prst="rect">
             <a:avLst/>
@@ -6547,15 +6491,50 @@
           <a:lstStyle/>
           <a:p>
             <a:pPr>
-              <a:defRPr sz="3800" b="1" i="0">
-                <a:solidFill>
-                  <a:srgbClr val="DCAA5A"/>
-                </a:solidFill>
-                <a:latin typeface="Calibri"/>
-              </a:defRPr>
-            </a:pPr>
-            <a:r>
-              <a:t>Eastertide Celebration</a:t>
+              <a:spcAft>
+                <a:spcPts val="500"/>
+              </a:spcAft>
+              <a:defRPr sz="1500" b="0" i="1">
+                <a:solidFill>
+                  <a:srgbClr val="F2F0E8"/>
+                </a:solidFill>
+                <a:latin typeface="Calibri"/>
+              </a:defRPr>
+            </a:pPr>
+            <a:r>
+              <a:t>Prayer of the Faithful — insert petitions for your community.</a:t>
+            </a:r>
+          </a:p>
+          <a:p>
+            <a:pPr>
+              <a:spcAft>
+                <a:spcPts val="500"/>
+              </a:spcAft>
+              <a:defRPr sz="2000" b="1" i="0">
+                <a:solidFill>
+                  <a:srgbClr val="F2F0E8"/>
+                </a:solidFill>
+                <a:latin typeface="Calibri"/>
+              </a:defRPr>
+            </a:pPr>
+            <a:r>
+              <a:t>Father, bless your children.</a:t>
+            </a:r>
+          </a:p>
+          <a:p>
+            <a:pPr>
+              <a:spcAft>
+                <a:spcPts val="500"/>
+              </a:spcAft>
+              <a:defRPr sz="2000" b="1" i="0">
+                <a:solidFill>
+                  <a:srgbClr val="F5F5F5"/>
+                </a:solidFill>
+                <a:latin typeface="Calibri"/>
+              </a:defRPr>
+            </a:pPr>
+            <a:r>
+              <a:t>Lord, hear our prayer.</a:t>
             </a:r>
           </a:p>
         </p:txBody>
@@ -6563,176 +6542,6 @@
       <p:sp>
         <p:nvSpPr>
           <p:cNvPr id="3" name="TextBox 2"/>
-          <p:cNvSpPr txBox="1"/>
-          <p:nvPr/>
-        </p:nvSpPr>
-        <p:spPr>
-          <a:xfrm>
-            <a:off x="685800" y="2103120"/>
-            <a:ext cx="16916400" cy="2011680"/>
-          </a:xfrm>
-          <a:prstGeom prst="rect">
-            <a:avLst/>
-          </a:prstGeom>
-          <a:noFill/>
-        </p:spPr>
-        <p:txBody>
-          <a:bodyPr wrap="square" lIns="109728" rIns="109728" tIns="73152" bIns="73152">
-            <a:noAutofit/>
-          </a:bodyPr>
-          <a:lstStyle/>
-          <a:p>
-            <a:pPr>
-              <a:spcAft>
-                <a:spcPts val="200"/>
-              </a:spcAft>
-              <a:defRPr sz="2100" b="1" i="0">
-                <a:solidFill>
-                  <a:srgbClr val="F5F5F5"/>
-                </a:solidFill>
-                <a:latin typeface="Calibri"/>
-              </a:defRPr>
-            </a:pPr>
-            <a:r>
-              <a:t>MASS CELEBRANT: Rev. Fr. Jonrey Lauron, RCJ</a:t>
-            </a:r>
-          </a:p>
-          <a:p>
-            <a:pPr>
-              <a:spcAft>
-                <a:spcPts val="200"/>
-              </a:spcAft>
-              <a:defRPr sz="2100" b="0" i="0">
-                <a:solidFill>
-                  <a:srgbClr val="F5F5F5"/>
-                </a:solidFill>
-                <a:latin typeface="Calibri"/>
-              </a:defRPr>
-            </a:pPr>
-          </a:p>
-          <a:p>
-            <a:pPr>
-              <a:spcAft>
-                <a:spcPts val="200"/>
-              </a:spcAft>
-              <a:defRPr sz="2100" b="0" i="0">
-                <a:solidFill>
-                  <a:srgbClr val="F5F5F5"/>
-                </a:solidFill>
-                <a:latin typeface="Calibri"/>
-              </a:defRPr>
-            </a:pPr>
-            <a:r>
-              <a:t>GWANGJU</a:t>
-            </a:r>
-            <a:br/>
-            <a:r>
-              <a:t>FILIPINO</a:t>
-            </a:r>
-            <a:br/>
-            <a:r>
-              <a:t>CATHOLIC</a:t>
-            </a:r>
-            <a:br/>
-            <a:r>
-              <a:t>COMMUNITY</a:t>
-            </a:r>
-          </a:p>
-          <a:p>
-            <a:pPr>
-              <a:spcAft>
-                <a:spcPts val="200"/>
-              </a:spcAft>
-              <a:defRPr sz="2100" b="0" i="0">
-                <a:solidFill>
-                  <a:srgbClr val="F5F5F5"/>
-                </a:solidFill>
-                <a:latin typeface="Calibri"/>
-              </a:defRPr>
-            </a:pPr>
-          </a:p>
-          <a:p>
-            <a:pPr>
-              <a:spcAft>
-                <a:spcPts val="200"/>
-              </a:spcAft>
-              <a:defRPr sz="2100" b="0" i="0">
-                <a:solidFill>
-                  <a:srgbClr val="F5F5F5"/>
-                </a:solidFill>
-                <a:latin typeface="Calibri"/>
-              </a:defRPr>
-            </a:pPr>
-            <a:r>
-              <a:t>Gospel (John 14:15-21)</a:t>
-            </a:r>
-          </a:p>
-          <a:p>
-            <a:pPr>
-              <a:spcAft>
-                <a:spcPts val="200"/>
-              </a:spcAft>
-              <a:defRPr sz="2100" b="0" i="0">
-                <a:solidFill>
-                  <a:srgbClr val="F5F5F5"/>
-                </a:solidFill>
-                <a:latin typeface="Calibri"/>
-              </a:defRPr>
-            </a:pPr>
-            <a:r>
-              <a:t>“If you love me, you will keep my commandments.”</a:t>
-            </a:r>
-          </a:p>
-          <a:p>
-            <a:pPr>
-              <a:spcAft>
-                <a:spcPts val="200"/>
-              </a:spcAft>
-              <a:defRPr sz="2100" b="0" i="0">
-                <a:solidFill>
-                  <a:srgbClr val="F5F5F5"/>
-                </a:solidFill>
-                <a:latin typeface="Calibri"/>
-              </a:defRPr>
-            </a:pPr>
-          </a:p>
-          <a:p>
-            <a:pPr>
-              <a:spcAft>
-                <a:spcPts val="200"/>
-              </a:spcAft>
-              <a:defRPr sz="2100" b="0" i="0">
-                <a:solidFill>
-                  <a:srgbClr val="F5F5F5"/>
-                </a:solidFill>
-                <a:latin typeface="Calibri"/>
-              </a:defRPr>
-            </a:pPr>
-            <a:r>
-              <a:t>YEAR A</a:t>
-            </a:r>
-          </a:p>
-          <a:p>
-            <a:pPr>
-              <a:spcAft>
-                <a:spcPts val="200"/>
-              </a:spcAft>
-              <a:defRPr sz="2100" b="0" i="0">
-                <a:solidFill>
-                  <a:srgbClr val="F5F5F5"/>
-                </a:solidFill>
-                <a:latin typeface="Calibri"/>
-              </a:defRPr>
-            </a:pPr>
-            <a:r>
-              <a:t>2026-05-10 · Eastertide</a:t>
-            </a:r>
-          </a:p>
-        </p:txBody>
-      </p:sp>
-      <p:sp>
-        <p:nvSpPr>
-          <p:cNvPr id="4" name="TextBox 3"/>
           <p:cNvSpPr txBox="1"/>
           <p:nvPr/>
         </p:nvSpPr>
@@ -6771,13 +6580,13 @@
               </a:spcBef>
               <a:defRPr sz="1200" b="0" i="0">
                 <a:solidFill>
-                  <a:srgbClr val="DCAA5A"/>
-                </a:solidFill>
-                <a:latin typeface="Calibri"/>
-              </a:defRPr>
-            </a:pPr>
-            <a:r>
-              <a:t>Mass poster / divider</a:t>
+                  <a:srgbClr val="F2F0E8"/>
+                </a:solidFill>
+                <a:latin typeface="Calibri"/>
+              </a:defRPr>
+            </a:pPr>
+            <a:r>
+              <a:t>Prayer of the Faithful</a:t>
             </a:r>
           </a:p>
         </p:txBody>
@@ -6817,7 +6626,7 @@
         <p:spPr>
           <a:xfrm>
             <a:off x="685800" y="457200"/>
-            <a:ext cx="16916400" cy="8778240"/>
+            <a:ext cx="16916400" cy="8823960"/>
           </a:xfrm>
           <a:prstGeom prst="rect">
             <a:avLst/>
@@ -6834,15 +6643,15 @@
               <a:spcAft>
                 <a:spcPts val="500"/>
               </a:spcAft>
-              <a:defRPr sz="1900" b="1" i="0">
-                <a:solidFill>
-                  <a:srgbClr val="F5F5F5"/>
-                </a:solidFill>
-                <a:latin typeface="Calibri"/>
-              </a:defRPr>
-            </a:pPr>
-            <a:r>
-              <a:t>TAKE AND RECEIVE, O LORD, MY LIBERTY…</a:t>
+              <a:defRPr sz="2000" b="1" i="0">
+                <a:solidFill>
+                  <a:srgbClr val="F2F0E8"/>
+                </a:solidFill>
+                <a:latin typeface="Calibri"/>
+              </a:defRPr>
+            </a:pPr>
+            <a:r>
+              <a:t>Heavenly Father… We ask this through Christ our Lord.</a:t>
             </a:r>
           </a:p>
           <a:p>
@@ -6850,15 +6659,15 @@
               <a:spcAft>
                 <a:spcPts val="500"/>
               </a:spcAft>
-              <a:defRPr sz="1500" b="0" i="1">
-                <a:solidFill>
-                  <a:srgbClr val="DCAA5A"/>
-                </a:solidFill>
-                <a:latin typeface="Calibri"/>
-              </a:defRPr>
-            </a:pPr>
-            <a:r>
-              <a:t>Offertory — replace with your hymn (e.g. Take and Receive).</a:t>
+              <a:defRPr sz="2000" b="1" i="0">
+                <a:solidFill>
+                  <a:srgbClr val="F5F5F5"/>
+                </a:solidFill>
+                <a:latin typeface="Calibri"/>
+              </a:defRPr>
+            </a:pPr>
+            <a:r>
+              <a:t>Amen.</a:t>
             </a:r>
           </a:p>
         </p:txBody>
@@ -6904,13 +6713,13 @@
               </a:spcBef>
               <a:defRPr sz="1200" b="0" i="0">
                 <a:solidFill>
-                  <a:srgbClr val="DCAA5A"/>
-                </a:solidFill>
-                <a:latin typeface="Calibri"/>
-              </a:defRPr>
-            </a:pPr>
-            <a:r>
-              <a:t>Liturgy of the Eucharist</a:t>
+                  <a:srgbClr val="F2F0E8"/>
+                </a:solidFill>
+                <a:latin typeface="Calibri"/>
+              </a:defRPr>
+            </a:pPr>
+            <a:r>
+              <a:t>Prayer of the Faithful</a:t>
             </a:r>
           </a:p>
         </p:txBody>
@@ -6949,8 +6758,8 @@
         </p:nvSpPr>
         <p:spPr>
           <a:xfrm>
-            <a:off x="685800" y="1554480"/>
-            <a:ext cx="16916400" cy="3657600"/>
+            <a:off x="685800" y="914400"/>
+            <a:ext cx="16916400" cy="5943600"/>
           </a:xfrm>
           <a:prstGeom prst="rect">
             <a:avLst/>
@@ -6963,20 +6772,166 @@
           </a:bodyPr>
           <a:lstStyle/>
           <a:p>
-            <a:pPr algn="ctr">
-              <a:defRPr sz="4400" b="1" i="0">
-                <a:solidFill>
-                  <a:srgbClr val="DCAA5A"/>
-                </a:solidFill>
-                <a:latin typeface="Calibri"/>
-              </a:defRPr>
-            </a:pPr>
-            <a:r>
-              <a:t>LITURGY OF</a:t>
+            <a:pPr>
+              <a:spcAft>
+                <a:spcPts val="300"/>
+              </a:spcAft>
+              <a:defRPr sz="2100" b="1" i="0">
+                <a:solidFill>
+                  <a:srgbClr val="F2F0E8"/>
+                </a:solidFill>
+                <a:latin typeface="Calibri"/>
+              </a:defRPr>
+            </a:pPr>
+            <a:r>
+              <a:t>MASS CELEBRANT:</a:t>
+            </a:r>
+          </a:p>
+          <a:p>
+            <a:pPr>
+              <a:spcAft>
+                <a:spcPts val="300"/>
+              </a:spcAft>
+              <a:defRPr sz="2100" b="0" i="0">
+                <a:solidFill>
+                  <a:srgbClr val="F5F5F5"/>
+                </a:solidFill>
+                <a:latin typeface="Calibri"/>
+              </a:defRPr>
+            </a:pPr>
+            <a:r>
+              <a:t>Hye</a:t>
+            </a:r>
+          </a:p>
+          <a:p>
+            <a:pPr>
+              <a:spcAft>
+                <a:spcPts val="300"/>
+              </a:spcAft>
+              <a:defRPr sz="2100" b="0" i="0">
+                <a:solidFill>
+                  <a:srgbClr val="F5F5F5"/>
+                </a:solidFill>
+                <a:latin typeface="Calibri"/>
+              </a:defRPr>
+            </a:pPr>
+          </a:p>
+          <a:p>
+            <a:pPr>
+              <a:spcAft>
+                <a:spcPts val="300"/>
+              </a:spcAft>
+              <a:defRPr sz="2100" b="0" i="0">
+                <a:solidFill>
+                  <a:srgbClr val="F5F5F5"/>
+                </a:solidFill>
+                <a:latin typeface="Calibri"/>
+              </a:defRPr>
+            </a:pPr>
+            <a:r>
+              <a:t>GWANGJU</a:t>
             </a:r>
             <a:br/>
             <a:r>
-              <a:t>THE EUCHARIST</a:t>
+              <a:t>FILIPINO</a:t>
+            </a:r>
+            <a:br/>
+            <a:r>
+              <a:t>CATHOLIC</a:t>
+            </a:r>
+            <a:br/>
+            <a:r>
+              <a:t>COMMUNITY</a:t>
+            </a:r>
+          </a:p>
+          <a:p>
+            <a:pPr>
+              <a:spcAft>
+                <a:spcPts val="300"/>
+              </a:spcAft>
+              <a:defRPr sz="2100" b="0" i="0">
+                <a:solidFill>
+                  <a:srgbClr val="F5F5F5"/>
+                </a:solidFill>
+                <a:latin typeface="Calibri"/>
+              </a:defRPr>
+            </a:pPr>
+          </a:p>
+          <a:p>
+            <a:pPr>
+              <a:spcAft>
+                <a:spcPts val="300"/>
+              </a:spcAft>
+              <a:defRPr sz="2100" b="0" i="0">
+                <a:solidFill>
+                  <a:srgbClr val="F5F5F5"/>
+                </a:solidFill>
+                <a:latin typeface="Calibri"/>
+              </a:defRPr>
+            </a:pPr>
+            <a:r>
+              <a:t>Gospel (John 10:1-10)</a:t>
+            </a:r>
+          </a:p>
+          <a:p>
+            <a:pPr>
+              <a:spcAft>
+                <a:spcPts val="300"/>
+              </a:spcAft>
+              <a:defRPr sz="2100" b="0" i="0">
+                <a:solidFill>
+                  <a:srgbClr val="F5F5F5"/>
+                </a:solidFill>
+                <a:latin typeface="Calibri"/>
+              </a:defRPr>
+            </a:pPr>
+            <a:r>
+              <a:t>“Amen, amen, I say to you, whoever does not enter a sheepfold through the gate but climbs over elsewhere is a thief and a robber.”</a:t>
+            </a:r>
+          </a:p>
+          <a:p>
+            <a:pPr>
+              <a:spcAft>
+                <a:spcPts val="300"/>
+              </a:spcAft>
+              <a:defRPr sz="2100" b="0" i="0">
+                <a:solidFill>
+                  <a:srgbClr val="F5F5F5"/>
+                </a:solidFill>
+                <a:latin typeface="Calibri"/>
+              </a:defRPr>
+            </a:pPr>
+          </a:p>
+          <a:p>
+            <a:pPr>
+              <a:spcAft>
+                <a:spcPts val="300"/>
+              </a:spcAft>
+              <a:defRPr sz="2100" b="0" i="0">
+                <a:solidFill>
+                  <a:srgbClr val="F5F5F5"/>
+                </a:solidFill>
+                <a:latin typeface="Calibri"/>
+              </a:defRPr>
+            </a:pPr>
+            <a:r>
+              <a:t>YEAR A</a:t>
+            </a:r>
+          </a:p>
+          <a:p>
+            <a:pPr>
+              <a:spcAft>
+                <a:spcPts val="300"/>
+              </a:spcAft>
+              <a:defRPr sz="2100" b="0" i="0">
+                <a:solidFill>
+                  <a:srgbClr val="F5F5F5"/>
+                </a:solidFill>
+                <a:latin typeface="Calibri"/>
+              </a:defRPr>
+            </a:pPr>
+            <a:r>
+              <a:t>2026-04-26 · Eastertide</a:t>
             </a:r>
           </a:p>
         </p:txBody>
@@ -7022,13 +6977,13 @@
               </a:spcBef>
               <a:defRPr sz="1200" b="0" i="0">
                 <a:solidFill>
-                  <a:srgbClr val="DCAA5A"/>
-                </a:solidFill>
-                <a:latin typeface="Calibri"/>
-              </a:defRPr>
-            </a:pPr>
-            <a:r>
-              <a:t>Liturgy of the Eucharist</a:t>
+                  <a:srgbClr val="F2F0E8"/>
+                </a:solidFill>
+                <a:latin typeface="Calibri"/>
+              </a:defRPr>
+            </a:pPr>
+            <a:r>
+              <a:t>Mass poster / divider</a:t>
             </a:r>
           </a:p>
         </p:txBody>
@@ -7068,7 +7023,7 @@
         <p:spPr>
           <a:xfrm>
             <a:off x="685800" y="457200"/>
-            <a:ext cx="16916400" cy="8778240"/>
+            <a:ext cx="16916400" cy="8823960"/>
           </a:xfrm>
           <a:prstGeom prst="rect">
             <a:avLst/>
@@ -7151,7 +7106,7 @@
               </a:spcAft>
               <a:defRPr sz="1500" b="0" i="1">
                 <a:solidFill>
-                  <a:srgbClr val="DCAA5A"/>
+                  <a:srgbClr val="F2F0E8"/>
                 </a:solidFill>
                 <a:latin typeface="Calibri"/>
               </a:defRPr>
@@ -7231,7 +7186,7 @@
               </a:spcAft>
               <a:defRPr sz="1500" b="0" i="1">
                 <a:solidFill>
-                  <a:srgbClr val="DCAA5A"/>
+                  <a:srgbClr val="F2F0E8"/>
                 </a:solidFill>
                 <a:latin typeface="Calibri"/>
               </a:defRPr>
@@ -7283,7 +7238,7 @@
               </a:spcBef>
               <a:defRPr sz="1200" b="0" i="0">
                 <a:solidFill>
-                  <a:srgbClr val="DCAA5A"/>
+                  <a:srgbClr val="F2F0E8"/>
                 </a:solidFill>
                 <a:latin typeface="Calibri"/>
               </a:defRPr>
@@ -7329,7 +7284,7 @@
         <p:spPr>
           <a:xfrm>
             <a:off x="685800" y="457200"/>
-            <a:ext cx="16916400" cy="8778240"/>
+            <a:ext cx="16916400" cy="8823960"/>
           </a:xfrm>
           <a:prstGeom prst="rect">
             <a:avLst/>
@@ -7346,15 +7301,15 @@
               <a:spcAft>
                 <a:spcPts val="500"/>
               </a:spcAft>
-              <a:defRPr sz="2000" b="1" i="0">
-                <a:solidFill>
-                  <a:srgbClr val="DCAA5A"/>
-                </a:solidFill>
-                <a:latin typeface="Calibri"/>
-              </a:defRPr>
-            </a:pPr>
-            <a:r>
-              <a:t>Pray, brethren, that my sacrifice and yours may be acceptable to God, the almighty Father.</a:t>
+              <a:defRPr sz="1900" b="1" i="0">
+                <a:solidFill>
+                  <a:srgbClr val="F5F5F5"/>
+                </a:solidFill>
+                <a:latin typeface="Calibri"/>
+              </a:defRPr>
+            </a:pPr>
+            <a:r>
+              <a:t>TAKE AND RECEIVE, O LORD, MY LIBERTY…</a:t>
             </a:r>
           </a:p>
           <a:p>
@@ -7362,15 +7317,15 @@
               <a:spcAft>
                 <a:spcPts val="500"/>
               </a:spcAft>
-              <a:defRPr sz="2000" b="1" i="0">
-                <a:solidFill>
-                  <a:srgbClr val="F5F5F5"/>
-                </a:solidFill>
-                <a:latin typeface="Calibri"/>
-              </a:defRPr>
-            </a:pPr>
-            <a:r>
-              <a:t>May the Lord accept the sacrifice at your hands, for the praise and glory of his name, for our good and the good of all his holy Church.</a:t>
+              <a:defRPr sz="1500" b="0" i="1">
+                <a:solidFill>
+                  <a:srgbClr val="F2F0E8"/>
+                </a:solidFill>
+                <a:latin typeface="Calibri"/>
+              </a:defRPr>
+            </a:pPr>
+            <a:r>
+              <a:t>Offertory — replace with your hymn (e.g. Take and Receive).</a:t>
             </a:r>
           </a:p>
         </p:txBody>
@@ -7416,7 +7371,7 @@
               </a:spcBef>
               <a:defRPr sz="1200" b="0" i="0">
                 <a:solidFill>
-                  <a:srgbClr val="DCAA5A"/>
+                  <a:srgbClr val="F2F0E8"/>
                 </a:solidFill>
                 <a:latin typeface="Calibri"/>
               </a:defRPr>
@@ -7461,8 +7416,8 @@
         </p:nvSpPr>
         <p:spPr>
           <a:xfrm>
-            <a:off x="685800" y="1554480"/>
-            <a:ext cx="16916400" cy="3657600"/>
+            <a:off x="685800" y="1508760"/>
+            <a:ext cx="16916400" cy="4114800"/>
           </a:xfrm>
           <a:prstGeom prst="rect">
             <a:avLst/>
@@ -7478,7 +7433,7 @@
             <a:pPr algn="ctr">
               <a:defRPr sz="4400" b="1" i="0">
                 <a:solidFill>
-                  <a:srgbClr val="DCAA5A"/>
+                  <a:srgbClr val="F2F0E8"/>
                 </a:solidFill>
                 <a:latin typeface="Calibri"/>
               </a:defRPr>
@@ -7534,7 +7489,7 @@
               </a:spcBef>
               <a:defRPr sz="1200" b="0" i="0">
                 <a:solidFill>
-                  <a:srgbClr val="DCAA5A"/>
+                  <a:srgbClr val="F2F0E8"/>
                 </a:solidFill>
                 <a:latin typeface="Calibri"/>
               </a:defRPr>
@@ -7580,7 +7535,7 @@
         <p:spPr>
           <a:xfrm>
             <a:off x="685800" y="457200"/>
-            <a:ext cx="16916400" cy="8778240"/>
+            <a:ext cx="16916400" cy="8823960"/>
           </a:xfrm>
           <a:prstGeom prst="rect">
             <a:avLst/>
@@ -7599,13 +7554,13 @@
               </a:spcAft>
               <a:defRPr sz="2000" b="1" i="0">
                 <a:solidFill>
-                  <a:srgbClr val="DCAA5A"/>
-                </a:solidFill>
-                <a:latin typeface="Calibri"/>
-              </a:defRPr>
-            </a:pPr>
-            <a:r>
-              <a:t>The Lord be with you.</a:t>
+                  <a:srgbClr val="F2F0E8"/>
+                </a:solidFill>
+                <a:latin typeface="Calibri"/>
+              </a:defRPr>
+            </a:pPr>
+            <a:r>
+              <a:t>Pray, brethren, that my sacrifice and yours may be acceptable to God, the almighty Father.</a:t>
             </a:r>
           </a:p>
           <a:p>
@@ -7621,71 +7576,7 @@
               </a:defRPr>
             </a:pPr>
             <a:r>
-              <a:t>And with your spirit.</a:t>
-            </a:r>
-          </a:p>
-          <a:p>
-            <a:pPr>
-              <a:spcAft>
-                <a:spcPts val="500"/>
-              </a:spcAft>
-              <a:defRPr sz="2000" b="1" i="0">
-                <a:solidFill>
-                  <a:srgbClr val="DCAA5A"/>
-                </a:solidFill>
-                <a:latin typeface="Calibri"/>
-              </a:defRPr>
-            </a:pPr>
-            <a:r>
-              <a:t>Lift up your hearts.</a:t>
-            </a:r>
-          </a:p>
-          <a:p>
-            <a:pPr>
-              <a:spcAft>
-                <a:spcPts val="500"/>
-              </a:spcAft>
-              <a:defRPr sz="2000" b="1" i="0">
-                <a:solidFill>
-                  <a:srgbClr val="F5F5F5"/>
-                </a:solidFill>
-                <a:latin typeface="Calibri"/>
-              </a:defRPr>
-            </a:pPr>
-            <a:r>
-              <a:t>We lift them up to the Lord.</a:t>
-            </a:r>
-          </a:p>
-          <a:p>
-            <a:pPr>
-              <a:spcAft>
-                <a:spcPts val="500"/>
-              </a:spcAft>
-              <a:defRPr sz="2000" b="1" i="0">
-                <a:solidFill>
-                  <a:srgbClr val="DCAA5A"/>
-                </a:solidFill>
-                <a:latin typeface="Calibri"/>
-              </a:defRPr>
-            </a:pPr>
-            <a:r>
-              <a:t>Let us give thanks to the Lord our God.</a:t>
-            </a:r>
-          </a:p>
-          <a:p>
-            <a:pPr>
-              <a:spcAft>
-                <a:spcPts val="500"/>
-              </a:spcAft>
-              <a:defRPr sz="2000" b="1" i="0">
-                <a:solidFill>
-                  <a:srgbClr val="F5F5F5"/>
-                </a:solidFill>
-                <a:latin typeface="Calibri"/>
-              </a:defRPr>
-            </a:pPr>
-            <a:r>
-              <a:t>It is right and just.</a:t>
+              <a:t>May the Lord accept the sacrifice at your hands, for the praise and glory of his name, for our good and the good of all his holy Church.</a:t>
             </a:r>
           </a:p>
         </p:txBody>
@@ -7731,7 +7622,7 @@
               </a:spcBef>
               <a:defRPr sz="1200" b="0" i="0">
                 <a:solidFill>
-                  <a:srgbClr val="DCAA5A"/>
+                  <a:srgbClr val="F2F0E8"/>
                 </a:solidFill>
                 <a:latin typeface="Calibri"/>
               </a:defRPr>
@@ -7776,8 +7667,8 @@
         </p:nvSpPr>
         <p:spPr>
           <a:xfrm>
-            <a:off x="685800" y="457200"/>
-            <a:ext cx="16916400" cy="8778240"/>
+            <a:off x="685800" y="1508760"/>
+            <a:ext cx="16916400" cy="4114800"/>
           </a:xfrm>
           <a:prstGeom prst="rect">
             <a:avLst/>
@@ -7790,35 +7681,20 @@
           </a:bodyPr>
           <a:lstStyle/>
           <a:p>
-            <a:pPr>
-              <a:spcAft>
-                <a:spcPts val="500"/>
-              </a:spcAft>
-              <a:defRPr sz="2000" b="1" i="0">
-                <a:solidFill>
-                  <a:srgbClr val="DCAA5A"/>
-                </a:solidFill>
-                <a:latin typeface="Calibri"/>
-              </a:defRPr>
-            </a:pPr>
-            <a:r>
-              <a:t>…we sing the hymn of your praise as without end we acclaim…</a:t>
-            </a:r>
-          </a:p>
-          <a:p>
-            <a:pPr>
-              <a:spcAft>
-                <a:spcPts val="500"/>
-              </a:spcAft>
-              <a:defRPr sz="1500" b="0" i="1">
-                <a:solidFill>
-                  <a:srgbClr val="DCAA5A"/>
-                </a:solidFill>
-                <a:latin typeface="Calibri"/>
-              </a:defRPr>
-            </a:pPr>
-            <a:r>
-              <a:t>— Priest continues the Preface from the Missal.</a:t>
+            <a:pPr algn="ctr">
+              <a:defRPr sz="4400" b="1" i="0">
+                <a:solidFill>
+                  <a:srgbClr val="F2F0E8"/>
+                </a:solidFill>
+                <a:latin typeface="Calibri"/>
+              </a:defRPr>
+            </a:pPr>
+            <a:r>
+              <a:t>LITURGY OF</a:t>
+            </a:r>
+            <a:br/>
+            <a:r>
+              <a:t>THE EUCHARIST</a:t>
             </a:r>
           </a:p>
         </p:txBody>
@@ -7864,7 +7740,7 @@
               </a:spcBef>
               <a:defRPr sz="1200" b="0" i="0">
                 <a:solidFill>
-                  <a:srgbClr val="DCAA5A"/>
+                  <a:srgbClr val="F2F0E8"/>
                 </a:solidFill>
                 <a:latin typeface="Calibri"/>
               </a:defRPr>
@@ -7910,7 +7786,7 @@
         <p:spPr>
           <a:xfrm>
             <a:off x="685800" y="457200"/>
-            <a:ext cx="16916400" cy="8778240"/>
+            <a:ext cx="16916400" cy="8823960"/>
           </a:xfrm>
           <a:prstGeom prst="rect">
             <a:avLst/>
@@ -7927,15 +7803,95 @@
               <a:spcAft>
                 <a:spcPts val="500"/>
               </a:spcAft>
-              <a:defRPr sz="1900" b="1" i="0">
-                <a:solidFill>
-                  <a:srgbClr val="F5F5F5"/>
-                </a:solidFill>
-                <a:latin typeface="Calibri"/>
-              </a:defRPr>
-            </a:pPr>
-            <a:r>
-              <a:t>Holy, Holy, Holy Lord God of hosts. Heaven and earth are full of your glory. Hosanna in the highest. Blessed is he who comes in the name of the Lord. Hosanna in the highest.</a:t>
+              <a:defRPr sz="2000" b="1" i="0">
+                <a:solidFill>
+                  <a:srgbClr val="F2F0E8"/>
+                </a:solidFill>
+                <a:latin typeface="Calibri"/>
+              </a:defRPr>
+            </a:pPr>
+            <a:r>
+              <a:t>The Lord be with you.</a:t>
+            </a:r>
+          </a:p>
+          <a:p>
+            <a:pPr>
+              <a:spcAft>
+                <a:spcPts val="500"/>
+              </a:spcAft>
+              <a:defRPr sz="2000" b="1" i="0">
+                <a:solidFill>
+                  <a:srgbClr val="F5F5F5"/>
+                </a:solidFill>
+                <a:latin typeface="Calibri"/>
+              </a:defRPr>
+            </a:pPr>
+            <a:r>
+              <a:t>And with your spirit.</a:t>
+            </a:r>
+          </a:p>
+          <a:p>
+            <a:pPr>
+              <a:spcAft>
+                <a:spcPts val="500"/>
+              </a:spcAft>
+              <a:defRPr sz="2000" b="1" i="0">
+                <a:solidFill>
+                  <a:srgbClr val="F2F0E8"/>
+                </a:solidFill>
+                <a:latin typeface="Calibri"/>
+              </a:defRPr>
+            </a:pPr>
+            <a:r>
+              <a:t>Lift up your hearts.</a:t>
+            </a:r>
+          </a:p>
+          <a:p>
+            <a:pPr>
+              <a:spcAft>
+                <a:spcPts val="500"/>
+              </a:spcAft>
+              <a:defRPr sz="2000" b="1" i="0">
+                <a:solidFill>
+                  <a:srgbClr val="F5F5F5"/>
+                </a:solidFill>
+                <a:latin typeface="Calibri"/>
+              </a:defRPr>
+            </a:pPr>
+            <a:r>
+              <a:t>We lift them up to the Lord.</a:t>
+            </a:r>
+          </a:p>
+          <a:p>
+            <a:pPr>
+              <a:spcAft>
+                <a:spcPts val="500"/>
+              </a:spcAft>
+              <a:defRPr sz="2000" b="1" i="0">
+                <a:solidFill>
+                  <a:srgbClr val="F2F0E8"/>
+                </a:solidFill>
+                <a:latin typeface="Calibri"/>
+              </a:defRPr>
+            </a:pPr>
+            <a:r>
+              <a:t>Let us give thanks to the Lord our God.</a:t>
+            </a:r>
+          </a:p>
+          <a:p>
+            <a:pPr>
+              <a:spcAft>
+                <a:spcPts val="500"/>
+              </a:spcAft>
+              <a:defRPr sz="2000" b="1" i="0">
+                <a:solidFill>
+                  <a:srgbClr val="F5F5F5"/>
+                </a:solidFill>
+                <a:latin typeface="Calibri"/>
+              </a:defRPr>
+            </a:pPr>
+            <a:r>
+              <a:t>It is right and just.</a:t>
             </a:r>
           </a:p>
         </p:txBody>
@@ -7981,13 +7937,13 @@
               </a:spcBef>
               <a:defRPr sz="1200" b="0" i="0">
                 <a:solidFill>
-                  <a:srgbClr val="DCAA5A"/>
-                </a:solidFill>
-                <a:latin typeface="Calibri"/>
-              </a:defRPr>
-            </a:pPr>
-            <a:r>
-              <a:t>Sanctus</a:t>
+                  <a:srgbClr val="F2F0E8"/>
+                </a:solidFill>
+                <a:latin typeface="Calibri"/>
+              </a:defRPr>
+            </a:pPr>
+            <a:r>
+              <a:t>Liturgy of the Eucharist</a:t>
             </a:r>
           </a:p>
         </p:txBody>
@@ -8026,8 +7982,8 @@
         </p:nvSpPr>
         <p:spPr>
           <a:xfrm>
-            <a:off x="685800" y="1554480"/>
-            <a:ext cx="16916400" cy="3657600"/>
+            <a:off x="685800" y="457200"/>
+            <a:ext cx="16916400" cy="8823960"/>
           </a:xfrm>
           <a:prstGeom prst="rect">
             <a:avLst/>
@@ -8040,20 +7996,35 @@
           </a:bodyPr>
           <a:lstStyle/>
           <a:p>
-            <a:pPr algn="ctr">
-              <a:defRPr sz="4400" b="1" i="0">
-                <a:solidFill>
-                  <a:srgbClr val="DCAA5A"/>
-                </a:solidFill>
-                <a:latin typeface="Calibri"/>
-              </a:defRPr>
-            </a:pPr>
-            <a:r>
-              <a:t>LITURGY OF</a:t>
-            </a:r>
-            <a:br/>
-            <a:r>
-              <a:t>THE EUCHARIST</a:t>
+            <a:pPr>
+              <a:spcAft>
+                <a:spcPts val="500"/>
+              </a:spcAft>
+              <a:defRPr sz="2000" b="1" i="0">
+                <a:solidFill>
+                  <a:srgbClr val="F2F0E8"/>
+                </a:solidFill>
+                <a:latin typeface="Calibri"/>
+              </a:defRPr>
+            </a:pPr>
+            <a:r>
+              <a:t>…we sing the hymn of your praise as without end we acclaim…</a:t>
+            </a:r>
+          </a:p>
+          <a:p>
+            <a:pPr>
+              <a:spcAft>
+                <a:spcPts val="500"/>
+              </a:spcAft>
+              <a:defRPr sz="1500" b="0" i="1">
+                <a:solidFill>
+                  <a:srgbClr val="F2F0E8"/>
+                </a:solidFill>
+                <a:latin typeface="Calibri"/>
+              </a:defRPr>
+            </a:pPr>
+            <a:r>
+              <a:t>— Priest continues the Preface from the Missal.</a:t>
             </a:r>
           </a:p>
         </p:txBody>
@@ -8099,7 +8070,7 @@
               </a:spcBef>
               <a:defRPr sz="1200" b="0" i="0">
                 <a:solidFill>
-                  <a:srgbClr val="DCAA5A"/>
+                  <a:srgbClr val="F2F0E8"/>
                 </a:solidFill>
                 <a:latin typeface="Calibri"/>
               </a:defRPr>
@@ -8145,7 +8116,7 @@
         <p:spPr>
           <a:xfrm>
             <a:off x="685800" y="457200"/>
-            <a:ext cx="16916400" cy="8778240"/>
+            <a:ext cx="16916400" cy="8823960"/>
           </a:xfrm>
           <a:prstGeom prst="rect">
             <a:avLst/>
@@ -8170,23 +8141,7 @@
               </a:defRPr>
             </a:pPr>
             <a:r>
-              <a:t>When we eat this bread and drink this cup, we proclaim your death, O Lord, until you come again.</a:t>
-            </a:r>
-          </a:p>
-          <a:p>
-            <a:pPr>
-              <a:spcAft>
-                <a:spcPts val="500"/>
-              </a:spcAft>
-              <a:defRPr sz="1500" b="0" i="1">
-                <a:solidFill>
-                  <a:srgbClr val="DCAA5A"/>
-                </a:solidFill>
-                <a:latin typeface="Calibri"/>
-              </a:defRPr>
-            </a:pPr>
-            <a:r>
-              <a:t>The Mystery of Faith — use the form in the Eucharistic Prayer of the day.</a:t>
+              <a:t>Holy, Holy, Holy Lord God of hosts. Heaven and earth are full of your glory. Hosanna in the highest. Blessed is he who comes in the name of the Lord. Hosanna in the highest.</a:t>
             </a:r>
           </a:p>
         </p:txBody>
@@ -8232,13 +8187,13 @@
               </a:spcBef>
               <a:defRPr sz="1200" b="0" i="0">
                 <a:solidFill>
-                  <a:srgbClr val="DCAA5A"/>
-                </a:solidFill>
-                <a:latin typeface="Calibri"/>
-              </a:defRPr>
-            </a:pPr>
-            <a:r>
-              <a:t>The Eucharistic Prayer</a:t>
+                  <a:srgbClr val="F2F0E8"/>
+                </a:solidFill>
+                <a:latin typeface="Calibri"/>
+              </a:defRPr>
+            </a:pPr>
+            <a:r>
+              <a:t>Sanctus</a:t>
             </a:r>
           </a:p>
         </p:txBody>
@@ -8277,8 +8232,8 @@
         </p:nvSpPr>
         <p:spPr>
           <a:xfrm>
-            <a:off x="685800" y="1554480"/>
-            <a:ext cx="16916400" cy="3657600"/>
+            <a:off x="685800" y="1508760"/>
+            <a:ext cx="16916400" cy="4114800"/>
           </a:xfrm>
           <a:prstGeom prst="rect">
             <a:avLst/>
@@ -8294,7 +8249,7 @@
             <a:pPr algn="ctr">
               <a:defRPr sz="4400" b="1" i="0">
                 <a:solidFill>
-                  <a:srgbClr val="DCAA5A"/>
+                  <a:srgbClr val="F2F0E8"/>
                 </a:solidFill>
                 <a:latin typeface="Calibri"/>
               </a:defRPr>
@@ -8350,7 +8305,7 @@
               </a:spcBef>
               <a:defRPr sz="1200" b="0" i="0">
                 <a:solidFill>
-                  <a:srgbClr val="DCAA5A"/>
+                  <a:srgbClr val="F2F0E8"/>
                 </a:solidFill>
                 <a:latin typeface="Calibri"/>
               </a:defRPr>
@@ -8396,7 +8351,7 @@
         <p:spPr>
           <a:xfrm>
             <a:off x="685800" y="457200"/>
-            <a:ext cx="16916400" cy="8778240"/>
+            <a:ext cx="16916400" cy="8823960"/>
           </a:xfrm>
           <a:prstGeom prst="rect">
             <a:avLst/>
@@ -8413,15 +8368,15 @@
               <a:spcAft>
                 <a:spcPts val="500"/>
               </a:spcAft>
-              <a:defRPr sz="2000" b="1" i="0">
-                <a:solidFill>
-                  <a:srgbClr val="F5F5F5"/>
-                </a:solidFill>
-                <a:latin typeface="Calibri"/>
-              </a:defRPr>
-            </a:pPr>
-            <a:r>
-              <a:t>Amen.</a:t>
+              <a:defRPr sz="1900" b="1" i="0">
+                <a:solidFill>
+                  <a:srgbClr val="F5F5F5"/>
+                </a:solidFill>
+                <a:latin typeface="Calibri"/>
+              </a:defRPr>
+            </a:pPr>
+            <a:r>
+              <a:t>When we eat this bread and drink this cup, we proclaim your death, O Lord, until you come again.</a:t>
             </a:r>
           </a:p>
           <a:p>
@@ -8431,13 +8386,13 @@
               </a:spcAft>
               <a:defRPr sz="1500" b="0" i="1">
                 <a:solidFill>
-                  <a:srgbClr val="DCAA5A"/>
-                </a:solidFill>
-                <a:latin typeface="Calibri"/>
-              </a:defRPr>
-            </a:pPr>
-            <a:r>
-              <a:t>Great Amen — repeat as customary.</a:t>
+                  <a:srgbClr val="F2F0E8"/>
+                </a:solidFill>
+                <a:latin typeface="Calibri"/>
+              </a:defRPr>
+            </a:pPr>
+            <a:r>
+              <a:t>The Mystery of Faith — use the form in the Eucharistic Prayer of the day.</a:t>
             </a:r>
           </a:p>
         </p:txBody>
@@ -8483,13 +8438,13 @@
               </a:spcBef>
               <a:defRPr sz="1200" b="0" i="0">
                 <a:solidFill>
-                  <a:srgbClr val="DCAA5A"/>
-                </a:solidFill>
-                <a:latin typeface="Calibri"/>
-              </a:defRPr>
-            </a:pPr>
-            <a:r>
-              <a:t>Great Amen</a:t>
+                  <a:srgbClr val="F2F0E8"/>
+                </a:solidFill>
+                <a:latin typeface="Calibri"/>
+              </a:defRPr>
+            </a:pPr>
+            <a:r>
+              <a:t>The Eucharistic Prayer</a:t>
             </a:r>
           </a:p>
         </p:txBody>
@@ -8528,8 +8483,8 @@
         </p:nvSpPr>
         <p:spPr>
           <a:xfrm>
-            <a:off x="685800" y="457200"/>
-            <a:ext cx="16916400" cy="8778240"/>
+            <a:off x="685800" y="1508760"/>
+            <a:ext cx="16916400" cy="4114800"/>
           </a:xfrm>
           <a:prstGeom prst="rect">
             <a:avLst/>
@@ -8542,147 +8497,20 @@
           </a:bodyPr>
           <a:lstStyle/>
           <a:p>
-            <a:pPr>
-              <a:spcAft>
-                <a:spcPts val="500"/>
-              </a:spcAft>
-              <a:defRPr sz="1900" b="1" i="0">
-                <a:solidFill>
-                  <a:srgbClr val="F5F5F5"/>
-                </a:solidFill>
-                <a:latin typeface="Calibri"/>
-              </a:defRPr>
-            </a:pPr>
-            <a:r>
-              <a:t>주님의 기도</a:t>
-            </a:r>
-          </a:p>
-          <a:p>
-            <a:pPr>
-              <a:spcAft>
-                <a:spcPts val="500"/>
-              </a:spcAft>
-              <a:defRPr sz="1900" b="0" i="0">
-                <a:solidFill>
-                  <a:srgbClr val="F5F5F5"/>
-                </a:solidFill>
-                <a:latin typeface="Calibri"/>
-              </a:defRPr>
-            </a:pPr>
-            <a:r>
-              <a:t>하늘에 계신 우리 아버지,</a:t>
-            </a:r>
-          </a:p>
-          <a:p>
-            <a:pPr>
-              <a:spcAft>
-                <a:spcPts val="500"/>
-              </a:spcAft>
-              <a:defRPr sz="1900" b="0" i="0">
-                <a:solidFill>
-                  <a:srgbClr val="F5F5F5"/>
-                </a:solidFill>
-                <a:latin typeface="Calibri"/>
-              </a:defRPr>
-            </a:pPr>
-            <a:r>
-              <a:t>아버지 이름 빛나시며</a:t>
-            </a:r>
-          </a:p>
-          <a:p>
-            <a:pPr>
-              <a:spcAft>
-                <a:spcPts val="500"/>
-              </a:spcAft>
-              <a:defRPr sz="1900" b="0" i="0">
-                <a:solidFill>
-                  <a:srgbClr val="F5F5F5"/>
-                </a:solidFill>
-                <a:latin typeface="Calibri"/>
-              </a:defRPr>
-            </a:pPr>
-            <a:r>
-              <a:t>아버지 뜻이 하늘에서와 같이 땅에서도 이루어지소서</a:t>
-            </a:r>
-          </a:p>
-          <a:p>
-            <a:pPr>
-              <a:spcAft>
-                <a:spcPts val="500"/>
-              </a:spcAft>
-              <a:defRPr sz="1900" b="0" i="0">
-                <a:solidFill>
-                  <a:srgbClr val="F5F5F5"/>
-                </a:solidFill>
-                <a:latin typeface="Calibri"/>
-              </a:defRPr>
-            </a:pPr>
-            <a:r>
-              <a:t>저희에게 일용할 양식 주시고,</a:t>
-            </a:r>
-          </a:p>
-          <a:p>
-            <a:pPr>
-              <a:spcAft>
-                <a:spcPts val="500"/>
-              </a:spcAft>
-              <a:defRPr sz="1900" b="0" i="0">
-                <a:solidFill>
-                  <a:srgbClr val="F5F5F5"/>
-                </a:solidFill>
-                <a:latin typeface="Calibri"/>
-              </a:defRPr>
-            </a:pPr>
-            <a:r>
-              <a:t>저희의 죄를 용서하시고</a:t>
-            </a:r>
-          </a:p>
-          <a:p>
-            <a:pPr>
-              <a:spcAft>
-                <a:spcPts val="500"/>
-              </a:spcAft>
-              <a:defRPr sz="1900" b="0" i="0">
-                <a:solidFill>
-                  <a:srgbClr val="F5F5F5"/>
-                </a:solidFill>
-                <a:latin typeface="Calibri"/>
-              </a:defRPr>
-            </a:pPr>
-            <a:r>
-              <a:t>유혹에 빠지지 않게 하시고,</a:t>
-            </a:r>
-          </a:p>
-          <a:p>
-            <a:pPr>
-              <a:spcAft>
-                <a:spcPts val="500"/>
-              </a:spcAft>
-              <a:defRPr sz="1900" b="0" i="0">
-                <a:solidFill>
-                  <a:srgbClr val="F5F5F5"/>
-                </a:solidFill>
-                <a:latin typeface="Calibri"/>
-              </a:defRPr>
-            </a:pPr>
-            <a:r>
-              <a:t>악에서도 저희 구하소서</a:t>
-            </a:r>
-          </a:p>
-          <a:p>
-            <a:pPr>
-              <a:spcAft>
-                <a:spcPts val="500"/>
-              </a:spcAft>
-              <a:defRPr sz="1500" b="0" i="1">
-                <a:solidFill>
-                  <a:srgbClr val="DCAA5A"/>
-                </a:solidFill>
-                <a:latin typeface="Calibri"/>
-              </a:defRPr>
-            </a:pPr>
-            <a:r>
-              <a:t>Our Father — Korean (주님의 기도).</a:t>
+            <a:pPr algn="ctr">
+              <a:defRPr sz="4400" b="1" i="0">
+                <a:solidFill>
+                  <a:srgbClr val="F2F0E8"/>
+                </a:solidFill>
+                <a:latin typeface="Calibri"/>
+              </a:defRPr>
+            </a:pPr>
+            <a:r>
+              <a:t>LITURGY OF</a:t>
+            </a:r>
+            <a:br/>
+            <a:r>
+              <a:t>THE EUCHARIST</a:t>
             </a:r>
           </a:p>
         </p:txBody>
@@ -8728,13 +8556,13 @@
               </a:spcBef>
               <a:defRPr sz="1200" b="0" i="0">
                 <a:solidFill>
-                  <a:srgbClr val="DCAA5A"/>
-                </a:solidFill>
-                <a:latin typeface="Calibri"/>
-              </a:defRPr>
-            </a:pPr>
-            <a:r>
-              <a:t>Our Father</a:t>
+                  <a:srgbClr val="F2F0E8"/>
+                </a:solidFill>
+                <a:latin typeface="Calibri"/>
+              </a:defRPr>
+            </a:pPr>
+            <a:r>
+              <a:t>Liturgy of the Eucharist</a:t>
             </a:r>
           </a:p>
         </p:txBody>
@@ -8773,8 +8601,8 @@
         </p:nvSpPr>
         <p:spPr>
           <a:xfrm>
-            <a:off x="685800" y="960120"/>
-            <a:ext cx="16916400" cy="1051560"/>
+            <a:off x="685800" y="914400"/>
+            <a:ext cx="16916400" cy="5943600"/>
           </a:xfrm>
           <a:prstGeom prst="rect">
             <a:avLst/>
@@ -8788,15 +8616,165 @@
           <a:lstStyle/>
           <a:p>
             <a:pPr>
-              <a:defRPr sz="3800" b="1" i="0">
-                <a:solidFill>
-                  <a:srgbClr val="DCAA5A"/>
-                </a:solidFill>
-                <a:latin typeface="Calibri"/>
-              </a:defRPr>
-            </a:pPr>
-            <a:r>
-              <a:t>Eastertide Celebration</a:t>
+              <a:spcAft>
+                <a:spcPts val="300"/>
+              </a:spcAft>
+              <a:defRPr sz="2100" b="1" i="0">
+                <a:solidFill>
+                  <a:srgbClr val="F2F0E8"/>
+                </a:solidFill>
+                <a:latin typeface="Calibri"/>
+              </a:defRPr>
+            </a:pPr>
+            <a:r>
+              <a:t>MASS CELEBRANT:</a:t>
+            </a:r>
+          </a:p>
+          <a:p>
+            <a:pPr>
+              <a:spcAft>
+                <a:spcPts val="300"/>
+              </a:spcAft>
+              <a:defRPr sz="2100" b="0" i="0">
+                <a:solidFill>
+                  <a:srgbClr val="F5F5F5"/>
+                </a:solidFill>
+                <a:latin typeface="Calibri"/>
+              </a:defRPr>
+            </a:pPr>
+            <a:r>
+              <a:t>Hye</a:t>
+            </a:r>
+          </a:p>
+          <a:p>
+            <a:pPr>
+              <a:spcAft>
+                <a:spcPts val="300"/>
+              </a:spcAft>
+              <a:defRPr sz="2100" b="0" i="0">
+                <a:solidFill>
+                  <a:srgbClr val="F5F5F5"/>
+                </a:solidFill>
+                <a:latin typeface="Calibri"/>
+              </a:defRPr>
+            </a:pPr>
+          </a:p>
+          <a:p>
+            <a:pPr>
+              <a:spcAft>
+                <a:spcPts val="300"/>
+              </a:spcAft>
+              <a:defRPr sz="2100" b="0" i="0">
+                <a:solidFill>
+                  <a:srgbClr val="F5F5F5"/>
+                </a:solidFill>
+                <a:latin typeface="Calibri"/>
+              </a:defRPr>
+            </a:pPr>
+            <a:r>
+              <a:t>GWANGJU</a:t>
+            </a:r>
+            <a:br/>
+            <a:r>
+              <a:t>FILIPINO</a:t>
+            </a:r>
+            <a:br/>
+            <a:r>
+              <a:t>CATHOLIC</a:t>
+            </a:r>
+            <a:br/>
+            <a:r>
+              <a:t>COMMUNITY</a:t>
+            </a:r>
+          </a:p>
+          <a:p>
+            <a:pPr>
+              <a:spcAft>
+                <a:spcPts val="300"/>
+              </a:spcAft>
+              <a:defRPr sz="2100" b="0" i="0">
+                <a:solidFill>
+                  <a:srgbClr val="F5F5F5"/>
+                </a:solidFill>
+                <a:latin typeface="Calibri"/>
+              </a:defRPr>
+            </a:pPr>
+          </a:p>
+          <a:p>
+            <a:pPr>
+              <a:spcAft>
+                <a:spcPts val="300"/>
+              </a:spcAft>
+              <a:defRPr sz="2100" b="0" i="0">
+                <a:solidFill>
+                  <a:srgbClr val="F5F5F5"/>
+                </a:solidFill>
+                <a:latin typeface="Calibri"/>
+              </a:defRPr>
+            </a:pPr>
+            <a:r>
+              <a:t>Gospel (John 10:1-10)</a:t>
+            </a:r>
+          </a:p>
+          <a:p>
+            <a:pPr>
+              <a:spcAft>
+                <a:spcPts val="300"/>
+              </a:spcAft>
+              <a:defRPr sz="2100" b="0" i="0">
+                <a:solidFill>
+                  <a:srgbClr val="F5F5F5"/>
+                </a:solidFill>
+                <a:latin typeface="Calibri"/>
+              </a:defRPr>
+            </a:pPr>
+            <a:r>
+              <a:t>“Amen, amen, I say to you, whoever does not enter a sheepfold through the gate but climbs over elsewhere is a thief and a robber.”</a:t>
+            </a:r>
+          </a:p>
+          <a:p>
+            <a:pPr>
+              <a:spcAft>
+                <a:spcPts val="300"/>
+              </a:spcAft>
+              <a:defRPr sz="2100" b="0" i="0">
+                <a:solidFill>
+                  <a:srgbClr val="F5F5F5"/>
+                </a:solidFill>
+                <a:latin typeface="Calibri"/>
+              </a:defRPr>
+            </a:pPr>
+          </a:p>
+          <a:p>
+            <a:pPr>
+              <a:spcAft>
+                <a:spcPts val="300"/>
+              </a:spcAft>
+              <a:defRPr sz="2100" b="0" i="0">
+                <a:solidFill>
+                  <a:srgbClr val="F5F5F5"/>
+                </a:solidFill>
+                <a:latin typeface="Calibri"/>
+              </a:defRPr>
+            </a:pPr>
+            <a:r>
+              <a:t>YEAR A</a:t>
+            </a:r>
+          </a:p>
+          <a:p>
+            <a:pPr>
+              <a:spcAft>
+                <a:spcPts val="300"/>
+              </a:spcAft>
+              <a:defRPr sz="2100" b="0" i="0">
+                <a:solidFill>
+                  <a:srgbClr val="F5F5F5"/>
+                </a:solidFill>
+                <a:latin typeface="Calibri"/>
+              </a:defRPr>
+            </a:pPr>
+            <a:r>
+              <a:t>2026-04-26 · Eastertide</a:t>
             </a:r>
           </a:p>
         </p:txBody>
@@ -8804,176 +8782,6 @@
       <p:sp>
         <p:nvSpPr>
           <p:cNvPr id="3" name="TextBox 2"/>
-          <p:cNvSpPr txBox="1"/>
-          <p:nvPr/>
-        </p:nvSpPr>
-        <p:spPr>
-          <a:xfrm>
-            <a:off x="685800" y="2103120"/>
-            <a:ext cx="16916400" cy="2011680"/>
-          </a:xfrm>
-          <a:prstGeom prst="rect">
-            <a:avLst/>
-          </a:prstGeom>
-          <a:noFill/>
-        </p:spPr>
-        <p:txBody>
-          <a:bodyPr wrap="square" lIns="109728" rIns="109728" tIns="73152" bIns="73152">
-            <a:noAutofit/>
-          </a:bodyPr>
-          <a:lstStyle/>
-          <a:p>
-            <a:pPr>
-              <a:spcAft>
-                <a:spcPts val="200"/>
-              </a:spcAft>
-              <a:defRPr sz="2100" b="1" i="0">
-                <a:solidFill>
-                  <a:srgbClr val="F5F5F5"/>
-                </a:solidFill>
-                <a:latin typeface="Calibri"/>
-              </a:defRPr>
-            </a:pPr>
-            <a:r>
-              <a:t>MASS CELEBRANT: Rev. Fr. Jonrey Lauron, RCJ</a:t>
-            </a:r>
-          </a:p>
-          <a:p>
-            <a:pPr>
-              <a:spcAft>
-                <a:spcPts val="200"/>
-              </a:spcAft>
-              <a:defRPr sz="2100" b="0" i="0">
-                <a:solidFill>
-                  <a:srgbClr val="F5F5F5"/>
-                </a:solidFill>
-                <a:latin typeface="Calibri"/>
-              </a:defRPr>
-            </a:pPr>
-          </a:p>
-          <a:p>
-            <a:pPr>
-              <a:spcAft>
-                <a:spcPts val="200"/>
-              </a:spcAft>
-              <a:defRPr sz="2100" b="0" i="0">
-                <a:solidFill>
-                  <a:srgbClr val="F5F5F5"/>
-                </a:solidFill>
-                <a:latin typeface="Calibri"/>
-              </a:defRPr>
-            </a:pPr>
-            <a:r>
-              <a:t>GWANGJU</a:t>
-            </a:r>
-            <a:br/>
-            <a:r>
-              <a:t>FILIPINO</a:t>
-            </a:r>
-            <a:br/>
-            <a:r>
-              <a:t>CATHOLIC</a:t>
-            </a:r>
-            <a:br/>
-            <a:r>
-              <a:t>COMMUNITY</a:t>
-            </a:r>
-          </a:p>
-          <a:p>
-            <a:pPr>
-              <a:spcAft>
-                <a:spcPts val="200"/>
-              </a:spcAft>
-              <a:defRPr sz="2100" b="0" i="0">
-                <a:solidFill>
-                  <a:srgbClr val="F5F5F5"/>
-                </a:solidFill>
-                <a:latin typeface="Calibri"/>
-              </a:defRPr>
-            </a:pPr>
-          </a:p>
-          <a:p>
-            <a:pPr>
-              <a:spcAft>
-                <a:spcPts val="200"/>
-              </a:spcAft>
-              <a:defRPr sz="2100" b="0" i="0">
-                <a:solidFill>
-                  <a:srgbClr val="F5F5F5"/>
-                </a:solidFill>
-                <a:latin typeface="Calibri"/>
-              </a:defRPr>
-            </a:pPr>
-            <a:r>
-              <a:t>Gospel (John 14:15-21)</a:t>
-            </a:r>
-          </a:p>
-          <a:p>
-            <a:pPr>
-              <a:spcAft>
-                <a:spcPts val="200"/>
-              </a:spcAft>
-              <a:defRPr sz="2100" b="0" i="0">
-                <a:solidFill>
-                  <a:srgbClr val="F5F5F5"/>
-                </a:solidFill>
-                <a:latin typeface="Calibri"/>
-              </a:defRPr>
-            </a:pPr>
-            <a:r>
-              <a:t>“If you love me, you will keep my commandments.”</a:t>
-            </a:r>
-          </a:p>
-          <a:p>
-            <a:pPr>
-              <a:spcAft>
-                <a:spcPts val="200"/>
-              </a:spcAft>
-              <a:defRPr sz="2100" b="0" i="0">
-                <a:solidFill>
-                  <a:srgbClr val="F5F5F5"/>
-                </a:solidFill>
-                <a:latin typeface="Calibri"/>
-              </a:defRPr>
-            </a:pPr>
-          </a:p>
-          <a:p>
-            <a:pPr>
-              <a:spcAft>
-                <a:spcPts val="200"/>
-              </a:spcAft>
-              <a:defRPr sz="2100" b="0" i="0">
-                <a:solidFill>
-                  <a:srgbClr val="F5F5F5"/>
-                </a:solidFill>
-                <a:latin typeface="Calibri"/>
-              </a:defRPr>
-            </a:pPr>
-            <a:r>
-              <a:t>YEAR A</a:t>
-            </a:r>
-          </a:p>
-          <a:p>
-            <a:pPr>
-              <a:spcAft>
-                <a:spcPts val="200"/>
-              </a:spcAft>
-              <a:defRPr sz="2100" b="0" i="0">
-                <a:solidFill>
-                  <a:srgbClr val="F5F5F5"/>
-                </a:solidFill>
-                <a:latin typeface="Calibri"/>
-              </a:defRPr>
-            </a:pPr>
-            <a:r>
-              <a:t>2026-05-10 · Eastertide</a:t>
-            </a:r>
-          </a:p>
-        </p:txBody>
-      </p:sp>
-      <p:sp>
-        <p:nvSpPr>
-          <p:cNvPr id="4" name="TextBox 3"/>
           <p:cNvSpPr txBox="1"/>
           <p:nvPr/>
         </p:nvSpPr>
@@ -9012,7 +8820,7 @@
               </a:spcBef>
               <a:defRPr sz="1200" b="0" i="0">
                 <a:solidFill>
-                  <a:srgbClr val="DCAA5A"/>
+                  <a:srgbClr val="F2F0E8"/>
                 </a:solidFill>
                 <a:latin typeface="Calibri"/>
               </a:defRPr>
@@ -9058,7 +8866,7 @@
         <p:spPr>
           <a:xfrm>
             <a:off x="685800" y="457200"/>
-            <a:ext cx="16916400" cy="8778240"/>
+            <a:ext cx="16916400" cy="8823960"/>
           </a:xfrm>
           <a:prstGeom prst="rect">
             <a:avLst/>
@@ -9075,15 +8883,15 @@
               <a:spcAft>
                 <a:spcPts val="500"/>
               </a:spcAft>
-              <a:defRPr sz="1900" b="1" i="0">
-                <a:solidFill>
-                  <a:srgbClr val="F5F5F5"/>
-                </a:solidFill>
-                <a:latin typeface="Calibri"/>
-              </a:defRPr>
-            </a:pPr>
-            <a:r>
-              <a:t>영광이며 사랑이신 우리 주님께</a:t>
+              <a:defRPr sz="2000" b="1" i="0">
+                <a:solidFill>
+                  <a:srgbClr val="F5F5F5"/>
+                </a:solidFill>
+                <a:latin typeface="Calibri"/>
+              </a:defRPr>
+            </a:pPr>
+            <a:r>
+              <a:t>Amen.</a:t>
             </a:r>
           </a:p>
           <a:p>
@@ -9091,31 +8899,15 @@
               <a:spcAft>
                 <a:spcPts val="500"/>
               </a:spcAft>
-              <a:defRPr sz="1900" b="0" i="0">
-                <a:solidFill>
-                  <a:srgbClr val="F5F5F5"/>
-                </a:solidFill>
-                <a:latin typeface="Calibri"/>
-              </a:defRPr>
-            </a:pPr>
-            <a:r>
-              <a:t>처음과 같이 이제와 항상 영원히</a:t>
-            </a:r>
-          </a:p>
-          <a:p>
-            <a:pPr>
-              <a:spcAft>
-                <a:spcPts val="500"/>
-              </a:spcAft>
               <a:defRPr sz="1500" b="0" i="1">
                 <a:solidFill>
-                  <a:srgbClr val="DCAA5A"/>
-                </a:solidFill>
-                <a:latin typeface="Calibri"/>
-              </a:defRPr>
-            </a:pPr>
-            <a:r>
-              <a:t>Doxology in Korean as in GFCC practice.</a:t>
+                  <a:srgbClr val="F2F0E8"/>
+                </a:solidFill>
+                <a:latin typeface="Calibri"/>
+              </a:defRPr>
+            </a:pPr>
+            <a:r>
+              <a:t>Great Amen — repeat as customary.</a:t>
             </a:r>
           </a:p>
         </p:txBody>
@@ -9161,13 +8953,13 @@
               </a:spcBef>
               <a:defRPr sz="1200" b="0" i="0">
                 <a:solidFill>
-                  <a:srgbClr val="DCAA5A"/>
-                </a:solidFill>
-                <a:latin typeface="Calibri"/>
-              </a:defRPr>
-            </a:pPr>
-            <a:r>
-              <a:t>Our Father</a:t>
+                  <a:srgbClr val="F2F0E8"/>
+                </a:solidFill>
+                <a:latin typeface="Calibri"/>
+              </a:defRPr>
+            </a:pPr>
+            <a:r>
+              <a:t>Great Amen</a:t>
             </a:r>
           </a:p>
         </p:txBody>
@@ -9206,8 +8998,8 @@
         </p:nvSpPr>
         <p:spPr>
           <a:xfrm>
-            <a:off x="685800" y="960120"/>
-            <a:ext cx="16916400" cy="1051560"/>
+            <a:off x="685800" y="457200"/>
+            <a:ext cx="16916400" cy="8823960"/>
           </a:xfrm>
           <a:prstGeom prst="rect">
             <a:avLst/>
@@ -9221,15 +9013,146 @@
           <a:lstStyle/>
           <a:p>
             <a:pPr>
-              <a:defRPr sz="3800" b="1" i="0">
-                <a:solidFill>
-                  <a:srgbClr val="DCAA5A"/>
-                </a:solidFill>
-                <a:latin typeface="Calibri"/>
-              </a:defRPr>
-            </a:pPr>
-            <a:r>
-              <a:t>Eastertide Celebration</a:t>
+              <a:spcAft>
+                <a:spcPts val="500"/>
+              </a:spcAft>
+              <a:defRPr sz="1900" b="1" i="0">
+                <a:solidFill>
+                  <a:srgbClr val="F5F5F5"/>
+                </a:solidFill>
+                <a:latin typeface="Calibri"/>
+              </a:defRPr>
+            </a:pPr>
+            <a:r>
+              <a:t>주님의 기도</a:t>
+            </a:r>
+          </a:p>
+          <a:p>
+            <a:pPr>
+              <a:spcAft>
+                <a:spcPts val="500"/>
+              </a:spcAft>
+              <a:defRPr sz="1900" b="0" i="0">
+                <a:solidFill>
+                  <a:srgbClr val="F5F5F5"/>
+                </a:solidFill>
+                <a:latin typeface="Calibri"/>
+              </a:defRPr>
+            </a:pPr>
+            <a:r>
+              <a:t>하늘에 계신 우리 아버지,</a:t>
+            </a:r>
+          </a:p>
+          <a:p>
+            <a:pPr>
+              <a:spcAft>
+                <a:spcPts val="500"/>
+              </a:spcAft>
+              <a:defRPr sz="1900" b="0" i="0">
+                <a:solidFill>
+                  <a:srgbClr val="F5F5F5"/>
+                </a:solidFill>
+                <a:latin typeface="Calibri"/>
+              </a:defRPr>
+            </a:pPr>
+            <a:r>
+              <a:t>아버지 이름 빛나시며</a:t>
+            </a:r>
+          </a:p>
+          <a:p>
+            <a:pPr>
+              <a:spcAft>
+                <a:spcPts val="500"/>
+              </a:spcAft>
+              <a:defRPr sz="1900" b="0" i="0">
+                <a:solidFill>
+                  <a:srgbClr val="F5F5F5"/>
+                </a:solidFill>
+                <a:latin typeface="Calibri"/>
+              </a:defRPr>
+            </a:pPr>
+            <a:r>
+              <a:t>아버지 뜻이 하늘에서와 같이 땅에서도 이루어지소서</a:t>
+            </a:r>
+          </a:p>
+          <a:p>
+            <a:pPr>
+              <a:spcAft>
+                <a:spcPts val="500"/>
+              </a:spcAft>
+              <a:defRPr sz="1900" b="0" i="0">
+                <a:solidFill>
+                  <a:srgbClr val="F5F5F5"/>
+                </a:solidFill>
+                <a:latin typeface="Calibri"/>
+              </a:defRPr>
+            </a:pPr>
+            <a:r>
+              <a:t>저희에게 일용할 양식 주시고,</a:t>
+            </a:r>
+          </a:p>
+          <a:p>
+            <a:pPr>
+              <a:spcAft>
+                <a:spcPts val="500"/>
+              </a:spcAft>
+              <a:defRPr sz="1900" b="0" i="0">
+                <a:solidFill>
+                  <a:srgbClr val="F5F5F5"/>
+                </a:solidFill>
+                <a:latin typeface="Calibri"/>
+              </a:defRPr>
+            </a:pPr>
+            <a:r>
+              <a:t>저희의 죄를 용서하시고</a:t>
+            </a:r>
+          </a:p>
+          <a:p>
+            <a:pPr>
+              <a:spcAft>
+                <a:spcPts val="500"/>
+              </a:spcAft>
+              <a:defRPr sz="1900" b="0" i="0">
+                <a:solidFill>
+                  <a:srgbClr val="F5F5F5"/>
+                </a:solidFill>
+                <a:latin typeface="Calibri"/>
+              </a:defRPr>
+            </a:pPr>
+            <a:r>
+              <a:t>유혹에 빠지지 않게 하시고,</a:t>
+            </a:r>
+          </a:p>
+          <a:p>
+            <a:pPr>
+              <a:spcAft>
+                <a:spcPts val="500"/>
+              </a:spcAft>
+              <a:defRPr sz="1900" b="0" i="0">
+                <a:solidFill>
+                  <a:srgbClr val="F5F5F5"/>
+                </a:solidFill>
+                <a:latin typeface="Calibri"/>
+              </a:defRPr>
+            </a:pPr>
+            <a:r>
+              <a:t>악에서도 저희 구하소서</a:t>
+            </a:r>
+          </a:p>
+          <a:p>
+            <a:pPr>
+              <a:spcAft>
+                <a:spcPts val="500"/>
+              </a:spcAft>
+              <a:defRPr sz="1500" b="0" i="1">
+                <a:solidFill>
+                  <a:srgbClr val="F2F0E8"/>
+                </a:solidFill>
+                <a:latin typeface="Calibri"/>
+              </a:defRPr>
+            </a:pPr>
+            <a:r>
+              <a:t>Our Father — Korean (주님의 기도).</a:t>
             </a:r>
           </a:p>
         </p:txBody>
@@ -9237,176 +9160,6 @@
       <p:sp>
         <p:nvSpPr>
           <p:cNvPr id="3" name="TextBox 2"/>
-          <p:cNvSpPr txBox="1"/>
-          <p:nvPr/>
-        </p:nvSpPr>
-        <p:spPr>
-          <a:xfrm>
-            <a:off x="685800" y="2103120"/>
-            <a:ext cx="16916400" cy="2011680"/>
-          </a:xfrm>
-          <a:prstGeom prst="rect">
-            <a:avLst/>
-          </a:prstGeom>
-          <a:noFill/>
-        </p:spPr>
-        <p:txBody>
-          <a:bodyPr wrap="square" lIns="109728" rIns="109728" tIns="73152" bIns="73152">
-            <a:noAutofit/>
-          </a:bodyPr>
-          <a:lstStyle/>
-          <a:p>
-            <a:pPr>
-              <a:spcAft>
-                <a:spcPts val="200"/>
-              </a:spcAft>
-              <a:defRPr sz="2100" b="1" i="0">
-                <a:solidFill>
-                  <a:srgbClr val="F5F5F5"/>
-                </a:solidFill>
-                <a:latin typeface="Calibri"/>
-              </a:defRPr>
-            </a:pPr>
-            <a:r>
-              <a:t>MASS CELEBRANT: Rev. Fr. Jonrey Lauron, RCJ</a:t>
-            </a:r>
-          </a:p>
-          <a:p>
-            <a:pPr>
-              <a:spcAft>
-                <a:spcPts val="200"/>
-              </a:spcAft>
-              <a:defRPr sz="2100" b="0" i="0">
-                <a:solidFill>
-                  <a:srgbClr val="F5F5F5"/>
-                </a:solidFill>
-                <a:latin typeface="Calibri"/>
-              </a:defRPr>
-            </a:pPr>
-          </a:p>
-          <a:p>
-            <a:pPr>
-              <a:spcAft>
-                <a:spcPts val="200"/>
-              </a:spcAft>
-              <a:defRPr sz="2100" b="0" i="0">
-                <a:solidFill>
-                  <a:srgbClr val="F5F5F5"/>
-                </a:solidFill>
-                <a:latin typeface="Calibri"/>
-              </a:defRPr>
-            </a:pPr>
-            <a:r>
-              <a:t>GWANGJU</a:t>
-            </a:r>
-            <a:br/>
-            <a:r>
-              <a:t>FILIPINO</a:t>
-            </a:r>
-            <a:br/>
-            <a:r>
-              <a:t>CATHOLIC</a:t>
-            </a:r>
-            <a:br/>
-            <a:r>
-              <a:t>COMMUNITY</a:t>
-            </a:r>
-          </a:p>
-          <a:p>
-            <a:pPr>
-              <a:spcAft>
-                <a:spcPts val="200"/>
-              </a:spcAft>
-              <a:defRPr sz="2100" b="0" i="0">
-                <a:solidFill>
-                  <a:srgbClr val="F5F5F5"/>
-                </a:solidFill>
-                <a:latin typeface="Calibri"/>
-              </a:defRPr>
-            </a:pPr>
-          </a:p>
-          <a:p>
-            <a:pPr>
-              <a:spcAft>
-                <a:spcPts val="200"/>
-              </a:spcAft>
-              <a:defRPr sz="2100" b="0" i="0">
-                <a:solidFill>
-                  <a:srgbClr val="F5F5F5"/>
-                </a:solidFill>
-                <a:latin typeface="Calibri"/>
-              </a:defRPr>
-            </a:pPr>
-            <a:r>
-              <a:t>Gospel (John 14:15-21)</a:t>
-            </a:r>
-          </a:p>
-          <a:p>
-            <a:pPr>
-              <a:spcAft>
-                <a:spcPts val="200"/>
-              </a:spcAft>
-              <a:defRPr sz="2100" b="0" i="0">
-                <a:solidFill>
-                  <a:srgbClr val="F5F5F5"/>
-                </a:solidFill>
-                <a:latin typeface="Calibri"/>
-              </a:defRPr>
-            </a:pPr>
-            <a:r>
-              <a:t>“If you love me, you will keep my commandments.”</a:t>
-            </a:r>
-          </a:p>
-          <a:p>
-            <a:pPr>
-              <a:spcAft>
-                <a:spcPts val="200"/>
-              </a:spcAft>
-              <a:defRPr sz="2100" b="0" i="0">
-                <a:solidFill>
-                  <a:srgbClr val="F5F5F5"/>
-                </a:solidFill>
-                <a:latin typeface="Calibri"/>
-              </a:defRPr>
-            </a:pPr>
-          </a:p>
-          <a:p>
-            <a:pPr>
-              <a:spcAft>
-                <a:spcPts val="200"/>
-              </a:spcAft>
-              <a:defRPr sz="2100" b="0" i="0">
-                <a:solidFill>
-                  <a:srgbClr val="F5F5F5"/>
-                </a:solidFill>
-                <a:latin typeface="Calibri"/>
-              </a:defRPr>
-            </a:pPr>
-            <a:r>
-              <a:t>YEAR A</a:t>
-            </a:r>
-          </a:p>
-          <a:p>
-            <a:pPr>
-              <a:spcAft>
-                <a:spcPts val="200"/>
-              </a:spcAft>
-              <a:defRPr sz="2100" b="0" i="0">
-                <a:solidFill>
-                  <a:srgbClr val="F5F5F5"/>
-                </a:solidFill>
-                <a:latin typeface="Calibri"/>
-              </a:defRPr>
-            </a:pPr>
-            <a:r>
-              <a:t>2026-05-10 · Eastertide</a:t>
-            </a:r>
-          </a:p>
-        </p:txBody>
-      </p:sp>
-      <p:sp>
-        <p:nvSpPr>
-          <p:cNvPr id="4" name="TextBox 3"/>
           <p:cNvSpPr txBox="1"/>
           <p:nvPr/>
         </p:nvSpPr>
@@ -9445,13 +9198,13 @@
               </a:spcBef>
               <a:defRPr sz="1200" b="0" i="0">
                 <a:solidFill>
-                  <a:srgbClr val="DCAA5A"/>
-                </a:solidFill>
-                <a:latin typeface="Calibri"/>
-              </a:defRPr>
-            </a:pPr>
-            <a:r>
-              <a:t>Mass poster / divider</a:t>
+                  <a:srgbClr val="F2F0E8"/>
+                </a:solidFill>
+                <a:latin typeface="Calibri"/>
+              </a:defRPr>
+            </a:pPr>
+            <a:r>
+              <a:t>Our Father</a:t>
             </a:r>
           </a:p>
         </p:txBody>
@@ -9491,7 +9244,7 @@
         <p:spPr>
           <a:xfrm>
             <a:off x="685800" y="457200"/>
-            <a:ext cx="16916400" cy="8778240"/>
+            <a:ext cx="16916400" cy="8823960"/>
           </a:xfrm>
           <a:prstGeom prst="rect">
             <a:avLst/>
@@ -9508,15 +9261,15 @@
               <a:spcAft>
                 <a:spcPts val="500"/>
               </a:spcAft>
-              <a:defRPr sz="2000" b="1" i="0">
-                <a:solidFill>
-                  <a:srgbClr val="DCAA5A"/>
-                </a:solidFill>
-                <a:latin typeface="Calibri"/>
-              </a:defRPr>
-            </a:pPr>
-            <a:r>
-              <a:t>Deliver us, Lord, we pray, from every evil…</a:t>
+              <a:defRPr sz="1900" b="1" i="0">
+                <a:solidFill>
+                  <a:srgbClr val="F5F5F5"/>
+                </a:solidFill>
+                <a:latin typeface="Calibri"/>
+              </a:defRPr>
+            </a:pPr>
+            <a:r>
+              <a:t>영광이며 사랑이신 우리 주님께</a:t>
             </a:r>
           </a:p>
           <a:p>
@@ -9524,15 +9277,31 @@
               <a:spcAft>
                 <a:spcPts val="500"/>
               </a:spcAft>
-              <a:defRPr sz="2000" b="1" i="0">
-                <a:solidFill>
-                  <a:srgbClr val="F5F5F5"/>
-                </a:solidFill>
-                <a:latin typeface="Calibri"/>
-              </a:defRPr>
-            </a:pPr>
-            <a:r>
-              <a:t>For the kingdom, the power, and the glory are yours, now and for ever. Amen.</a:t>
+              <a:defRPr sz="1900" b="0" i="0">
+                <a:solidFill>
+                  <a:srgbClr val="F5F5F5"/>
+                </a:solidFill>
+                <a:latin typeface="Calibri"/>
+              </a:defRPr>
+            </a:pPr>
+            <a:r>
+              <a:t>처음과 같이 이제와 항상 영원히</a:t>
+            </a:r>
+          </a:p>
+          <a:p>
+            <a:pPr>
+              <a:spcAft>
+                <a:spcPts val="500"/>
+              </a:spcAft>
+              <a:defRPr sz="1500" b="0" i="1">
+                <a:solidFill>
+                  <a:srgbClr val="F2F0E8"/>
+                </a:solidFill>
+                <a:latin typeface="Calibri"/>
+              </a:defRPr>
+            </a:pPr>
+            <a:r>
+              <a:t>Doxology in Korean as in GFCC practice.</a:t>
             </a:r>
           </a:p>
         </p:txBody>
@@ -9578,13 +9347,13 @@
               </a:spcBef>
               <a:defRPr sz="1200" b="0" i="0">
                 <a:solidFill>
-                  <a:srgbClr val="DCAA5A"/>
-                </a:solidFill>
-                <a:latin typeface="Calibri"/>
-              </a:defRPr>
-            </a:pPr>
-            <a:r>
-              <a:t>The Communion Rite</a:t>
+                  <a:srgbClr val="F2F0E8"/>
+                </a:solidFill>
+                <a:latin typeface="Calibri"/>
+              </a:defRPr>
+            </a:pPr>
+            <a:r>
+              <a:t>Our Father</a:t>
             </a:r>
           </a:p>
         </p:txBody>
@@ -9623,8 +9392,8 @@
         </p:nvSpPr>
         <p:spPr>
           <a:xfrm>
-            <a:off x="685800" y="457200"/>
-            <a:ext cx="16916400" cy="8778240"/>
+            <a:off x="685800" y="914400"/>
+            <a:ext cx="16916400" cy="5943600"/>
           </a:xfrm>
           <a:prstGeom prst="rect">
             <a:avLst/>
@@ -9639,49 +9408,164 @@
           <a:p>
             <a:pPr>
               <a:spcAft>
-                <a:spcPts val="500"/>
-              </a:spcAft>
-              <a:defRPr sz="2000" b="1" i="0">
-                <a:solidFill>
-                  <a:srgbClr val="DCAA5A"/>
-                </a:solidFill>
-                <a:latin typeface="Calibri"/>
-              </a:defRPr>
-            </a:pPr>
-            <a:r>
-              <a:t>The peace of the Lord be with you always.</a:t>
-            </a:r>
-          </a:p>
-          <a:p>
-            <a:pPr>
-              <a:spcAft>
-                <a:spcPts val="500"/>
-              </a:spcAft>
-              <a:defRPr sz="2000" b="1" i="0">
-                <a:solidFill>
-                  <a:srgbClr val="F5F5F5"/>
-                </a:solidFill>
-                <a:latin typeface="Calibri"/>
-              </a:defRPr>
-            </a:pPr>
-            <a:r>
-              <a:t>And with your spirit.</a:t>
-            </a:r>
-          </a:p>
-          <a:p>
-            <a:pPr>
-              <a:spcAft>
-                <a:spcPts val="500"/>
-              </a:spcAft>
-              <a:defRPr sz="1500" b="0" i="1">
-                <a:solidFill>
-                  <a:srgbClr val="DCAA5A"/>
-                </a:solidFill>
-                <a:latin typeface="Calibri"/>
-              </a:defRPr>
-            </a:pPr>
-            <a:r>
-              <a:t>Let us offer each other the sign of peace.</a:t>
+                <a:spcPts val="300"/>
+              </a:spcAft>
+              <a:defRPr sz="2100" b="1" i="0">
+                <a:solidFill>
+                  <a:srgbClr val="F2F0E8"/>
+                </a:solidFill>
+                <a:latin typeface="Calibri"/>
+              </a:defRPr>
+            </a:pPr>
+            <a:r>
+              <a:t>MASS CELEBRANT:</a:t>
+            </a:r>
+          </a:p>
+          <a:p>
+            <a:pPr>
+              <a:spcAft>
+                <a:spcPts val="300"/>
+              </a:spcAft>
+              <a:defRPr sz="2100" b="0" i="0">
+                <a:solidFill>
+                  <a:srgbClr val="F5F5F5"/>
+                </a:solidFill>
+                <a:latin typeface="Calibri"/>
+              </a:defRPr>
+            </a:pPr>
+            <a:r>
+              <a:t>Hye</a:t>
+            </a:r>
+          </a:p>
+          <a:p>
+            <a:pPr>
+              <a:spcAft>
+                <a:spcPts val="300"/>
+              </a:spcAft>
+              <a:defRPr sz="2100" b="0" i="0">
+                <a:solidFill>
+                  <a:srgbClr val="F5F5F5"/>
+                </a:solidFill>
+                <a:latin typeface="Calibri"/>
+              </a:defRPr>
+            </a:pPr>
+          </a:p>
+          <a:p>
+            <a:pPr>
+              <a:spcAft>
+                <a:spcPts val="300"/>
+              </a:spcAft>
+              <a:defRPr sz="2100" b="0" i="0">
+                <a:solidFill>
+                  <a:srgbClr val="F5F5F5"/>
+                </a:solidFill>
+                <a:latin typeface="Calibri"/>
+              </a:defRPr>
+            </a:pPr>
+            <a:r>
+              <a:t>GWANGJU</a:t>
+            </a:r>
+            <a:br/>
+            <a:r>
+              <a:t>FILIPINO</a:t>
+            </a:r>
+            <a:br/>
+            <a:r>
+              <a:t>CATHOLIC</a:t>
+            </a:r>
+            <a:br/>
+            <a:r>
+              <a:t>COMMUNITY</a:t>
+            </a:r>
+          </a:p>
+          <a:p>
+            <a:pPr>
+              <a:spcAft>
+                <a:spcPts val="300"/>
+              </a:spcAft>
+              <a:defRPr sz="2100" b="0" i="0">
+                <a:solidFill>
+                  <a:srgbClr val="F5F5F5"/>
+                </a:solidFill>
+                <a:latin typeface="Calibri"/>
+              </a:defRPr>
+            </a:pPr>
+          </a:p>
+          <a:p>
+            <a:pPr>
+              <a:spcAft>
+                <a:spcPts val="300"/>
+              </a:spcAft>
+              <a:defRPr sz="2100" b="0" i="0">
+                <a:solidFill>
+                  <a:srgbClr val="F5F5F5"/>
+                </a:solidFill>
+                <a:latin typeface="Calibri"/>
+              </a:defRPr>
+            </a:pPr>
+            <a:r>
+              <a:t>Gospel (John 10:1-10)</a:t>
+            </a:r>
+          </a:p>
+          <a:p>
+            <a:pPr>
+              <a:spcAft>
+                <a:spcPts val="300"/>
+              </a:spcAft>
+              <a:defRPr sz="2100" b="0" i="0">
+                <a:solidFill>
+                  <a:srgbClr val="F5F5F5"/>
+                </a:solidFill>
+                <a:latin typeface="Calibri"/>
+              </a:defRPr>
+            </a:pPr>
+            <a:r>
+              <a:t>“Amen, amen, I say to you, whoever does not enter a sheepfold through the gate but climbs over elsewhere is a thief and a robber.”</a:t>
+            </a:r>
+          </a:p>
+          <a:p>
+            <a:pPr>
+              <a:spcAft>
+                <a:spcPts val="300"/>
+              </a:spcAft>
+              <a:defRPr sz="2100" b="0" i="0">
+                <a:solidFill>
+                  <a:srgbClr val="F5F5F5"/>
+                </a:solidFill>
+                <a:latin typeface="Calibri"/>
+              </a:defRPr>
+            </a:pPr>
+          </a:p>
+          <a:p>
+            <a:pPr>
+              <a:spcAft>
+                <a:spcPts val="300"/>
+              </a:spcAft>
+              <a:defRPr sz="2100" b="0" i="0">
+                <a:solidFill>
+                  <a:srgbClr val="F5F5F5"/>
+                </a:solidFill>
+                <a:latin typeface="Calibri"/>
+              </a:defRPr>
+            </a:pPr>
+            <a:r>
+              <a:t>YEAR A</a:t>
+            </a:r>
+          </a:p>
+          <a:p>
+            <a:pPr>
+              <a:spcAft>
+                <a:spcPts val="300"/>
+              </a:spcAft>
+              <a:defRPr sz="2100" b="0" i="0">
+                <a:solidFill>
+                  <a:srgbClr val="F5F5F5"/>
+                </a:solidFill>
+                <a:latin typeface="Calibri"/>
+              </a:defRPr>
+            </a:pPr>
+            <a:r>
+              <a:t>2026-04-26 · Eastertide</a:t>
             </a:r>
           </a:p>
         </p:txBody>
@@ -9727,13 +9611,13 @@
               </a:spcBef>
               <a:defRPr sz="1200" b="0" i="0">
                 <a:solidFill>
-                  <a:srgbClr val="DCAA5A"/>
-                </a:solidFill>
-                <a:latin typeface="Calibri"/>
-              </a:defRPr>
-            </a:pPr>
-            <a:r>
-              <a:t>Sign of Peace</a:t>
+                  <a:srgbClr val="F2F0E8"/>
+                </a:solidFill>
+                <a:latin typeface="Calibri"/>
+              </a:defRPr>
+            </a:pPr>
+            <a:r>
+              <a:t>Mass poster / divider</a:t>
             </a:r>
           </a:p>
         </p:txBody>
@@ -9773,7 +9657,7 @@
         <p:spPr>
           <a:xfrm>
             <a:off x="685800" y="457200"/>
-            <a:ext cx="16916400" cy="8778240"/>
+            <a:ext cx="16916400" cy="8823960"/>
           </a:xfrm>
           <a:prstGeom prst="rect">
             <a:avLst/>
@@ -9790,15 +9674,15 @@
               <a:spcAft>
                 <a:spcPts val="500"/>
               </a:spcAft>
-              <a:defRPr sz="1900" b="1" i="0">
-                <a:solidFill>
-                  <a:srgbClr val="F5F5F5"/>
-                </a:solidFill>
-                <a:latin typeface="Calibri"/>
-              </a:defRPr>
-            </a:pPr>
-            <a:r>
-              <a:t>Lamb of God, you take away the sins of the world: have mercy on us…</a:t>
+              <a:defRPr sz="2000" b="1" i="0">
+                <a:solidFill>
+                  <a:srgbClr val="F2F0E8"/>
+                </a:solidFill>
+                <a:latin typeface="Calibri"/>
+              </a:defRPr>
+            </a:pPr>
+            <a:r>
+              <a:t>Deliver us, Lord, we pray, from every evil…</a:t>
             </a:r>
           </a:p>
           <a:p>
@@ -9806,15 +9690,15 @@
               <a:spcAft>
                 <a:spcPts val="500"/>
               </a:spcAft>
-              <a:defRPr sz="1900" b="0" i="0">
-                <a:solidFill>
-                  <a:srgbClr val="F5F5F5"/>
-                </a:solidFill>
-                <a:latin typeface="Calibri"/>
-              </a:defRPr>
-            </a:pPr>
-            <a:r>
-              <a:t>Lamb of God… grant us peace.</a:t>
+              <a:defRPr sz="2000" b="1" i="0">
+                <a:solidFill>
+                  <a:srgbClr val="F5F5F5"/>
+                </a:solidFill>
+                <a:latin typeface="Calibri"/>
+              </a:defRPr>
+            </a:pPr>
+            <a:r>
+              <a:t>For the kingdom, the power, and the glory are yours, now and for ever. Amen.</a:t>
             </a:r>
           </a:p>
         </p:txBody>
@@ -9860,13 +9744,13 @@
               </a:spcBef>
               <a:defRPr sz="1200" b="0" i="0">
                 <a:solidFill>
-                  <a:srgbClr val="DCAA5A"/>
-                </a:solidFill>
-                <a:latin typeface="Calibri"/>
-              </a:defRPr>
-            </a:pPr>
-            <a:r>
-              <a:t>Lamb of God</a:t>
+                  <a:srgbClr val="F2F0E8"/>
+                </a:solidFill>
+                <a:latin typeface="Calibri"/>
+              </a:defRPr>
+            </a:pPr>
+            <a:r>
+              <a:t>The Communion Rite</a:t>
             </a:r>
           </a:p>
         </p:txBody>
@@ -9905,8 +9789,8 @@
         </p:nvSpPr>
         <p:spPr>
           <a:xfrm>
-            <a:off x="685800" y="457200"/>
-            <a:ext cx="16916400" cy="8778240"/>
+            <a:off x="685800" y="914400"/>
+            <a:ext cx="16916400" cy="5943600"/>
           </a:xfrm>
           <a:prstGeom prst="rect">
             <a:avLst/>
@@ -9921,33 +9805,164 @@
           <a:p>
             <a:pPr>
               <a:spcAft>
-                <a:spcPts val="500"/>
-              </a:spcAft>
-              <a:defRPr sz="2000" b="1" i="0">
-                <a:solidFill>
-                  <a:srgbClr val="DCAA5A"/>
-                </a:solidFill>
-                <a:latin typeface="Calibri"/>
-              </a:defRPr>
-            </a:pPr>
-            <a:r>
-              <a:t>Behold the Lamb of God…</a:t>
-            </a:r>
-          </a:p>
-          <a:p>
-            <a:pPr>
-              <a:spcAft>
-                <a:spcPts val="500"/>
-              </a:spcAft>
-              <a:defRPr sz="2000" b="1" i="0">
-                <a:solidFill>
-                  <a:srgbClr val="F5F5F5"/>
-                </a:solidFill>
-                <a:latin typeface="Calibri"/>
-              </a:defRPr>
-            </a:pPr>
-            <a:r>
-              <a:t>Lord, I am not worthy that you should enter under my roof, but only say the word and my soul shall be healed.</a:t>
+                <a:spcPts val="300"/>
+              </a:spcAft>
+              <a:defRPr sz="2100" b="1" i="0">
+                <a:solidFill>
+                  <a:srgbClr val="F2F0E8"/>
+                </a:solidFill>
+                <a:latin typeface="Calibri"/>
+              </a:defRPr>
+            </a:pPr>
+            <a:r>
+              <a:t>MASS CELEBRANT:</a:t>
+            </a:r>
+          </a:p>
+          <a:p>
+            <a:pPr>
+              <a:spcAft>
+                <a:spcPts val="300"/>
+              </a:spcAft>
+              <a:defRPr sz="2100" b="0" i="0">
+                <a:solidFill>
+                  <a:srgbClr val="F5F5F5"/>
+                </a:solidFill>
+                <a:latin typeface="Calibri"/>
+              </a:defRPr>
+            </a:pPr>
+            <a:r>
+              <a:t>Hye</a:t>
+            </a:r>
+          </a:p>
+          <a:p>
+            <a:pPr>
+              <a:spcAft>
+                <a:spcPts val="300"/>
+              </a:spcAft>
+              <a:defRPr sz="2100" b="0" i="0">
+                <a:solidFill>
+                  <a:srgbClr val="F5F5F5"/>
+                </a:solidFill>
+                <a:latin typeface="Calibri"/>
+              </a:defRPr>
+            </a:pPr>
+          </a:p>
+          <a:p>
+            <a:pPr>
+              <a:spcAft>
+                <a:spcPts val="300"/>
+              </a:spcAft>
+              <a:defRPr sz="2100" b="0" i="0">
+                <a:solidFill>
+                  <a:srgbClr val="F5F5F5"/>
+                </a:solidFill>
+                <a:latin typeface="Calibri"/>
+              </a:defRPr>
+            </a:pPr>
+            <a:r>
+              <a:t>GWANGJU</a:t>
+            </a:r>
+            <a:br/>
+            <a:r>
+              <a:t>FILIPINO</a:t>
+            </a:r>
+            <a:br/>
+            <a:r>
+              <a:t>CATHOLIC</a:t>
+            </a:r>
+            <a:br/>
+            <a:r>
+              <a:t>COMMUNITY</a:t>
+            </a:r>
+          </a:p>
+          <a:p>
+            <a:pPr>
+              <a:spcAft>
+                <a:spcPts val="300"/>
+              </a:spcAft>
+              <a:defRPr sz="2100" b="0" i="0">
+                <a:solidFill>
+                  <a:srgbClr val="F5F5F5"/>
+                </a:solidFill>
+                <a:latin typeface="Calibri"/>
+              </a:defRPr>
+            </a:pPr>
+          </a:p>
+          <a:p>
+            <a:pPr>
+              <a:spcAft>
+                <a:spcPts val="300"/>
+              </a:spcAft>
+              <a:defRPr sz="2100" b="0" i="0">
+                <a:solidFill>
+                  <a:srgbClr val="F5F5F5"/>
+                </a:solidFill>
+                <a:latin typeface="Calibri"/>
+              </a:defRPr>
+            </a:pPr>
+            <a:r>
+              <a:t>Gospel (John 10:1-10)</a:t>
+            </a:r>
+          </a:p>
+          <a:p>
+            <a:pPr>
+              <a:spcAft>
+                <a:spcPts val="300"/>
+              </a:spcAft>
+              <a:defRPr sz="2100" b="0" i="0">
+                <a:solidFill>
+                  <a:srgbClr val="F5F5F5"/>
+                </a:solidFill>
+                <a:latin typeface="Calibri"/>
+              </a:defRPr>
+            </a:pPr>
+            <a:r>
+              <a:t>“Amen, amen, I say to you, whoever does not enter a sheepfold through the gate but climbs over elsewhere is a thief and a robber.”</a:t>
+            </a:r>
+          </a:p>
+          <a:p>
+            <a:pPr>
+              <a:spcAft>
+                <a:spcPts val="300"/>
+              </a:spcAft>
+              <a:defRPr sz="2100" b="0" i="0">
+                <a:solidFill>
+                  <a:srgbClr val="F5F5F5"/>
+                </a:solidFill>
+                <a:latin typeface="Calibri"/>
+              </a:defRPr>
+            </a:pPr>
+          </a:p>
+          <a:p>
+            <a:pPr>
+              <a:spcAft>
+                <a:spcPts val="300"/>
+              </a:spcAft>
+              <a:defRPr sz="2100" b="0" i="0">
+                <a:solidFill>
+                  <a:srgbClr val="F5F5F5"/>
+                </a:solidFill>
+                <a:latin typeface="Calibri"/>
+              </a:defRPr>
+            </a:pPr>
+            <a:r>
+              <a:t>YEAR A</a:t>
+            </a:r>
+          </a:p>
+          <a:p>
+            <a:pPr>
+              <a:spcAft>
+                <a:spcPts val="300"/>
+              </a:spcAft>
+              <a:defRPr sz="2100" b="0" i="0">
+                <a:solidFill>
+                  <a:srgbClr val="F5F5F5"/>
+                </a:solidFill>
+                <a:latin typeface="Calibri"/>
+              </a:defRPr>
+            </a:pPr>
+            <a:r>
+              <a:t>2026-04-26 · Eastertide</a:t>
             </a:r>
           </a:p>
         </p:txBody>
@@ -9993,13 +10008,13 @@
               </a:spcBef>
               <a:defRPr sz="1200" b="0" i="0">
                 <a:solidFill>
-                  <a:srgbClr val="DCAA5A"/>
-                </a:solidFill>
-                <a:latin typeface="Calibri"/>
-              </a:defRPr>
-            </a:pPr>
-            <a:r>
-              <a:t>The Communion Rite</a:t>
+                  <a:srgbClr val="F2F0E8"/>
+                </a:solidFill>
+                <a:latin typeface="Calibri"/>
+              </a:defRPr>
+            </a:pPr>
+            <a:r>
+              <a:t>Mass poster / divider</a:t>
             </a:r>
           </a:p>
         </p:txBody>
@@ -10038,8 +10053,8 @@
         </p:nvSpPr>
         <p:spPr>
           <a:xfrm>
-            <a:off x="685800" y="960120"/>
-            <a:ext cx="16916400" cy="1051560"/>
+            <a:off x="685800" y="457200"/>
+            <a:ext cx="16916400" cy="8823960"/>
           </a:xfrm>
           <a:prstGeom prst="rect">
             <a:avLst/>
@@ -10053,15 +10068,50 @@
           <a:lstStyle/>
           <a:p>
             <a:pPr>
-              <a:defRPr sz="3800" b="1" i="0">
-                <a:solidFill>
-                  <a:srgbClr val="DCAA5A"/>
-                </a:solidFill>
-                <a:latin typeface="Calibri"/>
-              </a:defRPr>
-            </a:pPr>
-            <a:r>
-              <a:t>Eastertide Celebration</a:t>
+              <a:spcAft>
+                <a:spcPts val="500"/>
+              </a:spcAft>
+              <a:defRPr sz="2000" b="1" i="0">
+                <a:solidFill>
+                  <a:srgbClr val="F2F0E8"/>
+                </a:solidFill>
+                <a:latin typeface="Calibri"/>
+              </a:defRPr>
+            </a:pPr>
+            <a:r>
+              <a:t>The peace of the Lord be with you always.</a:t>
+            </a:r>
+          </a:p>
+          <a:p>
+            <a:pPr>
+              <a:spcAft>
+                <a:spcPts val="500"/>
+              </a:spcAft>
+              <a:defRPr sz="2000" b="1" i="0">
+                <a:solidFill>
+                  <a:srgbClr val="F5F5F5"/>
+                </a:solidFill>
+                <a:latin typeface="Calibri"/>
+              </a:defRPr>
+            </a:pPr>
+            <a:r>
+              <a:t>And with your spirit.</a:t>
+            </a:r>
+          </a:p>
+          <a:p>
+            <a:pPr>
+              <a:spcAft>
+                <a:spcPts val="500"/>
+              </a:spcAft>
+              <a:defRPr sz="1500" b="0" i="1">
+                <a:solidFill>
+                  <a:srgbClr val="F2F0E8"/>
+                </a:solidFill>
+                <a:latin typeface="Calibri"/>
+              </a:defRPr>
+            </a:pPr>
+            <a:r>
+              <a:t>Let us offer each other the sign of peace.</a:t>
             </a:r>
           </a:p>
         </p:txBody>
@@ -10069,176 +10119,6 @@
       <p:sp>
         <p:nvSpPr>
           <p:cNvPr id="3" name="TextBox 2"/>
-          <p:cNvSpPr txBox="1"/>
-          <p:nvPr/>
-        </p:nvSpPr>
-        <p:spPr>
-          <a:xfrm>
-            <a:off x="685800" y="2103120"/>
-            <a:ext cx="16916400" cy="2011680"/>
-          </a:xfrm>
-          <a:prstGeom prst="rect">
-            <a:avLst/>
-          </a:prstGeom>
-          <a:noFill/>
-        </p:spPr>
-        <p:txBody>
-          <a:bodyPr wrap="square" lIns="109728" rIns="109728" tIns="73152" bIns="73152">
-            <a:noAutofit/>
-          </a:bodyPr>
-          <a:lstStyle/>
-          <a:p>
-            <a:pPr>
-              <a:spcAft>
-                <a:spcPts val="200"/>
-              </a:spcAft>
-              <a:defRPr sz="2100" b="1" i="0">
-                <a:solidFill>
-                  <a:srgbClr val="F5F5F5"/>
-                </a:solidFill>
-                <a:latin typeface="Calibri"/>
-              </a:defRPr>
-            </a:pPr>
-            <a:r>
-              <a:t>MASS CELEBRANT: Rev. Fr. Jonrey Lauron, RCJ</a:t>
-            </a:r>
-          </a:p>
-          <a:p>
-            <a:pPr>
-              <a:spcAft>
-                <a:spcPts val="200"/>
-              </a:spcAft>
-              <a:defRPr sz="2100" b="0" i="0">
-                <a:solidFill>
-                  <a:srgbClr val="F5F5F5"/>
-                </a:solidFill>
-                <a:latin typeface="Calibri"/>
-              </a:defRPr>
-            </a:pPr>
-          </a:p>
-          <a:p>
-            <a:pPr>
-              <a:spcAft>
-                <a:spcPts val="200"/>
-              </a:spcAft>
-              <a:defRPr sz="2100" b="0" i="0">
-                <a:solidFill>
-                  <a:srgbClr val="F5F5F5"/>
-                </a:solidFill>
-                <a:latin typeface="Calibri"/>
-              </a:defRPr>
-            </a:pPr>
-            <a:r>
-              <a:t>GWANGJU</a:t>
-            </a:r>
-            <a:br/>
-            <a:r>
-              <a:t>FILIPINO</a:t>
-            </a:r>
-            <a:br/>
-            <a:r>
-              <a:t>CATHOLIC</a:t>
-            </a:r>
-            <a:br/>
-            <a:r>
-              <a:t>COMMUNITY</a:t>
-            </a:r>
-          </a:p>
-          <a:p>
-            <a:pPr>
-              <a:spcAft>
-                <a:spcPts val="200"/>
-              </a:spcAft>
-              <a:defRPr sz="2100" b="0" i="0">
-                <a:solidFill>
-                  <a:srgbClr val="F5F5F5"/>
-                </a:solidFill>
-                <a:latin typeface="Calibri"/>
-              </a:defRPr>
-            </a:pPr>
-          </a:p>
-          <a:p>
-            <a:pPr>
-              <a:spcAft>
-                <a:spcPts val="200"/>
-              </a:spcAft>
-              <a:defRPr sz="2100" b="0" i="0">
-                <a:solidFill>
-                  <a:srgbClr val="F5F5F5"/>
-                </a:solidFill>
-                <a:latin typeface="Calibri"/>
-              </a:defRPr>
-            </a:pPr>
-            <a:r>
-              <a:t>Gospel (John 14:15-21)</a:t>
-            </a:r>
-          </a:p>
-          <a:p>
-            <a:pPr>
-              <a:spcAft>
-                <a:spcPts val="200"/>
-              </a:spcAft>
-              <a:defRPr sz="2100" b="0" i="0">
-                <a:solidFill>
-                  <a:srgbClr val="F5F5F5"/>
-                </a:solidFill>
-                <a:latin typeface="Calibri"/>
-              </a:defRPr>
-            </a:pPr>
-            <a:r>
-              <a:t>“If you love me, you will keep my commandments.”</a:t>
-            </a:r>
-          </a:p>
-          <a:p>
-            <a:pPr>
-              <a:spcAft>
-                <a:spcPts val="200"/>
-              </a:spcAft>
-              <a:defRPr sz="2100" b="0" i="0">
-                <a:solidFill>
-                  <a:srgbClr val="F5F5F5"/>
-                </a:solidFill>
-                <a:latin typeface="Calibri"/>
-              </a:defRPr>
-            </a:pPr>
-          </a:p>
-          <a:p>
-            <a:pPr>
-              <a:spcAft>
-                <a:spcPts val="200"/>
-              </a:spcAft>
-              <a:defRPr sz="2100" b="0" i="0">
-                <a:solidFill>
-                  <a:srgbClr val="F5F5F5"/>
-                </a:solidFill>
-                <a:latin typeface="Calibri"/>
-              </a:defRPr>
-            </a:pPr>
-            <a:r>
-              <a:t>YEAR A</a:t>
-            </a:r>
-          </a:p>
-          <a:p>
-            <a:pPr>
-              <a:spcAft>
-                <a:spcPts val="200"/>
-              </a:spcAft>
-              <a:defRPr sz="2100" b="0" i="0">
-                <a:solidFill>
-                  <a:srgbClr val="F5F5F5"/>
-                </a:solidFill>
-                <a:latin typeface="Calibri"/>
-              </a:defRPr>
-            </a:pPr>
-            <a:r>
-              <a:t>2026-05-10 · Eastertide</a:t>
-            </a:r>
-          </a:p>
-        </p:txBody>
-      </p:sp>
-      <p:sp>
-        <p:nvSpPr>
-          <p:cNvPr id="4" name="TextBox 3"/>
           <p:cNvSpPr txBox="1"/>
           <p:nvPr/>
         </p:nvSpPr>
@@ -10277,13 +10157,13 @@
               </a:spcBef>
               <a:defRPr sz="1200" b="0" i="0">
                 <a:solidFill>
-                  <a:srgbClr val="DCAA5A"/>
-                </a:solidFill>
-                <a:latin typeface="Calibri"/>
-              </a:defRPr>
-            </a:pPr>
-            <a:r>
-              <a:t>Mass poster / divider</a:t>
+                  <a:srgbClr val="F2F0E8"/>
+                </a:solidFill>
+                <a:latin typeface="Calibri"/>
+              </a:defRPr>
+            </a:pPr>
+            <a:r>
+              <a:t>Sign of Peace</a:t>
             </a:r>
           </a:p>
         </p:txBody>
@@ -10323,7 +10203,7 @@
         <p:spPr>
           <a:xfrm>
             <a:off x="685800" y="457200"/>
-            <a:ext cx="16916400" cy="8778240"/>
+            <a:ext cx="16916400" cy="8823960"/>
           </a:xfrm>
           <a:prstGeom prst="rect">
             <a:avLst/>
@@ -10348,7 +10228,7 @@
               </a:defRPr>
             </a:pPr>
             <a:r>
-              <a:t>TASTE AND SEE, TASTE AND SEE THE GOODNESS OF THE LORD…</a:t>
+              <a:t>Lamb of God, you take away the sins of the world: have mercy on us…</a:t>
             </a:r>
           </a:p>
           <a:p>
@@ -10356,15 +10236,15 @@
               <a:spcAft>
                 <a:spcPts val="500"/>
               </a:spcAft>
-              <a:defRPr sz="1500" b="0" i="1">
-                <a:solidFill>
-                  <a:srgbClr val="DCAA5A"/>
-                </a:solidFill>
-                <a:latin typeface="Calibri"/>
-              </a:defRPr>
-            </a:pPr>
-            <a:r>
-              <a:t>Communion hymn — replace with your selection (multiple slides as needed).</a:t>
+              <a:defRPr sz="1900" b="0" i="0">
+                <a:solidFill>
+                  <a:srgbClr val="F5F5F5"/>
+                </a:solidFill>
+                <a:latin typeface="Calibri"/>
+              </a:defRPr>
+            </a:pPr>
+            <a:r>
+              <a:t>Lamb of God… grant us peace.</a:t>
             </a:r>
           </a:p>
         </p:txBody>
@@ -10410,13 +10290,13 @@
               </a:spcBef>
               <a:defRPr sz="1200" b="0" i="0">
                 <a:solidFill>
-                  <a:srgbClr val="DCAA5A"/>
-                </a:solidFill>
-                <a:latin typeface="Calibri"/>
-              </a:defRPr>
-            </a:pPr>
-            <a:r>
-              <a:t>Communion</a:t>
+                  <a:srgbClr val="F2F0E8"/>
+                </a:solidFill>
+                <a:latin typeface="Calibri"/>
+              </a:defRPr>
+            </a:pPr>
+            <a:r>
+              <a:t>Lamb of God</a:t>
             </a:r>
           </a:p>
         </p:txBody>
@@ -10456,7 +10336,7 @@
         <p:spPr>
           <a:xfrm>
             <a:off x="685800" y="457200"/>
-            <a:ext cx="16916400" cy="8778240"/>
+            <a:ext cx="16916400" cy="8823960"/>
           </a:xfrm>
           <a:prstGeom prst="rect">
             <a:avLst/>
@@ -10475,13 +10355,13 @@
               </a:spcAft>
               <a:defRPr sz="2000" b="1" i="0">
                 <a:solidFill>
-                  <a:srgbClr val="DCAA5A"/>
-                </a:solidFill>
-                <a:latin typeface="Calibri"/>
-              </a:defRPr>
-            </a:pPr>
-            <a:r>
-              <a:t>Let us pray.</a:t>
+                  <a:srgbClr val="F2F0E8"/>
+                </a:solidFill>
+                <a:latin typeface="Calibri"/>
+              </a:defRPr>
+            </a:pPr>
+            <a:r>
+              <a:t>Behold the Lamb of God…</a:t>
             </a:r>
           </a:p>
           <a:p>
@@ -10497,23 +10377,7 @@
               </a:defRPr>
             </a:pPr>
             <a:r>
-              <a:t>Amen.</a:t>
-            </a:r>
-          </a:p>
-          <a:p>
-            <a:pPr>
-              <a:spcAft>
-                <a:spcPts val="500"/>
-              </a:spcAft>
-              <a:defRPr sz="1500" b="0" i="1">
-                <a:solidFill>
-                  <a:srgbClr val="DCAA5A"/>
-                </a:solidFill>
-                <a:latin typeface="Calibri"/>
-              </a:defRPr>
-            </a:pPr>
-            <a:r>
-              <a:t>— Post-Communion Prayer of the day.</a:t>
+              <a:t>Lord, I am not worthy that you should enter under my roof, but only say the word and my soul shall be healed.</a:t>
             </a:r>
           </a:p>
         </p:txBody>
@@ -10559,7 +10423,7 @@
               </a:spcBef>
               <a:defRPr sz="1200" b="0" i="0">
                 <a:solidFill>
-                  <a:srgbClr val="DCAA5A"/>
+                  <a:srgbClr val="F2F0E8"/>
                 </a:solidFill>
                 <a:latin typeface="Calibri"/>
               </a:defRPr>
@@ -10604,8 +10468,8 @@
         </p:nvSpPr>
         <p:spPr>
           <a:xfrm>
-            <a:off x="685800" y="960120"/>
-            <a:ext cx="16916400" cy="1051560"/>
+            <a:off x="685800" y="914400"/>
+            <a:ext cx="16916400" cy="5943600"/>
           </a:xfrm>
           <a:prstGeom prst="rect">
             <a:avLst/>
@@ -10619,15 +10483,165 @@
           <a:lstStyle/>
           <a:p>
             <a:pPr>
-              <a:defRPr sz="3800" b="1" i="0">
-                <a:solidFill>
-                  <a:srgbClr val="DCAA5A"/>
-                </a:solidFill>
-                <a:latin typeface="Calibri"/>
-              </a:defRPr>
-            </a:pPr>
-            <a:r>
-              <a:t>Eastertide Celebration</a:t>
+              <a:spcAft>
+                <a:spcPts val="300"/>
+              </a:spcAft>
+              <a:defRPr sz="2100" b="1" i="0">
+                <a:solidFill>
+                  <a:srgbClr val="F2F0E8"/>
+                </a:solidFill>
+                <a:latin typeface="Calibri"/>
+              </a:defRPr>
+            </a:pPr>
+            <a:r>
+              <a:t>MASS CELEBRANT:</a:t>
+            </a:r>
+          </a:p>
+          <a:p>
+            <a:pPr>
+              <a:spcAft>
+                <a:spcPts val="300"/>
+              </a:spcAft>
+              <a:defRPr sz="2100" b="0" i="0">
+                <a:solidFill>
+                  <a:srgbClr val="F5F5F5"/>
+                </a:solidFill>
+                <a:latin typeface="Calibri"/>
+              </a:defRPr>
+            </a:pPr>
+            <a:r>
+              <a:t>Hye</a:t>
+            </a:r>
+          </a:p>
+          <a:p>
+            <a:pPr>
+              <a:spcAft>
+                <a:spcPts val="300"/>
+              </a:spcAft>
+              <a:defRPr sz="2100" b="0" i="0">
+                <a:solidFill>
+                  <a:srgbClr val="F5F5F5"/>
+                </a:solidFill>
+                <a:latin typeface="Calibri"/>
+              </a:defRPr>
+            </a:pPr>
+          </a:p>
+          <a:p>
+            <a:pPr>
+              <a:spcAft>
+                <a:spcPts val="300"/>
+              </a:spcAft>
+              <a:defRPr sz="2100" b="0" i="0">
+                <a:solidFill>
+                  <a:srgbClr val="F5F5F5"/>
+                </a:solidFill>
+                <a:latin typeface="Calibri"/>
+              </a:defRPr>
+            </a:pPr>
+            <a:r>
+              <a:t>GWANGJU</a:t>
+            </a:r>
+            <a:br/>
+            <a:r>
+              <a:t>FILIPINO</a:t>
+            </a:r>
+            <a:br/>
+            <a:r>
+              <a:t>CATHOLIC</a:t>
+            </a:r>
+            <a:br/>
+            <a:r>
+              <a:t>COMMUNITY</a:t>
+            </a:r>
+          </a:p>
+          <a:p>
+            <a:pPr>
+              <a:spcAft>
+                <a:spcPts val="300"/>
+              </a:spcAft>
+              <a:defRPr sz="2100" b="0" i="0">
+                <a:solidFill>
+                  <a:srgbClr val="F5F5F5"/>
+                </a:solidFill>
+                <a:latin typeface="Calibri"/>
+              </a:defRPr>
+            </a:pPr>
+          </a:p>
+          <a:p>
+            <a:pPr>
+              <a:spcAft>
+                <a:spcPts val="300"/>
+              </a:spcAft>
+              <a:defRPr sz="2100" b="0" i="0">
+                <a:solidFill>
+                  <a:srgbClr val="F5F5F5"/>
+                </a:solidFill>
+                <a:latin typeface="Calibri"/>
+              </a:defRPr>
+            </a:pPr>
+            <a:r>
+              <a:t>Gospel (John 10:1-10)</a:t>
+            </a:r>
+          </a:p>
+          <a:p>
+            <a:pPr>
+              <a:spcAft>
+                <a:spcPts val="300"/>
+              </a:spcAft>
+              <a:defRPr sz="2100" b="0" i="0">
+                <a:solidFill>
+                  <a:srgbClr val="F5F5F5"/>
+                </a:solidFill>
+                <a:latin typeface="Calibri"/>
+              </a:defRPr>
+            </a:pPr>
+            <a:r>
+              <a:t>“Amen, amen, I say to you, whoever does not enter a sheepfold through the gate but climbs over elsewhere is a thief and a robber.”</a:t>
+            </a:r>
+          </a:p>
+          <a:p>
+            <a:pPr>
+              <a:spcAft>
+                <a:spcPts val="300"/>
+              </a:spcAft>
+              <a:defRPr sz="2100" b="0" i="0">
+                <a:solidFill>
+                  <a:srgbClr val="F5F5F5"/>
+                </a:solidFill>
+                <a:latin typeface="Calibri"/>
+              </a:defRPr>
+            </a:pPr>
+          </a:p>
+          <a:p>
+            <a:pPr>
+              <a:spcAft>
+                <a:spcPts val="300"/>
+              </a:spcAft>
+              <a:defRPr sz="2100" b="0" i="0">
+                <a:solidFill>
+                  <a:srgbClr val="F5F5F5"/>
+                </a:solidFill>
+                <a:latin typeface="Calibri"/>
+              </a:defRPr>
+            </a:pPr>
+            <a:r>
+              <a:t>YEAR A</a:t>
+            </a:r>
+          </a:p>
+          <a:p>
+            <a:pPr>
+              <a:spcAft>
+                <a:spcPts val="300"/>
+              </a:spcAft>
+              <a:defRPr sz="2100" b="0" i="0">
+                <a:solidFill>
+                  <a:srgbClr val="F5F5F5"/>
+                </a:solidFill>
+                <a:latin typeface="Calibri"/>
+              </a:defRPr>
+            </a:pPr>
+            <a:r>
+              <a:t>2026-04-26 · Eastertide</a:t>
             </a:r>
           </a:p>
         </p:txBody>
@@ -10635,176 +10649,6 @@
       <p:sp>
         <p:nvSpPr>
           <p:cNvPr id="3" name="TextBox 2"/>
-          <p:cNvSpPr txBox="1"/>
-          <p:nvPr/>
-        </p:nvSpPr>
-        <p:spPr>
-          <a:xfrm>
-            <a:off x="685800" y="2103120"/>
-            <a:ext cx="16916400" cy="2011680"/>
-          </a:xfrm>
-          <a:prstGeom prst="rect">
-            <a:avLst/>
-          </a:prstGeom>
-          <a:noFill/>
-        </p:spPr>
-        <p:txBody>
-          <a:bodyPr wrap="square" lIns="109728" rIns="109728" tIns="73152" bIns="73152">
-            <a:noAutofit/>
-          </a:bodyPr>
-          <a:lstStyle/>
-          <a:p>
-            <a:pPr>
-              <a:spcAft>
-                <a:spcPts val="200"/>
-              </a:spcAft>
-              <a:defRPr sz="2100" b="1" i="0">
-                <a:solidFill>
-                  <a:srgbClr val="F5F5F5"/>
-                </a:solidFill>
-                <a:latin typeface="Calibri"/>
-              </a:defRPr>
-            </a:pPr>
-            <a:r>
-              <a:t>MASS CELEBRANT: Rev. Fr. Jonrey Lauron, RCJ</a:t>
-            </a:r>
-          </a:p>
-          <a:p>
-            <a:pPr>
-              <a:spcAft>
-                <a:spcPts val="200"/>
-              </a:spcAft>
-              <a:defRPr sz="2100" b="0" i="0">
-                <a:solidFill>
-                  <a:srgbClr val="F5F5F5"/>
-                </a:solidFill>
-                <a:latin typeface="Calibri"/>
-              </a:defRPr>
-            </a:pPr>
-          </a:p>
-          <a:p>
-            <a:pPr>
-              <a:spcAft>
-                <a:spcPts val="200"/>
-              </a:spcAft>
-              <a:defRPr sz="2100" b="0" i="0">
-                <a:solidFill>
-                  <a:srgbClr val="F5F5F5"/>
-                </a:solidFill>
-                <a:latin typeface="Calibri"/>
-              </a:defRPr>
-            </a:pPr>
-            <a:r>
-              <a:t>GWANGJU</a:t>
-            </a:r>
-            <a:br/>
-            <a:r>
-              <a:t>FILIPINO</a:t>
-            </a:r>
-            <a:br/>
-            <a:r>
-              <a:t>CATHOLIC</a:t>
-            </a:r>
-            <a:br/>
-            <a:r>
-              <a:t>COMMUNITY</a:t>
-            </a:r>
-          </a:p>
-          <a:p>
-            <a:pPr>
-              <a:spcAft>
-                <a:spcPts val="200"/>
-              </a:spcAft>
-              <a:defRPr sz="2100" b="0" i="0">
-                <a:solidFill>
-                  <a:srgbClr val="F5F5F5"/>
-                </a:solidFill>
-                <a:latin typeface="Calibri"/>
-              </a:defRPr>
-            </a:pPr>
-          </a:p>
-          <a:p>
-            <a:pPr>
-              <a:spcAft>
-                <a:spcPts val="200"/>
-              </a:spcAft>
-              <a:defRPr sz="2100" b="0" i="0">
-                <a:solidFill>
-                  <a:srgbClr val="F5F5F5"/>
-                </a:solidFill>
-                <a:latin typeface="Calibri"/>
-              </a:defRPr>
-            </a:pPr>
-            <a:r>
-              <a:t>Gospel (John 14:15-21)</a:t>
-            </a:r>
-          </a:p>
-          <a:p>
-            <a:pPr>
-              <a:spcAft>
-                <a:spcPts val="200"/>
-              </a:spcAft>
-              <a:defRPr sz="2100" b="0" i="0">
-                <a:solidFill>
-                  <a:srgbClr val="F5F5F5"/>
-                </a:solidFill>
-                <a:latin typeface="Calibri"/>
-              </a:defRPr>
-            </a:pPr>
-            <a:r>
-              <a:t>“If you love me, you will keep my commandments.”</a:t>
-            </a:r>
-          </a:p>
-          <a:p>
-            <a:pPr>
-              <a:spcAft>
-                <a:spcPts val="200"/>
-              </a:spcAft>
-              <a:defRPr sz="2100" b="0" i="0">
-                <a:solidFill>
-                  <a:srgbClr val="F5F5F5"/>
-                </a:solidFill>
-                <a:latin typeface="Calibri"/>
-              </a:defRPr>
-            </a:pPr>
-          </a:p>
-          <a:p>
-            <a:pPr>
-              <a:spcAft>
-                <a:spcPts val="200"/>
-              </a:spcAft>
-              <a:defRPr sz="2100" b="0" i="0">
-                <a:solidFill>
-                  <a:srgbClr val="F5F5F5"/>
-                </a:solidFill>
-                <a:latin typeface="Calibri"/>
-              </a:defRPr>
-            </a:pPr>
-            <a:r>
-              <a:t>YEAR A</a:t>
-            </a:r>
-          </a:p>
-          <a:p>
-            <a:pPr>
-              <a:spcAft>
-                <a:spcPts val="200"/>
-              </a:spcAft>
-              <a:defRPr sz="2100" b="0" i="0">
-                <a:solidFill>
-                  <a:srgbClr val="F5F5F5"/>
-                </a:solidFill>
-                <a:latin typeface="Calibri"/>
-              </a:defRPr>
-            </a:pPr>
-            <a:r>
-              <a:t>2026-05-10 · Eastertide</a:t>
-            </a:r>
-          </a:p>
-        </p:txBody>
-      </p:sp>
-      <p:sp>
-        <p:nvSpPr>
-          <p:cNvPr id="4" name="TextBox 3"/>
           <p:cNvSpPr txBox="1"/>
           <p:nvPr/>
         </p:nvSpPr>
@@ -10843,7 +10687,7 @@
               </a:spcBef>
               <a:defRPr sz="1200" b="0" i="0">
                 <a:solidFill>
-                  <a:srgbClr val="DCAA5A"/>
+                  <a:srgbClr val="F2F0E8"/>
                 </a:solidFill>
                 <a:latin typeface="Calibri"/>
               </a:defRPr>
@@ -10889,7 +10733,7 @@
         <p:spPr>
           <a:xfrm>
             <a:off x="685800" y="457200"/>
-            <a:ext cx="16916400" cy="8778240"/>
+            <a:ext cx="16916400" cy="8823960"/>
           </a:xfrm>
           <a:prstGeom prst="rect">
             <a:avLst/>
@@ -10908,7 +10752,7 @@
               </a:spcAft>
               <a:defRPr sz="2000" b="1" i="0">
                 <a:solidFill>
-                  <a:srgbClr val="DCAA5A"/>
+                  <a:srgbClr val="F2F0E8"/>
                 </a:solidFill>
                 <a:latin typeface="Calibri"/>
               </a:defRPr>
@@ -10940,7 +10784,7 @@
               </a:spcAft>
               <a:defRPr sz="2000" b="1" i="0">
                 <a:solidFill>
-                  <a:srgbClr val="DCAA5A"/>
+                  <a:srgbClr val="F2F0E8"/>
                 </a:solidFill>
                 <a:latin typeface="Calibri"/>
               </a:defRPr>
@@ -11008,7 +10852,7 @@
               </a:spcBef>
               <a:defRPr sz="1200" b="0" i="0">
                 <a:solidFill>
-                  <a:srgbClr val="DCAA5A"/>
+                  <a:srgbClr val="F2F0E8"/>
                 </a:solidFill>
                 <a:latin typeface="Calibri"/>
               </a:defRPr>
@@ -11054,7 +10898,7 @@
         <p:spPr>
           <a:xfrm>
             <a:off x="685800" y="457200"/>
-            <a:ext cx="16916400" cy="8778240"/>
+            <a:ext cx="16916400" cy="8823960"/>
           </a:xfrm>
           <a:prstGeom prst="rect">
             <a:avLst/>
@@ -11079,7 +10923,7 @@
               </a:defRPr>
             </a:pPr>
             <a:r>
-              <a:t>CHURCH ANNOUNCEMENTS</a:t>
+              <a:t>TASTE AND SEE, TASTE AND SEE THE GOODNESS OF THE LORD…</a:t>
             </a:r>
           </a:p>
           <a:p>
@@ -11089,13 +10933,13 @@
               </a:spcAft>
               <a:defRPr sz="1500" b="0" i="1">
                 <a:solidFill>
-                  <a:srgbClr val="DCAA5A"/>
-                </a:solidFill>
-                <a:latin typeface="Calibri"/>
-              </a:defRPr>
-            </a:pPr>
-            <a:r>
-              <a:t>Insert your bulletin points on the following slides or edit this deck.</a:t>
+                  <a:srgbClr val="F2F0E8"/>
+                </a:solidFill>
+                <a:latin typeface="Calibri"/>
+              </a:defRPr>
+            </a:pPr>
+            <a:r>
+              <a:t>Communion hymn — replace with your selection (multiple slides as needed).</a:t>
             </a:r>
           </a:p>
         </p:txBody>
@@ -11141,13 +10985,13 @@
               </a:spcBef>
               <a:defRPr sz="1200" b="0" i="0">
                 <a:solidFill>
-                  <a:srgbClr val="DCAA5A"/>
-                </a:solidFill>
-                <a:latin typeface="Calibri"/>
-              </a:defRPr>
-            </a:pPr>
-            <a:r>
-              <a:t>Announcements</a:t>
+                  <a:srgbClr val="F2F0E8"/>
+                </a:solidFill>
+                <a:latin typeface="Calibri"/>
+              </a:defRPr>
+            </a:pPr>
+            <a:r>
+              <a:t>Communion</a:t>
             </a:r>
           </a:p>
         </p:txBody>
@@ -11187,7 +11031,7 @@
         <p:spPr>
           <a:xfrm>
             <a:off x="685800" y="457200"/>
-            <a:ext cx="16916400" cy="8778240"/>
+            <a:ext cx="16916400" cy="8823960"/>
           </a:xfrm>
           <a:prstGeom prst="rect">
             <a:avLst/>
@@ -11204,15 +11048,15 @@
               <a:spcAft>
                 <a:spcPts val="500"/>
               </a:spcAft>
-              <a:defRPr sz="1900" b="1" i="0">
-                <a:solidFill>
-                  <a:srgbClr val="F5F5F5"/>
-                </a:solidFill>
-                <a:latin typeface="Calibri"/>
-              </a:defRPr>
-            </a:pPr>
-            <a:r>
-              <a:t>Welcome newcomers!</a:t>
+              <a:defRPr sz="2000" b="1" i="0">
+                <a:solidFill>
+                  <a:srgbClr val="F2F0E8"/>
+                </a:solidFill>
+                <a:latin typeface="Calibri"/>
+              </a:defRPr>
+            </a:pPr>
+            <a:r>
+              <a:t>Let us pray.</a:t>
             </a:r>
           </a:p>
           <a:p>
@@ -11220,15 +11064,31 @@
               <a:spcAft>
                 <a:spcPts val="500"/>
               </a:spcAft>
+              <a:defRPr sz="2000" b="1" i="0">
+                <a:solidFill>
+                  <a:srgbClr val="F5F5F5"/>
+                </a:solidFill>
+                <a:latin typeface="Calibri"/>
+              </a:defRPr>
+            </a:pPr>
+            <a:r>
+              <a:t>Amen.</a:t>
+            </a:r>
+          </a:p>
+          <a:p>
+            <a:pPr>
+              <a:spcAft>
+                <a:spcPts val="500"/>
+              </a:spcAft>
               <a:defRPr sz="1500" b="0" i="1">
                 <a:solidFill>
-                  <a:srgbClr val="DCAA5A"/>
-                </a:solidFill>
-                <a:latin typeface="Calibri"/>
-              </a:defRPr>
-            </a:pPr>
-            <a:r>
-              <a:t>Photo collage optional.</a:t>
+                  <a:srgbClr val="F2F0E8"/>
+                </a:solidFill>
+                <a:latin typeface="Calibri"/>
+              </a:defRPr>
+            </a:pPr>
+            <a:r>
+              <a:t>— Post-Communion Prayer of the day.</a:t>
             </a:r>
           </a:p>
         </p:txBody>
@@ -11274,13 +11134,13 @@
               </a:spcBef>
               <a:defRPr sz="1200" b="0" i="0">
                 <a:solidFill>
-                  <a:srgbClr val="DCAA5A"/>
-                </a:solidFill>
-                <a:latin typeface="Calibri"/>
-              </a:defRPr>
-            </a:pPr>
-            <a:r>
-              <a:t>Announcements</a:t>
+                  <a:srgbClr val="F2F0E8"/>
+                </a:solidFill>
+                <a:latin typeface="Calibri"/>
+              </a:defRPr>
+            </a:pPr>
+            <a:r>
+              <a:t>The Communion Rite</a:t>
             </a:r>
           </a:p>
         </p:txBody>
@@ -11319,8 +11179,8 @@
         </p:nvSpPr>
         <p:spPr>
           <a:xfrm>
-            <a:off x="685800" y="457200"/>
-            <a:ext cx="16916400" cy="8778240"/>
+            <a:off x="685800" y="914400"/>
+            <a:ext cx="16916400" cy="5943600"/>
           </a:xfrm>
           <a:prstGeom prst="rect">
             <a:avLst/>
@@ -11335,33 +11195,164 @@
           <a:p>
             <a:pPr>
               <a:spcAft>
-                <a:spcPts val="500"/>
-              </a:spcAft>
-              <a:defRPr sz="1900" b="1" i="0">
-                <a:solidFill>
-                  <a:srgbClr val="F5F5F5"/>
-                </a:solidFill>
-                <a:latin typeface="Calibri"/>
-              </a:defRPr>
-            </a:pPr>
-            <a:r>
-              <a:t>Sacrament of Confession</a:t>
-            </a:r>
-          </a:p>
-          <a:p>
-            <a:pPr>
-              <a:spcAft>
-                <a:spcPts val="500"/>
-              </a:spcAft>
-              <a:defRPr sz="1500" b="0" i="1">
-                <a:solidFill>
-                  <a:srgbClr val="DCAA5A"/>
-                </a:solidFill>
-                <a:latin typeface="Calibri"/>
-              </a:defRPr>
-            </a:pPr>
-            <a:r>
-              <a:t>“The Lord never tires of forgiving us; we are the ones who tire of seeking his mercy.” — Pope Francis</a:t>
+                <a:spcPts val="300"/>
+              </a:spcAft>
+              <a:defRPr sz="2100" b="1" i="0">
+                <a:solidFill>
+                  <a:srgbClr val="F2F0E8"/>
+                </a:solidFill>
+                <a:latin typeface="Calibri"/>
+              </a:defRPr>
+            </a:pPr>
+            <a:r>
+              <a:t>MASS CELEBRANT:</a:t>
+            </a:r>
+          </a:p>
+          <a:p>
+            <a:pPr>
+              <a:spcAft>
+                <a:spcPts val="300"/>
+              </a:spcAft>
+              <a:defRPr sz="2100" b="0" i="0">
+                <a:solidFill>
+                  <a:srgbClr val="F5F5F5"/>
+                </a:solidFill>
+                <a:latin typeface="Calibri"/>
+              </a:defRPr>
+            </a:pPr>
+            <a:r>
+              <a:t>Hye</a:t>
+            </a:r>
+          </a:p>
+          <a:p>
+            <a:pPr>
+              <a:spcAft>
+                <a:spcPts val="300"/>
+              </a:spcAft>
+              <a:defRPr sz="2100" b="0" i="0">
+                <a:solidFill>
+                  <a:srgbClr val="F5F5F5"/>
+                </a:solidFill>
+                <a:latin typeface="Calibri"/>
+              </a:defRPr>
+            </a:pPr>
+          </a:p>
+          <a:p>
+            <a:pPr>
+              <a:spcAft>
+                <a:spcPts val="300"/>
+              </a:spcAft>
+              <a:defRPr sz="2100" b="0" i="0">
+                <a:solidFill>
+                  <a:srgbClr val="F5F5F5"/>
+                </a:solidFill>
+                <a:latin typeface="Calibri"/>
+              </a:defRPr>
+            </a:pPr>
+            <a:r>
+              <a:t>GWANGJU</a:t>
+            </a:r>
+            <a:br/>
+            <a:r>
+              <a:t>FILIPINO</a:t>
+            </a:r>
+            <a:br/>
+            <a:r>
+              <a:t>CATHOLIC</a:t>
+            </a:r>
+            <a:br/>
+            <a:r>
+              <a:t>COMMUNITY</a:t>
+            </a:r>
+          </a:p>
+          <a:p>
+            <a:pPr>
+              <a:spcAft>
+                <a:spcPts val="300"/>
+              </a:spcAft>
+              <a:defRPr sz="2100" b="0" i="0">
+                <a:solidFill>
+                  <a:srgbClr val="F5F5F5"/>
+                </a:solidFill>
+                <a:latin typeface="Calibri"/>
+              </a:defRPr>
+            </a:pPr>
+          </a:p>
+          <a:p>
+            <a:pPr>
+              <a:spcAft>
+                <a:spcPts val="300"/>
+              </a:spcAft>
+              <a:defRPr sz="2100" b="0" i="0">
+                <a:solidFill>
+                  <a:srgbClr val="F5F5F5"/>
+                </a:solidFill>
+                <a:latin typeface="Calibri"/>
+              </a:defRPr>
+            </a:pPr>
+            <a:r>
+              <a:t>Gospel (John 10:1-10)</a:t>
+            </a:r>
+          </a:p>
+          <a:p>
+            <a:pPr>
+              <a:spcAft>
+                <a:spcPts val="300"/>
+              </a:spcAft>
+              <a:defRPr sz="2100" b="0" i="0">
+                <a:solidFill>
+                  <a:srgbClr val="F5F5F5"/>
+                </a:solidFill>
+                <a:latin typeface="Calibri"/>
+              </a:defRPr>
+            </a:pPr>
+            <a:r>
+              <a:t>“Amen, amen, I say to you, whoever does not enter a sheepfold through the gate but climbs over elsewhere is a thief and a robber.”</a:t>
+            </a:r>
+          </a:p>
+          <a:p>
+            <a:pPr>
+              <a:spcAft>
+                <a:spcPts val="300"/>
+              </a:spcAft>
+              <a:defRPr sz="2100" b="0" i="0">
+                <a:solidFill>
+                  <a:srgbClr val="F5F5F5"/>
+                </a:solidFill>
+                <a:latin typeface="Calibri"/>
+              </a:defRPr>
+            </a:pPr>
+          </a:p>
+          <a:p>
+            <a:pPr>
+              <a:spcAft>
+                <a:spcPts val="300"/>
+              </a:spcAft>
+              <a:defRPr sz="2100" b="0" i="0">
+                <a:solidFill>
+                  <a:srgbClr val="F5F5F5"/>
+                </a:solidFill>
+                <a:latin typeface="Calibri"/>
+              </a:defRPr>
+            </a:pPr>
+            <a:r>
+              <a:t>YEAR A</a:t>
+            </a:r>
+          </a:p>
+          <a:p>
+            <a:pPr>
+              <a:spcAft>
+                <a:spcPts val="300"/>
+              </a:spcAft>
+              <a:defRPr sz="2100" b="0" i="0">
+                <a:solidFill>
+                  <a:srgbClr val="F5F5F5"/>
+                </a:solidFill>
+                <a:latin typeface="Calibri"/>
+              </a:defRPr>
+            </a:pPr>
+            <a:r>
+              <a:t>2026-04-26 · Eastertide</a:t>
             </a:r>
           </a:p>
         </p:txBody>
@@ -11407,13 +11398,13 @@
               </a:spcBef>
               <a:defRPr sz="1200" b="0" i="0">
                 <a:solidFill>
-                  <a:srgbClr val="DCAA5A"/>
-                </a:solidFill>
-                <a:latin typeface="Calibri"/>
-              </a:defRPr>
-            </a:pPr>
-            <a:r>
-              <a:t>Announcements</a:t>
+                  <a:srgbClr val="F2F0E8"/>
+                </a:solidFill>
+                <a:latin typeface="Calibri"/>
+              </a:defRPr>
+            </a:pPr>
+            <a:r>
+              <a:t>Mass poster / divider</a:t>
             </a:r>
           </a:p>
         </p:txBody>
@@ -11453,7 +11444,7 @@
         <p:spPr>
           <a:xfrm>
             <a:off x="685800" y="457200"/>
-            <a:ext cx="16916400" cy="8778240"/>
+            <a:ext cx="16916400" cy="8823960"/>
           </a:xfrm>
           <a:prstGeom prst="rect">
             <a:avLst/>
@@ -11478,7 +11469,7 @@
               </a:defRPr>
             </a:pPr>
             <a:r>
-              <a:t>Mass Collection</a:t>
+              <a:t>CHURCH ANNOUNCEMENTS</a:t>
             </a:r>
           </a:p>
           <a:p>
@@ -11488,13 +11479,13 @@
               </a:spcAft>
               <a:defRPr sz="1500" b="0" i="1">
                 <a:solidFill>
-                  <a:srgbClr val="DCAA5A"/>
-                </a:solidFill>
-                <a:latin typeface="Calibri"/>
-              </a:defRPr>
-            </a:pPr>
-            <a:r>
-              <a:t>Amount · date · thank you — add 2 Cor 9:7 if desired.</a:t>
+                  <a:srgbClr val="F2F0E8"/>
+                </a:solidFill>
+                <a:latin typeface="Calibri"/>
+              </a:defRPr>
+            </a:pPr>
+            <a:r>
+              <a:t>Insert your bulletin points on the following slides or edit this deck.</a:t>
             </a:r>
           </a:p>
         </p:txBody>
@@ -11540,7 +11531,7 @@
               </a:spcBef>
               <a:defRPr sz="1200" b="0" i="0">
                 <a:solidFill>
-                  <a:srgbClr val="DCAA5A"/>
+                  <a:srgbClr val="F2F0E8"/>
                 </a:solidFill>
                 <a:latin typeface="Calibri"/>
               </a:defRPr>
@@ -11586,7 +11577,7 @@
         <p:spPr>
           <a:xfrm>
             <a:off x="685800" y="457200"/>
-            <a:ext cx="16916400" cy="8778240"/>
+            <a:ext cx="16916400" cy="8823960"/>
           </a:xfrm>
           <a:prstGeom prst="rect">
             <a:avLst/>
@@ -11611,7 +11602,7 @@
               </a:defRPr>
             </a:pPr>
             <a:r>
-              <a:t>Food or Mass Sponsorship</a:t>
+              <a:t>Welcome newcomers!</a:t>
             </a:r>
           </a:p>
           <a:p>
@@ -11621,13 +11612,13 @@
               </a:spcAft>
               <a:defRPr sz="1500" b="0" i="1">
                 <a:solidFill>
-                  <a:srgbClr val="DCAA5A"/>
-                </a:solidFill>
-                <a:latin typeface="Calibri"/>
-              </a:defRPr>
-            </a:pPr>
-            <a:r>
-              <a:t>Contact your parish coordinator — thank you.</a:t>
+                  <a:srgbClr val="F2F0E8"/>
+                </a:solidFill>
+                <a:latin typeface="Calibri"/>
+              </a:defRPr>
+            </a:pPr>
+            <a:r>
+              <a:t>Photo collage optional.</a:t>
             </a:r>
           </a:p>
         </p:txBody>
@@ -11673,7 +11664,7 @@
               </a:spcBef>
               <a:defRPr sz="1200" b="0" i="0">
                 <a:solidFill>
-                  <a:srgbClr val="DCAA5A"/>
+                  <a:srgbClr val="F2F0E8"/>
                 </a:solidFill>
                 <a:latin typeface="Calibri"/>
               </a:defRPr>
@@ -11719,7 +11710,7 @@
         <p:spPr>
           <a:xfrm>
             <a:off x="685800" y="457200"/>
-            <a:ext cx="16916400" cy="8778240"/>
+            <a:ext cx="16916400" cy="8823960"/>
           </a:xfrm>
           <a:prstGeom prst="rect">
             <a:avLst/>
@@ -11744,7 +11735,7 @@
               </a:defRPr>
             </a:pPr>
             <a:r>
-              <a:t>Updates and Announcements</a:t>
+              <a:t>Sacrament of Confession</a:t>
             </a:r>
           </a:p>
           <a:p>
@@ -11754,13 +11745,13 @@
               </a:spcAft>
               <a:defRPr sz="1500" b="0" i="1">
                 <a:solidFill>
-                  <a:srgbClr val="DCAA5A"/>
-                </a:solidFill>
-                <a:latin typeface="Calibri"/>
-              </a:defRPr>
-            </a:pPr>
-            <a:r>
-              <a:t>Like and follow: Gwangju Filipino Catholic Community (add QR in slide master later).</a:t>
+                  <a:srgbClr val="F2F0E8"/>
+                </a:solidFill>
+                <a:latin typeface="Calibri"/>
+              </a:defRPr>
+            </a:pPr>
+            <a:r>
+              <a:t>“The Lord never tires of forgiving us; we are the ones who tire of seeking his mercy.” — Pope Francis</a:t>
             </a:r>
           </a:p>
         </p:txBody>
@@ -11806,7 +11797,7 @@
               </a:spcBef>
               <a:defRPr sz="1200" b="0" i="0">
                 <a:solidFill>
-                  <a:srgbClr val="DCAA5A"/>
+                  <a:srgbClr val="F2F0E8"/>
                 </a:solidFill>
                 <a:latin typeface="Calibri"/>
               </a:defRPr>
@@ -11852,7 +11843,7 @@
         <p:spPr>
           <a:xfrm>
             <a:off x="685800" y="457200"/>
-            <a:ext cx="16916400" cy="8778240"/>
+            <a:ext cx="16916400" cy="8823960"/>
           </a:xfrm>
           <a:prstGeom prst="rect">
             <a:avLst/>
@@ -11869,15 +11860,15 @@
               <a:spcAft>
                 <a:spcPts val="500"/>
               </a:spcAft>
-              <a:defRPr sz="2000" b="1" i="0">
-                <a:solidFill>
-                  <a:srgbClr val="DCAA5A"/>
-                </a:solidFill>
-                <a:latin typeface="Calibri"/>
-              </a:defRPr>
-            </a:pPr>
-            <a:r>
-              <a:t>The Lord be with you.</a:t>
+              <a:defRPr sz="1900" b="1" i="0">
+                <a:solidFill>
+                  <a:srgbClr val="F5F5F5"/>
+                </a:solidFill>
+                <a:latin typeface="Calibri"/>
+              </a:defRPr>
+            </a:pPr>
+            <a:r>
+              <a:t>Mass Collection</a:t>
             </a:r>
           </a:p>
           <a:p>
@@ -11885,79 +11876,15 @@
               <a:spcAft>
                 <a:spcPts val="500"/>
               </a:spcAft>
-              <a:defRPr sz="2000" b="1" i="0">
-                <a:solidFill>
-                  <a:srgbClr val="F5F5F5"/>
-                </a:solidFill>
-                <a:latin typeface="Calibri"/>
-              </a:defRPr>
-            </a:pPr>
-            <a:r>
-              <a:t>And with your spirit.</a:t>
-            </a:r>
-          </a:p>
-          <a:p>
-            <a:pPr>
-              <a:spcAft>
-                <a:spcPts val="500"/>
-              </a:spcAft>
-              <a:defRPr sz="2000" b="1" i="0">
-                <a:solidFill>
-                  <a:srgbClr val="DCAA5A"/>
-                </a:solidFill>
-                <a:latin typeface="Calibri"/>
-              </a:defRPr>
-            </a:pPr>
-            <a:r>
-              <a:t>May almighty God bless you, the Father, and the Son, and the Holy Spirit.</a:t>
-            </a:r>
-          </a:p>
-          <a:p>
-            <a:pPr>
-              <a:spcAft>
-                <a:spcPts val="500"/>
-              </a:spcAft>
-              <a:defRPr sz="2000" b="1" i="0">
-                <a:solidFill>
-                  <a:srgbClr val="F5F5F5"/>
-                </a:solidFill>
-                <a:latin typeface="Calibri"/>
-              </a:defRPr>
-            </a:pPr>
-            <a:r>
-              <a:t>Amen.</a:t>
-            </a:r>
-          </a:p>
-          <a:p>
-            <a:pPr>
-              <a:spcAft>
-                <a:spcPts val="500"/>
-              </a:spcAft>
-              <a:defRPr sz="2000" b="1" i="0">
-                <a:solidFill>
-                  <a:srgbClr val="DCAA5A"/>
-                </a:solidFill>
-                <a:latin typeface="Calibri"/>
-              </a:defRPr>
-            </a:pPr>
-            <a:r>
-              <a:t>Go in peace, glorifying the Lord by your life.</a:t>
-            </a:r>
-          </a:p>
-          <a:p>
-            <a:pPr>
-              <a:spcAft>
-                <a:spcPts val="500"/>
-              </a:spcAft>
-              <a:defRPr sz="2000" b="1" i="0">
-                <a:solidFill>
-                  <a:srgbClr val="F5F5F5"/>
-                </a:solidFill>
-                <a:latin typeface="Calibri"/>
-              </a:defRPr>
-            </a:pPr>
-            <a:r>
-              <a:t>Thanks be to God.</a:t>
+              <a:defRPr sz="1500" b="0" i="1">
+                <a:solidFill>
+                  <a:srgbClr val="F2F0E8"/>
+                </a:solidFill>
+                <a:latin typeface="Calibri"/>
+              </a:defRPr>
+            </a:pPr>
+            <a:r>
+              <a:t>Amount · date · thank you — add 2 Cor 9:7 if desired.</a:t>
             </a:r>
           </a:p>
         </p:txBody>
@@ -12003,13 +11930,13 @@
               </a:spcBef>
               <a:defRPr sz="1200" b="0" i="0">
                 <a:solidFill>
-                  <a:srgbClr val="DCAA5A"/>
-                </a:solidFill>
-                <a:latin typeface="Calibri"/>
-              </a:defRPr>
-            </a:pPr>
-            <a:r>
-              <a:t>Final Blessing</a:t>
+                  <a:srgbClr val="F2F0E8"/>
+                </a:solidFill>
+                <a:latin typeface="Calibri"/>
+              </a:defRPr>
+            </a:pPr>
+            <a:r>
+              <a:t>Announcements</a:t>
             </a:r>
           </a:p>
         </p:txBody>
@@ -12049,7 +11976,7 @@
         <p:spPr>
           <a:xfrm>
             <a:off x="685800" y="457200"/>
-            <a:ext cx="16916400" cy="8778240"/>
+            <a:ext cx="16916400" cy="8823960"/>
           </a:xfrm>
           <a:prstGeom prst="rect">
             <a:avLst/>
@@ -12074,7 +12001,7 @@
               </a:defRPr>
             </a:pPr>
             <a:r>
-              <a:t>COME! LIVE IN THE LIGHT! SHINE WITH THE JOY AND THE LOVE OF THE LORD!</a:t>
+              <a:t>Food or Mass Sponsorship</a:t>
             </a:r>
           </a:p>
           <a:p>
@@ -12082,63 +12009,15 @@
               <a:spcAft>
                 <a:spcPts val="500"/>
               </a:spcAft>
-              <a:defRPr sz="1900" b="0" i="0">
-                <a:solidFill>
-                  <a:srgbClr val="F5F5F5"/>
-                </a:solidFill>
-                <a:latin typeface="Calibri"/>
-              </a:defRPr>
-            </a:pPr>
-            <a:r>
-              <a:t>WE ARE CALLED… TO BE LIGHT FOR THE KINGDOM…</a:t>
-            </a:r>
-          </a:p>
-          <a:p>
-            <a:pPr>
-              <a:spcAft>
-                <a:spcPts val="500"/>
-              </a:spcAft>
               <a:defRPr sz="1500" b="0" i="1">
                 <a:solidFill>
-                  <a:srgbClr val="DCAA5A"/>
-                </a:solidFill>
-                <a:latin typeface="Calibri"/>
-              </a:defRPr>
-            </a:pPr>
-            <a:r>
-              <a:t>Recessional — We Are Called (David Haas). Replace if needed.</a:t>
-            </a:r>
-          </a:p>
-          <a:p>
-            <a:pPr>
-              <a:spcAft>
-                <a:spcPts val="500"/>
-              </a:spcAft>
-              <a:defRPr sz="1900" b="1" i="0">
-                <a:solidFill>
-                  <a:srgbClr val="F5F5F5"/>
-                </a:solidFill>
-                <a:latin typeface="Calibri"/>
-              </a:defRPr>
-            </a:pPr>
-            <a:r>
-              <a:t>WE ARE CALLED TO ACT WITH JUSTICE. WE ARE CALLED TO LOVE TENDERLY.</a:t>
-            </a:r>
-          </a:p>
-          <a:p>
-            <a:pPr>
-              <a:spcAft>
-                <a:spcPts val="500"/>
-              </a:spcAft>
-              <a:defRPr sz="1900" b="0" i="0">
-                <a:solidFill>
-                  <a:srgbClr val="F5F5F5"/>
-                </a:solidFill>
-                <a:latin typeface="Calibri"/>
-              </a:defRPr>
-            </a:pPr>
-            <a:r>
-              <a:t>WE ARE CALLED TO SERVE ONE ANOTHER, TO WALK HUMBLY WITH GOD.</a:t>
+                  <a:srgbClr val="F2F0E8"/>
+                </a:solidFill>
+                <a:latin typeface="Calibri"/>
+              </a:defRPr>
+            </a:pPr>
+            <a:r>
+              <a:t>Contact your parish coordinator — thank you.</a:t>
             </a:r>
           </a:p>
         </p:txBody>
@@ -12184,13 +12063,13 @@
               </a:spcBef>
               <a:defRPr sz="1200" b="0" i="0">
                 <a:solidFill>
-                  <a:srgbClr val="DCAA5A"/>
-                </a:solidFill>
-                <a:latin typeface="Calibri"/>
-              </a:defRPr>
-            </a:pPr>
-            <a:r>
-              <a:t>Recessional</a:t>
+                  <a:srgbClr val="F2F0E8"/>
+                </a:solidFill>
+                <a:latin typeface="Calibri"/>
+              </a:defRPr>
+            </a:pPr>
+            <a:r>
+              <a:t>Announcements</a:t>
             </a:r>
           </a:p>
         </p:txBody>
@@ -12229,8 +12108,8 @@
         </p:nvSpPr>
         <p:spPr>
           <a:xfrm>
-            <a:off x="685800" y="960120"/>
-            <a:ext cx="16916400" cy="1051560"/>
+            <a:off x="685800" y="457200"/>
+            <a:ext cx="16916400" cy="8823960"/>
           </a:xfrm>
           <a:prstGeom prst="rect">
             <a:avLst/>
@@ -12244,15 +12123,34 @@
           <a:lstStyle/>
           <a:p>
             <a:pPr>
-              <a:defRPr sz="3800" b="1" i="0">
-                <a:solidFill>
-                  <a:srgbClr val="DCAA5A"/>
-                </a:solidFill>
-                <a:latin typeface="Calibri"/>
-              </a:defRPr>
-            </a:pPr>
-            <a:r>
-              <a:t>Eastertide Celebration</a:t>
+              <a:spcAft>
+                <a:spcPts val="500"/>
+              </a:spcAft>
+              <a:defRPr sz="1900" b="1" i="0">
+                <a:solidFill>
+                  <a:srgbClr val="F5F5F5"/>
+                </a:solidFill>
+                <a:latin typeface="Calibri"/>
+              </a:defRPr>
+            </a:pPr>
+            <a:r>
+              <a:t>Updates and Announcements</a:t>
+            </a:r>
+          </a:p>
+          <a:p>
+            <a:pPr>
+              <a:spcAft>
+                <a:spcPts val="500"/>
+              </a:spcAft>
+              <a:defRPr sz="1500" b="0" i="1">
+                <a:solidFill>
+                  <a:srgbClr val="F2F0E8"/>
+                </a:solidFill>
+                <a:latin typeface="Calibri"/>
+              </a:defRPr>
+            </a:pPr>
+            <a:r>
+              <a:t>Like and follow: Gwangju Filipino Catholic Community (add QR in slide master later).</a:t>
             </a:r>
           </a:p>
         </p:txBody>
@@ -12260,176 +12158,6 @@
       <p:sp>
         <p:nvSpPr>
           <p:cNvPr id="3" name="TextBox 2"/>
-          <p:cNvSpPr txBox="1"/>
-          <p:nvPr/>
-        </p:nvSpPr>
-        <p:spPr>
-          <a:xfrm>
-            <a:off x="685800" y="2103120"/>
-            <a:ext cx="16916400" cy="2011680"/>
-          </a:xfrm>
-          <a:prstGeom prst="rect">
-            <a:avLst/>
-          </a:prstGeom>
-          <a:noFill/>
-        </p:spPr>
-        <p:txBody>
-          <a:bodyPr wrap="square" lIns="109728" rIns="109728" tIns="73152" bIns="73152">
-            <a:noAutofit/>
-          </a:bodyPr>
-          <a:lstStyle/>
-          <a:p>
-            <a:pPr>
-              <a:spcAft>
-                <a:spcPts val="200"/>
-              </a:spcAft>
-              <a:defRPr sz="2100" b="1" i="0">
-                <a:solidFill>
-                  <a:srgbClr val="F5F5F5"/>
-                </a:solidFill>
-                <a:latin typeface="Calibri"/>
-              </a:defRPr>
-            </a:pPr>
-            <a:r>
-              <a:t>MASS CELEBRANT: Rev. Fr. Jonrey Lauron, RCJ</a:t>
-            </a:r>
-          </a:p>
-          <a:p>
-            <a:pPr>
-              <a:spcAft>
-                <a:spcPts val="200"/>
-              </a:spcAft>
-              <a:defRPr sz="2100" b="0" i="0">
-                <a:solidFill>
-                  <a:srgbClr val="F5F5F5"/>
-                </a:solidFill>
-                <a:latin typeface="Calibri"/>
-              </a:defRPr>
-            </a:pPr>
-          </a:p>
-          <a:p>
-            <a:pPr>
-              <a:spcAft>
-                <a:spcPts val="200"/>
-              </a:spcAft>
-              <a:defRPr sz="2100" b="0" i="0">
-                <a:solidFill>
-                  <a:srgbClr val="F5F5F5"/>
-                </a:solidFill>
-                <a:latin typeface="Calibri"/>
-              </a:defRPr>
-            </a:pPr>
-            <a:r>
-              <a:t>GWANGJU</a:t>
-            </a:r>
-            <a:br/>
-            <a:r>
-              <a:t>FILIPINO</a:t>
-            </a:r>
-            <a:br/>
-            <a:r>
-              <a:t>CATHOLIC</a:t>
-            </a:r>
-            <a:br/>
-            <a:r>
-              <a:t>COMMUNITY</a:t>
-            </a:r>
-          </a:p>
-          <a:p>
-            <a:pPr>
-              <a:spcAft>
-                <a:spcPts val="200"/>
-              </a:spcAft>
-              <a:defRPr sz="2100" b="0" i="0">
-                <a:solidFill>
-                  <a:srgbClr val="F5F5F5"/>
-                </a:solidFill>
-                <a:latin typeface="Calibri"/>
-              </a:defRPr>
-            </a:pPr>
-          </a:p>
-          <a:p>
-            <a:pPr>
-              <a:spcAft>
-                <a:spcPts val="200"/>
-              </a:spcAft>
-              <a:defRPr sz="2100" b="0" i="0">
-                <a:solidFill>
-                  <a:srgbClr val="F5F5F5"/>
-                </a:solidFill>
-                <a:latin typeface="Calibri"/>
-              </a:defRPr>
-            </a:pPr>
-            <a:r>
-              <a:t>Gospel (John 14:15-21)</a:t>
-            </a:r>
-          </a:p>
-          <a:p>
-            <a:pPr>
-              <a:spcAft>
-                <a:spcPts val="200"/>
-              </a:spcAft>
-              <a:defRPr sz="2100" b="0" i="0">
-                <a:solidFill>
-                  <a:srgbClr val="F5F5F5"/>
-                </a:solidFill>
-                <a:latin typeface="Calibri"/>
-              </a:defRPr>
-            </a:pPr>
-            <a:r>
-              <a:t>“If you love me, you will keep my commandments.”</a:t>
-            </a:r>
-          </a:p>
-          <a:p>
-            <a:pPr>
-              <a:spcAft>
-                <a:spcPts val="200"/>
-              </a:spcAft>
-              <a:defRPr sz="2100" b="0" i="0">
-                <a:solidFill>
-                  <a:srgbClr val="F5F5F5"/>
-                </a:solidFill>
-                <a:latin typeface="Calibri"/>
-              </a:defRPr>
-            </a:pPr>
-          </a:p>
-          <a:p>
-            <a:pPr>
-              <a:spcAft>
-                <a:spcPts val="200"/>
-              </a:spcAft>
-              <a:defRPr sz="2100" b="0" i="0">
-                <a:solidFill>
-                  <a:srgbClr val="F5F5F5"/>
-                </a:solidFill>
-                <a:latin typeface="Calibri"/>
-              </a:defRPr>
-            </a:pPr>
-            <a:r>
-              <a:t>YEAR A</a:t>
-            </a:r>
-          </a:p>
-          <a:p>
-            <a:pPr>
-              <a:spcAft>
-                <a:spcPts val="200"/>
-              </a:spcAft>
-              <a:defRPr sz="2100" b="0" i="0">
-                <a:solidFill>
-                  <a:srgbClr val="F5F5F5"/>
-                </a:solidFill>
-                <a:latin typeface="Calibri"/>
-              </a:defRPr>
-            </a:pPr>
-            <a:r>
-              <a:t>2026-05-10 · Eastertide</a:t>
-            </a:r>
-          </a:p>
-        </p:txBody>
-      </p:sp>
-      <p:sp>
-        <p:nvSpPr>
-          <p:cNvPr id="4" name="TextBox 3"/>
           <p:cNvSpPr txBox="1"/>
           <p:nvPr/>
         </p:nvSpPr>
@@ -12468,13 +12196,210 @@
               </a:spcBef>
               <a:defRPr sz="1200" b="0" i="0">
                 <a:solidFill>
-                  <a:srgbClr val="DCAA5A"/>
-                </a:solidFill>
-                <a:latin typeface="Calibri"/>
-              </a:defRPr>
-            </a:pPr>
-            <a:r>
-              <a:t>Mass poster / divider</a:t>
+                  <a:srgbClr val="F2F0E8"/>
+                </a:solidFill>
+                <a:latin typeface="Calibri"/>
+              </a:defRPr>
+            </a:pPr>
+            <a:r>
+              <a:t>Announcements</a:t>
+            </a:r>
+          </a:p>
+        </p:txBody>
+      </p:sp>
+    </p:spTree>
+  </p:cSld>
+  <p:clrMapOvr>
+    <a:masterClrMapping/>
+  </p:clrMapOvr>
+</p:sld>
+</file>
+
+<file path=ppt/slides/slide59.xml><?xml version="1.0" encoding="utf-8"?>
+<p:sld xmlns:a="http://schemas.openxmlformats.org/drawingml/2006/main" xmlns:p="http://schemas.openxmlformats.org/presentationml/2006/main" xmlns:r="http://schemas.openxmlformats.org/officeDocument/2006/relationships">
+  <p:cSld>
+    <p:bg>
+      <p:bgPr>
+        <a:solidFill>
+          <a:srgbClr val="121216"/>
+        </a:solidFill>
+        <a:effectLst/>
+      </p:bgPr>
+    </p:bg>
+    <p:spTree>
+      <p:nvGrpSpPr>
+        <p:cNvPr id="1" name=""/>
+        <p:cNvGrpSpPr/>
+        <p:nvPr/>
+      </p:nvGrpSpPr>
+      <p:grpSpPr/>
+      <p:sp>
+        <p:nvSpPr>
+          <p:cNvPr id="2" name="TextBox 1"/>
+          <p:cNvSpPr txBox="1"/>
+          <p:nvPr/>
+        </p:nvSpPr>
+        <p:spPr>
+          <a:xfrm>
+            <a:off x="685800" y="457200"/>
+            <a:ext cx="16916400" cy="8823960"/>
+          </a:xfrm>
+          <a:prstGeom prst="rect">
+            <a:avLst/>
+          </a:prstGeom>
+          <a:noFill/>
+        </p:spPr>
+        <p:txBody>
+          <a:bodyPr wrap="square" lIns="109728" rIns="109728" tIns="73152" bIns="73152">
+            <a:noAutofit/>
+          </a:bodyPr>
+          <a:lstStyle/>
+          <a:p>
+            <a:pPr>
+              <a:spcAft>
+                <a:spcPts val="500"/>
+              </a:spcAft>
+              <a:defRPr sz="2000" b="1" i="0">
+                <a:solidFill>
+                  <a:srgbClr val="F2F0E8"/>
+                </a:solidFill>
+                <a:latin typeface="Calibri"/>
+              </a:defRPr>
+            </a:pPr>
+            <a:r>
+              <a:t>The Lord be with you.</a:t>
+            </a:r>
+          </a:p>
+          <a:p>
+            <a:pPr>
+              <a:spcAft>
+                <a:spcPts val="500"/>
+              </a:spcAft>
+              <a:defRPr sz="2000" b="1" i="0">
+                <a:solidFill>
+                  <a:srgbClr val="F5F5F5"/>
+                </a:solidFill>
+                <a:latin typeface="Calibri"/>
+              </a:defRPr>
+            </a:pPr>
+            <a:r>
+              <a:t>And with your spirit.</a:t>
+            </a:r>
+          </a:p>
+          <a:p>
+            <a:pPr>
+              <a:spcAft>
+                <a:spcPts val="500"/>
+              </a:spcAft>
+              <a:defRPr sz="2000" b="1" i="0">
+                <a:solidFill>
+                  <a:srgbClr val="F2F0E8"/>
+                </a:solidFill>
+                <a:latin typeface="Calibri"/>
+              </a:defRPr>
+            </a:pPr>
+            <a:r>
+              <a:t>May almighty God bless you, the Father, and the Son, and the Holy Spirit.</a:t>
+            </a:r>
+          </a:p>
+          <a:p>
+            <a:pPr>
+              <a:spcAft>
+                <a:spcPts val="500"/>
+              </a:spcAft>
+              <a:defRPr sz="2000" b="1" i="0">
+                <a:solidFill>
+                  <a:srgbClr val="F5F5F5"/>
+                </a:solidFill>
+                <a:latin typeface="Calibri"/>
+              </a:defRPr>
+            </a:pPr>
+            <a:r>
+              <a:t>Amen.</a:t>
+            </a:r>
+          </a:p>
+          <a:p>
+            <a:pPr>
+              <a:spcAft>
+                <a:spcPts val="500"/>
+              </a:spcAft>
+              <a:defRPr sz="2000" b="1" i="0">
+                <a:solidFill>
+                  <a:srgbClr val="F2F0E8"/>
+                </a:solidFill>
+                <a:latin typeface="Calibri"/>
+              </a:defRPr>
+            </a:pPr>
+            <a:r>
+              <a:t>Go in peace, glorifying the Lord by your life.</a:t>
+            </a:r>
+          </a:p>
+          <a:p>
+            <a:pPr>
+              <a:spcAft>
+                <a:spcPts val="500"/>
+              </a:spcAft>
+              <a:defRPr sz="2000" b="1" i="0">
+                <a:solidFill>
+                  <a:srgbClr val="F5F5F5"/>
+                </a:solidFill>
+                <a:latin typeface="Calibri"/>
+              </a:defRPr>
+            </a:pPr>
+            <a:r>
+              <a:t>Thanks be to God.</a:t>
+            </a:r>
+          </a:p>
+        </p:txBody>
+      </p:sp>
+      <p:sp>
+        <p:nvSpPr>
+          <p:cNvPr id="3" name="TextBox 2"/>
+          <p:cNvSpPr txBox="1"/>
+          <p:nvPr/>
+        </p:nvSpPr>
+        <p:spPr>
+          <a:xfrm>
+            <a:off x="685800" y="9418320"/>
+            <a:ext cx="16916400" cy="777240"/>
+          </a:xfrm>
+          <a:prstGeom prst="rect">
+            <a:avLst/>
+          </a:prstGeom>
+          <a:noFill/>
+        </p:spPr>
+        <p:txBody>
+          <a:bodyPr wrap="square" lIns="109728" rIns="109728" tIns="73152" bIns="73152">
+            <a:noAutofit/>
+          </a:bodyPr>
+          <a:lstStyle/>
+          <a:p>
+            <a:pPr>
+              <a:defRPr sz="1300" b="1" i="0">
+                <a:solidFill>
+                  <a:srgbClr val="9B9BA5"/>
+                </a:solidFill>
+                <a:latin typeface="Calibri"/>
+              </a:defRPr>
+            </a:pPr>
+            <a:r>
+              <a:t>GWANGJU FILIPINO CATHOLIC COMMUNITY</a:t>
+            </a:r>
+          </a:p>
+          <a:p>
+            <a:pPr>
+              <a:spcBef>
+                <a:spcPts val="200"/>
+              </a:spcBef>
+              <a:defRPr sz="1200" b="0" i="0">
+                <a:solidFill>
+                  <a:srgbClr val="F2F0E8"/>
+                </a:solidFill>
+                <a:latin typeface="Calibri"/>
+              </a:defRPr>
+            </a:pPr>
+            <a:r>
+              <a:t>Final Blessing</a:t>
             </a:r>
           </a:p>
         </p:txBody>
@@ -12514,7 +12439,7 @@
         <p:spPr>
           <a:xfrm>
             <a:off x="685800" y="457200"/>
-            <a:ext cx="16916400" cy="8778240"/>
+            <a:ext cx="16916400" cy="8823960"/>
           </a:xfrm>
           <a:prstGeom prst="rect">
             <a:avLst/>
@@ -12533,7 +12458,7 @@
               </a:spcAft>
               <a:defRPr sz="2000" b="1" i="0">
                 <a:solidFill>
-                  <a:srgbClr val="DCAA5A"/>
+                  <a:srgbClr val="F2F0E8"/>
                 </a:solidFill>
                 <a:latin typeface="Calibri"/>
               </a:defRPr>
@@ -12585,13 +12510,458 @@
               </a:spcBef>
               <a:defRPr sz="1200" b="0" i="0">
                 <a:solidFill>
-                  <a:srgbClr val="DCAA5A"/>
+                  <a:srgbClr val="F2F0E8"/>
                 </a:solidFill>
                 <a:latin typeface="Calibri"/>
               </a:defRPr>
             </a:pPr>
             <a:r>
               <a:t>Penitential Act</a:t>
+            </a:r>
+          </a:p>
+        </p:txBody>
+      </p:sp>
+    </p:spTree>
+  </p:cSld>
+  <p:clrMapOvr>
+    <a:masterClrMapping/>
+  </p:clrMapOvr>
+</p:sld>
+</file>
+
+<file path=ppt/slides/slide60.xml><?xml version="1.0" encoding="utf-8"?>
+<p:sld xmlns:a="http://schemas.openxmlformats.org/drawingml/2006/main" xmlns:p="http://schemas.openxmlformats.org/presentationml/2006/main" xmlns:r="http://schemas.openxmlformats.org/officeDocument/2006/relationships">
+  <p:cSld>
+    <p:bg>
+      <p:bgPr>
+        <a:solidFill>
+          <a:srgbClr val="121216"/>
+        </a:solidFill>
+        <a:effectLst/>
+      </p:bgPr>
+    </p:bg>
+    <p:spTree>
+      <p:nvGrpSpPr>
+        <p:cNvPr id="1" name=""/>
+        <p:cNvGrpSpPr/>
+        <p:nvPr/>
+      </p:nvGrpSpPr>
+      <p:grpSpPr/>
+      <p:sp>
+        <p:nvSpPr>
+          <p:cNvPr id="2" name="TextBox 1"/>
+          <p:cNvSpPr txBox="1"/>
+          <p:nvPr/>
+        </p:nvSpPr>
+        <p:spPr>
+          <a:xfrm>
+            <a:off x="685800" y="457200"/>
+            <a:ext cx="16916400" cy="8823960"/>
+          </a:xfrm>
+          <a:prstGeom prst="rect">
+            <a:avLst/>
+          </a:prstGeom>
+          <a:noFill/>
+        </p:spPr>
+        <p:txBody>
+          <a:bodyPr wrap="square" lIns="109728" rIns="109728" tIns="73152" bIns="73152">
+            <a:noAutofit/>
+          </a:bodyPr>
+          <a:lstStyle/>
+          <a:p>
+            <a:pPr>
+              <a:spcAft>
+                <a:spcPts val="500"/>
+              </a:spcAft>
+              <a:defRPr sz="1900" b="1" i="0">
+                <a:solidFill>
+                  <a:srgbClr val="F5F5F5"/>
+                </a:solidFill>
+                <a:latin typeface="Calibri"/>
+              </a:defRPr>
+            </a:pPr>
+            <a:r>
+              <a:t>COME! LIVE IN THE LIGHT! SHINE WITH THE JOY AND THE LOVE OF THE LORD!</a:t>
+            </a:r>
+          </a:p>
+          <a:p>
+            <a:pPr>
+              <a:spcAft>
+                <a:spcPts val="500"/>
+              </a:spcAft>
+              <a:defRPr sz="1900" b="0" i="0">
+                <a:solidFill>
+                  <a:srgbClr val="F5F5F5"/>
+                </a:solidFill>
+                <a:latin typeface="Calibri"/>
+              </a:defRPr>
+            </a:pPr>
+            <a:r>
+              <a:t>WE ARE CALLED… TO BE LIGHT FOR THE KINGDOM…</a:t>
+            </a:r>
+          </a:p>
+          <a:p>
+            <a:pPr>
+              <a:spcAft>
+                <a:spcPts val="500"/>
+              </a:spcAft>
+              <a:defRPr sz="1500" b="0" i="1">
+                <a:solidFill>
+                  <a:srgbClr val="F2F0E8"/>
+                </a:solidFill>
+                <a:latin typeface="Calibri"/>
+              </a:defRPr>
+            </a:pPr>
+            <a:r>
+              <a:t>Recessional — We Are Called (David Haas). Replace if needed.</a:t>
+            </a:r>
+          </a:p>
+          <a:p>
+            <a:pPr>
+              <a:spcAft>
+                <a:spcPts val="500"/>
+              </a:spcAft>
+              <a:defRPr sz="1900" b="1" i="0">
+                <a:solidFill>
+                  <a:srgbClr val="F5F5F5"/>
+                </a:solidFill>
+                <a:latin typeface="Calibri"/>
+              </a:defRPr>
+            </a:pPr>
+            <a:r>
+              <a:t>WE ARE CALLED TO ACT WITH JUSTICE. WE ARE CALLED TO LOVE TENDERLY.</a:t>
+            </a:r>
+          </a:p>
+          <a:p>
+            <a:pPr>
+              <a:spcAft>
+                <a:spcPts val="500"/>
+              </a:spcAft>
+              <a:defRPr sz="1900" b="0" i="0">
+                <a:solidFill>
+                  <a:srgbClr val="F5F5F5"/>
+                </a:solidFill>
+                <a:latin typeface="Calibri"/>
+              </a:defRPr>
+            </a:pPr>
+            <a:r>
+              <a:t>WE ARE CALLED TO SERVE ONE ANOTHER, TO WALK HUMBLY WITH GOD.</a:t>
+            </a:r>
+          </a:p>
+        </p:txBody>
+      </p:sp>
+      <p:sp>
+        <p:nvSpPr>
+          <p:cNvPr id="3" name="TextBox 2"/>
+          <p:cNvSpPr txBox="1"/>
+          <p:nvPr/>
+        </p:nvSpPr>
+        <p:spPr>
+          <a:xfrm>
+            <a:off x="685800" y="9418320"/>
+            <a:ext cx="16916400" cy="777240"/>
+          </a:xfrm>
+          <a:prstGeom prst="rect">
+            <a:avLst/>
+          </a:prstGeom>
+          <a:noFill/>
+        </p:spPr>
+        <p:txBody>
+          <a:bodyPr wrap="square" lIns="109728" rIns="109728" tIns="73152" bIns="73152">
+            <a:noAutofit/>
+          </a:bodyPr>
+          <a:lstStyle/>
+          <a:p>
+            <a:pPr>
+              <a:defRPr sz="1300" b="1" i="0">
+                <a:solidFill>
+                  <a:srgbClr val="9B9BA5"/>
+                </a:solidFill>
+                <a:latin typeface="Calibri"/>
+              </a:defRPr>
+            </a:pPr>
+            <a:r>
+              <a:t>GWANGJU FILIPINO CATHOLIC COMMUNITY</a:t>
+            </a:r>
+          </a:p>
+          <a:p>
+            <a:pPr>
+              <a:spcBef>
+                <a:spcPts val="200"/>
+              </a:spcBef>
+              <a:defRPr sz="1200" b="0" i="0">
+                <a:solidFill>
+                  <a:srgbClr val="F2F0E8"/>
+                </a:solidFill>
+                <a:latin typeface="Calibri"/>
+              </a:defRPr>
+            </a:pPr>
+            <a:r>
+              <a:t>Recessional</a:t>
+            </a:r>
+          </a:p>
+        </p:txBody>
+      </p:sp>
+    </p:spTree>
+  </p:cSld>
+  <p:clrMapOvr>
+    <a:masterClrMapping/>
+  </p:clrMapOvr>
+</p:sld>
+</file>
+
+<file path=ppt/slides/slide61.xml><?xml version="1.0" encoding="utf-8"?>
+<p:sld xmlns:a="http://schemas.openxmlformats.org/drawingml/2006/main" xmlns:p="http://schemas.openxmlformats.org/presentationml/2006/main" xmlns:r="http://schemas.openxmlformats.org/officeDocument/2006/relationships">
+  <p:cSld>
+    <p:bg>
+      <p:bgPr>
+        <a:solidFill>
+          <a:srgbClr val="121216"/>
+        </a:solidFill>
+        <a:effectLst/>
+      </p:bgPr>
+    </p:bg>
+    <p:spTree>
+      <p:nvGrpSpPr>
+        <p:cNvPr id="1" name=""/>
+        <p:cNvGrpSpPr/>
+        <p:nvPr/>
+      </p:nvGrpSpPr>
+      <p:grpSpPr/>
+      <p:sp>
+        <p:nvSpPr>
+          <p:cNvPr id="2" name="TextBox 1"/>
+          <p:cNvSpPr txBox="1"/>
+          <p:nvPr/>
+        </p:nvSpPr>
+        <p:spPr>
+          <a:xfrm>
+            <a:off x="685800" y="914400"/>
+            <a:ext cx="16916400" cy="5943600"/>
+          </a:xfrm>
+          <a:prstGeom prst="rect">
+            <a:avLst/>
+          </a:prstGeom>
+          <a:noFill/>
+        </p:spPr>
+        <p:txBody>
+          <a:bodyPr wrap="square" lIns="109728" rIns="109728" tIns="73152" bIns="73152">
+            <a:noAutofit/>
+          </a:bodyPr>
+          <a:lstStyle/>
+          <a:p>
+            <a:pPr>
+              <a:spcAft>
+                <a:spcPts val="300"/>
+              </a:spcAft>
+              <a:defRPr sz="2100" b="1" i="0">
+                <a:solidFill>
+                  <a:srgbClr val="F2F0E8"/>
+                </a:solidFill>
+                <a:latin typeface="Calibri"/>
+              </a:defRPr>
+            </a:pPr>
+            <a:r>
+              <a:t>MASS CELEBRANT:</a:t>
+            </a:r>
+          </a:p>
+          <a:p>
+            <a:pPr>
+              <a:spcAft>
+                <a:spcPts val="300"/>
+              </a:spcAft>
+              <a:defRPr sz="2100" b="0" i="0">
+                <a:solidFill>
+                  <a:srgbClr val="F5F5F5"/>
+                </a:solidFill>
+                <a:latin typeface="Calibri"/>
+              </a:defRPr>
+            </a:pPr>
+            <a:r>
+              <a:t>Hye</a:t>
+            </a:r>
+          </a:p>
+          <a:p>
+            <a:pPr>
+              <a:spcAft>
+                <a:spcPts val="300"/>
+              </a:spcAft>
+              <a:defRPr sz="2100" b="0" i="0">
+                <a:solidFill>
+                  <a:srgbClr val="F5F5F5"/>
+                </a:solidFill>
+                <a:latin typeface="Calibri"/>
+              </a:defRPr>
+            </a:pPr>
+          </a:p>
+          <a:p>
+            <a:pPr>
+              <a:spcAft>
+                <a:spcPts val="300"/>
+              </a:spcAft>
+              <a:defRPr sz="2100" b="0" i="0">
+                <a:solidFill>
+                  <a:srgbClr val="F5F5F5"/>
+                </a:solidFill>
+                <a:latin typeface="Calibri"/>
+              </a:defRPr>
+            </a:pPr>
+            <a:r>
+              <a:t>GWANGJU</a:t>
+            </a:r>
+            <a:br/>
+            <a:r>
+              <a:t>FILIPINO</a:t>
+            </a:r>
+            <a:br/>
+            <a:r>
+              <a:t>CATHOLIC</a:t>
+            </a:r>
+            <a:br/>
+            <a:r>
+              <a:t>COMMUNITY</a:t>
+            </a:r>
+          </a:p>
+          <a:p>
+            <a:pPr>
+              <a:spcAft>
+                <a:spcPts val="300"/>
+              </a:spcAft>
+              <a:defRPr sz="2100" b="0" i="0">
+                <a:solidFill>
+                  <a:srgbClr val="F5F5F5"/>
+                </a:solidFill>
+                <a:latin typeface="Calibri"/>
+              </a:defRPr>
+            </a:pPr>
+          </a:p>
+          <a:p>
+            <a:pPr>
+              <a:spcAft>
+                <a:spcPts val="300"/>
+              </a:spcAft>
+              <a:defRPr sz="2100" b="0" i="0">
+                <a:solidFill>
+                  <a:srgbClr val="F5F5F5"/>
+                </a:solidFill>
+                <a:latin typeface="Calibri"/>
+              </a:defRPr>
+            </a:pPr>
+            <a:r>
+              <a:t>Gospel (John 10:1-10)</a:t>
+            </a:r>
+          </a:p>
+          <a:p>
+            <a:pPr>
+              <a:spcAft>
+                <a:spcPts val="300"/>
+              </a:spcAft>
+              <a:defRPr sz="2100" b="0" i="0">
+                <a:solidFill>
+                  <a:srgbClr val="F5F5F5"/>
+                </a:solidFill>
+                <a:latin typeface="Calibri"/>
+              </a:defRPr>
+            </a:pPr>
+            <a:r>
+              <a:t>“Amen, amen, I say to you, whoever does not enter a sheepfold through the gate but climbs over elsewhere is a thief and a robber.”</a:t>
+            </a:r>
+          </a:p>
+          <a:p>
+            <a:pPr>
+              <a:spcAft>
+                <a:spcPts val="300"/>
+              </a:spcAft>
+              <a:defRPr sz="2100" b="0" i="0">
+                <a:solidFill>
+                  <a:srgbClr val="F5F5F5"/>
+                </a:solidFill>
+                <a:latin typeface="Calibri"/>
+              </a:defRPr>
+            </a:pPr>
+          </a:p>
+          <a:p>
+            <a:pPr>
+              <a:spcAft>
+                <a:spcPts val="300"/>
+              </a:spcAft>
+              <a:defRPr sz="2100" b="0" i="0">
+                <a:solidFill>
+                  <a:srgbClr val="F5F5F5"/>
+                </a:solidFill>
+                <a:latin typeface="Calibri"/>
+              </a:defRPr>
+            </a:pPr>
+            <a:r>
+              <a:t>YEAR A</a:t>
+            </a:r>
+          </a:p>
+          <a:p>
+            <a:pPr>
+              <a:spcAft>
+                <a:spcPts val="300"/>
+              </a:spcAft>
+              <a:defRPr sz="2100" b="0" i="0">
+                <a:solidFill>
+                  <a:srgbClr val="F5F5F5"/>
+                </a:solidFill>
+                <a:latin typeface="Calibri"/>
+              </a:defRPr>
+            </a:pPr>
+            <a:r>
+              <a:t>2026-04-26 · Eastertide</a:t>
+            </a:r>
+          </a:p>
+        </p:txBody>
+      </p:sp>
+      <p:sp>
+        <p:nvSpPr>
+          <p:cNvPr id="3" name="TextBox 2"/>
+          <p:cNvSpPr txBox="1"/>
+          <p:nvPr/>
+        </p:nvSpPr>
+        <p:spPr>
+          <a:xfrm>
+            <a:off x="685800" y="9418320"/>
+            <a:ext cx="16916400" cy="777240"/>
+          </a:xfrm>
+          <a:prstGeom prst="rect">
+            <a:avLst/>
+          </a:prstGeom>
+          <a:noFill/>
+        </p:spPr>
+        <p:txBody>
+          <a:bodyPr wrap="square" lIns="109728" rIns="109728" tIns="73152" bIns="73152">
+            <a:noAutofit/>
+          </a:bodyPr>
+          <a:lstStyle/>
+          <a:p>
+            <a:pPr>
+              <a:defRPr sz="1300" b="1" i="0">
+                <a:solidFill>
+                  <a:srgbClr val="9B9BA5"/>
+                </a:solidFill>
+                <a:latin typeface="Calibri"/>
+              </a:defRPr>
+            </a:pPr>
+            <a:r>
+              <a:t>GWANGJU FILIPINO CATHOLIC COMMUNITY</a:t>
+            </a:r>
+          </a:p>
+          <a:p>
+            <a:pPr>
+              <a:spcBef>
+                <a:spcPts val="200"/>
+              </a:spcBef>
+              <a:defRPr sz="1200" b="0" i="0">
+                <a:solidFill>
+                  <a:srgbClr val="F2F0E8"/>
+                </a:solidFill>
+                <a:latin typeface="Calibri"/>
+              </a:defRPr>
+            </a:pPr>
+            <a:r>
+              <a:t>Mass poster / divider</a:t>
             </a:r>
           </a:p>
         </p:txBody>
@@ -12631,7 +13001,7 @@
         <p:spPr>
           <a:xfrm>
             <a:off x="685800" y="457200"/>
-            <a:ext cx="16916400" cy="8778240"/>
+            <a:ext cx="16916400" cy="8823960"/>
           </a:xfrm>
           <a:prstGeom prst="rect">
             <a:avLst/>
@@ -12702,7 +13072,7 @@
               </a:spcBef>
               <a:defRPr sz="1200" b="0" i="0">
                 <a:solidFill>
-                  <a:srgbClr val="DCAA5A"/>
+                  <a:srgbClr val="F2F0E8"/>
                 </a:solidFill>
                 <a:latin typeface="Calibri"/>
               </a:defRPr>
@@ -12748,7 +13118,7 @@
         <p:spPr>
           <a:xfrm>
             <a:off x="685800" y="457200"/>
-            <a:ext cx="16916400" cy="8778240"/>
+            <a:ext cx="16916400" cy="8823960"/>
           </a:xfrm>
           <a:prstGeom prst="rect">
             <a:avLst/>
@@ -12767,7 +13137,7 @@
               </a:spcAft>
               <a:defRPr sz="2000" b="1" i="0">
                 <a:solidFill>
-                  <a:srgbClr val="DCAA5A"/>
+                  <a:srgbClr val="F2F0E8"/>
                 </a:solidFill>
                 <a:latin typeface="Calibri"/>
               </a:defRPr>
@@ -12835,7 +13205,7 @@
               </a:spcBef>
               <a:defRPr sz="1200" b="0" i="0">
                 <a:solidFill>
-                  <a:srgbClr val="DCAA5A"/>
+                  <a:srgbClr val="F2F0E8"/>
                 </a:solidFill>
                 <a:latin typeface="Calibri"/>
               </a:defRPr>
@@ -12881,7 +13251,7 @@
         <p:spPr>
           <a:xfrm>
             <a:off x="685800" y="457200"/>
-            <a:ext cx="16916400" cy="8778240"/>
+            <a:ext cx="16916400" cy="8823960"/>
           </a:xfrm>
           <a:prstGeom prst="rect">
             <a:avLst/>
@@ -12916,7 +13286,7 @@
               </a:spcAft>
               <a:defRPr sz="1500" b="0" i="1">
                 <a:solidFill>
-                  <a:srgbClr val="DCAA5A"/>
+                  <a:srgbClr val="F2F0E8"/>
                 </a:solidFill>
                 <a:latin typeface="Calibri"/>
               </a:defRPr>
@@ -12968,7 +13338,7 @@
               </a:spcBef>
               <a:defRPr sz="1200" b="0" i="0">
                 <a:solidFill>
-                  <a:srgbClr val="DCAA5A"/>
+                  <a:srgbClr val="F2F0E8"/>
                 </a:solidFill>
                 <a:latin typeface="Calibri"/>
               </a:defRPr>

--- a/church_media_generator/outputs/mass_presentation.pptx
+++ b/church_media_generator/outputs/mass_presentation.pptx
@@ -68,8 +68,6 @@
     <p:sldId id="316" r:id="rId67"/>
     <p:sldId id="317" r:id="rId68"/>
     <p:sldId id="318" r:id="rId69"/>
-    <p:sldId id="319" r:id="rId70"/>
-    <p:sldId id="320" r:id="rId71"/>
   </p:sldIdLst>
   <p:sldSz cx="18288000" cy="10287000" type="screen4x3"/>
   <p:notesSz cx="6858000" cy="9144000"/>
@@ -3177,7 +3175,7 @@
         <p:spPr>
           <a:xfrm>
             <a:off x="685800" y="256032"/>
-            <a:ext cx="756904" cy="749807"/>
+            <a:ext cx="387682" cy="384048"/>
           </a:xfrm>
           <a:prstGeom prst="rect">
             <a:avLst/>
@@ -3192,16 +3190,16 @@
         </p:nvSpPr>
         <p:spPr>
           <a:xfrm>
-            <a:off x="1570720" y="256032"/>
-            <a:ext cx="16031480" cy="868680"/>
-          </a:xfrm>
-          <a:prstGeom prst="rect">
-            <a:avLst/>
-          </a:prstGeom>
-          <a:noFill/>
-        </p:spPr>
-        <p:txBody>
-          <a:bodyPr wrap="square" lIns="109728" rIns="109728" tIns="73152" bIns="73152">
+            <a:off x="1201498" y="256032"/>
+            <a:ext cx="16400702" cy="384048"/>
+          </a:xfrm>
+          <a:prstGeom prst="rect">
+            <a:avLst/>
+          </a:prstGeom>
+          <a:noFill/>
+        </p:spPr>
+        <p:txBody>
+          <a:bodyPr wrap="square" lIns="109728" rIns="109728" tIns="73152" bIns="73152" anchor="ctr">
             <a:noAutofit/>
           </a:bodyPr>
           <a:lstStyle/>
@@ -3370,7 +3368,7 @@
         <p:spPr>
           <a:xfrm>
             <a:off x="685800" y="256032"/>
-            <a:ext cx="756904" cy="749807"/>
+            <a:ext cx="387682" cy="384048"/>
           </a:xfrm>
           <a:prstGeom prst="rect">
             <a:avLst/>
@@ -3385,16 +3383,16 @@
         </p:nvSpPr>
         <p:spPr>
           <a:xfrm>
-            <a:off x="1570720" y="256032"/>
-            <a:ext cx="16031480" cy="868680"/>
-          </a:xfrm>
-          <a:prstGeom prst="rect">
-            <a:avLst/>
-          </a:prstGeom>
-          <a:noFill/>
-        </p:spPr>
-        <p:txBody>
-          <a:bodyPr wrap="square" lIns="109728" rIns="109728" tIns="73152" bIns="73152">
+            <a:off x="1201498" y="256032"/>
+            <a:ext cx="16400702" cy="384048"/>
+          </a:xfrm>
+          <a:prstGeom prst="rect">
+            <a:avLst/>
+          </a:prstGeom>
+          <a:noFill/>
+        </p:spPr>
+        <p:txBody>
+          <a:bodyPr wrap="square" lIns="109728" rIns="109728" tIns="73152" bIns="73152" anchor="ctr">
             <a:noAutofit/>
           </a:bodyPr>
           <a:lstStyle/>
@@ -3441,13 +3439,13 @@
               </a:spcAft>
               <a:defRPr sz="2000" b="1" i="0">
                 <a:solidFill>
-                  <a:srgbClr val="1A1A1E"/>
-                </a:solidFill>
-                <a:latin typeface="Calibri"/>
-              </a:defRPr>
-            </a:pPr>
-            <a:r>
-              <a:t>Lord, have mercy.</a:t>
+                  <a:srgbClr val="56515A"/>
+                </a:solidFill>
+                <a:latin typeface="Calibri"/>
+              </a:defRPr>
+            </a:pPr>
+            <a:r>
+              <a:t>Let us pray.</a:t>
             </a:r>
           </a:p>
           <a:p>
@@ -3455,6 +3453,22 @@
               <a:spcAft>
                 <a:spcPts val="500"/>
               </a:spcAft>
+              <a:defRPr sz="1500" b="0" i="1">
+                <a:solidFill>
+                  <a:srgbClr val="56515A"/>
+                </a:solidFill>
+                <a:latin typeface="Calibri"/>
+              </a:defRPr>
+            </a:pPr>
+            <a:r>
+              <a:t>All pray silently with the Priest for a moment. Then the Priest says the Collect for the day, that is, the Opening Prayer, in full from the Roman Missal for this celebration—nothing abbreviated. The people respond at the end.</a:t>
+            </a:r>
+          </a:p>
+          <a:p>
+            <a:pPr>
+              <a:spcAft>
+                <a:spcPts val="500"/>
+              </a:spcAft>
               <a:defRPr sz="2000" b="1" i="0">
                 <a:solidFill>
                   <a:srgbClr val="1A1A1E"/>
@@ -3463,87 +3477,7 @@
               </a:defRPr>
             </a:pPr>
             <a:r>
-              <a:t>Lord, have mercy.</a:t>
-            </a:r>
-          </a:p>
-          <a:p>
-            <a:pPr>
-              <a:spcAft>
-                <a:spcPts val="500"/>
-              </a:spcAft>
-              <a:defRPr sz="2000" b="1" i="0">
-                <a:solidFill>
-                  <a:srgbClr val="1A1A1E"/>
-                </a:solidFill>
-                <a:latin typeface="Calibri"/>
-              </a:defRPr>
-            </a:pPr>
-            <a:r>
-              <a:t>Christ, have mercy.</a:t>
-            </a:r>
-          </a:p>
-          <a:p>
-            <a:pPr>
-              <a:spcAft>
-                <a:spcPts val="500"/>
-              </a:spcAft>
-              <a:defRPr sz="2000" b="1" i="0">
-                <a:solidFill>
-                  <a:srgbClr val="1A1A1E"/>
-                </a:solidFill>
-                <a:latin typeface="Calibri"/>
-              </a:defRPr>
-            </a:pPr>
-            <a:r>
-              <a:t>Christ, have mercy.</a:t>
-            </a:r>
-          </a:p>
-          <a:p>
-            <a:pPr>
-              <a:spcAft>
-                <a:spcPts val="500"/>
-              </a:spcAft>
-              <a:defRPr sz="2000" b="1" i="0">
-                <a:solidFill>
-                  <a:srgbClr val="1A1A1E"/>
-                </a:solidFill>
-                <a:latin typeface="Calibri"/>
-              </a:defRPr>
-            </a:pPr>
-            <a:r>
-              <a:t>Lord, have mercy.</a:t>
-            </a:r>
-          </a:p>
-          <a:p>
-            <a:pPr>
-              <a:spcAft>
-                <a:spcPts val="500"/>
-              </a:spcAft>
-              <a:defRPr sz="2000" b="1" i="0">
-                <a:solidFill>
-                  <a:srgbClr val="1A1A1E"/>
-                </a:solidFill>
-                <a:latin typeface="Calibri"/>
-              </a:defRPr>
-            </a:pPr>
-            <a:r>
-              <a:t>Lord, have mercy.</a:t>
-            </a:r>
-          </a:p>
-          <a:p>
-            <a:pPr>
-              <a:spcAft>
-                <a:spcPts val="500"/>
-              </a:spcAft>
-              <a:defRPr sz="1500" b="0" i="1">
-                <a:solidFill>
-                  <a:srgbClr val="56515A"/>
-                </a:solidFill>
-                <a:latin typeface="Calibri"/>
-              </a:defRPr>
-            </a:pPr>
-            <a:r>
-              <a:t>This acclamation may also be sung, or the invocations from the Missal or approved pastoral practice may be used in full.</a:t>
+              <a:t>Amen.</a:t>
             </a:r>
           </a:p>
         </p:txBody>
@@ -3595,7 +3529,7 @@
               </a:defRPr>
             </a:pPr>
             <a:r>
-              <a:t>Kyrie Eleison</a:t>
+              <a:t>Liturgy of the Word</a:t>
             </a:r>
           </a:p>
         </p:txBody>
@@ -3643,7 +3577,7 @@
         <p:spPr>
           <a:xfrm>
             <a:off x="685800" y="256032"/>
-            <a:ext cx="756904" cy="749807"/>
+            <a:ext cx="387682" cy="384048"/>
           </a:xfrm>
           <a:prstGeom prst="rect">
             <a:avLst/>
@@ -3658,16 +3592,16 @@
         </p:nvSpPr>
         <p:spPr>
           <a:xfrm>
-            <a:off x="1570720" y="256032"/>
-            <a:ext cx="16031480" cy="868680"/>
-          </a:xfrm>
-          <a:prstGeom prst="rect">
-            <a:avLst/>
-          </a:prstGeom>
-          <a:noFill/>
-        </p:spPr>
-        <p:txBody>
-          <a:bodyPr wrap="square" lIns="109728" rIns="109728" tIns="73152" bIns="73152">
+            <a:off x="1201498" y="256032"/>
+            <a:ext cx="16400702" cy="384048"/>
+          </a:xfrm>
+          <a:prstGeom prst="rect">
+            <a:avLst/>
+          </a:prstGeom>
+          <a:noFill/>
+        </p:spPr>
+        <p:txBody>
+          <a:bodyPr wrap="square" lIns="109728" rIns="109728" tIns="73152" bIns="73152" anchor="ctr">
             <a:noAutofit/>
           </a:bodyPr>
           <a:lstStyle/>
@@ -3694,8 +3628,8 @@
         </p:nvSpPr>
         <p:spPr>
           <a:xfrm>
-            <a:off x="685800" y="1417320"/>
-            <a:ext cx="16916400" cy="7863840"/>
+            <a:off x="685800" y="1645920"/>
+            <a:ext cx="16916400" cy="4114800"/>
           </a:xfrm>
           <a:prstGeom prst="rect">
             <a:avLst/>
@@ -3708,323 +3642,20 @@
           </a:bodyPr>
           <a:lstStyle/>
           <a:p>
-            <a:pPr>
-              <a:spcAft>
-                <a:spcPts val="500"/>
-              </a:spcAft>
-              <a:defRPr sz="1900" b="1" i="0">
-                <a:solidFill>
-                  <a:srgbClr val="1A1A1E"/>
-                </a:solidFill>
-                <a:latin typeface="Calibri"/>
-              </a:defRPr>
-            </a:pPr>
-            <a:r>
-              <a:t>Glory to God in the highest,</a:t>
-            </a:r>
-          </a:p>
-          <a:p>
-            <a:pPr>
-              <a:spcAft>
-                <a:spcPts val="500"/>
-              </a:spcAft>
-              <a:defRPr sz="1900" b="0" i="0">
-                <a:solidFill>
-                  <a:srgbClr val="1A1A1E"/>
-                </a:solidFill>
-                <a:latin typeface="Calibri"/>
-              </a:defRPr>
-            </a:pPr>
-            <a:r>
-              <a:t>and on earth peace to people of good will.</a:t>
-            </a:r>
-          </a:p>
-          <a:p>
-            <a:pPr>
-              <a:spcAft>
-                <a:spcPts val="500"/>
-              </a:spcAft>
-              <a:defRPr sz="1900" b="0" i="0">
-                <a:solidFill>
-                  <a:srgbClr val="1A1A1E"/>
-                </a:solidFill>
-                <a:latin typeface="Calibri"/>
-              </a:defRPr>
-            </a:pPr>
-            <a:r>
-              <a:t>We praise you,</a:t>
-            </a:r>
-          </a:p>
-          <a:p>
-            <a:pPr>
-              <a:spcAft>
-                <a:spcPts val="500"/>
-              </a:spcAft>
-              <a:defRPr sz="1900" b="0" i="0">
-                <a:solidFill>
-                  <a:srgbClr val="1A1A1E"/>
-                </a:solidFill>
-                <a:latin typeface="Calibri"/>
-              </a:defRPr>
-            </a:pPr>
-            <a:r>
-              <a:t>we bless you,</a:t>
-            </a:r>
-          </a:p>
-          <a:p>
-            <a:pPr>
-              <a:spcAft>
-                <a:spcPts val="500"/>
-              </a:spcAft>
-              <a:defRPr sz="1900" b="0" i="0">
-                <a:solidFill>
-                  <a:srgbClr val="1A1A1E"/>
-                </a:solidFill>
-                <a:latin typeface="Calibri"/>
-              </a:defRPr>
-            </a:pPr>
-            <a:r>
-              <a:t>we adore you,</a:t>
-            </a:r>
-          </a:p>
-          <a:p>
-            <a:pPr>
-              <a:spcAft>
-                <a:spcPts val="500"/>
-              </a:spcAft>
-              <a:defRPr sz="1900" b="0" i="0">
-                <a:solidFill>
-                  <a:srgbClr val="1A1A1E"/>
-                </a:solidFill>
-                <a:latin typeface="Calibri"/>
-              </a:defRPr>
-            </a:pPr>
-            <a:r>
-              <a:t>we glorify you,</a:t>
-            </a:r>
-          </a:p>
-          <a:p>
-            <a:pPr>
-              <a:spcAft>
-                <a:spcPts val="500"/>
-              </a:spcAft>
-              <a:defRPr sz="1900" b="0" i="0">
-                <a:solidFill>
-                  <a:srgbClr val="1A1A1E"/>
-                </a:solidFill>
-                <a:latin typeface="Calibri"/>
-              </a:defRPr>
-            </a:pPr>
-            <a:r>
-              <a:t>we give you thanks for your great glory,</a:t>
-            </a:r>
-          </a:p>
-          <a:p>
-            <a:pPr>
-              <a:spcAft>
-                <a:spcPts val="500"/>
-              </a:spcAft>
-              <a:defRPr sz="1900" b="0" i="0">
-                <a:solidFill>
-                  <a:srgbClr val="1A1A1E"/>
-                </a:solidFill>
-                <a:latin typeface="Calibri"/>
-              </a:defRPr>
-            </a:pPr>
-            <a:r>
-              <a:t>Lord God, heavenly King, O God, almighty Father.</a:t>
-            </a:r>
-          </a:p>
-          <a:p>
-            <a:pPr>
-              <a:spcAft>
-                <a:spcPts val="500"/>
-              </a:spcAft>
-              <a:defRPr sz="1900" b="1" i="0">
-                <a:solidFill>
-                  <a:srgbClr val="1A1A1E"/>
-                </a:solidFill>
-                <a:latin typeface="Calibri"/>
-              </a:defRPr>
-            </a:pPr>
-            <a:r>
-              <a:t>Lord Jesus Christ, Only Begotten Son,</a:t>
-            </a:r>
-          </a:p>
-          <a:p>
-            <a:pPr>
-              <a:spcAft>
-                <a:spcPts val="500"/>
-              </a:spcAft>
-              <a:defRPr sz="1900" b="0" i="0">
-                <a:solidFill>
-                  <a:srgbClr val="1A1A1E"/>
-                </a:solidFill>
-                <a:latin typeface="Calibri"/>
-              </a:defRPr>
-            </a:pPr>
-            <a:r>
-              <a:t>Lord God, Lamb of God, Son of the Father,</a:t>
-            </a:r>
-          </a:p>
-          <a:p>
-            <a:pPr>
-              <a:spcAft>
-                <a:spcPts val="500"/>
-              </a:spcAft>
-              <a:defRPr sz="1900" b="0" i="0">
-                <a:solidFill>
-                  <a:srgbClr val="1A1A1E"/>
-                </a:solidFill>
-                <a:latin typeface="Calibri"/>
-              </a:defRPr>
-            </a:pPr>
-            <a:r>
-              <a:t>you take away the sins of the world, have mercy on us;</a:t>
-            </a:r>
-          </a:p>
-          <a:p>
-            <a:pPr>
-              <a:spcAft>
-                <a:spcPts val="500"/>
-              </a:spcAft>
-              <a:defRPr sz="1900" b="0" i="0">
-                <a:solidFill>
-                  <a:srgbClr val="1A1A1E"/>
-                </a:solidFill>
-                <a:latin typeface="Calibri"/>
-              </a:defRPr>
-            </a:pPr>
-            <a:r>
-              <a:t>you take away the sins of the world, receive our prayer;</a:t>
-            </a:r>
-          </a:p>
-          <a:p>
-            <a:pPr>
-              <a:spcAft>
-                <a:spcPts val="500"/>
-              </a:spcAft>
-              <a:defRPr sz="1900" b="0" i="0">
-                <a:solidFill>
-                  <a:srgbClr val="1A1A1E"/>
-                </a:solidFill>
-                <a:latin typeface="Calibri"/>
-              </a:defRPr>
-            </a:pPr>
-            <a:r>
-              <a:t>you are seated at the right hand of the Father, have mercy on us.</a:t>
-            </a:r>
-          </a:p>
-          <a:p>
-            <a:pPr>
-              <a:spcAft>
-                <a:spcPts val="500"/>
-              </a:spcAft>
-              <a:defRPr sz="1900" b="1" i="0">
-                <a:solidFill>
-                  <a:srgbClr val="1A1A1E"/>
-                </a:solidFill>
-                <a:latin typeface="Calibri"/>
-              </a:defRPr>
-            </a:pPr>
-            <a:r>
-              <a:t>For you alone are the Holy One,</a:t>
-            </a:r>
-          </a:p>
-          <a:p>
-            <a:pPr>
-              <a:spcAft>
-                <a:spcPts val="500"/>
-              </a:spcAft>
-              <a:defRPr sz="1900" b="0" i="0">
-                <a:solidFill>
-                  <a:srgbClr val="1A1A1E"/>
-                </a:solidFill>
-                <a:latin typeface="Calibri"/>
-              </a:defRPr>
-            </a:pPr>
-            <a:r>
-              <a:t>you alone are the Lord,</a:t>
-            </a:r>
-          </a:p>
-          <a:p>
-            <a:pPr>
-              <a:spcAft>
-                <a:spcPts val="500"/>
-              </a:spcAft>
-              <a:defRPr sz="1900" b="0" i="0">
-                <a:solidFill>
-                  <a:srgbClr val="1A1A1E"/>
-                </a:solidFill>
-                <a:latin typeface="Calibri"/>
-              </a:defRPr>
-            </a:pPr>
-            <a:r>
-              <a:t>you alone are the Most High,</a:t>
-            </a:r>
-          </a:p>
-          <a:p>
-            <a:pPr>
-              <a:spcAft>
-                <a:spcPts val="500"/>
-              </a:spcAft>
-              <a:defRPr sz="1900" b="0" i="0">
-                <a:solidFill>
-                  <a:srgbClr val="1A1A1E"/>
-                </a:solidFill>
-                <a:latin typeface="Calibri"/>
-              </a:defRPr>
-            </a:pPr>
-            <a:r>
-              <a:t>Jesus Christ,</a:t>
-            </a:r>
-          </a:p>
-          <a:p>
-            <a:pPr>
-              <a:spcAft>
-                <a:spcPts val="500"/>
-              </a:spcAft>
-              <a:defRPr sz="1900" b="0" i="0">
-                <a:solidFill>
-                  <a:srgbClr val="1A1A1E"/>
-                </a:solidFill>
-                <a:latin typeface="Calibri"/>
-              </a:defRPr>
-            </a:pPr>
-            <a:r>
-              <a:t>with the Holy Spirit,</a:t>
-            </a:r>
-          </a:p>
-          <a:p>
-            <a:pPr>
-              <a:spcAft>
-                <a:spcPts val="500"/>
-              </a:spcAft>
-              <a:defRPr sz="1900" b="0" i="0">
-                <a:solidFill>
-                  <a:srgbClr val="1A1A1E"/>
-                </a:solidFill>
-                <a:latin typeface="Calibri"/>
-              </a:defRPr>
-            </a:pPr>
-            <a:r>
-              <a:t>in the glory of God the Father.</a:t>
-            </a:r>
-          </a:p>
-          <a:p>
-            <a:pPr>
-              <a:spcAft>
-                <a:spcPts val="500"/>
-              </a:spcAft>
-              <a:defRPr sz="1900" b="0" i="0">
-                <a:solidFill>
-                  <a:srgbClr val="1A1A1E"/>
-                </a:solidFill>
-                <a:latin typeface="Calibri"/>
-              </a:defRPr>
-            </a:pPr>
-            <a:r>
-              <a:t>Amen.</a:t>
+            <a:pPr algn="ctr">
+              <a:defRPr sz="4400" b="1" i="0">
+                <a:solidFill>
+                  <a:srgbClr val="56515A"/>
+                </a:solidFill>
+                <a:latin typeface="Calibri"/>
+              </a:defRPr>
+            </a:pPr>
+            <a:r>
+              <a:t>LITURGY OF</a:t>
+            </a:r>
+            <a:br/>
+            <a:r>
+              <a:t>THE WORD</a:t>
             </a:r>
           </a:p>
         </p:txBody>
@@ -4076,7 +3707,7 @@
               </a:defRPr>
             </a:pPr>
             <a:r>
-              <a:t>Gloria</a:t>
+              <a:t>Liturgy of the Word</a:t>
             </a:r>
           </a:p>
         </p:txBody>
@@ -4124,7 +3755,7 @@
         <p:spPr>
           <a:xfrm>
             <a:off x="685800" y="256032"/>
-            <a:ext cx="756904" cy="749807"/>
+            <a:ext cx="387682" cy="384048"/>
           </a:xfrm>
           <a:prstGeom prst="rect">
             <a:avLst/>
@@ -4139,16 +3770,16 @@
         </p:nvSpPr>
         <p:spPr>
           <a:xfrm>
-            <a:off x="1570720" y="256032"/>
-            <a:ext cx="16031480" cy="868680"/>
-          </a:xfrm>
-          <a:prstGeom prst="rect">
-            <a:avLst/>
-          </a:prstGeom>
-          <a:noFill/>
-        </p:spPr>
-        <p:txBody>
-          <a:bodyPr wrap="square" lIns="109728" rIns="109728" tIns="73152" bIns="73152">
+            <a:off x="1201498" y="256032"/>
+            <a:ext cx="16400702" cy="384048"/>
+          </a:xfrm>
+          <a:prstGeom prst="rect">
+            <a:avLst/>
+          </a:prstGeom>
+          <a:noFill/>
+        </p:spPr>
+        <p:txBody>
+          <a:bodyPr wrap="square" lIns="109728" rIns="109728" tIns="73152" bIns="73152" anchor="ctr">
             <a:noAutofit/>
           </a:bodyPr>
           <a:lstStyle/>
@@ -4175,8 +3806,8 @@
         </p:nvSpPr>
         <p:spPr>
           <a:xfrm>
-            <a:off x="685800" y="1417320"/>
-            <a:ext cx="16916400" cy="7863840"/>
+            <a:off x="685800" y="1645920"/>
+            <a:ext cx="16916400" cy="4114800"/>
           </a:xfrm>
           <a:prstGeom prst="rect">
             <a:avLst/>
@@ -4189,11 +3820,8 @@
           </a:bodyPr>
           <a:lstStyle/>
           <a:p>
-            <a:pPr>
-              <a:spcAft>
-                <a:spcPts val="500"/>
-              </a:spcAft>
-              <a:defRPr sz="2000" b="1" i="0">
+            <a:pPr algn="ctr">
+              <a:defRPr sz="4400" b="1" i="0">
                 <a:solidFill>
                   <a:srgbClr val="56515A"/>
                 </a:solidFill>
@@ -4201,39 +3829,11 @@
               </a:defRPr>
             </a:pPr>
             <a:r>
-              <a:t>Let us pray.</a:t>
-            </a:r>
-          </a:p>
-          <a:p>
-            <a:pPr>
-              <a:spcAft>
-                <a:spcPts val="500"/>
-              </a:spcAft>
-              <a:defRPr sz="1500" b="0" i="1">
-                <a:solidFill>
-                  <a:srgbClr val="56515A"/>
-                </a:solidFill>
-                <a:latin typeface="Calibri"/>
-              </a:defRPr>
-            </a:pPr>
-            <a:r>
-              <a:t>All pray silently with the Priest for a moment. Then the Priest says the Collect for the day, that is, the Opening Prayer, in full from the Roman Missal for this celebration—nothing abbreviated. The people respond at the end.</a:t>
-            </a:r>
-          </a:p>
-          <a:p>
-            <a:pPr>
-              <a:spcAft>
-                <a:spcPts val="500"/>
-              </a:spcAft>
-              <a:defRPr sz="2000" b="1" i="0">
-                <a:solidFill>
-                  <a:srgbClr val="1A1A1E"/>
-                </a:solidFill>
-                <a:latin typeface="Calibri"/>
-              </a:defRPr>
-            </a:pPr>
-            <a:r>
-              <a:t>Amen.</a:t>
+              <a:t>FIRST</a:t>
+            </a:r>
+            <a:br/>
+            <a:r>
+              <a:t>READING</a:t>
             </a:r>
           </a:p>
         </p:txBody>
@@ -4285,7 +3885,7 @@
               </a:defRPr>
             </a:pPr>
             <a:r>
-              <a:t>Liturgy of the Word</a:t>
+              <a:t>First Reading Title</a:t>
             </a:r>
           </a:p>
         </p:txBody>
@@ -4333,7 +3933,7 @@
         <p:spPr>
           <a:xfrm>
             <a:off x="685800" y="256032"/>
-            <a:ext cx="756904" cy="749807"/>
+            <a:ext cx="387682" cy="384048"/>
           </a:xfrm>
           <a:prstGeom prst="rect">
             <a:avLst/>
@@ -4348,16 +3948,16 @@
         </p:nvSpPr>
         <p:spPr>
           <a:xfrm>
-            <a:off x="1570720" y="256032"/>
-            <a:ext cx="16031480" cy="868680"/>
-          </a:xfrm>
-          <a:prstGeom prst="rect">
-            <a:avLst/>
-          </a:prstGeom>
-          <a:noFill/>
-        </p:spPr>
-        <p:txBody>
-          <a:bodyPr wrap="square" lIns="109728" rIns="109728" tIns="73152" bIns="73152">
+            <a:off x="1201498" y="256032"/>
+            <a:ext cx="16400702" cy="384048"/>
+          </a:xfrm>
+          <a:prstGeom prst="rect">
+            <a:avLst/>
+          </a:prstGeom>
+          <a:noFill/>
+        </p:spPr>
+        <p:txBody>
+          <a:bodyPr wrap="square" lIns="109728" rIns="109728" tIns="73152" bIns="73152" anchor="ctr">
             <a:noAutofit/>
           </a:bodyPr>
           <a:lstStyle/>
@@ -4384,8 +3984,8 @@
         </p:nvSpPr>
         <p:spPr>
           <a:xfrm>
-            <a:off x="685800" y="1645920"/>
-            <a:ext cx="16916400" cy="4114800"/>
+            <a:off x="685800" y="1417320"/>
+            <a:ext cx="16916400" cy="1024128"/>
           </a:xfrm>
           <a:prstGeom prst="rect">
             <a:avLst/>
@@ -4398,8 +3998,8 @@
           </a:bodyPr>
           <a:lstStyle/>
           <a:p>
-            <a:pPr algn="ctr">
-              <a:defRPr sz="4400" b="1" i="0">
+            <a:pPr>
+              <a:defRPr sz="2800" b="1" i="0">
                 <a:solidFill>
                   <a:srgbClr val="56515A"/>
                 </a:solidFill>
@@ -4407,11 +4007,20 @@
               </a:defRPr>
             </a:pPr>
             <a:r>
-              <a:t>LITURGY OF</a:t>
-            </a:r>
-            <a:br/>
-            <a:r>
-              <a:t>THE WORD</a:t>
+              <a:t>Liturgy of the Word</a:t>
+            </a:r>
+          </a:p>
+          <a:p>
+            <a:pPr>
+              <a:defRPr sz="1600" b="0" i="0">
+                <a:solidFill>
+                  <a:srgbClr val="5F5D68"/>
+                </a:solidFill>
+                <a:latin typeface="Calibri"/>
+              </a:defRPr>
+            </a:pPr>
+            <a:r>
+              <a:t>First Reading (Acts 16:11-15)</a:t>
             </a:r>
           </a:p>
         </p:txBody>
@@ -4419,6 +4028,78 @@
       <p:sp>
         <p:nvSpPr>
           <p:cNvPr id="5" name="TextBox 4"/>
+          <p:cNvSpPr txBox="1"/>
+          <p:nvPr/>
+        </p:nvSpPr>
+        <p:spPr>
+          <a:xfrm>
+            <a:off x="685800" y="2496312"/>
+            <a:ext cx="16916400" cy="438912"/>
+          </a:xfrm>
+          <a:prstGeom prst="rect">
+            <a:avLst/>
+          </a:prstGeom>
+          <a:noFill/>
+        </p:spPr>
+        <p:txBody>
+          <a:bodyPr wrap="square" lIns="109728" rIns="109728" tIns="73152" bIns="73152">
+            <a:noAutofit/>
+          </a:bodyPr>
+          <a:lstStyle/>
+          <a:p>
+            <a:pPr>
+              <a:defRPr sz="1400" b="0" i="0">
+                <a:solidFill>
+                  <a:srgbClr val="5F5D68"/>
+                </a:solidFill>
+                <a:latin typeface="Calibri"/>
+              </a:defRPr>
+            </a:pPr>
+          </a:p>
+        </p:txBody>
+      </p:sp>
+      <p:sp>
+        <p:nvSpPr>
+          <p:cNvPr id="6" name="TextBox 5"/>
+          <p:cNvSpPr txBox="1"/>
+          <p:nvPr/>
+        </p:nvSpPr>
+        <p:spPr>
+          <a:xfrm>
+            <a:off x="685800" y="3044952"/>
+            <a:ext cx="16916400" cy="6327648"/>
+          </a:xfrm>
+          <a:prstGeom prst="rect">
+            <a:avLst/>
+          </a:prstGeom>
+          <a:noFill/>
+        </p:spPr>
+        <p:txBody>
+          <a:bodyPr wrap="square" lIns="109728" rIns="109728" tIns="73152" bIns="73152">
+            <a:noAutofit/>
+          </a:bodyPr>
+          <a:lstStyle/>
+          <a:p>
+            <a:pPr>
+              <a:spcAft>
+                <a:spcPts val="500"/>
+              </a:spcAft>
+              <a:defRPr sz="1900" b="0" i="0">
+                <a:solidFill>
+                  <a:srgbClr val="1A1A1E"/>
+                </a:solidFill>
+                <a:latin typeface="Calibri"/>
+              </a:defRPr>
+            </a:pPr>
+            <a:r>
+              <a:t>We set sail from Troas, making a straight run for Samothrace, and on the next day to Neapolis, and from there to Philippi, a leading city in that district of Macedonia and a Roman colony. We spent some time in that city. On the sabbath we went outside the city gate along the river where we thought there would be a place of prayer. We sat and spoke with the women who had gathered there. One of them, a woman named Lydia, a dealer in purple cloth, from the city of Thyatira, a worshiper of God, listened, and the Lord opened her heart to pay attention to what Paul was saying. After she and her household had been baptized, she offered us an invitation, "If you consider me a believer in the Lord, come and stay at my home," and she prevailed on us.</a:t>
+            </a:r>
+          </a:p>
+        </p:txBody>
+      </p:sp>
+      <p:sp>
+        <p:nvSpPr>
+          <p:cNvPr id="7" name="TextBox 6"/>
           <p:cNvSpPr txBox="1"/>
           <p:nvPr/>
         </p:nvSpPr>
@@ -4511,7 +4192,7 @@
         <p:spPr>
           <a:xfrm>
             <a:off x="685800" y="256032"/>
-            <a:ext cx="756904" cy="749807"/>
+            <a:ext cx="387682" cy="384048"/>
           </a:xfrm>
           <a:prstGeom prst="rect">
             <a:avLst/>
@@ -4526,16 +4207,16 @@
         </p:nvSpPr>
         <p:spPr>
           <a:xfrm>
-            <a:off x="1570720" y="256032"/>
-            <a:ext cx="16031480" cy="868680"/>
-          </a:xfrm>
-          <a:prstGeom prst="rect">
-            <a:avLst/>
-          </a:prstGeom>
-          <a:noFill/>
-        </p:spPr>
-        <p:txBody>
-          <a:bodyPr wrap="square" lIns="109728" rIns="109728" tIns="73152" bIns="73152">
+            <a:off x="1201498" y="256032"/>
+            <a:ext cx="16400702" cy="384048"/>
+          </a:xfrm>
+          <a:prstGeom prst="rect">
+            <a:avLst/>
+          </a:prstGeom>
+          <a:noFill/>
+        </p:spPr>
+        <p:txBody>
+          <a:bodyPr wrap="square" lIns="109728" rIns="109728" tIns="73152" bIns="73152" anchor="ctr">
             <a:noAutofit/>
           </a:bodyPr>
           <a:lstStyle/>
@@ -4562,8 +4243,8 @@
         </p:nvSpPr>
         <p:spPr>
           <a:xfrm>
-            <a:off x="685800" y="1417320"/>
-            <a:ext cx="16916400" cy="1024128"/>
+            <a:off x="685800" y="1645920"/>
+            <a:ext cx="16916400" cy="4114800"/>
           </a:xfrm>
           <a:prstGeom prst="rect">
             <a:avLst/>
@@ -4576,8 +4257,8 @@
           </a:bodyPr>
           <a:lstStyle/>
           <a:p>
-            <a:pPr>
-              <a:defRPr sz="2800" b="1" i="0">
+            <a:pPr algn="ctr">
+              <a:defRPr sz="4400" b="1" i="0">
                 <a:solidFill>
                   <a:srgbClr val="56515A"/>
                 </a:solidFill>
@@ -4585,20 +4266,11 @@
               </a:defRPr>
             </a:pPr>
             <a:r>
-              <a:t>Liturgy of the Word</a:t>
-            </a:r>
-          </a:p>
-          <a:p>
-            <a:pPr>
-              <a:defRPr sz="1600" b="0" i="0">
-                <a:solidFill>
-                  <a:srgbClr val="5F5D68"/>
-                </a:solidFill>
-                <a:latin typeface="Calibri"/>
-              </a:defRPr>
-            </a:pPr>
-            <a:r>
-              <a:t>First Reading (Acts 8:5-8, 14-17)</a:t>
+              <a:t>RESPONSORIAL</a:t>
+            </a:r>
+            <a:br/>
+            <a:r>
+              <a:t>PSALM</a:t>
             </a:r>
           </a:p>
         </p:txBody>
@@ -4606,81 +4278,6 @@
       <p:sp>
         <p:nvSpPr>
           <p:cNvPr id="5" name="TextBox 4"/>
-          <p:cNvSpPr txBox="1"/>
-          <p:nvPr/>
-        </p:nvSpPr>
-        <p:spPr>
-          <a:xfrm>
-            <a:off x="685800" y="2496312"/>
-            <a:ext cx="16916400" cy="438912"/>
-          </a:xfrm>
-          <a:prstGeom prst="rect">
-            <a:avLst/>
-          </a:prstGeom>
-          <a:noFill/>
-        </p:spPr>
-        <p:txBody>
-          <a:bodyPr wrap="square" lIns="109728" rIns="109728" tIns="73152" bIns="73152">
-            <a:noAutofit/>
-          </a:bodyPr>
-          <a:lstStyle/>
-          <a:p>
-            <a:pPr>
-              <a:defRPr sz="1400" b="0" i="0">
-                <a:solidFill>
-                  <a:srgbClr val="5F5D68"/>
-                </a:solidFill>
-                <a:latin typeface="Calibri"/>
-              </a:defRPr>
-            </a:pPr>
-            <a:r>
-              <a:t>Acts 8:5-8, 14-17</a:t>
-            </a:r>
-          </a:p>
-        </p:txBody>
-      </p:sp>
-      <p:sp>
-        <p:nvSpPr>
-          <p:cNvPr id="6" name="TextBox 5"/>
-          <p:cNvSpPr txBox="1"/>
-          <p:nvPr/>
-        </p:nvSpPr>
-        <p:spPr>
-          <a:xfrm>
-            <a:off x="685800" y="3044952"/>
-            <a:ext cx="16916400" cy="6327648"/>
-          </a:xfrm>
-          <a:prstGeom prst="rect">
-            <a:avLst/>
-          </a:prstGeom>
-          <a:noFill/>
-        </p:spPr>
-        <p:txBody>
-          <a:bodyPr wrap="square" lIns="109728" rIns="109728" tIns="73152" bIns="73152">
-            <a:noAutofit/>
-          </a:bodyPr>
-          <a:lstStyle/>
-          <a:p>
-            <a:pPr>
-              <a:spcAft>
-                <a:spcPts val="500"/>
-              </a:spcAft>
-              <a:defRPr sz="1900" b="0" i="0">
-                <a:solidFill>
-                  <a:srgbClr val="1A1A1E"/>
-                </a:solidFill>
-                <a:latin typeface="Calibri"/>
-              </a:defRPr>
-            </a:pPr>
-            <a:r>
-              <a:t>Full text was not loaded from bible.usccb.org. Open today’s readings for this date and paste if needed.</a:t>
-            </a:r>
-          </a:p>
-        </p:txBody>
-      </p:sp>
-      <p:sp>
-        <p:nvSpPr>
-          <p:cNvPr id="7" name="TextBox 6"/>
           <p:cNvSpPr txBox="1"/>
           <p:nvPr/>
         </p:nvSpPr>
@@ -4725,7 +4322,7 @@
               </a:defRPr>
             </a:pPr>
             <a:r>
-              <a:t>Liturgy of the Word</a:t>
+              <a:t>Responsorial Psalm Title</a:t>
             </a:r>
           </a:p>
         </p:txBody>
@@ -4773,7 +4370,7 @@
         <p:spPr>
           <a:xfrm>
             <a:off x="685800" y="256032"/>
-            <a:ext cx="756904" cy="749807"/>
+            <a:ext cx="387682" cy="384048"/>
           </a:xfrm>
           <a:prstGeom prst="rect">
             <a:avLst/>
@@ -4788,16 +4385,16 @@
         </p:nvSpPr>
         <p:spPr>
           <a:xfrm>
-            <a:off x="1570720" y="256032"/>
-            <a:ext cx="16031480" cy="868680"/>
-          </a:xfrm>
-          <a:prstGeom prst="rect">
-            <a:avLst/>
-          </a:prstGeom>
-          <a:noFill/>
-        </p:spPr>
-        <p:txBody>
-          <a:bodyPr wrap="square" lIns="109728" rIns="109728" tIns="73152" bIns="73152">
+            <a:off x="1201498" y="256032"/>
+            <a:ext cx="16400702" cy="384048"/>
+          </a:xfrm>
+          <a:prstGeom prst="rect">
+            <a:avLst/>
+          </a:prstGeom>
+          <a:noFill/>
+        </p:spPr>
+        <p:txBody>
+          <a:bodyPr wrap="square" lIns="109728" rIns="109728" tIns="73152" bIns="73152" anchor="ctr">
             <a:noAutofit/>
           </a:bodyPr>
           <a:lstStyle/>
@@ -4860,7 +4457,7 @@
               </a:defRPr>
             </a:pPr>
             <a:r>
-              <a:t>Responsorial Psalm (Psalm 66:1-3, 4-5, 6-7, 16, 20)</a:t>
+              <a:t>Responsorial Psalm (Psalm 149:1b-2, 3-4, 5-6a and 9b)</a:t>
             </a:r>
           </a:p>
         </p:txBody>
@@ -4895,9 +4492,6 @@
                 <a:latin typeface="Calibri"/>
               </a:defRPr>
             </a:pPr>
-            <a:r>
-              <a:t>Psalm 66:1-3, 4-5, 6-7, 16, 20</a:t>
-            </a:r>
           </a:p>
         </p:txBody>
       </p:sp>
@@ -4935,7 +4529,7 @@
               </a:defRPr>
             </a:pPr>
             <a:r>
-              <a:t>Full text was not loaded from bible.usccb.org. Open today’s readings for this date and paste if needed.</a:t>
+              <a:t>R. (see 4a) The Lord takes delight in his people. or: R. Alleluia. Sing to the LORD a new song of praise in the assembly of the faithful. Let Israel be glad in their maker, let the children of Zion rejoice in their king. R. The Lord takes delight in his people. or: R. Alleluia. Let them praise his name in the festive dance, let them sing praise to him with timbrel and harp. For the LORD loves his people, and he adorns the lowly with victory. R. The Lord takes delight in his people. or: R. Alleluia. Let the faithful exult in glory; let them sing for joy upon their couches. Let the high praises of God be in their throats. This is the glory of all his faithful. Alleluia. R. The Lord takes delight in his people. or: R. Alleluia.</a:t>
             </a:r>
           </a:p>
         </p:txBody>
@@ -5035,7 +4629,7 @@
         <p:spPr>
           <a:xfrm>
             <a:off x="685800" y="256032"/>
-            <a:ext cx="756904" cy="749807"/>
+            <a:ext cx="387682" cy="384048"/>
           </a:xfrm>
           <a:prstGeom prst="rect">
             <a:avLst/>
@@ -5050,16 +4644,16 @@
         </p:nvSpPr>
         <p:spPr>
           <a:xfrm>
-            <a:off x="1570720" y="256032"/>
-            <a:ext cx="16031480" cy="868680"/>
-          </a:xfrm>
-          <a:prstGeom prst="rect">
-            <a:avLst/>
-          </a:prstGeom>
-          <a:noFill/>
-        </p:spPr>
-        <p:txBody>
-          <a:bodyPr wrap="square" lIns="109728" rIns="109728" tIns="73152" bIns="73152">
+            <a:off x="1201498" y="256032"/>
+            <a:ext cx="16400702" cy="384048"/>
+          </a:xfrm>
+          <a:prstGeom prst="rect">
+            <a:avLst/>
+          </a:prstGeom>
+          <a:noFill/>
+        </p:spPr>
+        <p:txBody>
+          <a:bodyPr wrap="square" lIns="109728" rIns="109728" tIns="73152" bIns="73152" anchor="ctr">
             <a:noAutofit/>
           </a:bodyPr>
           <a:lstStyle/>
@@ -5087,7 +4681,7 @@
         <p:spPr>
           <a:xfrm>
             <a:off x="685800" y="1417320"/>
-            <a:ext cx="16916400" cy="1024128"/>
+            <a:ext cx="16916400" cy="7863840"/>
           </a:xfrm>
           <a:prstGeom prst="rect">
             <a:avLst/>
@@ -5101,7 +4695,26 @@
           <a:lstStyle/>
           <a:p>
             <a:pPr>
-              <a:defRPr sz="2800" b="1" i="0">
+              <a:spcAft>
+                <a:spcPts val="500"/>
+              </a:spcAft>
+              <a:defRPr sz="1900" b="1" i="0">
+                <a:solidFill>
+                  <a:srgbClr val="1A1A1E"/>
+                </a:solidFill>
+                <a:latin typeface="Calibri"/>
+              </a:defRPr>
+            </a:pPr>
+            <a:r>
+              <a:t>ALLELUIA! ALLELUIA! ALLELUIA! ALLELUIA!</a:t>
+            </a:r>
+          </a:p>
+          <a:p>
+            <a:pPr>
+              <a:spcAft>
+                <a:spcPts val="500"/>
+              </a:spcAft>
+              <a:defRPr sz="1500" b="0" i="1">
                 <a:solidFill>
                   <a:srgbClr val="56515A"/>
                 </a:solidFill>
@@ -5109,20 +4722,7 @@
               </a:defRPr>
             </a:pPr>
             <a:r>
-              <a:t>Liturgy of the Word</a:t>
-            </a:r>
-          </a:p>
-          <a:p>
-            <a:pPr>
-              <a:defRPr sz="1600" b="0" i="0">
-                <a:solidFill>
-                  <a:srgbClr val="5F5D68"/>
-                </a:solidFill>
-                <a:latin typeface="Calibri"/>
-              </a:defRPr>
-            </a:pPr>
-            <a:r>
-              <a:t>Second Reading (1 Peter 3:15-18)</a:t>
+              <a:t>Sing the verse of the Gospel Acclamation given in the Lectionary for this Mass in full, not shortened.</a:t>
             </a:r>
           </a:p>
         </p:txBody>
@@ -5130,81 +4730,6 @@
       <p:sp>
         <p:nvSpPr>
           <p:cNvPr id="5" name="TextBox 4"/>
-          <p:cNvSpPr txBox="1"/>
-          <p:nvPr/>
-        </p:nvSpPr>
-        <p:spPr>
-          <a:xfrm>
-            <a:off x="685800" y="2496312"/>
-            <a:ext cx="16916400" cy="438912"/>
-          </a:xfrm>
-          <a:prstGeom prst="rect">
-            <a:avLst/>
-          </a:prstGeom>
-          <a:noFill/>
-        </p:spPr>
-        <p:txBody>
-          <a:bodyPr wrap="square" lIns="109728" rIns="109728" tIns="73152" bIns="73152">
-            <a:noAutofit/>
-          </a:bodyPr>
-          <a:lstStyle/>
-          <a:p>
-            <a:pPr>
-              <a:defRPr sz="1400" b="0" i="0">
-                <a:solidFill>
-                  <a:srgbClr val="5F5D68"/>
-                </a:solidFill>
-                <a:latin typeface="Calibri"/>
-              </a:defRPr>
-            </a:pPr>
-            <a:r>
-              <a:t>1 Peter 3:15-18</a:t>
-            </a:r>
-          </a:p>
-        </p:txBody>
-      </p:sp>
-      <p:sp>
-        <p:nvSpPr>
-          <p:cNvPr id="6" name="TextBox 5"/>
-          <p:cNvSpPr txBox="1"/>
-          <p:nvPr/>
-        </p:nvSpPr>
-        <p:spPr>
-          <a:xfrm>
-            <a:off x="685800" y="3044952"/>
-            <a:ext cx="16916400" cy="6327648"/>
-          </a:xfrm>
-          <a:prstGeom prst="rect">
-            <a:avLst/>
-          </a:prstGeom>
-          <a:noFill/>
-        </p:spPr>
-        <p:txBody>
-          <a:bodyPr wrap="square" lIns="109728" rIns="109728" tIns="73152" bIns="73152">
-            <a:noAutofit/>
-          </a:bodyPr>
-          <a:lstStyle/>
-          <a:p>
-            <a:pPr>
-              <a:spcAft>
-                <a:spcPts val="500"/>
-              </a:spcAft>
-              <a:defRPr sz="1900" b="0" i="0">
-                <a:solidFill>
-                  <a:srgbClr val="1A1A1E"/>
-                </a:solidFill>
-                <a:latin typeface="Calibri"/>
-              </a:defRPr>
-            </a:pPr>
-            <a:r>
-              <a:t>Full text was not loaded from bible.usccb.org. Open today’s readings for this date and paste if needed.</a:t>
-            </a:r>
-          </a:p>
-        </p:txBody>
-      </p:sp>
-      <p:sp>
-        <p:nvSpPr>
-          <p:cNvPr id="7" name="TextBox 6"/>
           <p:cNvSpPr txBox="1"/>
           <p:nvPr/>
         </p:nvSpPr>
@@ -5249,7 +4774,7 @@
               </a:defRPr>
             </a:pPr>
             <a:r>
-              <a:t>Liturgy of the Word</a:t>
+              <a:t>Gospel Acclamation</a:t>
             </a:r>
           </a:p>
         </p:txBody>
@@ -5297,7 +4822,7 @@
         <p:spPr>
           <a:xfrm>
             <a:off x="685800" y="256032"/>
-            <a:ext cx="756904" cy="749807"/>
+            <a:ext cx="387682" cy="384048"/>
           </a:xfrm>
           <a:prstGeom prst="rect">
             <a:avLst/>
@@ -5312,16 +4837,16 @@
         </p:nvSpPr>
         <p:spPr>
           <a:xfrm>
-            <a:off x="1570720" y="256032"/>
-            <a:ext cx="16031480" cy="868680"/>
-          </a:xfrm>
-          <a:prstGeom prst="rect">
-            <a:avLst/>
-          </a:prstGeom>
-          <a:noFill/>
-        </p:spPr>
-        <p:txBody>
-          <a:bodyPr wrap="square" lIns="109728" rIns="109728" tIns="73152" bIns="73152">
+            <a:off x="1201498" y="256032"/>
+            <a:ext cx="16400702" cy="384048"/>
+          </a:xfrm>
+          <a:prstGeom prst="rect">
+            <a:avLst/>
+          </a:prstGeom>
+          <a:noFill/>
+        </p:spPr>
+        <p:txBody>
+          <a:bodyPr wrap="square" lIns="109728" rIns="109728" tIns="73152" bIns="73152" anchor="ctr">
             <a:noAutofit/>
           </a:bodyPr>
           <a:lstStyle/>
@@ -5366,22 +4891,6 @@
               <a:spcAft>
                 <a:spcPts val="500"/>
               </a:spcAft>
-              <a:defRPr sz="1900" b="1" i="0">
-                <a:solidFill>
-                  <a:srgbClr val="1A1A1E"/>
-                </a:solidFill>
-                <a:latin typeface="Calibri"/>
-              </a:defRPr>
-            </a:pPr>
-            <a:r>
-              <a:t>ALLELUIA! ALLELUIA! ALLELUIA! ALLELUIA!</a:t>
-            </a:r>
-          </a:p>
-          <a:p>
-            <a:pPr>
-              <a:spcAft>
-                <a:spcPts val="500"/>
-              </a:spcAft>
               <a:defRPr sz="1500" b="0" i="1">
                 <a:solidFill>
                   <a:srgbClr val="56515A"/>
@@ -5390,7 +4899,7 @@
               </a:defRPr>
             </a:pPr>
             <a:r>
-              <a:t>Sing the verse of the Gospel Acclamation given in the Lectionary for this Mass in full, not shortened.</a:t>
+              <a:t>If a commentator announces the verse before the Gospel Acclamation, the verse from the Lectionary is spoken in full, and then the assembly sings the Alleluia and response without abbreviation.</a:t>
             </a:r>
           </a:p>
         </p:txBody>
@@ -5490,7 +4999,7 @@
         <p:spPr>
           <a:xfrm>
             <a:off x="685800" y="256032"/>
-            <a:ext cx="756904" cy="749807"/>
+            <a:ext cx="387682" cy="384048"/>
           </a:xfrm>
           <a:prstGeom prst="rect">
             <a:avLst/>
@@ -5505,16 +5014,16 @@
         </p:nvSpPr>
         <p:spPr>
           <a:xfrm>
-            <a:off x="1570720" y="256032"/>
-            <a:ext cx="16031480" cy="868680"/>
-          </a:xfrm>
-          <a:prstGeom prst="rect">
-            <a:avLst/>
-          </a:prstGeom>
-          <a:noFill/>
-        </p:spPr>
-        <p:txBody>
-          <a:bodyPr wrap="square" lIns="109728" rIns="109728" tIns="73152" bIns="73152">
+            <a:off x="1201498" y="256032"/>
+            <a:ext cx="16400702" cy="384048"/>
+          </a:xfrm>
+          <a:prstGeom prst="rect">
+            <a:avLst/>
+          </a:prstGeom>
+          <a:noFill/>
+        </p:spPr>
+        <p:txBody>
+          <a:bodyPr wrap="square" lIns="109728" rIns="109728" tIns="73152" bIns="73152" anchor="ctr">
             <a:noAutofit/>
           </a:bodyPr>
           <a:lstStyle/>
@@ -5559,6 +5068,38 @@
               <a:spcAft>
                 <a:spcPts val="500"/>
               </a:spcAft>
+              <a:defRPr sz="2000" b="1" i="0">
+                <a:solidFill>
+                  <a:srgbClr val="56515A"/>
+                </a:solidFill>
+                <a:latin typeface="Calibri"/>
+              </a:defRPr>
+            </a:pPr>
+            <a:r>
+              <a:t>The Lord be with you.</a:t>
+            </a:r>
+          </a:p>
+          <a:p>
+            <a:pPr>
+              <a:spcAft>
+                <a:spcPts val="500"/>
+              </a:spcAft>
+              <a:defRPr sz="2000" b="1" i="0">
+                <a:solidFill>
+                  <a:srgbClr val="1A1A1E"/>
+                </a:solidFill>
+                <a:latin typeface="Calibri"/>
+              </a:defRPr>
+            </a:pPr>
+            <a:r>
+              <a:t>And with your spirit.</a:t>
+            </a:r>
+          </a:p>
+          <a:p>
+            <a:pPr>
+              <a:spcAft>
+                <a:spcPts val="500"/>
+              </a:spcAft>
               <a:defRPr sz="1500" b="0" i="1">
                 <a:solidFill>
                   <a:srgbClr val="56515A"/>
@@ -5567,7 +5108,23 @@
               </a:defRPr>
             </a:pPr>
             <a:r>
-              <a:t>If a commentator announces the verse before the Gospel Acclamation, the verse from the Lectionary is spoken in full, and then the assembly sings the Alleluia and response without abbreviation.</a:t>
+              <a:t>The Priest says the full introductory dialogue from the Roman Missal, using the complete sentence from the Lectionary for this Mass, beginning “A reading from the holy Gospel according to [name the evangelist or book in full, as printed in the Lectionary—never abbreviated].”</a:t>
+            </a:r>
+          </a:p>
+          <a:p>
+            <a:pPr>
+              <a:spcAft>
+                <a:spcPts val="500"/>
+              </a:spcAft>
+              <a:defRPr sz="2000" b="1" i="0">
+                <a:solidFill>
+                  <a:srgbClr val="1A1A1E"/>
+                </a:solidFill>
+                <a:latin typeface="Calibri"/>
+              </a:defRPr>
+            </a:pPr>
+            <a:r>
+              <a:t>Glory to you, O Lord.</a:t>
             </a:r>
           </a:p>
         </p:txBody>
@@ -5667,7 +5224,7 @@
         <p:spPr>
           <a:xfrm>
             <a:off x="685800" y="256032"/>
-            <a:ext cx="756904" cy="749807"/>
+            <a:ext cx="387682" cy="384048"/>
           </a:xfrm>
           <a:prstGeom prst="rect">
             <a:avLst/>
@@ -5682,16 +5239,16 @@
         </p:nvSpPr>
         <p:spPr>
           <a:xfrm>
-            <a:off x="1570720" y="256032"/>
-            <a:ext cx="16031480" cy="868680"/>
-          </a:xfrm>
-          <a:prstGeom prst="rect">
-            <a:avLst/>
-          </a:prstGeom>
-          <a:noFill/>
-        </p:spPr>
-        <p:txBody>
-          <a:bodyPr wrap="square" lIns="109728" rIns="109728" tIns="73152" bIns="73152">
+            <a:off x="1201498" y="256032"/>
+            <a:ext cx="16400702" cy="384048"/>
+          </a:xfrm>
+          <a:prstGeom prst="rect">
+            <a:avLst/>
+          </a:prstGeom>
+          <a:noFill/>
+        </p:spPr>
+        <p:txBody>
+          <a:bodyPr wrap="square" lIns="109728" rIns="109728" tIns="73152" bIns="73152" anchor="ctr">
             <a:noAutofit/>
           </a:bodyPr>
           <a:lstStyle/>
@@ -5736,63 +5293,44 @@
               <a:spcAft>
                 <a:spcPts val="500"/>
               </a:spcAft>
+              <a:defRPr sz="1500" b="0" i="1">
+                <a:solidFill>
+                  <a:srgbClr val="56515A"/>
+                </a:solidFill>
+                <a:latin typeface="Calibri"/>
+              </a:defRPr>
+            </a:pPr>
+            <a:r>
+              <a:t>John 15:26—16:4a</a:t>
+            </a:r>
+          </a:p>
+          <a:p>
+            <a:pPr>
+              <a:spcAft>
+                <a:spcPts val="500"/>
+              </a:spcAft>
+              <a:defRPr sz="1500" b="0" i="1">
+                <a:solidFill>
+                  <a:srgbClr val="56515A"/>
+                </a:solidFill>
+                <a:latin typeface="Calibri"/>
+              </a:defRPr>
+            </a:pPr>
+          </a:p>
+          <a:p>
+            <a:pPr>
+              <a:spcAft>
+                <a:spcPts val="500"/>
+              </a:spcAft>
               <a:defRPr sz="2000" b="1" i="0">
                 <a:solidFill>
-                  <a:srgbClr val="56515A"/>
-                </a:solidFill>
-                <a:latin typeface="Calibri"/>
-              </a:defRPr>
-            </a:pPr>
-            <a:r>
-              <a:t>The Lord be with you.</a:t>
-            </a:r>
-          </a:p>
-          <a:p>
-            <a:pPr>
-              <a:spcAft>
-                <a:spcPts val="500"/>
-              </a:spcAft>
-              <a:defRPr sz="2000" b="1" i="0">
-                <a:solidFill>
-                  <a:srgbClr val="1A1A1E"/>
-                </a:solidFill>
-                <a:latin typeface="Calibri"/>
-              </a:defRPr>
-            </a:pPr>
-            <a:r>
-              <a:t>And with your spirit.</a:t>
-            </a:r>
-          </a:p>
-          <a:p>
-            <a:pPr>
-              <a:spcAft>
-                <a:spcPts val="500"/>
-              </a:spcAft>
-              <a:defRPr sz="1500" b="0" i="1">
-                <a:solidFill>
-                  <a:srgbClr val="56515A"/>
-                </a:solidFill>
-                <a:latin typeface="Calibri"/>
-              </a:defRPr>
-            </a:pPr>
-            <a:r>
-              <a:t>The Priest says the full introductory dialogue from the Roman Missal, using the complete sentence from the Lectionary for this Mass, beginning “A reading from the holy Gospel according to [name the evangelist or book in full, as printed in the Lectionary—never abbreviated].”</a:t>
-            </a:r>
-          </a:p>
-          <a:p>
-            <a:pPr>
-              <a:spcAft>
-                <a:spcPts val="500"/>
-              </a:spcAft>
-              <a:defRPr sz="2000" b="1" i="0">
-                <a:solidFill>
-                  <a:srgbClr val="1A1A1E"/>
-                </a:solidFill>
-                <a:latin typeface="Calibri"/>
-              </a:defRPr>
-            </a:pPr>
-            <a:r>
-              <a:t>Glory to you, O Lord.</a:t>
+                  <a:srgbClr val="1A1A1E"/>
+                </a:solidFill>
+                <a:latin typeface="Calibri"/>
+              </a:defRPr>
+            </a:pPr>
+            <a:r>
+              <a:t>“When the Advocate comes whom I will send you from the Father, the Spirit of truth who proceeds from the Father, he will testify to me.”</a:t>
             </a:r>
           </a:p>
         </p:txBody>
@@ -5844,7 +5382,7 @@
               </a:defRPr>
             </a:pPr>
             <a:r>
-              <a:t>Gospel Acclamation</a:t>
+              <a:t>Gospel</a:t>
             </a:r>
           </a:p>
         </p:txBody>
@@ -5892,7 +5430,7 @@
         <p:spPr>
           <a:xfrm>
             <a:off x="685800" y="256032"/>
-            <a:ext cx="756904" cy="749807"/>
+            <a:ext cx="387682" cy="384048"/>
           </a:xfrm>
           <a:prstGeom prst="rect">
             <a:avLst/>
@@ -5907,16 +5445,16 @@
         </p:nvSpPr>
         <p:spPr>
           <a:xfrm>
-            <a:off x="1570720" y="256032"/>
-            <a:ext cx="16031480" cy="868680"/>
-          </a:xfrm>
-          <a:prstGeom prst="rect">
-            <a:avLst/>
-          </a:prstGeom>
-          <a:noFill/>
-        </p:spPr>
-        <p:txBody>
-          <a:bodyPr wrap="square" lIns="109728" rIns="109728" tIns="73152" bIns="73152">
+            <a:off x="1201498" y="256032"/>
+            <a:ext cx="16400702" cy="384048"/>
+          </a:xfrm>
+          <a:prstGeom prst="rect">
+            <a:avLst/>
+          </a:prstGeom>
+          <a:noFill/>
+        </p:spPr>
+        <p:txBody>
+          <a:bodyPr wrap="square" lIns="109728" rIns="109728" tIns="73152" bIns="73152" anchor="ctr">
             <a:noAutofit/>
           </a:bodyPr>
           <a:lstStyle/>
@@ -6005,7 +5543,7 @@
               </a:defRPr>
             </a:pPr>
             <a:r>
-              <a:t>2026-05-10</a:t>
+              <a:t>2026-05-11</a:t>
             </a:r>
           </a:p>
           <a:p>
@@ -6021,7 +5559,7 @@
               </a:defRPr>
             </a:pPr>
             <a:r>
-              <a:t>Celebrant: Gabby</a:t>
+              <a:t>Celebrant: juju</a:t>
             </a:r>
           </a:p>
           <a:p>
@@ -6037,7 +5575,7 @@
               </a:defRPr>
             </a:pPr>
             <a:r>
-              <a:t>Gospel: John 14:15-21</a:t>
+              <a:t>Gospel: John 15:26—16:4a</a:t>
             </a:r>
             <a:br/>
             <a:r>
@@ -6061,7 +5599,7 @@
             </a:r>
             <a:br/>
             <a:r>
-              <a:t>“I will pray to the Father, and he will give you another Counselor, that he may be with you forever,— the Spirit of truth, whom the world can't receive; for it doesn't see him, neither knows him.”</a:t>
+              <a:t>“When the Advocate comes whom I will send you from the Father, the Spirit of truth who proceeds from the Father, he will testify to me.”</a:t>
             </a:r>
           </a:p>
           <a:p>
@@ -6085,45 +5623,6 @@
       <p:sp>
         <p:nvSpPr>
           <p:cNvPr id="6" name="TextBox 5"/>
-          <p:cNvSpPr txBox="1"/>
-          <p:nvPr/>
-        </p:nvSpPr>
-        <p:spPr>
-          <a:xfrm>
-            <a:off x="685800" y="9189720"/>
-            <a:ext cx="16916400" cy="685800"/>
-          </a:xfrm>
-          <a:prstGeom prst="rect">
-            <a:avLst/>
-          </a:prstGeom>
-          <a:noFill/>
-        </p:spPr>
-        <p:txBody>
-          <a:bodyPr wrap="square" lIns="109728" rIns="109728" tIns="73152" bIns="73152">
-            <a:noAutofit/>
-          </a:bodyPr>
-          <a:lstStyle/>
-          <a:p>
-            <a:pPr>
-              <a:spcAft>
-                <a:spcPts val="500"/>
-              </a:spcAft>
-              <a:defRPr sz="1400" b="0" i="0">
-                <a:solidFill>
-                  <a:srgbClr val="5F5D68"/>
-                </a:solidFill>
-                <a:latin typeface="Calibri"/>
-              </a:defRPr>
-            </a:pPr>
-            <a:r>
-              <a:t>Below: World English Bible (WEB) fallback — verify NABRE on bible.usccb.org.</a:t>
-            </a:r>
-          </a:p>
-        </p:txBody>
-      </p:sp>
-      <p:sp>
-        <p:nvSpPr>
-          <p:cNvPr id="7" name="TextBox 6"/>
           <p:cNvSpPr txBox="1"/>
           <p:nvPr/>
         </p:nvSpPr>
@@ -6216,7 +5715,7 @@
         <p:spPr>
           <a:xfrm>
             <a:off x="685800" y="256032"/>
-            <a:ext cx="756904" cy="749807"/>
+            <a:ext cx="387682" cy="384048"/>
           </a:xfrm>
           <a:prstGeom prst="rect">
             <a:avLst/>
@@ -6231,16 +5730,16 @@
         </p:nvSpPr>
         <p:spPr>
           <a:xfrm>
-            <a:off x="1570720" y="256032"/>
-            <a:ext cx="16031480" cy="868680"/>
-          </a:xfrm>
-          <a:prstGeom prst="rect">
-            <a:avLst/>
-          </a:prstGeom>
-          <a:noFill/>
-        </p:spPr>
-        <p:txBody>
-          <a:bodyPr wrap="square" lIns="109728" rIns="109728" tIns="73152" bIns="73152">
+            <a:off x="1201498" y="256032"/>
+            <a:ext cx="16400702" cy="384048"/>
+          </a:xfrm>
+          <a:prstGeom prst="rect">
+            <a:avLst/>
+          </a:prstGeom>
+          <a:noFill/>
+        </p:spPr>
+        <p:txBody>
+          <a:bodyPr wrap="square" lIns="109728" rIns="109728" tIns="73152" bIns="73152" anchor="ctr">
             <a:noAutofit/>
           </a:bodyPr>
           <a:lstStyle/>
@@ -6326,7 +5825,7 @@
               </a:defRPr>
             </a:pPr>
             <a:r>
-              <a:t>John 14:15-21</a:t>
+              <a:t>John 15:26—16:4a</a:t>
             </a:r>
           </a:p>
         </p:txBody>
@@ -6365,7 +5864,7 @@
               </a:defRPr>
             </a:pPr>
             <a:r>
-              <a:t>If you love me, keep my commandments. I will pray to the Father, and he will give you another Counselor, that he may be with you forever,— the Spirit of truth, whom the world can’t receive; for it doesn’t see him, neither knows him. You know him, for he lives with you, and will be in you. I will not leave you orphans. I will come to you. Yet a little while, and the world will see me no more; but you will see me. Because I live, you will live also. In that day you will know that I am in my Father, and you in me, and I in you. One who has my commandments, and keeps them, that person is one who loves me. One who loves me will be loved by my Father, and I will love him, and will reveal myself to him.”</a:t>
+              <a:t>Jesus said to his disciples: "When the Advocate comes whom I will send you from the Father, the Spirit of truth who proceeds from the Father, he will testify to me. And you also testify, because you have been with me from the beginning. "I have told you this so that you may not fall away. They will expel you from the synagogues; in fact, the hour is coming when everyone who kills you will think he is offering worship to God. They will do this because they have not known either the Father or me. I have told you this so that when their hour comes you may remember that I told you."</a:t>
             </a:r>
           </a:p>
         </p:txBody>
@@ -6465,7 +5964,7 @@
         <p:spPr>
           <a:xfrm>
             <a:off x="685800" y="256032"/>
-            <a:ext cx="756904" cy="749807"/>
+            <a:ext cx="387682" cy="384048"/>
           </a:xfrm>
           <a:prstGeom prst="rect">
             <a:avLst/>
@@ -6480,16 +5979,16 @@
         </p:nvSpPr>
         <p:spPr>
           <a:xfrm>
-            <a:off x="1570720" y="256032"/>
-            <a:ext cx="16031480" cy="868680"/>
-          </a:xfrm>
-          <a:prstGeom prst="rect">
-            <a:avLst/>
-          </a:prstGeom>
-          <a:noFill/>
-        </p:spPr>
-        <p:txBody>
-          <a:bodyPr wrap="square" lIns="109728" rIns="109728" tIns="73152" bIns="73152">
+            <a:off x="1201498" y="256032"/>
+            <a:ext cx="16400702" cy="384048"/>
+          </a:xfrm>
+          <a:prstGeom prst="rect">
+            <a:avLst/>
+          </a:prstGeom>
+          <a:noFill/>
+        </p:spPr>
+        <p:txBody>
+          <a:bodyPr wrap="square" lIns="109728" rIns="109728" tIns="73152" bIns="73152" anchor="ctr">
             <a:noAutofit/>
           </a:bodyPr>
           <a:lstStyle/>
@@ -6658,7 +6157,7 @@
         <p:spPr>
           <a:xfrm>
             <a:off x="685800" y="256032"/>
-            <a:ext cx="756904" cy="749807"/>
+            <a:ext cx="387682" cy="384048"/>
           </a:xfrm>
           <a:prstGeom prst="rect">
             <a:avLst/>
@@ -6673,16 +6172,16 @@
         </p:nvSpPr>
         <p:spPr>
           <a:xfrm>
-            <a:off x="1570720" y="256032"/>
-            <a:ext cx="16031480" cy="868680"/>
-          </a:xfrm>
-          <a:prstGeom prst="rect">
-            <a:avLst/>
-          </a:prstGeom>
-          <a:noFill/>
-        </p:spPr>
-        <p:txBody>
-          <a:bodyPr wrap="square" lIns="109728" rIns="109728" tIns="73152" bIns="73152">
+            <a:off x="1201498" y="256032"/>
+            <a:ext cx="16400702" cy="384048"/>
+          </a:xfrm>
+          <a:prstGeom prst="rect">
+            <a:avLst/>
+          </a:prstGeom>
+          <a:noFill/>
+        </p:spPr>
+        <p:txBody>
+          <a:bodyPr wrap="square" lIns="109728" rIns="109728" tIns="73152" bIns="73152" anchor="ctr">
             <a:noAutofit/>
           </a:bodyPr>
           <a:lstStyle/>
@@ -6851,7 +6350,7 @@
         <p:spPr>
           <a:xfrm>
             <a:off x="685800" y="256032"/>
-            <a:ext cx="756904" cy="749807"/>
+            <a:ext cx="387682" cy="384048"/>
           </a:xfrm>
           <a:prstGeom prst="rect">
             <a:avLst/>
@@ -6866,16 +6365,16 @@
         </p:nvSpPr>
         <p:spPr>
           <a:xfrm>
-            <a:off x="1570720" y="256032"/>
-            <a:ext cx="16031480" cy="868680"/>
-          </a:xfrm>
-          <a:prstGeom prst="rect">
-            <a:avLst/>
-          </a:prstGeom>
-          <a:noFill/>
-        </p:spPr>
-        <p:txBody>
-          <a:bodyPr wrap="square" lIns="109728" rIns="109728" tIns="73152" bIns="73152">
+            <a:off x="1201498" y="256032"/>
+            <a:ext cx="16400702" cy="384048"/>
+          </a:xfrm>
+          <a:prstGeom prst="rect">
+            <a:avLst/>
+          </a:prstGeom>
+          <a:noFill/>
+        </p:spPr>
+        <p:txBody>
+          <a:bodyPr wrap="square" lIns="109728" rIns="109728" tIns="73152" bIns="73152" anchor="ctr">
             <a:noAutofit/>
           </a:bodyPr>
           <a:lstStyle/>
@@ -6944,7 +6443,7 @@
               </a:defRPr>
             </a:pPr>
             <a:r>
-              <a:t>Gabby</a:t>
+              <a:t>juju</a:t>
             </a:r>
           </a:p>
           <a:p>
@@ -7014,7 +6513,7 @@
               </a:defRPr>
             </a:pPr>
             <a:r>
-              <a:t>Gospel (John 14:15-21)</a:t>
+              <a:t>Gospel (John 15:26—16:4a)</a:t>
             </a:r>
           </a:p>
           <a:p>
@@ -7030,7 +6529,7 @@
               </a:defRPr>
             </a:pPr>
             <a:r>
-              <a:t>“I will pray to the Father, and he will give you another Counselor, that he may be with you forever,— the Spirit of truth, whom the world can't receive; for it doesn't see him, neither knows him.”</a:t>
+              <a:t>“When the Advocate comes whom I will send you from the Father, the Spirit of truth who proceeds from the Father, he will testify to me.”</a:t>
             </a:r>
           </a:p>
           <a:p>
@@ -7075,7 +6574,7 @@
               </a:defRPr>
             </a:pPr>
             <a:r>
-              <a:t>2026-05-10 · Eastertide</a:t>
+              <a:t>2026-05-11 · Eastertide</a:t>
             </a:r>
           </a:p>
         </p:txBody>
@@ -7175,7 +6674,7 @@
         <p:spPr>
           <a:xfrm>
             <a:off x="685800" y="256032"/>
-            <a:ext cx="756904" cy="749807"/>
+            <a:ext cx="387682" cy="384048"/>
           </a:xfrm>
           <a:prstGeom prst="rect">
             <a:avLst/>
@@ -7190,16 +6689,16 @@
         </p:nvSpPr>
         <p:spPr>
           <a:xfrm>
-            <a:off x="1570720" y="256032"/>
-            <a:ext cx="16031480" cy="868680"/>
-          </a:xfrm>
-          <a:prstGeom prst="rect">
-            <a:avLst/>
-          </a:prstGeom>
-          <a:noFill/>
-        </p:spPr>
-        <p:txBody>
-          <a:bodyPr wrap="square" lIns="109728" rIns="109728" tIns="73152" bIns="73152">
+            <a:off x="1201498" y="256032"/>
+            <a:ext cx="16400702" cy="384048"/>
+          </a:xfrm>
+          <a:prstGeom prst="rect">
+            <a:avLst/>
+          </a:prstGeom>
+          <a:noFill/>
+        </p:spPr>
+        <p:txBody>
+          <a:bodyPr wrap="square" lIns="109728" rIns="109728" tIns="73152" bIns="73152" anchor="ctr">
             <a:noAutofit/>
           </a:bodyPr>
           <a:lstStyle/>
@@ -7420,7 +6919,7 @@
               <a:spcAft>
                 <a:spcPts val="500"/>
               </a:spcAft>
-              <a:defRPr sz="2000" b="1" i="0">
+              <a:defRPr sz="1900" b="0" i="0">
                 <a:solidFill>
                   <a:srgbClr val="1A1A1E"/>
                 </a:solidFill>
@@ -7460,7 +6959,7 @@
               </a:defRPr>
             </a:pPr>
             <a:r>
-              <a:t>and by the Holy Spirit was incarnate of the Virgin Mary, and became man.</a:t>
+              <a:t>and by the Holy Spirit was incarnate of the Virgin Mary,</a:t>
             </a:r>
           </a:p>
           <a:p>
@@ -7476,6 +6975,22 @@
               </a:defRPr>
             </a:pPr>
             <a:r>
+              <a:t>and became man.</a:t>
+            </a:r>
+          </a:p>
+          <a:p>
+            <a:pPr>
+              <a:spcAft>
+                <a:spcPts val="500"/>
+              </a:spcAft>
+              <a:defRPr sz="1900" b="0" i="0">
+                <a:solidFill>
+                  <a:srgbClr val="1A1A1E"/>
+                </a:solidFill>
+                <a:latin typeface="Calibri"/>
+              </a:defRPr>
+            </a:pPr>
+            <a:r>
               <a:t>For our sake he was crucified under Pontius Pilate,</a:t>
             </a:r>
           </a:p>
@@ -7508,7 +7023,7 @@
               </a:defRPr>
             </a:pPr>
             <a:r>
-              <a:t>and rose again on the third day in accordance with the Scriptures.</a:t>
+              <a:t>and rose again on the third day</a:t>
             </a:r>
           </a:p>
           <a:p>
@@ -7524,6 +7039,22 @@
               </a:defRPr>
             </a:pPr>
             <a:r>
+              <a:t>in accordance with the Scriptures.</a:t>
+            </a:r>
+          </a:p>
+          <a:p>
+            <a:pPr>
+              <a:spcAft>
+                <a:spcPts val="500"/>
+              </a:spcAft>
+              <a:defRPr sz="1900" b="0" i="0">
+                <a:solidFill>
+                  <a:srgbClr val="1A1A1E"/>
+                </a:solidFill>
+                <a:latin typeface="Calibri"/>
+              </a:defRPr>
+            </a:pPr>
+            <a:r>
               <a:t>He ascended into heaven</a:t>
             </a:r>
           </a:p>
@@ -7596,7 +7127,7 @@
               <a:spcAft>
                 <a:spcPts val="500"/>
               </a:spcAft>
-              <a:defRPr sz="2000" b="1" i="0">
+              <a:defRPr sz="1900" b="0" i="0">
                 <a:solidFill>
                   <a:srgbClr val="1A1A1E"/>
                 </a:solidFill>
@@ -7716,23 +7247,7 @@
               </a:defRPr>
             </a:pPr>
             <a:r>
-              <a:t>and the life of the world to come.</a:t>
-            </a:r>
-          </a:p>
-          <a:p>
-            <a:pPr>
-              <a:spcAft>
-                <a:spcPts val="500"/>
-              </a:spcAft>
-              <a:defRPr sz="1900" b="0" i="0">
-                <a:solidFill>
-                  <a:srgbClr val="1A1A1E"/>
-                </a:solidFill>
-                <a:latin typeface="Calibri"/>
-              </a:defRPr>
-            </a:pPr>
-            <a:r>
-              <a:t>Amen.</a:t>
+              <a:t>and the life of the world to come. Amen.</a:t>
             </a:r>
           </a:p>
         </p:txBody>
@@ -7832,7 +7347,7 @@
         <p:spPr>
           <a:xfrm>
             <a:off x="685800" y="256032"/>
-            <a:ext cx="756904" cy="749807"/>
+            <a:ext cx="387682" cy="384048"/>
           </a:xfrm>
           <a:prstGeom prst="rect">
             <a:avLst/>
@@ -7847,16 +7362,16 @@
         </p:nvSpPr>
         <p:spPr>
           <a:xfrm>
-            <a:off x="1570720" y="256032"/>
-            <a:ext cx="16031480" cy="868680"/>
-          </a:xfrm>
-          <a:prstGeom prst="rect">
-            <a:avLst/>
-          </a:prstGeom>
-          <a:noFill/>
-        </p:spPr>
-        <p:txBody>
-          <a:bodyPr wrap="square" lIns="109728" rIns="109728" tIns="73152" bIns="73152">
+            <a:off x="1201498" y="256032"/>
+            <a:ext cx="16400702" cy="384048"/>
+          </a:xfrm>
+          <a:prstGeom prst="rect">
+            <a:avLst/>
+          </a:prstGeom>
+          <a:noFill/>
+        </p:spPr>
+        <p:txBody>
+          <a:bodyPr wrap="square" lIns="109728" rIns="109728" tIns="73152" bIns="73152" anchor="ctr">
             <a:noAutofit/>
           </a:bodyPr>
           <a:lstStyle/>
@@ -7925,7 +7440,7 @@
               </a:defRPr>
             </a:pPr>
             <a:r>
-              <a:t>Gabby</a:t>
+              <a:t>juju</a:t>
             </a:r>
           </a:p>
           <a:p>
@@ -7995,7 +7510,7 @@
               </a:defRPr>
             </a:pPr>
             <a:r>
-              <a:t>Gospel (John 14:15-21)</a:t>
+              <a:t>Gospel (John 15:26—16:4a)</a:t>
             </a:r>
           </a:p>
           <a:p>
@@ -8011,7 +7526,7 @@
               </a:defRPr>
             </a:pPr>
             <a:r>
-              <a:t>“I will pray to the Father, and he will give you another Counselor, that he may be with you forever,— the Spirit of truth, whom the world can't receive; for it doesn't see him, neither knows him.”</a:t>
+              <a:t>“When the Advocate comes whom I will send you from the Father, the Spirit of truth who proceeds from the Father, he will testify to me.”</a:t>
             </a:r>
           </a:p>
           <a:p>
@@ -8056,7 +7571,7 @@
               </a:defRPr>
             </a:pPr>
             <a:r>
-              <a:t>2026-05-10 · Eastertide</a:t>
+              <a:t>2026-05-11 · Eastertide</a:t>
             </a:r>
           </a:p>
         </p:txBody>
@@ -8156,7 +7671,7 @@
         <p:spPr>
           <a:xfrm>
             <a:off x="685800" y="256032"/>
-            <a:ext cx="756904" cy="749807"/>
+            <a:ext cx="387682" cy="384048"/>
           </a:xfrm>
           <a:prstGeom prst="rect">
             <a:avLst/>
@@ -8171,16 +7686,16 @@
         </p:nvSpPr>
         <p:spPr>
           <a:xfrm>
-            <a:off x="1570720" y="256032"/>
-            <a:ext cx="16031480" cy="868680"/>
-          </a:xfrm>
-          <a:prstGeom prst="rect">
-            <a:avLst/>
-          </a:prstGeom>
-          <a:noFill/>
-        </p:spPr>
-        <p:txBody>
-          <a:bodyPr wrap="square" lIns="109728" rIns="109728" tIns="73152" bIns="73152">
+            <a:off x="1201498" y="256032"/>
+            <a:ext cx="16400702" cy="384048"/>
+          </a:xfrm>
+          <a:prstGeom prst="rect">
+            <a:avLst/>
+          </a:prstGeom>
+          <a:noFill/>
+        </p:spPr>
+        <p:txBody>
+          <a:bodyPr wrap="square" lIns="109728" rIns="109728" tIns="73152" bIns="73152" anchor="ctr">
             <a:noAutofit/>
           </a:bodyPr>
           <a:lstStyle/>
@@ -8365,7 +7880,7 @@
         <p:spPr>
           <a:xfrm>
             <a:off x="685800" y="256032"/>
-            <a:ext cx="756904" cy="749807"/>
+            <a:ext cx="387682" cy="384048"/>
           </a:xfrm>
           <a:prstGeom prst="rect">
             <a:avLst/>
@@ -8380,16 +7895,16 @@
         </p:nvSpPr>
         <p:spPr>
           <a:xfrm>
-            <a:off x="1570720" y="256032"/>
-            <a:ext cx="16031480" cy="868680"/>
-          </a:xfrm>
-          <a:prstGeom prst="rect">
-            <a:avLst/>
-          </a:prstGeom>
-          <a:noFill/>
-        </p:spPr>
-        <p:txBody>
-          <a:bodyPr wrap="square" lIns="109728" rIns="109728" tIns="73152" bIns="73152">
+            <a:off x="1201498" y="256032"/>
+            <a:ext cx="16400702" cy="384048"/>
+          </a:xfrm>
+          <a:prstGeom prst="rect">
+            <a:avLst/>
+          </a:prstGeom>
+          <a:noFill/>
+        </p:spPr>
+        <p:txBody>
+          <a:bodyPr wrap="square" lIns="109728" rIns="109728" tIns="73152" bIns="73152" anchor="ctr">
             <a:noAutofit/>
           </a:bodyPr>
           <a:lstStyle/>
@@ -8574,7 +8089,7 @@
         <p:spPr>
           <a:xfrm>
             <a:off x="685800" y="256032"/>
-            <a:ext cx="756904" cy="749807"/>
+            <a:ext cx="387682" cy="384048"/>
           </a:xfrm>
           <a:prstGeom prst="rect">
             <a:avLst/>
@@ -8589,16 +8104,16 @@
         </p:nvSpPr>
         <p:spPr>
           <a:xfrm>
-            <a:off x="1570720" y="256032"/>
-            <a:ext cx="16031480" cy="868680"/>
-          </a:xfrm>
-          <a:prstGeom prst="rect">
-            <a:avLst/>
-          </a:prstGeom>
-          <a:noFill/>
-        </p:spPr>
-        <p:txBody>
-          <a:bodyPr wrap="square" lIns="109728" rIns="109728" tIns="73152" bIns="73152">
+            <a:off x="1201498" y="256032"/>
+            <a:ext cx="16400702" cy="384048"/>
+          </a:xfrm>
+          <a:prstGeom prst="rect">
+            <a:avLst/>
+          </a:prstGeom>
+          <a:noFill/>
+        </p:spPr>
+        <p:txBody>
+          <a:bodyPr wrap="square" lIns="109728" rIns="109728" tIns="73152" bIns="73152" anchor="ctr">
             <a:noAutofit/>
           </a:bodyPr>
           <a:lstStyle/>
@@ -8667,7 +8182,7 @@
               </a:defRPr>
             </a:pPr>
             <a:r>
-              <a:t>Gabby</a:t>
+              <a:t>juju</a:t>
             </a:r>
           </a:p>
           <a:p>
@@ -8737,7 +8252,7 @@
               </a:defRPr>
             </a:pPr>
             <a:r>
-              <a:t>Gospel (John 14:15-21)</a:t>
+              <a:t>Gospel (John 15:26—16:4a)</a:t>
             </a:r>
           </a:p>
           <a:p>
@@ -8753,7 +8268,7 @@
               </a:defRPr>
             </a:pPr>
             <a:r>
-              <a:t>“I will pray to the Father, and he will give you another Counselor, that he may be with you forever,— the Spirit of truth, whom the world can't receive; for it doesn't see him, neither knows him.”</a:t>
+              <a:t>“When the Advocate comes whom I will send you from the Father, the Spirit of truth who proceeds from the Father, he will testify to me.”</a:t>
             </a:r>
           </a:p>
           <a:p>
@@ -8798,7 +8313,7 @@
               </a:defRPr>
             </a:pPr>
             <a:r>
-              <a:t>2026-05-10 · Eastertide</a:t>
+              <a:t>2026-05-11 · Eastertide</a:t>
             </a:r>
           </a:p>
         </p:txBody>
@@ -8898,7 +8413,7 @@
         <p:spPr>
           <a:xfrm>
             <a:off x="685800" y="256032"/>
-            <a:ext cx="756904" cy="749807"/>
+            <a:ext cx="387682" cy="384048"/>
           </a:xfrm>
           <a:prstGeom prst="rect">
             <a:avLst/>
@@ -8913,16 +8428,16 @@
         </p:nvSpPr>
         <p:spPr>
           <a:xfrm>
-            <a:off x="1570720" y="256032"/>
-            <a:ext cx="16031480" cy="868680"/>
-          </a:xfrm>
-          <a:prstGeom prst="rect">
-            <a:avLst/>
-          </a:prstGeom>
-          <a:noFill/>
-        </p:spPr>
-        <p:txBody>
-          <a:bodyPr wrap="square" lIns="109728" rIns="109728" tIns="73152" bIns="73152">
+            <a:off x="1201498" y="256032"/>
+            <a:ext cx="16400702" cy="384048"/>
+          </a:xfrm>
+          <a:prstGeom prst="rect">
+            <a:avLst/>
+          </a:prstGeom>
+          <a:noFill/>
+        </p:spPr>
+        <p:txBody>
+          <a:bodyPr wrap="square" lIns="109728" rIns="109728" tIns="73152" bIns="73152" anchor="ctr">
             <a:noAutofit/>
           </a:bodyPr>
           <a:lstStyle/>
@@ -8972,7 +8487,7 @@
               </a:defRPr>
             </a:pPr>
             <a:r>
-              <a:t>I Am the Bread of Life</a:t>
+              <a:t>Gift of Finest Wheat</a:t>
             </a:r>
           </a:p>
         </p:txBody>
@@ -8994,17 +8509,17 @@
           <a:noFill/>
         </p:spPr>
         <p:txBody>
-          <a:bodyPr wrap="square" lIns="109728" rIns="109728" tIns="73152" bIns="73152" anchor="t">
+          <a:bodyPr wrap="square" lIns="109728" rIns="109728" tIns="73152" bIns="73152" anchor="ctr">
             <a:noAutofit/>
           </a:bodyPr>
           <a:lstStyle/>
           <a:p>
             <a:pPr algn="ctr">
               <a:lnSpc>
-                <a:spcPct val="115000"/>
+                <a:spcPct val="105000"/>
               </a:lnSpc>
               <a:spcAft>
-                <a:spcPts val="1400"/>
+                <a:spcPts val="1000"/>
               </a:spcAft>
               <a:defRPr sz="3800" b="1" i="0">
                 <a:solidFill>
@@ -9014,16 +8529,16 @@
               </a:defRPr>
             </a:pPr>
             <a:r>
-              <a:t>I AM THE BREAD OF LIFE;</a:t>
+              <a:t>YOU SATISFY THE HUNGRY HEART</a:t>
             </a:r>
           </a:p>
           <a:p>
             <a:pPr algn="ctr">
               <a:lnSpc>
-                <a:spcPct val="115000"/>
+                <a:spcPct val="105000"/>
               </a:lnSpc>
               <a:spcAft>
-                <a:spcPts val="1400"/>
+                <a:spcPts val="1000"/>
               </a:spcAft>
               <a:defRPr sz="3800" b="1" i="0">
                 <a:solidFill>
@@ -9033,16 +8548,16 @@
               </a:defRPr>
             </a:pPr>
             <a:r>
-              <a:t>ALL WHO COME TO ME SHALL NOT HUNGER,</a:t>
+              <a:t>WITH GIFT OF FINEST WHEAT,</a:t>
             </a:r>
           </a:p>
           <a:p>
             <a:pPr algn="ctr">
               <a:lnSpc>
-                <a:spcPct val="115000"/>
+                <a:spcPct val="105000"/>
               </a:lnSpc>
               <a:spcAft>
-                <a:spcPts val="1400"/>
+                <a:spcPts val="1000"/>
               </a:spcAft>
               <a:defRPr sz="3800" b="1" i="0">
                 <a:solidFill>
@@ -9052,16 +8567,16 @@
               </a:defRPr>
             </a:pPr>
             <a:r>
-              <a:t>AND WHO BELIEVE IN ME SHALL NOT THIRST.</a:t>
+              <a:t>COME GIVE TO US, O SAVING LORD,</a:t>
             </a:r>
           </a:p>
           <a:p>
             <a:pPr algn="ctr">
               <a:lnSpc>
-                <a:spcPct val="115000"/>
+                <a:spcPct val="105000"/>
               </a:lnSpc>
               <a:spcAft>
-                <a:spcPts val="1400"/>
+                <a:spcPts val="1000"/>
               </a:spcAft>
               <a:defRPr sz="3800" b="1" i="0">
                 <a:solidFill>
@@ -9071,273 +8586,7 @@
               </a:defRPr>
             </a:pPr>
             <a:r>
-              <a:t>NO ONE CAN COME TO ME UNLESS</a:t>
-            </a:r>
-          </a:p>
-          <a:p>
-            <a:pPr algn="ctr">
-              <a:lnSpc>
-                <a:spcPct val="115000"/>
-              </a:lnSpc>
-              <a:spcAft>
-                <a:spcPts val="1400"/>
-              </a:spcAft>
-              <a:defRPr sz="3800" b="1" i="0">
-                <a:solidFill>
-                  <a:srgbClr val="FFFFFF"/>
-                </a:solidFill>
-                <a:latin typeface="Arial Black"/>
-              </a:defRPr>
-            </a:pPr>
-            <a:r>
-              <a:t>MY FATHER BECKONS.</a:t>
-            </a:r>
-          </a:p>
-          <a:p>
-            <a:pPr algn="ctr">
-              <a:lnSpc>
-                <a:spcPct val="115000"/>
-              </a:lnSpc>
-              <a:spcAft>
-                <a:spcPts val="1400"/>
-              </a:spcAft>
-              <a:defRPr sz="3800" b="1" i="0">
-                <a:solidFill>
-                  <a:srgbClr val="FFFFFF"/>
-                </a:solidFill>
-                <a:latin typeface="Arial Black"/>
-              </a:defRPr>
-            </a:pPr>
-            <a:r>
-              <a:t>AND I WILL RAISE THEM UP,</a:t>
-            </a:r>
-          </a:p>
-          <a:p>
-            <a:pPr algn="ctr">
-              <a:lnSpc>
-                <a:spcPct val="115000"/>
-              </a:lnSpc>
-              <a:spcAft>
-                <a:spcPts val="1400"/>
-              </a:spcAft>
-              <a:defRPr sz="3800" b="1" i="0">
-                <a:solidFill>
-                  <a:srgbClr val="FFFFFF"/>
-                </a:solidFill>
-                <a:latin typeface="Arial Black"/>
-              </a:defRPr>
-            </a:pPr>
-            <a:r>
-              <a:t>AND I WILL RAISE THEM UP,</a:t>
-            </a:r>
-          </a:p>
-          <a:p>
-            <a:pPr algn="ctr">
-              <a:lnSpc>
-                <a:spcPct val="115000"/>
-              </a:lnSpc>
-              <a:spcAft>
-                <a:spcPts val="1400"/>
-              </a:spcAft>
-              <a:defRPr sz="3800" b="1" i="0">
-                <a:solidFill>
-                  <a:srgbClr val="FFFFFF"/>
-                </a:solidFill>
-                <a:latin typeface="Arial Black"/>
-              </a:defRPr>
-            </a:pPr>
-            <a:r>
-              <a:t>AND I WILL RAISE THEM UP ON THE LAST DAY.</a:t>
-            </a:r>
-          </a:p>
-          <a:p>
-            <a:pPr algn="ctr">
-              <a:lnSpc>
-                <a:spcPct val="115000"/>
-              </a:lnSpc>
-              <a:spcAft>
-                <a:spcPts val="1400"/>
-              </a:spcAft>
-              <a:defRPr sz="3800" b="1" i="0">
-                <a:solidFill>
-                  <a:srgbClr val="FFFFFF"/>
-                </a:solidFill>
-                <a:latin typeface="Arial Black"/>
-              </a:defRPr>
-            </a:pPr>
-            <a:r>
-              <a:t>THE BREAD THAT I WILL GIVE</a:t>
-            </a:r>
-          </a:p>
-          <a:p>
-            <a:pPr algn="ctr">
-              <a:lnSpc>
-                <a:spcPct val="115000"/>
-              </a:lnSpc>
-              <a:spcAft>
-                <a:spcPts val="1400"/>
-              </a:spcAft>
-              <a:defRPr sz="3800" b="1" i="0">
-                <a:solidFill>
-                  <a:srgbClr val="FFFFFF"/>
-                </a:solidFill>
-                <a:latin typeface="Arial Black"/>
-              </a:defRPr>
-            </a:pPr>
-            <a:r>
-              <a:t>IS MY FLESH FOR THE LIFE OF THE WORLD</a:t>
-            </a:r>
-          </a:p>
-          <a:p>
-            <a:pPr algn="ctr">
-              <a:lnSpc>
-                <a:spcPct val="115000"/>
-              </a:lnSpc>
-              <a:spcAft>
-                <a:spcPts val="1400"/>
-              </a:spcAft>
-              <a:defRPr sz="3800" b="1" i="0">
-                <a:solidFill>
-                  <a:srgbClr val="FFFFFF"/>
-                </a:solidFill>
-                <a:latin typeface="Arial Black"/>
-              </a:defRPr>
-            </a:pPr>
-            <a:r>
-              <a:t>AND IF YOU EAT OF THIS BREAD,</a:t>
-            </a:r>
-          </a:p>
-          <a:p>
-            <a:pPr algn="ctr">
-              <a:lnSpc>
-                <a:spcPct val="115000"/>
-              </a:lnSpc>
-              <a:spcAft>
-                <a:spcPts val="1400"/>
-              </a:spcAft>
-              <a:defRPr sz="3800" b="1" i="0">
-                <a:solidFill>
-                  <a:srgbClr val="FFFFFF"/>
-                </a:solidFill>
-                <a:latin typeface="Arial Black"/>
-              </a:defRPr>
-            </a:pPr>
-            <a:r>
-              <a:t>YOU SHALL LIVE FOREVER,</a:t>
-            </a:r>
-          </a:p>
-          <a:p>
-            <a:pPr algn="ctr">
-              <a:lnSpc>
-                <a:spcPct val="115000"/>
-              </a:lnSpc>
-              <a:spcAft>
-                <a:spcPts val="1400"/>
-              </a:spcAft>
-              <a:defRPr sz="3800" b="1" i="0">
-                <a:solidFill>
-                  <a:srgbClr val="FFFFFF"/>
-                </a:solidFill>
-                <a:latin typeface="Arial Black"/>
-              </a:defRPr>
-            </a:pPr>
-            <a:r>
-              <a:t>YES, LIVE FOREVER.</a:t>
-            </a:r>
-          </a:p>
-          <a:p>
-            <a:pPr algn="ctr">
-              <a:lnSpc>
-                <a:spcPct val="115000"/>
-              </a:lnSpc>
-              <a:spcAft>
-                <a:spcPts val="1400"/>
-              </a:spcAft>
-              <a:defRPr sz="3800" b="1" i="0">
-                <a:solidFill>
-                  <a:srgbClr val="FFFFFF"/>
-                </a:solidFill>
-                <a:latin typeface="Arial Black"/>
-              </a:defRPr>
-            </a:pPr>
-            <a:r>
-              <a:t>UNLESS YOU EAT</a:t>
-            </a:r>
-          </a:p>
-          <a:p>
-            <a:pPr algn="ctr">
-              <a:lnSpc>
-                <a:spcPct val="115000"/>
-              </a:lnSpc>
-              <a:spcAft>
-                <a:spcPts val="1400"/>
-              </a:spcAft>
-              <a:defRPr sz="3800" b="1" i="0">
-                <a:solidFill>
-                  <a:srgbClr val="FFFFFF"/>
-                </a:solidFill>
-                <a:latin typeface="Arial Black"/>
-              </a:defRPr>
-            </a:pPr>
-            <a:r>
-              <a:t>OF THE FLESH OF THE SON OF MAN</a:t>
-            </a:r>
-          </a:p>
-          <a:p>
-            <a:pPr algn="ctr">
-              <a:lnSpc>
-                <a:spcPct val="115000"/>
-              </a:lnSpc>
-              <a:spcAft>
-                <a:spcPts val="1400"/>
-              </a:spcAft>
-              <a:defRPr sz="3800" b="1" i="0">
-                <a:solidFill>
-                  <a:srgbClr val="FFFFFF"/>
-                </a:solidFill>
-                <a:latin typeface="Arial Black"/>
-              </a:defRPr>
-            </a:pPr>
-            <a:r>
-              <a:t>AND DRINK OF HIS BLOOD,</a:t>
-            </a:r>
-          </a:p>
-          <a:p>
-            <a:pPr algn="ctr">
-              <a:lnSpc>
-                <a:spcPct val="115000"/>
-              </a:lnSpc>
-              <a:spcAft>
-                <a:spcPts val="1400"/>
-              </a:spcAft>
-              <a:defRPr sz="3800" b="1" i="0">
-                <a:solidFill>
-                  <a:srgbClr val="FFFFFF"/>
-                </a:solidFill>
-                <a:latin typeface="Arial Black"/>
-              </a:defRPr>
-            </a:pPr>
-            <a:r>
-              <a:t>AND DRINK OF HIS BLOOD,</a:t>
-            </a:r>
-          </a:p>
-          <a:p>
-            <a:pPr algn="ctr">
-              <a:lnSpc>
-                <a:spcPct val="115000"/>
-              </a:lnSpc>
-              <a:spcAft>
-                <a:spcPts val="1400"/>
-              </a:spcAft>
-              <a:defRPr sz="3800" b="1" i="0">
-                <a:solidFill>
-                  <a:srgbClr val="FFFFFF"/>
-                </a:solidFill>
-                <a:latin typeface="Arial Black"/>
-              </a:defRPr>
-            </a:pPr>
-            <a:r>
-              <a:t>THERE IS NO LIFE IN YOU,</a:t>
+              <a:t>THE BREAD OF LIFE TO EAT.</a:t>
             </a:r>
           </a:p>
         </p:txBody>
@@ -9408,7 +8657,7 @@
     <p:bg>
       <p:bgPr>
         <a:solidFill>
-          <a:srgbClr val="000000"/>
+          <a:srgbClr val="F2F0E8"/>
         </a:solidFill>
         <a:effectLst/>
       </p:bgPr>
@@ -9437,7 +8686,7 @@
         <p:spPr>
           <a:xfrm>
             <a:off x="685800" y="256032"/>
-            <a:ext cx="756904" cy="749807"/>
+            <a:ext cx="387682" cy="384048"/>
           </a:xfrm>
           <a:prstGeom prst="rect">
             <a:avLst/>
@@ -9452,16 +8701,16 @@
         </p:nvSpPr>
         <p:spPr>
           <a:xfrm>
-            <a:off x="1570720" y="256032"/>
-            <a:ext cx="16031480" cy="868680"/>
-          </a:xfrm>
-          <a:prstGeom prst="rect">
-            <a:avLst/>
-          </a:prstGeom>
-          <a:noFill/>
-        </p:spPr>
-        <p:txBody>
-          <a:bodyPr wrap="square" lIns="109728" rIns="109728" tIns="73152" bIns="73152">
+            <a:off x="1201498" y="256032"/>
+            <a:ext cx="16400702" cy="384048"/>
+          </a:xfrm>
+          <a:prstGeom prst="rect">
+            <a:avLst/>
+          </a:prstGeom>
+          <a:noFill/>
+        </p:spPr>
+        <p:txBody>
+          <a:bodyPr wrap="square" lIns="109728" rIns="109728" tIns="73152" bIns="73152" anchor="ctr">
             <a:noAutofit/>
           </a:bodyPr>
           <a:lstStyle/>
@@ -9469,7 +8718,7 @@
             <a:pPr algn="l">
               <a:defRPr sz="1500" b="1" i="0">
                 <a:solidFill>
-                  <a:srgbClr val="FFFFFF"/>
+                  <a:srgbClr val="1A1A1E"/>
                 </a:solidFill>
                 <a:latin typeface="Calibri"/>
               </a:defRPr>
@@ -9489,7 +8738,7 @@
         <p:spPr>
           <a:xfrm>
             <a:off x="685800" y="1417320"/>
-            <a:ext cx="16916400" cy="777240"/>
+            <a:ext cx="16916400" cy="7863840"/>
           </a:xfrm>
           <a:prstGeom prst="rect">
             <a:avLst/>
@@ -9502,16 +8751,35 @@
           </a:bodyPr>
           <a:lstStyle/>
           <a:p>
-            <a:pPr algn="ctr">
-              <a:defRPr sz="3400" b="1" i="0">
-                <a:solidFill>
-                  <a:srgbClr val="FFCC4D"/>
-                </a:solidFill>
-                <a:latin typeface="Georgia"/>
-              </a:defRPr>
-            </a:pPr>
-            <a:r>
-              <a:t>All Creatures of Our God and King</a:t>
+            <a:pPr>
+              <a:spcAft>
+                <a:spcPts val="500"/>
+              </a:spcAft>
+              <a:defRPr sz="1500" b="0" i="1">
+                <a:solidFill>
+                  <a:srgbClr val="56515A"/>
+                </a:solidFill>
+                <a:latin typeface="Calibri"/>
+              </a:defRPr>
+            </a:pPr>
+            <a:r>
+              <a:t>Welcome to the celebration of the Holy Eucharist.</a:t>
+            </a:r>
+          </a:p>
+          <a:p>
+            <a:pPr>
+              <a:spcAft>
+                <a:spcPts val="500"/>
+              </a:spcAft>
+              <a:defRPr sz="1500" b="0" i="1">
+                <a:solidFill>
+                  <a:srgbClr val="56515A"/>
+                </a:solidFill>
+                <a:latin typeface="Calibri"/>
+              </a:defRPr>
+            </a:pPr>
+            <a:r>
+              <a:t>Please stand and join in singing the Entrance hymn.</a:t>
             </a:r>
           </a:p>
         </p:txBody>
@@ -9519,314 +8787,6 @@
       <p:sp>
         <p:nvSpPr>
           <p:cNvPr id="5" name="TextBox 4"/>
-          <p:cNvSpPr txBox="1"/>
-          <p:nvPr/>
-        </p:nvSpPr>
-        <p:spPr>
-          <a:xfrm>
-            <a:off x="685800" y="2331720"/>
-            <a:ext cx="16916400" cy="7086600"/>
-          </a:xfrm>
-          <a:prstGeom prst="rect">
-            <a:avLst/>
-          </a:prstGeom>
-          <a:noFill/>
-        </p:spPr>
-        <p:txBody>
-          <a:bodyPr wrap="square" lIns="109728" rIns="109728" tIns="73152" bIns="73152" anchor="t">
-            <a:noAutofit/>
-          </a:bodyPr>
-          <a:lstStyle/>
-          <a:p>
-            <a:pPr algn="ctr">
-              <a:lnSpc>
-                <a:spcPct val="115000"/>
-              </a:lnSpc>
-              <a:spcAft>
-                <a:spcPts val="1400"/>
-              </a:spcAft>
-              <a:defRPr sz="3800" b="1" i="0">
-                <a:solidFill>
-                  <a:srgbClr val="FFFFFF"/>
-                </a:solidFill>
-                <a:latin typeface="Arial Black"/>
-              </a:defRPr>
-            </a:pPr>
-            <a:r>
-              <a:t>ALL CREATURES OF OUR GOD AND KING,</a:t>
-            </a:r>
-          </a:p>
-          <a:p>
-            <a:pPr algn="ctr">
-              <a:lnSpc>
-                <a:spcPct val="115000"/>
-              </a:lnSpc>
-              <a:spcAft>
-                <a:spcPts val="1400"/>
-              </a:spcAft>
-              <a:defRPr sz="3800" b="1" i="0">
-                <a:solidFill>
-                  <a:srgbClr val="FFFFFF"/>
-                </a:solidFill>
-                <a:latin typeface="Arial Black"/>
-              </a:defRPr>
-            </a:pPr>
-            <a:r>
-              <a:t>LIFT UP YOUR VOICE AND WITH US SING</a:t>
-            </a:r>
-          </a:p>
-          <a:p>
-            <a:pPr algn="ctr">
-              <a:lnSpc>
-                <a:spcPct val="115000"/>
-              </a:lnSpc>
-              <a:spcAft>
-                <a:spcPts val="1400"/>
-              </a:spcAft>
-              <a:defRPr sz="3800" b="1" i="0">
-                <a:solidFill>
-                  <a:srgbClr val="FFFFFF"/>
-                </a:solidFill>
-                <a:latin typeface="Arial Black"/>
-              </a:defRPr>
-            </a:pPr>
-            <a:r>
-              <a:t>ALLELUIA, ALLELUIA!</a:t>
-            </a:r>
-          </a:p>
-          <a:p>
-            <a:pPr algn="ctr">
-              <a:lnSpc>
-                <a:spcPct val="115000"/>
-              </a:lnSpc>
-              <a:spcAft>
-                <a:spcPts val="1400"/>
-              </a:spcAft>
-              <a:defRPr sz="3800" b="1" i="0">
-                <a:solidFill>
-                  <a:srgbClr val="FFFFFF"/>
-                </a:solidFill>
-                <a:latin typeface="Arial Black"/>
-              </a:defRPr>
-            </a:pPr>
-            <a:r>
-              <a:t>THOU BURNING SUN WITH GOLDEN BEAM,</a:t>
-            </a:r>
-          </a:p>
-          <a:p>
-            <a:pPr algn="ctr">
-              <a:lnSpc>
-                <a:spcPct val="115000"/>
-              </a:lnSpc>
-              <a:spcAft>
-                <a:spcPts val="1400"/>
-              </a:spcAft>
-              <a:defRPr sz="3800" b="1" i="0">
-                <a:solidFill>
-                  <a:srgbClr val="FFFFFF"/>
-                </a:solidFill>
-                <a:latin typeface="Arial Black"/>
-              </a:defRPr>
-            </a:pPr>
-            <a:r>
-              <a:t>THOU SILVER MOON WITH SOFTER GLEAM,</a:t>
-            </a:r>
-          </a:p>
-          <a:p>
-            <a:pPr algn="ctr">
-              <a:lnSpc>
-                <a:spcPct val="115000"/>
-              </a:lnSpc>
-              <a:spcAft>
-                <a:spcPts val="1400"/>
-              </a:spcAft>
-              <a:defRPr sz="3800" b="1" i="0">
-                <a:solidFill>
-                  <a:srgbClr val="FFFFFF"/>
-                </a:solidFill>
-                <a:latin typeface="Arial Black"/>
-              </a:defRPr>
-            </a:pPr>
-            <a:r>
-              <a:t>O PRAISE HIM, O PRAISE HIM,</a:t>
-            </a:r>
-          </a:p>
-          <a:p>
-            <a:pPr algn="ctr">
-              <a:lnSpc>
-                <a:spcPct val="115000"/>
-              </a:lnSpc>
-              <a:spcAft>
-                <a:spcPts val="1400"/>
-              </a:spcAft>
-              <a:defRPr sz="3800" b="1" i="0">
-                <a:solidFill>
-                  <a:srgbClr val="FFFFFF"/>
-                </a:solidFill>
-                <a:latin typeface="Arial Black"/>
-              </a:defRPr>
-            </a:pPr>
-            <a:r>
-              <a:t>ALLELUIA, ALLELUIA, ALLELUIA!</a:t>
-            </a:r>
-          </a:p>
-          <a:p>
-            <a:pPr algn="ctr">
-              <a:lnSpc>
-                <a:spcPct val="115000"/>
-              </a:lnSpc>
-              <a:spcAft>
-                <a:spcPts val="1400"/>
-              </a:spcAft>
-              <a:defRPr sz="3800" b="1" i="0">
-                <a:solidFill>
-                  <a:srgbClr val="FFFFFF"/>
-                </a:solidFill>
-                <a:latin typeface="Arial Black"/>
-              </a:defRPr>
-            </a:pPr>
-            <a:r>
-              <a:t>THOU RUSHING WIND THAT ART SO STRONG,</a:t>
-            </a:r>
-          </a:p>
-          <a:p>
-            <a:pPr algn="ctr">
-              <a:lnSpc>
-                <a:spcPct val="115000"/>
-              </a:lnSpc>
-              <a:spcAft>
-                <a:spcPts val="1400"/>
-              </a:spcAft>
-              <a:defRPr sz="3800" b="1" i="0">
-                <a:solidFill>
-                  <a:srgbClr val="FFFFFF"/>
-                </a:solidFill>
-                <a:latin typeface="Arial Black"/>
-              </a:defRPr>
-            </a:pPr>
-            <a:r>
-              <a:t>YE CLOUDS THAT SAIL IN HEAV'N ALONG,</a:t>
-            </a:r>
-          </a:p>
-          <a:p>
-            <a:pPr algn="ctr">
-              <a:lnSpc>
-                <a:spcPct val="115000"/>
-              </a:lnSpc>
-              <a:spcAft>
-                <a:spcPts val="1400"/>
-              </a:spcAft>
-              <a:defRPr sz="3800" b="1" i="0">
-                <a:solidFill>
-                  <a:srgbClr val="FFFFFF"/>
-                </a:solidFill>
-                <a:latin typeface="Arial Black"/>
-              </a:defRPr>
-            </a:pPr>
-            <a:r>
-              <a:t>O PRAISE HIM, ALLELUIA!</a:t>
-            </a:r>
-          </a:p>
-          <a:p>
-            <a:pPr algn="ctr">
-              <a:lnSpc>
-                <a:spcPct val="115000"/>
-              </a:lnSpc>
-              <a:spcAft>
-                <a:spcPts val="1400"/>
-              </a:spcAft>
-              <a:defRPr sz="3800" b="1" i="0">
-                <a:solidFill>
-                  <a:srgbClr val="FFFFFF"/>
-                </a:solidFill>
-                <a:latin typeface="Arial Black"/>
-              </a:defRPr>
-            </a:pPr>
-            <a:r>
-              <a:t>THOU RISING MORN, IN PRAISE REJOICE,</a:t>
-            </a:r>
-          </a:p>
-          <a:p>
-            <a:pPr algn="ctr">
-              <a:lnSpc>
-                <a:spcPct val="115000"/>
-              </a:lnSpc>
-              <a:spcAft>
-                <a:spcPts val="1400"/>
-              </a:spcAft>
-              <a:defRPr sz="3800" b="1" i="0">
-                <a:solidFill>
-                  <a:srgbClr val="FFFFFF"/>
-                </a:solidFill>
-                <a:latin typeface="Arial Black"/>
-              </a:defRPr>
-            </a:pPr>
-            <a:r>
-              <a:t>YE LIGHTS OF EVENING, FIND A VOICE,</a:t>
-            </a:r>
-          </a:p>
-          <a:p>
-            <a:pPr algn="ctr">
-              <a:lnSpc>
-                <a:spcPct val="115000"/>
-              </a:lnSpc>
-              <a:spcAft>
-                <a:spcPts val="1400"/>
-              </a:spcAft>
-              <a:defRPr sz="3800" b="1" i="0">
-                <a:solidFill>
-                  <a:srgbClr val="FFFFFF"/>
-                </a:solidFill>
-                <a:latin typeface="Arial Black"/>
-              </a:defRPr>
-            </a:pPr>
-            <a:r>
-              <a:t>O PRAISE HIM, O PRAISE HIM,</a:t>
-            </a:r>
-          </a:p>
-          <a:p>
-            <a:pPr algn="ctr">
-              <a:lnSpc>
-                <a:spcPct val="115000"/>
-              </a:lnSpc>
-              <a:spcAft>
-                <a:spcPts val="1400"/>
-              </a:spcAft>
-              <a:defRPr sz="3800" b="1" i="0">
-                <a:solidFill>
-                  <a:srgbClr val="FFFFFF"/>
-                </a:solidFill>
-                <a:latin typeface="Arial Black"/>
-              </a:defRPr>
-            </a:pPr>
-            <a:r>
-              <a:t>ALLELUIA, ALLELUIA, ALLELUIA!</a:t>
-            </a:r>
-          </a:p>
-          <a:p>
-            <a:pPr algn="ctr">
-              <a:lnSpc>
-                <a:spcPct val="115000"/>
-              </a:lnSpc>
-              <a:spcAft>
-                <a:spcPts val="1400"/>
-              </a:spcAft>
-              <a:defRPr sz="3800" b="1" i="0">
-                <a:solidFill>
-                  <a:srgbClr val="FFFFFF"/>
-                </a:solidFill>
-                <a:latin typeface="Arial Black"/>
-              </a:defRPr>
-            </a:pPr>
-            <a:r>
-              <a:t>THOU FLOWING WATER, PURE AND CLEAR,</a:t>
-            </a:r>
-          </a:p>
-        </p:txBody>
-      </p:sp>
-      <p:sp>
-        <p:nvSpPr>
-          <p:cNvPr id="6" name="TextBox 5"/>
           <p:cNvSpPr txBox="1"/>
           <p:nvPr/>
         </p:nvSpPr>
@@ -9849,7 +8809,7 @@
             <a:pPr>
               <a:defRPr sz="1300" b="1" i="0">
                 <a:solidFill>
-                  <a:srgbClr val="8C8C91"/>
+                  <a:srgbClr val="5F5D68"/>
                 </a:solidFill>
                 <a:latin typeface="Calibri"/>
               </a:defRPr>
@@ -9865,13 +8825,13 @@
               </a:spcBef>
               <a:defRPr sz="1200" b="0" i="0">
                 <a:solidFill>
-                  <a:srgbClr val="FFCC4D"/>
-                </a:solidFill>
-                <a:latin typeface="Calibri"/>
-              </a:defRPr>
-            </a:pPr>
-            <a:r>
-              <a:t>Entrance</a:t>
+                  <a:srgbClr val="56515A"/>
+                </a:solidFill>
+                <a:latin typeface="Calibri"/>
+              </a:defRPr>
+            </a:pPr>
+            <a:r>
+              <a:t>Intro</a:t>
             </a:r>
           </a:p>
         </p:txBody>
@@ -9919,7 +8879,7 @@
         <p:spPr>
           <a:xfrm>
             <a:off x="685800" y="256032"/>
-            <a:ext cx="756904" cy="749807"/>
+            <a:ext cx="387682" cy="384048"/>
           </a:xfrm>
           <a:prstGeom prst="rect">
             <a:avLst/>
@@ -9934,16 +8894,16 @@
         </p:nvSpPr>
         <p:spPr>
           <a:xfrm>
-            <a:off x="1570720" y="256032"/>
-            <a:ext cx="16031480" cy="868680"/>
-          </a:xfrm>
-          <a:prstGeom prst="rect">
-            <a:avLst/>
-          </a:prstGeom>
-          <a:noFill/>
-        </p:spPr>
-        <p:txBody>
-          <a:bodyPr wrap="square" lIns="109728" rIns="109728" tIns="73152" bIns="73152">
+            <a:off x="1201498" y="256032"/>
+            <a:ext cx="16400702" cy="384048"/>
+          </a:xfrm>
+          <a:prstGeom prst="rect">
+            <a:avLst/>
+          </a:prstGeom>
+          <a:noFill/>
+        </p:spPr>
+        <p:txBody>
+          <a:bodyPr wrap="square" lIns="109728" rIns="109728" tIns="73152" bIns="73152" anchor="ctr">
             <a:noAutofit/>
           </a:bodyPr>
           <a:lstStyle/>
@@ -9986,10 +8946,10 @@
           <a:p>
             <a:pPr algn="ctr">
               <a:lnSpc>
-                <a:spcPct val="115000"/>
+                <a:spcPct val="105000"/>
               </a:lnSpc>
               <a:spcAft>
-                <a:spcPts val="1400"/>
+                <a:spcPts val="1000"/>
               </a:spcAft>
               <a:defRPr sz="3800" b="1" i="0">
                 <a:solidFill>
@@ -9999,16 +8959,16 @@
               </a:defRPr>
             </a:pPr>
             <a:r>
-              <a:t>THERE IS NO LIFE IN YOU.</a:t>
+              <a:t>AS WHEN THE GRAIN BY SAINTS BELIEVED</a:t>
             </a:r>
           </a:p>
           <a:p>
             <a:pPr algn="ctr">
               <a:lnSpc>
-                <a:spcPct val="115000"/>
+                <a:spcPct val="105000"/>
               </a:lnSpc>
               <a:spcAft>
-                <a:spcPts val="1400"/>
+                <a:spcPts val="1000"/>
               </a:spcAft>
               <a:defRPr sz="3800" b="1" i="0">
                 <a:solidFill>
@@ -10018,16 +8978,16 @@
               </a:defRPr>
             </a:pPr>
             <a:r>
-              <a:t>AND I WILL RAISE THEM UP,</a:t>
+              <a:t>WAS BLESSED AND BROKEN, LORD,</a:t>
             </a:r>
           </a:p>
           <a:p>
             <a:pPr algn="ctr">
               <a:lnSpc>
-                <a:spcPct val="115000"/>
+                <a:spcPct val="105000"/>
               </a:lnSpc>
               <a:spcAft>
-                <a:spcPts val="1400"/>
+                <a:spcPts val="1000"/>
               </a:spcAft>
               <a:defRPr sz="3800" b="1" i="0">
                 <a:solidFill>
@@ -10037,16 +8997,16 @@
               </a:defRPr>
             </a:pPr>
             <a:r>
-              <a:t>AND I WILL RAISE THEM UP,</a:t>
+              <a:t>SO MAY YOUR CHURCH IN LANDS TODAY</a:t>
             </a:r>
           </a:p>
           <a:p>
             <a:pPr algn="ctr">
               <a:lnSpc>
-                <a:spcPct val="115000"/>
+                <a:spcPct val="105000"/>
               </a:lnSpc>
               <a:spcAft>
-                <a:spcPts val="1400"/>
+                <a:spcPts val="1000"/>
               </a:spcAft>
               <a:defRPr sz="3800" b="1" i="0">
                 <a:solidFill>
@@ -10056,7 +9016,7 @@
               </a:defRPr>
             </a:pPr>
             <a:r>
-              <a:t>AND I WILL RAISE THEM UP ON THE LAST DAY.</a:t>
+              <a:t>BE FED, YOUR PRAISE RESTORED.</a:t>
             </a:r>
           </a:p>
         </p:txBody>
@@ -10127,7 +9087,7 @@
     <p:bg>
       <p:bgPr>
         <a:solidFill>
-          <a:srgbClr val="F2F0E8"/>
+          <a:srgbClr val="000000"/>
         </a:solidFill>
         <a:effectLst/>
       </p:bgPr>
@@ -10156,7 +9116,7 @@
         <p:spPr>
           <a:xfrm>
             <a:off x="685800" y="256032"/>
-            <a:ext cx="756904" cy="749807"/>
+            <a:ext cx="387682" cy="384048"/>
           </a:xfrm>
           <a:prstGeom prst="rect">
             <a:avLst/>
@@ -10171,16 +9131,16 @@
         </p:nvSpPr>
         <p:spPr>
           <a:xfrm>
-            <a:off x="1570720" y="256032"/>
-            <a:ext cx="16031480" cy="868680"/>
-          </a:xfrm>
-          <a:prstGeom prst="rect">
-            <a:avLst/>
-          </a:prstGeom>
-          <a:noFill/>
-        </p:spPr>
-        <p:txBody>
-          <a:bodyPr wrap="square" lIns="109728" rIns="109728" tIns="73152" bIns="73152">
+            <a:off x="1201498" y="256032"/>
+            <a:ext cx="16400702" cy="384048"/>
+          </a:xfrm>
+          <a:prstGeom prst="rect">
+            <a:avLst/>
+          </a:prstGeom>
+          <a:noFill/>
+        </p:spPr>
+        <p:txBody>
+          <a:bodyPr wrap="square" lIns="109728" rIns="109728" tIns="73152" bIns="73152" anchor="ctr">
             <a:noAutofit/>
           </a:bodyPr>
           <a:lstStyle/>
@@ -10188,7 +9148,7 @@
             <a:pPr algn="l">
               <a:defRPr sz="1500" b="1" i="0">
                 <a:solidFill>
-                  <a:srgbClr val="1A1A1E"/>
+                  <a:srgbClr val="FFFFFF"/>
                 </a:solidFill>
                 <a:latin typeface="Calibri"/>
               </a:defRPr>
@@ -10207,34 +9167,93 @@
         </p:nvSpPr>
         <p:spPr>
           <a:xfrm>
-            <a:off x="685800" y="1645920"/>
-            <a:ext cx="16916400" cy="4114800"/>
-          </a:xfrm>
-          <a:prstGeom prst="rect">
-            <a:avLst/>
-          </a:prstGeom>
-          <a:noFill/>
-        </p:spPr>
-        <p:txBody>
-          <a:bodyPr wrap="square" lIns="109728" rIns="109728" tIns="73152" bIns="73152">
+            <a:off x="685800" y="1417320"/>
+            <a:ext cx="16916400" cy="8001000"/>
+          </a:xfrm>
+          <a:prstGeom prst="rect">
+            <a:avLst/>
+          </a:prstGeom>
+          <a:noFill/>
+        </p:spPr>
+        <p:txBody>
+          <a:bodyPr wrap="square" lIns="109728" rIns="109728" tIns="73152" bIns="73152" anchor="ctr">
             <a:noAutofit/>
           </a:bodyPr>
           <a:lstStyle/>
           <a:p>
             <a:pPr algn="ctr">
-              <a:defRPr sz="4400" b="1" i="0">
-                <a:solidFill>
-                  <a:srgbClr val="56515A"/>
-                </a:solidFill>
-                <a:latin typeface="Calibri"/>
-              </a:defRPr>
-            </a:pPr>
-            <a:r>
-              <a:t>LITURGY OF</a:t>
-            </a:r>
-            <a:br/>
-            <a:r>
-              <a:t>THE EUCHARIST</a:t>
+              <a:lnSpc>
+                <a:spcPct val="105000"/>
+              </a:lnSpc>
+              <a:spcAft>
+                <a:spcPts val="1000"/>
+              </a:spcAft>
+              <a:defRPr sz="3800" b="1" i="0">
+                <a:solidFill>
+                  <a:srgbClr val="FFFFFF"/>
+                </a:solidFill>
+                <a:latin typeface="Arial Black"/>
+              </a:defRPr>
+            </a:pPr>
+            <a:r>
+              <a:t>O LORD OF HARVEST, GRANT THAT WE</a:t>
+            </a:r>
+          </a:p>
+          <a:p>
+            <a:pPr algn="ctr">
+              <a:lnSpc>
+                <a:spcPct val="105000"/>
+              </a:lnSpc>
+              <a:spcAft>
+                <a:spcPts val="1000"/>
+              </a:spcAft>
+              <a:defRPr sz="3800" b="1" i="0">
+                <a:solidFill>
+                  <a:srgbClr val="FFFFFF"/>
+                </a:solidFill>
+                <a:latin typeface="Arial Black"/>
+              </a:defRPr>
+            </a:pPr>
+            <a:r>
+              <a:t>WHO SHARE THIS MYSTERY HERE</a:t>
+            </a:r>
+          </a:p>
+          <a:p>
+            <a:pPr algn="ctr">
+              <a:lnSpc>
+                <a:spcPct val="105000"/>
+              </a:lnSpc>
+              <a:spcAft>
+                <a:spcPts val="1000"/>
+              </a:spcAft>
+              <a:defRPr sz="3800" b="1" i="0">
+                <a:solidFill>
+                  <a:srgbClr val="FFFFFF"/>
+                </a:solidFill>
+                <a:latin typeface="Arial Black"/>
+              </a:defRPr>
+            </a:pPr>
+            <a:r>
+              <a:t>MAY FOLLOW YOU UNCEASINGLY</a:t>
+            </a:r>
+          </a:p>
+          <a:p>
+            <a:pPr algn="ctr">
+              <a:lnSpc>
+                <a:spcPct val="105000"/>
+              </a:lnSpc>
+              <a:spcAft>
+                <a:spcPts val="1000"/>
+              </a:spcAft>
+              <a:defRPr sz="3800" b="1" i="0">
+                <a:solidFill>
+                  <a:srgbClr val="FFFFFF"/>
+                </a:solidFill>
+                <a:latin typeface="Arial Black"/>
+              </a:defRPr>
+            </a:pPr>
+            <a:r>
+              <a:t>IN PRAISE, IN LOVE, IN FEAR.</a:t>
             </a:r>
           </a:p>
         </p:txBody>
@@ -10264,7 +9283,7 @@
             <a:pPr>
               <a:defRPr sz="1300" b="1" i="0">
                 <a:solidFill>
-                  <a:srgbClr val="5F5D68"/>
+                  <a:srgbClr val="8C8C91"/>
                 </a:solidFill>
                 <a:latin typeface="Calibri"/>
               </a:defRPr>
@@ -10280,13 +9299,13 @@
               </a:spcBef>
               <a:defRPr sz="1200" b="0" i="0">
                 <a:solidFill>
-                  <a:srgbClr val="56515A"/>
-                </a:solidFill>
-                <a:latin typeface="Calibri"/>
-              </a:defRPr>
-            </a:pPr>
-            <a:r>
-              <a:t>Liturgy of the Eucharist</a:t>
+                  <a:srgbClr val="FFCC4D"/>
+                </a:solidFill>
+                <a:latin typeface="Calibri"/>
+              </a:defRPr>
+            </a:pPr>
+            <a:r>
+              <a:t>Offertory</a:t>
             </a:r>
           </a:p>
         </p:txBody>
@@ -10305,7 +9324,7 @@
     <p:bg>
       <p:bgPr>
         <a:solidFill>
-          <a:srgbClr val="F2F0E8"/>
+          <a:srgbClr val="000000"/>
         </a:solidFill>
         <a:effectLst/>
       </p:bgPr>
@@ -10334,7 +9353,7 @@
         <p:spPr>
           <a:xfrm>
             <a:off x="685800" y="256032"/>
-            <a:ext cx="756904" cy="749807"/>
+            <a:ext cx="387682" cy="384048"/>
           </a:xfrm>
           <a:prstGeom prst="rect">
             <a:avLst/>
@@ -10349,16 +9368,16 @@
         </p:nvSpPr>
         <p:spPr>
           <a:xfrm>
-            <a:off x="1570720" y="256032"/>
-            <a:ext cx="16031480" cy="868680"/>
-          </a:xfrm>
-          <a:prstGeom prst="rect">
-            <a:avLst/>
-          </a:prstGeom>
-          <a:noFill/>
-        </p:spPr>
-        <p:txBody>
-          <a:bodyPr wrap="square" lIns="109728" rIns="109728" tIns="73152" bIns="73152">
+            <a:off x="1201498" y="256032"/>
+            <a:ext cx="16400702" cy="384048"/>
+          </a:xfrm>
+          <a:prstGeom prst="rect">
+            <a:avLst/>
+          </a:prstGeom>
+          <a:noFill/>
+        </p:spPr>
+        <p:txBody>
+          <a:bodyPr wrap="square" lIns="109728" rIns="109728" tIns="73152" bIns="73152" anchor="ctr">
             <a:noAutofit/>
           </a:bodyPr>
           <a:lstStyle/>
@@ -10366,7 +9385,7 @@
             <a:pPr algn="l">
               <a:defRPr sz="1500" b="1" i="0">
                 <a:solidFill>
-                  <a:srgbClr val="1A1A1E"/>
+                  <a:srgbClr val="FFFFFF"/>
                 </a:solidFill>
                 <a:latin typeface="Calibri"/>
               </a:defRPr>
@@ -10386,48 +9405,92 @@
         <p:spPr>
           <a:xfrm>
             <a:off x="685800" y="1417320"/>
-            <a:ext cx="16916400" cy="7863840"/>
-          </a:xfrm>
-          <a:prstGeom prst="rect">
-            <a:avLst/>
-          </a:prstGeom>
-          <a:noFill/>
-        </p:spPr>
-        <p:txBody>
-          <a:bodyPr wrap="square" lIns="109728" rIns="109728" tIns="73152" bIns="73152">
-            <a:noAutofit/>
-          </a:bodyPr>
-          <a:lstStyle/>
-          <a:p>
-            <a:pPr>
-              <a:spcAft>
-                <a:spcPts val="500"/>
-              </a:spcAft>
-              <a:defRPr sz="2000" b="1" i="0">
-                <a:solidFill>
-                  <a:srgbClr val="56515A"/>
-                </a:solidFill>
-                <a:latin typeface="Calibri"/>
-              </a:defRPr>
-            </a:pPr>
-            <a:r>
-              <a:t>Pray, brethren, that my sacrifice and yours may be acceptable to God, the almighty Father.</a:t>
-            </a:r>
-          </a:p>
-          <a:p>
-            <a:pPr>
-              <a:spcAft>
-                <a:spcPts val="500"/>
-              </a:spcAft>
-              <a:defRPr sz="2000" b="1" i="0">
-                <a:solidFill>
-                  <a:srgbClr val="1A1A1E"/>
-                </a:solidFill>
-                <a:latin typeface="Calibri"/>
-              </a:defRPr>
-            </a:pPr>
-            <a:r>
-              <a:t>May the Lord accept the sacrifice at your hands, for the praise and glory of his name, for our good and the good of all his holy Church.</a:t>
+            <a:ext cx="16916400" cy="8001000"/>
+          </a:xfrm>
+          <a:prstGeom prst="rect">
+            <a:avLst/>
+          </a:prstGeom>
+          <a:noFill/>
+        </p:spPr>
+        <p:txBody>
+          <a:bodyPr wrap="square" lIns="109728" rIns="109728" tIns="73152" bIns="73152" anchor="ctr">
+            <a:noAutofit/>
+          </a:bodyPr>
+          <a:lstStyle/>
+          <a:p>
+            <a:pPr algn="ctr">
+              <a:lnSpc>
+                <a:spcPct val="105000"/>
+              </a:lnSpc>
+              <a:spcAft>
+                <a:spcPts val="1000"/>
+              </a:spcAft>
+              <a:defRPr sz="3800" b="1" i="0">
+                <a:solidFill>
+                  <a:srgbClr val="FFFFFF"/>
+                </a:solidFill>
+                <a:latin typeface="Arial Black"/>
+              </a:defRPr>
+            </a:pPr>
+            <a:r>
+              <a:t>ONE BREAD, ONE CUP, ONE LIFE, ONE LORD—</a:t>
+            </a:r>
+          </a:p>
+          <a:p>
+            <a:pPr algn="ctr">
+              <a:lnSpc>
+                <a:spcPct val="105000"/>
+              </a:lnSpc>
+              <a:spcAft>
+                <a:spcPts val="1000"/>
+              </a:spcAft>
+              <a:defRPr sz="3800" b="1" i="0">
+                <a:solidFill>
+                  <a:srgbClr val="FFFFFF"/>
+                </a:solidFill>
+                <a:latin typeface="Arial Black"/>
+              </a:defRPr>
+            </a:pPr>
+            <a:r>
+              <a:t>WE OFFER, CHRIST, TO YOU;</a:t>
+            </a:r>
+          </a:p>
+          <a:p>
+            <a:pPr algn="ctr">
+              <a:lnSpc>
+                <a:spcPct val="105000"/>
+              </a:lnSpc>
+              <a:spcAft>
+                <a:spcPts val="1000"/>
+              </a:spcAft>
+              <a:defRPr sz="3800" b="1" i="0">
+                <a:solidFill>
+                  <a:srgbClr val="FFFFFF"/>
+                </a:solidFill>
+                <a:latin typeface="Arial Black"/>
+              </a:defRPr>
+            </a:pPr>
+            <a:r>
+              <a:t>UNTIL WE SHARE YOUR BANQUET BOARD</a:t>
+            </a:r>
+          </a:p>
+          <a:p>
+            <a:pPr algn="ctr">
+              <a:lnSpc>
+                <a:spcPct val="105000"/>
+              </a:lnSpc>
+              <a:spcAft>
+                <a:spcPts val="1000"/>
+              </a:spcAft>
+              <a:defRPr sz="3800" b="1" i="0">
+                <a:solidFill>
+                  <a:srgbClr val="FFFFFF"/>
+                </a:solidFill>
+                <a:latin typeface="Arial Black"/>
+              </a:defRPr>
+            </a:pPr>
+            <a:r>
+              <a:t>WHERE ALL THE WORLD IS NEW.</a:t>
             </a:r>
           </a:p>
         </p:txBody>
@@ -10457,7 +9520,7 @@
             <a:pPr>
               <a:defRPr sz="1300" b="1" i="0">
                 <a:solidFill>
-                  <a:srgbClr val="5F5D68"/>
+                  <a:srgbClr val="8C8C91"/>
                 </a:solidFill>
                 <a:latin typeface="Calibri"/>
               </a:defRPr>
@@ -10473,13 +9536,13 @@
               </a:spcBef>
               <a:defRPr sz="1200" b="0" i="0">
                 <a:solidFill>
-                  <a:srgbClr val="56515A"/>
-                </a:solidFill>
-                <a:latin typeface="Calibri"/>
-              </a:defRPr>
-            </a:pPr>
-            <a:r>
-              <a:t>Liturgy of the Eucharist</a:t>
+                  <a:srgbClr val="FFCC4D"/>
+                </a:solidFill>
+                <a:latin typeface="Calibri"/>
+              </a:defRPr>
+            </a:pPr>
+            <a:r>
+              <a:t>Offertory</a:t>
             </a:r>
           </a:p>
         </p:txBody>
@@ -10527,7 +9590,7 @@
         <p:spPr>
           <a:xfrm>
             <a:off x="685800" y="256032"/>
-            <a:ext cx="756904" cy="749807"/>
+            <a:ext cx="387682" cy="384048"/>
           </a:xfrm>
           <a:prstGeom prst="rect">
             <a:avLst/>
@@ -10542,16 +9605,16 @@
         </p:nvSpPr>
         <p:spPr>
           <a:xfrm>
-            <a:off x="1570720" y="256032"/>
-            <a:ext cx="16031480" cy="868680"/>
-          </a:xfrm>
-          <a:prstGeom prst="rect">
-            <a:avLst/>
-          </a:prstGeom>
-          <a:noFill/>
-        </p:spPr>
-        <p:txBody>
-          <a:bodyPr wrap="square" lIns="109728" rIns="109728" tIns="73152" bIns="73152">
+            <a:off x="1201498" y="256032"/>
+            <a:ext cx="16400702" cy="384048"/>
+          </a:xfrm>
+          <a:prstGeom prst="rect">
+            <a:avLst/>
+          </a:prstGeom>
+          <a:noFill/>
+        </p:spPr>
+        <p:txBody>
+          <a:bodyPr wrap="square" lIns="109728" rIns="109728" tIns="73152" bIns="73152" anchor="ctr">
             <a:noAutofit/>
           </a:bodyPr>
           <a:lstStyle/>
@@ -10705,7 +9768,7 @@
         <p:spPr>
           <a:xfrm>
             <a:off x="685800" y="256032"/>
-            <a:ext cx="756904" cy="749807"/>
+            <a:ext cx="387682" cy="384048"/>
           </a:xfrm>
           <a:prstGeom prst="rect">
             <a:avLst/>
@@ -10720,16 +9783,16 @@
         </p:nvSpPr>
         <p:spPr>
           <a:xfrm>
-            <a:off x="1570720" y="256032"/>
-            <a:ext cx="16031480" cy="868680"/>
-          </a:xfrm>
-          <a:prstGeom prst="rect">
-            <a:avLst/>
-          </a:prstGeom>
-          <a:noFill/>
-        </p:spPr>
-        <p:txBody>
-          <a:bodyPr wrap="square" lIns="109728" rIns="109728" tIns="73152" bIns="73152">
+            <a:off x="1201498" y="256032"/>
+            <a:ext cx="16400702" cy="384048"/>
+          </a:xfrm>
+          <a:prstGeom prst="rect">
+            <a:avLst/>
+          </a:prstGeom>
+          <a:noFill/>
+        </p:spPr>
+        <p:txBody>
+          <a:bodyPr wrap="square" lIns="109728" rIns="109728" tIns="73152" bIns="73152" anchor="ctr">
             <a:noAutofit/>
           </a:bodyPr>
           <a:lstStyle/>
@@ -10782,7 +9845,7 @@
               </a:defRPr>
             </a:pPr>
             <a:r>
-              <a:t>The Lord be with you.</a:t>
+              <a:t>Pray, brethren, that my sacrifice and yours may be acceptable to God, the almighty Father.</a:t>
             </a:r>
           </a:p>
           <a:p>
@@ -10798,71 +9861,7 @@
               </a:defRPr>
             </a:pPr>
             <a:r>
-              <a:t>And with your spirit.</a:t>
-            </a:r>
-          </a:p>
-          <a:p>
-            <a:pPr>
-              <a:spcAft>
-                <a:spcPts val="500"/>
-              </a:spcAft>
-              <a:defRPr sz="2000" b="1" i="0">
-                <a:solidFill>
-                  <a:srgbClr val="56515A"/>
-                </a:solidFill>
-                <a:latin typeface="Calibri"/>
-              </a:defRPr>
-            </a:pPr>
-            <a:r>
-              <a:t>Lift up your hearts.</a:t>
-            </a:r>
-          </a:p>
-          <a:p>
-            <a:pPr>
-              <a:spcAft>
-                <a:spcPts val="500"/>
-              </a:spcAft>
-              <a:defRPr sz="2000" b="1" i="0">
-                <a:solidFill>
-                  <a:srgbClr val="1A1A1E"/>
-                </a:solidFill>
-                <a:latin typeface="Calibri"/>
-              </a:defRPr>
-            </a:pPr>
-            <a:r>
-              <a:t>We lift them up to the Lord.</a:t>
-            </a:r>
-          </a:p>
-          <a:p>
-            <a:pPr>
-              <a:spcAft>
-                <a:spcPts val="500"/>
-              </a:spcAft>
-              <a:defRPr sz="2000" b="1" i="0">
-                <a:solidFill>
-                  <a:srgbClr val="56515A"/>
-                </a:solidFill>
-                <a:latin typeface="Calibri"/>
-              </a:defRPr>
-            </a:pPr>
-            <a:r>
-              <a:t>Let us give thanks to the Lord our God.</a:t>
-            </a:r>
-          </a:p>
-          <a:p>
-            <a:pPr>
-              <a:spcAft>
-                <a:spcPts val="500"/>
-              </a:spcAft>
-              <a:defRPr sz="2000" b="1" i="0">
-                <a:solidFill>
-                  <a:srgbClr val="1A1A1E"/>
-                </a:solidFill>
-                <a:latin typeface="Calibri"/>
-              </a:defRPr>
-            </a:pPr>
-            <a:r>
-              <a:t>It is right and just.</a:t>
+              <a:t>May the Lord accept the sacrifice at your hands, for the praise and glory of his name, for our good and the good of all his holy Church.</a:t>
             </a:r>
           </a:p>
         </p:txBody>
@@ -10962,7 +9961,7 @@
         <p:spPr>
           <a:xfrm>
             <a:off x="685800" y="256032"/>
-            <a:ext cx="756904" cy="749807"/>
+            <a:ext cx="387682" cy="384048"/>
           </a:xfrm>
           <a:prstGeom prst="rect">
             <a:avLst/>
@@ -10977,16 +9976,16 @@
         </p:nvSpPr>
         <p:spPr>
           <a:xfrm>
-            <a:off x="1570720" y="256032"/>
-            <a:ext cx="16031480" cy="868680"/>
-          </a:xfrm>
-          <a:prstGeom prst="rect">
-            <a:avLst/>
-          </a:prstGeom>
-          <a:noFill/>
-        </p:spPr>
-        <p:txBody>
-          <a:bodyPr wrap="square" lIns="109728" rIns="109728" tIns="73152" bIns="73152">
+            <a:off x="1201498" y="256032"/>
+            <a:ext cx="16400702" cy="384048"/>
+          </a:xfrm>
+          <a:prstGeom prst="rect">
+            <a:avLst/>
+          </a:prstGeom>
+          <a:noFill/>
+        </p:spPr>
+        <p:txBody>
+          <a:bodyPr wrap="square" lIns="109728" rIns="109728" tIns="73152" bIns="73152" anchor="ctr">
             <a:noAutofit/>
           </a:bodyPr>
           <a:lstStyle/>
@@ -11013,8 +10012,8 @@
         </p:nvSpPr>
         <p:spPr>
           <a:xfrm>
-            <a:off x="685800" y="1417320"/>
-            <a:ext cx="16916400" cy="7863840"/>
+            <a:off x="685800" y="1645920"/>
+            <a:ext cx="16916400" cy="4114800"/>
           </a:xfrm>
           <a:prstGeom prst="rect">
             <a:avLst/>
@@ -11027,11 +10026,8 @@
           </a:bodyPr>
           <a:lstStyle/>
           <a:p>
-            <a:pPr>
-              <a:spcAft>
-                <a:spcPts val="500"/>
-              </a:spcAft>
-              <a:defRPr sz="1500" b="0" i="1">
+            <a:pPr algn="ctr">
+              <a:defRPr sz="4400" b="1" i="0">
                 <a:solidFill>
                   <a:srgbClr val="56515A"/>
                 </a:solidFill>
@@ -11039,7 +10035,11 @@
               </a:defRPr>
             </a:pPr>
             <a:r>
-              <a:t>The Priest continues with the Preface of the day from the Roman Missal — the entire Preface proper for this Mass, not truncated — until the point where the people join in singing or saying the Holy, Holy (Sanctus).</a:t>
+              <a:t>LITURGY OF</a:t>
+            </a:r>
+            <a:br/>
+            <a:r>
+              <a:t>THE EUCHARIST</a:t>
             </a:r>
           </a:p>
         </p:txBody>
@@ -11139,7 +10139,7 @@
         <p:spPr>
           <a:xfrm>
             <a:off x="685800" y="256032"/>
-            <a:ext cx="756904" cy="749807"/>
+            <a:ext cx="387682" cy="384048"/>
           </a:xfrm>
           <a:prstGeom prst="rect">
             <a:avLst/>
@@ -11154,16 +10154,16 @@
         </p:nvSpPr>
         <p:spPr>
           <a:xfrm>
-            <a:off x="1570720" y="256032"/>
-            <a:ext cx="16031480" cy="868680"/>
-          </a:xfrm>
-          <a:prstGeom prst="rect">
-            <a:avLst/>
-          </a:prstGeom>
-          <a:noFill/>
-        </p:spPr>
-        <p:txBody>
-          <a:bodyPr wrap="square" lIns="109728" rIns="109728" tIns="73152" bIns="73152">
+            <a:off x="1201498" y="256032"/>
+            <a:ext cx="16400702" cy="384048"/>
+          </a:xfrm>
+          <a:prstGeom prst="rect">
+            <a:avLst/>
+          </a:prstGeom>
+          <a:noFill/>
+        </p:spPr>
+        <p:txBody>
+          <a:bodyPr wrap="square" lIns="109728" rIns="109728" tIns="73152" bIns="73152" anchor="ctr">
             <a:noAutofit/>
           </a:bodyPr>
           <a:lstStyle/>
@@ -11208,15 +10208,15 @@
               <a:spcAft>
                 <a:spcPts val="500"/>
               </a:spcAft>
-              <a:defRPr sz="1900" b="1" i="0">
-                <a:solidFill>
-                  <a:srgbClr val="1A1A1E"/>
-                </a:solidFill>
-                <a:latin typeface="Calibri"/>
-              </a:defRPr>
-            </a:pPr>
-            <a:r>
-              <a:t>Holy, Holy, Holy Lord God of hosts.</a:t>
+              <a:defRPr sz="2000" b="1" i="0">
+                <a:solidFill>
+                  <a:srgbClr val="56515A"/>
+                </a:solidFill>
+                <a:latin typeface="Calibri"/>
+              </a:defRPr>
+            </a:pPr>
+            <a:r>
+              <a:t>The Lord be with you.</a:t>
             </a:r>
           </a:p>
           <a:p>
@@ -11224,15 +10224,15 @@
               <a:spcAft>
                 <a:spcPts val="500"/>
               </a:spcAft>
-              <a:defRPr sz="1900" b="0" i="0">
-                <a:solidFill>
-                  <a:srgbClr val="1A1A1E"/>
-                </a:solidFill>
-                <a:latin typeface="Calibri"/>
-              </a:defRPr>
-            </a:pPr>
-            <a:r>
-              <a:t>Heaven and earth are full of your glory.</a:t>
+              <a:defRPr sz="2000" b="1" i="0">
+                <a:solidFill>
+                  <a:srgbClr val="1A1A1E"/>
+                </a:solidFill>
+                <a:latin typeface="Calibri"/>
+              </a:defRPr>
+            </a:pPr>
+            <a:r>
+              <a:t>And with your spirit.</a:t>
             </a:r>
           </a:p>
           <a:p>
@@ -11240,15 +10240,15 @@
               <a:spcAft>
                 <a:spcPts val="500"/>
               </a:spcAft>
-              <a:defRPr sz="1900" b="0" i="0">
-                <a:solidFill>
-                  <a:srgbClr val="1A1A1E"/>
-                </a:solidFill>
-                <a:latin typeface="Calibri"/>
-              </a:defRPr>
-            </a:pPr>
-            <a:r>
-              <a:t>Hosanna in the highest.</a:t>
+              <a:defRPr sz="2000" b="1" i="0">
+                <a:solidFill>
+                  <a:srgbClr val="56515A"/>
+                </a:solidFill>
+                <a:latin typeface="Calibri"/>
+              </a:defRPr>
+            </a:pPr>
+            <a:r>
+              <a:t>Lift up your hearts.</a:t>
             </a:r>
           </a:p>
           <a:p>
@@ -11256,15 +10256,15 @@
               <a:spcAft>
                 <a:spcPts val="500"/>
               </a:spcAft>
-              <a:defRPr sz="1900" b="0" i="0">
-                <a:solidFill>
-                  <a:srgbClr val="1A1A1E"/>
-                </a:solidFill>
-                <a:latin typeface="Calibri"/>
-              </a:defRPr>
-            </a:pPr>
-            <a:r>
-              <a:t>Blessed is he who comes in the name of the Lord.</a:t>
+              <a:defRPr sz="2000" b="1" i="0">
+                <a:solidFill>
+                  <a:srgbClr val="1A1A1E"/>
+                </a:solidFill>
+                <a:latin typeface="Calibri"/>
+              </a:defRPr>
+            </a:pPr>
+            <a:r>
+              <a:t>We lift them up to the Lord.</a:t>
             </a:r>
           </a:p>
           <a:p>
@@ -11272,15 +10272,31 @@
               <a:spcAft>
                 <a:spcPts val="500"/>
               </a:spcAft>
-              <a:defRPr sz="1900" b="0" i="0">
-                <a:solidFill>
-                  <a:srgbClr val="1A1A1E"/>
-                </a:solidFill>
-                <a:latin typeface="Calibri"/>
-              </a:defRPr>
-            </a:pPr>
-            <a:r>
-              <a:t>Hosanna in the highest.</a:t>
+              <a:defRPr sz="2000" b="1" i="0">
+                <a:solidFill>
+                  <a:srgbClr val="56515A"/>
+                </a:solidFill>
+                <a:latin typeface="Calibri"/>
+              </a:defRPr>
+            </a:pPr>
+            <a:r>
+              <a:t>Let us give thanks to the Lord our God.</a:t>
+            </a:r>
+          </a:p>
+          <a:p>
+            <a:pPr>
+              <a:spcAft>
+                <a:spcPts val="500"/>
+              </a:spcAft>
+              <a:defRPr sz="2000" b="1" i="0">
+                <a:solidFill>
+                  <a:srgbClr val="1A1A1E"/>
+                </a:solidFill>
+                <a:latin typeface="Calibri"/>
+              </a:defRPr>
+            </a:pPr>
+            <a:r>
+              <a:t>It is right and just.</a:t>
             </a:r>
           </a:p>
         </p:txBody>
@@ -11332,7 +10348,7 @@
               </a:defRPr>
             </a:pPr>
             <a:r>
-              <a:t>Sanctus</a:t>
+              <a:t>Liturgy of the Eucharist</a:t>
             </a:r>
           </a:p>
         </p:txBody>
@@ -11380,7 +10396,7 @@
         <p:spPr>
           <a:xfrm>
             <a:off x="685800" y="256032"/>
-            <a:ext cx="756904" cy="749807"/>
+            <a:ext cx="387682" cy="384048"/>
           </a:xfrm>
           <a:prstGeom prst="rect">
             <a:avLst/>
@@ -11395,16 +10411,16 @@
         </p:nvSpPr>
         <p:spPr>
           <a:xfrm>
-            <a:off x="1570720" y="256032"/>
-            <a:ext cx="16031480" cy="868680"/>
-          </a:xfrm>
-          <a:prstGeom prst="rect">
-            <a:avLst/>
-          </a:prstGeom>
-          <a:noFill/>
-        </p:spPr>
-        <p:txBody>
-          <a:bodyPr wrap="square" lIns="109728" rIns="109728" tIns="73152" bIns="73152">
+            <a:off x="1201498" y="256032"/>
+            <a:ext cx="16400702" cy="384048"/>
+          </a:xfrm>
+          <a:prstGeom prst="rect">
+            <a:avLst/>
+          </a:prstGeom>
+          <a:noFill/>
+        </p:spPr>
+        <p:txBody>
+          <a:bodyPr wrap="square" lIns="109728" rIns="109728" tIns="73152" bIns="73152" anchor="ctr">
             <a:noAutofit/>
           </a:bodyPr>
           <a:lstStyle/>
@@ -11431,8 +10447,8 @@
         </p:nvSpPr>
         <p:spPr>
           <a:xfrm>
-            <a:off x="685800" y="1645920"/>
-            <a:ext cx="16916400" cy="4114800"/>
+            <a:off x="685800" y="1417320"/>
+            <a:ext cx="16916400" cy="7863840"/>
           </a:xfrm>
           <a:prstGeom prst="rect">
             <a:avLst/>
@@ -11445,8 +10461,11 @@
           </a:bodyPr>
           <a:lstStyle/>
           <a:p>
-            <a:pPr algn="ctr">
-              <a:defRPr sz="4400" b="1" i="0">
+            <a:pPr>
+              <a:spcAft>
+                <a:spcPts val="500"/>
+              </a:spcAft>
+              <a:defRPr sz="1500" b="0" i="1">
                 <a:solidFill>
                   <a:srgbClr val="56515A"/>
                 </a:solidFill>
@@ -11454,11 +10473,7 @@
               </a:defRPr>
             </a:pPr>
             <a:r>
-              <a:t>LITURGY OF</a:t>
-            </a:r>
-            <a:br/>
-            <a:r>
-              <a:t>THE EUCHARIST</a:t>
+              <a:t>The Priest continues with the Preface of the day from the Roman Missal — the entire Preface proper for this Mass, not truncated — until the point where the people join in singing or saying the Holy, Holy (Sanctus).</a:t>
             </a:r>
           </a:p>
         </p:txBody>
@@ -11558,7 +10573,7 @@
         <p:spPr>
           <a:xfrm>
             <a:off x="685800" y="256032"/>
-            <a:ext cx="756904" cy="749807"/>
+            <a:ext cx="387682" cy="384048"/>
           </a:xfrm>
           <a:prstGeom prst="rect">
             <a:avLst/>
@@ -11573,16 +10588,16 @@
         </p:nvSpPr>
         <p:spPr>
           <a:xfrm>
-            <a:off x="1570720" y="256032"/>
-            <a:ext cx="16031480" cy="868680"/>
-          </a:xfrm>
-          <a:prstGeom prst="rect">
-            <a:avLst/>
-          </a:prstGeom>
-          <a:noFill/>
-        </p:spPr>
-        <p:txBody>
-          <a:bodyPr wrap="square" lIns="109728" rIns="109728" tIns="73152" bIns="73152">
+            <a:off x="1201498" y="256032"/>
+            <a:ext cx="16400702" cy="384048"/>
+          </a:xfrm>
+          <a:prstGeom prst="rect">
+            <a:avLst/>
+          </a:prstGeom>
+          <a:noFill/>
+        </p:spPr>
+        <p:txBody>
+          <a:bodyPr wrap="square" lIns="109728" rIns="109728" tIns="73152" bIns="73152" anchor="ctr">
             <a:noAutofit/>
           </a:bodyPr>
           <a:lstStyle/>
@@ -11627,15 +10642,15 @@
               <a:spcAft>
                 <a:spcPts val="500"/>
               </a:spcAft>
-              <a:defRPr sz="1500" b="0" i="1">
-                <a:solidFill>
-                  <a:srgbClr val="56515A"/>
-                </a:solidFill>
-                <a:latin typeface="Calibri"/>
-              </a:defRPr>
-            </a:pPr>
-            <a:r>
-              <a:t>The Priest sings or says the introduction to the Mystery of Faith, then the people sing or say one of these Memorial Acclamations in full:</a:t>
+              <a:defRPr sz="2000" b="1" i="0">
+                <a:solidFill>
+                  <a:srgbClr val="1A1A1E"/>
+                </a:solidFill>
+                <a:latin typeface="Calibri"/>
+              </a:defRPr>
+            </a:pPr>
+            <a:r>
+              <a:t>Holy, Holy, Holy Lord God of hosts.</a:t>
             </a:r>
           </a:p>
           <a:p>
@@ -11643,15 +10658,15 @@
               <a:spcAft>
                 <a:spcPts val="500"/>
               </a:spcAft>
-              <a:defRPr sz="1900" b="1" i="0">
-                <a:solidFill>
-                  <a:srgbClr val="1A1A1E"/>
-                </a:solidFill>
-                <a:latin typeface="Calibri"/>
-              </a:defRPr>
-            </a:pPr>
-            <a:r>
-              <a:t>We proclaim your Death, O Lord, and profess your Resurrection until you come again.</a:t>
+              <a:defRPr sz="1900" b="0" i="0">
+                <a:solidFill>
+                  <a:srgbClr val="1A1A1E"/>
+                </a:solidFill>
+                <a:latin typeface="Calibri"/>
+              </a:defRPr>
+            </a:pPr>
+            <a:r>
+              <a:t>Heaven and earth are full of your glory.</a:t>
             </a:r>
           </a:p>
           <a:p>
@@ -11659,15 +10674,15 @@
               <a:spcAft>
                 <a:spcPts val="500"/>
               </a:spcAft>
-              <a:defRPr sz="1500" b="0" i="1">
-                <a:solidFill>
-                  <a:srgbClr val="56515A"/>
-                </a:solidFill>
-                <a:latin typeface="Calibri"/>
-              </a:defRPr>
-            </a:pPr>
-            <a:r>
-              <a:t>or</a:t>
+              <a:defRPr sz="1900" b="0" i="0">
+                <a:solidFill>
+                  <a:srgbClr val="1A1A1E"/>
+                </a:solidFill>
+                <a:latin typeface="Calibri"/>
+              </a:defRPr>
+            </a:pPr>
+            <a:r>
+              <a:t>Hosanna in the highest.</a:t>
             </a:r>
           </a:p>
           <a:p>
@@ -11675,15 +10690,15 @@
               <a:spcAft>
                 <a:spcPts val="500"/>
               </a:spcAft>
-              <a:defRPr sz="1900" b="1" i="0">
-                <a:solidFill>
-                  <a:srgbClr val="1A1A1E"/>
-                </a:solidFill>
-                <a:latin typeface="Calibri"/>
-              </a:defRPr>
-            </a:pPr>
-            <a:r>
-              <a:t>When we eat this Bread and drink this Cup, we proclaim your Death, O Lord, until you come again.</a:t>
+              <a:defRPr sz="1900" b="0" i="0">
+                <a:solidFill>
+                  <a:srgbClr val="1A1A1E"/>
+                </a:solidFill>
+                <a:latin typeface="Calibri"/>
+              </a:defRPr>
+            </a:pPr>
+            <a:r>
+              <a:t>Blessed is he who comes in the name of the Lord.</a:t>
             </a:r>
           </a:p>
           <a:p>
@@ -11691,31 +10706,15 @@
               <a:spcAft>
                 <a:spcPts val="500"/>
               </a:spcAft>
-              <a:defRPr sz="1500" b="0" i="1">
-                <a:solidFill>
-                  <a:srgbClr val="56515A"/>
-                </a:solidFill>
-                <a:latin typeface="Calibri"/>
-              </a:defRPr>
-            </a:pPr>
-            <a:r>
-              <a:t>or</a:t>
-            </a:r>
-          </a:p>
-          <a:p>
-            <a:pPr>
-              <a:spcAft>
-                <a:spcPts val="500"/>
-              </a:spcAft>
-              <a:defRPr sz="1900" b="1" i="0">
-                <a:solidFill>
-                  <a:srgbClr val="1A1A1E"/>
-                </a:solidFill>
-                <a:latin typeface="Calibri"/>
-              </a:defRPr>
-            </a:pPr>
-            <a:r>
-              <a:t>Save us, Savior of the world, for by your Cross and Resurrection you have set us free.</a:t>
+              <a:defRPr sz="1900" b="0" i="0">
+                <a:solidFill>
+                  <a:srgbClr val="1A1A1E"/>
+                </a:solidFill>
+                <a:latin typeface="Calibri"/>
+              </a:defRPr>
+            </a:pPr>
+            <a:r>
+              <a:t>Hosanna in the highest.</a:t>
             </a:r>
           </a:p>
         </p:txBody>
@@ -11767,7 +10766,7 @@
               </a:defRPr>
             </a:pPr>
             <a:r>
-              <a:t>The Eucharistic Prayer</a:t>
+              <a:t>Sanctus</a:t>
             </a:r>
           </a:p>
         </p:txBody>
@@ -11815,7 +10814,7 @@
         <p:spPr>
           <a:xfrm>
             <a:off x="685800" y="256032"/>
-            <a:ext cx="756904" cy="749807"/>
+            <a:ext cx="387682" cy="384048"/>
           </a:xfrm>
           <a:prstGeom prst="rect">
             <a:avLst/>
@@ -11830,16 +10829,16 @@
         </p:nvSpPr>
         <p:spPr>
           <a:xfrm>
-            <a:off x="1570720" y="256032"/>
-            <a:ext cx="16031480" cy="868680"/>
-          </a:xfrm>
-          <a:prstGeom prst="rect">
-            <a:avLst/>
-          </a:prstGeom>
-          <a:noFill/>
-        </p:spPr>
-        <p:txBody>
-          <a:bodyPr wrap="square" lIns="109728" rIns="109728" tIns="73152" bIns="73152">
+            <a:off x="1201498" y="256032"/>
+            <a:ext cx="16400702" cy="384048"/>
+          </a:xfrm>
+          <a:prstGeom prst="rect">
+            <a:avLst/>
+          </a:prstGeom>
+          <a:noFill/>
+        </p:spPr>
+        <p:txBody>
+          <a:bodyPr wrap="square" lIns="109728" rIns="109728" tIns="73152" bIns="73152" anchor="ctr">
             <a:noAutofit/>
           </a:bodyPr>
           <a:lstStyle/>
@@ -11993,7 +10992,7 @@
         <p:spPr>
           <a:xfrm>
             <a:off x="685800" y="256032"/>
-            <a:ext cx="756904" cy="749807"/>
+            <a:ext cx="387682" cy="384048"/>
           </a:xfrm>
           <a:prstGeom prst="rect">
             <a:avLst/>
@@ -12008,16 +11007,16 @@
         </p:nvSpPr>
         <p:spPr>
           <a:xfrm>
-            <a:off x="1570720" y="256032"/>
-            <a:ext cx="16031480" cy="868680"/>
-          </a:xfrm>
-          <a:prstGeom prst="rect">
-            <a:avLst/>
-          </a:prstGeom>
-          <a:noFill/>
-        </p:spPr>
-        <p:txBody>
-          <a:bodyPr wrap="square" lIns="109728" rIns="109728" tIns="73152" bIns="73152">
+            <a:off x="1201498" y="256032"/>
+            <a:ext cx="16400702" cy="384048"/>
+          </a:xfrm>
+          <a:prstGeom prst="rect">
+            <a:avLst/>
+          </a:prstGeom>
+          <a:noFill/>
+        </p:spPr>
+        <p:txBody>
+          <a:bodyPr wrap="square" lIns="109728" rIns="109728" tIns="73152" bIns="73152" anchor="ctr">
             <a:noAutofit/>
           </a:bodyPr>
           <a:lstStyle/>
@@ -12045,7 +11044,43 @@
         <p:spPr>
           <a:xfrm>
             <a:off x="685800" y="1417320"/>
-            <a:ext cx="16916400" cy="8001000"/>
+            <a:ext cx="16916400" cy="777240"/>
+          </a:xfrm>
+          <a:prstGeom prst="rect">
+            <a:avLst/>
+          </a:prstGeom>
+          <a:noFill/>
+        </p:spPr>
+        <p:txBody>
+          <a:bodyPr wrap="square" lIns="109728" rIns="109728" tIns="73152" bIns="73152">
+            <a:noAutofit/>
+          </a:bodyPr>
+          <a:lstStyle/>
+          <a:p>
+            <a:pPr algn="ctr">
+              <a:defRPr sz="3400" b="1" i="0">
+                <a:solidFill>
+                  <a:srgbClr val="FFCC4D"/>
+                </a:solidFill>
+                <a:latin typeface="Georgia"/>
+              </a:defRPr>
+            </a:pPr>
+            <a:r>
+              <a:t>Joyful Joyful We Adore Thee</a:t>
+            </a:r>
+          </a:p>
+        </p:txBody>
+      </p:sp>
+      <p:sp>
+        <p:nvSpPr>
+          <p:cNvPr id="5" name="TextBox 4"/>
+          <p:cNvSpPr txBox="1"/>
+          <p:nvPr/>
+        </p:nvSpPr>
+        <p:spPr>
+          <a:xfrm>
+            <a:off x="685800" y="2331720"/>
+            <a:ext cx="16916400" cy="7086600"/>
           </a:xfrm>
           <a:prstGeom prst="rect">
             <a:avLst/>
@@ -12060,10 +11095,10 @@
           <a:p>
             <a:pPr algn="ctr">
               <a:lnSpc>
-                <a:spcPct val="115000"/>
+                <a:spcPct val="105000"/>
               </a:lnSpc>
               <a:spcAft>
-                <a:spcPts val="1400"/>
+                <a:spcPts val="1000"/>
               </a:spcAft>
               <a:defRPr sz="3800" b="1" i="0">
                 <a:solidFill>
@@ -12073,318 +11108,14 @@
               </a:defRPr>
             </a:pPr>
             <a:r>
-              <a:t>MAKE MUSIC FOR THY LORD TO HEAR,</a:t>
-            </a:r>
-          </a:p>
-          <a:p>
-            <a:pPr algn="ctr">
-              <a:lnSpc>
-                <a:spcPct val="115000"/>
-              </a:lnSpc>
-              <a:spcAft>
-                <a:spcPts val="1400"/>
-              </a:spcAft>
-              <a:defRPr sz="3800" b="1" i="0">
-                <a:solidFill>
-                  <a:srgbClr val="FFFFFF"/>
-                </a:solidFill>
-                <a:latin typeface="Arial Black"/>
-              </a:defRPr>
-            </a:pPr>
-            <a:r>
-              <a:t>ALLELUIA, ALLELUIA!</a:t>
-            </a:r>
-          </a:p>
-          <a:p>
-            <a:pPr algn="ctr">
-              <a:lnSpc>
-                <a:spcPct val="115000"/>
-              </a:lnSpc>
-              <a:spcAft>
-                <a:spcPts val="1400"/>
-              </a:spcAft>
-              <a:defRPr sz="3800" b="1" i="0">
-                <a:solidFill>
-                  <a:srgbClr val="FFFFFF"/>
-                </a:solidFill>
-                <a:latin typeface="Arial Black"/>
-              </a:defRPr>
-            </a:pPr>
-            <a:r>
-              <a:t>WHATSOEVER FOLK THERE BE</a:t>
-            </a:r>
-          </a:p>
-          <a:p>
-            <a:pPr algn="ctr">
-              <a:lnSpc>
-                <a:spcPct val="115000"/>
-              </a:lnSpc>
-              <a:spcAft>
-                <a:spcPts val="1400"/>
-              </a:spcAft>
-              <a:defRPr sz="3800" b="1" i="0">
-                <a:solidFill>
-                  <a:srgbClr val="FFFFFF"/>
-                </a:solidFill>
-                <a:latin typeface="Arial Black"/>
-              </a:defRPr>
-            </a:pPr>
-            <a:r>
-              <a:t>WHO HOLD HIGH SPRING IN DIGNITY,</a:t>
-            </a:r>
-          </a:p>
-          <a:p>
-            <a:pPr algn="ctr">
-              <a:lnSpc>
-                <a:spcPct val="115000"/>
-              </a:lnSpc>
-              <a:spcAft>
-                <a:spcPts val="1400"/>
-              </a:spcAft>
-              <a:defRPr sz="3800" b="1" i="0">
-                <a:solidFill>
-                  <a:srgbClr val="FFFFFF"/>
-                </a:solidFill>
-                <a:latin typeface="Arial Black"/>
-              </a:defRPr>
-            </a:pPr>
-            <a:r>
-              <a:t>O PRAISE HIM, ALLELUIA!</a:t>
-            </a:r>
-          </a:p>
-          <a:p>
-            <a:pPr algn="ctr">
-              <a:lnSpc>
-                <a:spcPct val="115000"/>
-              </a:lnSpc>
-              <a:spcAft>
-                <a:spcPts val="1400"/>
-              </a:spcAft>
-              <a:defRPr sz="3800" b="1" i="0">
-                <a:solidFill>
-                  <a:srgbClr val="FFFFFF"/>
-                </a:solidFill>
-                <a:latin typeface="Arial Black"/>
-              </a:defRPr>
-            </a:pPr>
-            <a:r>
-              <a:t>AND ALL YE MEN OF TENDER HEART,</a:t>
-            </a:r>
-          </a:p>
-          <a:p>
-            <a:pPr algn="ctr">
-              <a:lnSpc>
-                <a:spcPct val="115000"/>
-              </a:lnSpc>
-              <a:spcAft>
-                <a:spcPts val="1400"/>
-              </a:spcAft>
-              <a:defRPr sz="3800" b="1" i="0">
-                <a:solidFill>
-                  <a:srgbClr val="FFFFFF"/>
-                </a:solidFill>
-                <a:latin typeface="Arial Black"/>
-              </a:defRPr>
-            </a:pPr>
-            <a:r>
-              <a:t>FORGIVING OTHERS, TAKE YOUR PART,</a:t>
-            </a:r>
-          </a:p>
-          <a:p>
-            <a:pPr algn="ctr">
-              <a:lnSpc>
-                <a:spcPct val="115000"/>
-              </a:lnSpc>
-              <a:spcAft>
-                <a:spcPts val="1400"/>
-              </a:spcAft>
-              <a:defRPr sz="3800" b="1" i="0">
-                <a:solidFill>
-                  <a:srgbClr val="FFFFFF"/>
-                </a:solidFill>
-                <a:latin typeface="Arial Black"/>
-              </a:defRPr>
-            </a:pPr>
-            <a:r>
-              <a:t>O SING YE, ALLELUIA!</a:t>
-            </a:r>
-          </a:p>
-          <a:p>
-            <a:pPr algn="ctr">
-              <a:lnSpc>
-                <a:spcPct val="115000"/>
-              </a:lnSpc>
-              <a:spcAft>
-                <a:spcPts val="1400"/>
-              </a:spcAft>
-              <a:defRPr sz="3800" b="1" i="0">
-                <a:solidFill>
-                  <a:srgbClr val="FFFFFF"/>
-                </a:solidFill>
-                <a:latin typeface="Arial Black"/>
-              </a:defRPr>
-            </a:pPr>
-            <a:r>
-              <a:t>YE WHO LONG PAIN AND SORROW BEAR,</a:t>
-            </a:r>
-          </a:p>
-          <a:p>
-            <a:pPr algn="ctr">
-              <a:lnSpc>
-                <a:spcPct val="115000"/>
-              </a:lnSpc>
-              <a:spcAft>
-                <a:spcPts val="1400"/>
-              </a:spcAft>
-              <a:defRPr sz="3800" b="1" i="0">
-                <a:solidFill>
-                  <a:srgbClr val="FFFFFF"/>
-                </a:solidFill>
-                <a:latin typeface="Arial Black"/>
-              </a:defRPr>
-            </a:pPr>
-            <a:r>
-              <a:t>PRAISE GOD AND ON HIM CAST YOUR CARE,</a:t>
-            </a:r>
-          </a:p>
-          <a:p>
-            <a:pPr algn="ctr">
-              <a:lnSpc>
-                <a:spcPct val="115000"/>
-              </a:lnSpc>
-              <a:spcAft>
-                <a:spcPts val="1400"/>
-              </a:spcAft>
-              <a:defRPr sz="3800" b="1" i="0">
-                <a:solidFill>
-                  <a:srgbClr val="FFFFFF"/>
-                </a:solidFill>
-                <a:latin typeface="Arial Black"/>
-              </a:defRPr>
-            </a:pPr>
-            <a:r>
-              <a:t>O PRAISE HIM, ALLELUIA!</a:t>
-            </a:r>
-          </a:p>
-          <a:p>
-            <a:pPr algn="ctr">
-              <a:lnSpc>
-                <a:spcPct val="115000"/>
-              </a:lnSpc>
-              <a:spcAft>
-                <a:spcPts val="1400"/>
-              </a:spcAft>
-              <a:defRPr sz="3800" b="1" i="0">
-                <a:solidFill>
-                  <a:srgbClr val="FFFFFF"/>
-                </a:solidFill>
-                <a:latin typeface="Arial Black"/>
-              </a:defRPr>
-            </a:pPr>
-            <a:r>
-              <a:t>LET ALL THINGS THEIR CREATOR BLESS,</a:t>
-            </a:r>
-          </a:p>
-          <a:p>
-            <a:pPr algn="ctr">
-              <a:lnSpc>
-                <a:spcPct val="115000"/>
-              </a:lnSpc>
-              <a:spcAft>
-                <a:spcPts val="1400"/>
-              </a:spcAft>
-              <a:defRPr sz="3800" b="1" i="0">
-                <a:solidFill>
-                  <a:srgbClr val="FFFFFF"/>
-                </a:solidFill>
-                <a:latin typeface="Arial Black"/>
-              </a:defRPr>
-            </a:pPr>
-            <a:r>
-              <a:t>AND WORSHIP HIM IN HUMBLENESS,</a:t>
-            </a:r>
-          </a:p>
-          <a:p>
-            <a:pPr algn="ctr">
-              <a:lnSpc>
-                <a:spcPct val="115000"/>
-              </a:lnSpc>
-              <a:spcAft>
-                <a:spcPts val="1400"/>
-              </a:spcAft>
-              <a:defRPr sz="3800" b="1" i="0">
-                <a:solidFill>
-                  <a:srgbClr val="FFFFFF"/>
-                </a:solidFill>
-                <a:latin typeface="Arial Black"/>
-              </a:defRPr>
-            </a:pPr>
-            <a:r>
-              <a:t>O PRAISE HIM, ALLELUIA!</a:t>
-            </a:r>
-          </a:p>
-          <a:p>
-            <a:pPr algn="ctr">
-              <a:lnSpc>
-                <a:spcPct val="115000"/>
-              </a:lnSpc>
-              <a:spcAft>
-                <a:spcPts val="1400"/>
-              </a:spcAft>
-              <a:defRPr sz="3800" b="1" i="0">
-                <a:solidFill>
-                  <a:srgbClr val="FFFFFF"/>
-                </a:solidFill>
-                <a:latin typeface="Arial Black"/>
-              </a:defRPr>
-            </a:pPr>
-            <a:r>
-              <a:t>OH, PRAISE THE FATHER, PRAISE THE SON,</a:t>
-            </a:r>
-          </a:p>
-          <a:p>
-            <a:pPr algn="ctr">
-              <a:lnSpc>
-                <a:spcPct val="115000"/>
-              </a:lnSpc>
-              <a:spcAft>
-                <a:spcPts val="1400"/>
-              </a:spcAft>
-              <a:defRPr sz="3800" b="1" i="0">
-                <a:solidFill>
-                  <a:srgbClr val="FFFFFF"/>
-                </a:solidFill>
-                <a:latin typeface="Arial Black"/>
-              </a:defRPr>
-            </a:pPr>
-            <a:r>
-              <a:t>AND PRAISE THE SPIRIT, THREE IN ONE,</a:t>
-            </a:r>
-          </a:p>
-          <a:p>
-            <a:pPr algn="ctr">
-              <a:lnSpc>
-                <a:spcPct val="115000"/>
-              </a:lnSpc>
-              <a:spcAft>
-                <a:spcPts val="1400"/>
-              </a:spcAft>
-              <a:defRPr sz="3800" b="1" i="0">
-                <a:solidFill>
-                  <a:srgbClr val="FFFFFF"/>
-                </a:solidFill>
-                <a:latin typeface="Arial Black"/>
-              </a:defRPr>
-            </a:pPr>
-            <a:r>
-              <a:t>O PRAISE HIM, ALLELUIA!</a:t>
-            </a:r>
-          </a:p>
-        </p:txBody>
-      </p:sp>
-      <p:sp>
-        <p:nvSpPr>
-          <p:cNvPr id="5" name="TextBox 4"/>
+              <a:t>(NO LYRICS IN LIBRARY FOR THIS HYMN.)</a:t>
+            </a:r>
+          </a:p>
+        </p:txBody>
+      </p:sp>
+      <p:sp>
+        <p:nvSpPr>
+          <p:cNvPr id="6" name="TextBox 5"/>
           <p:cNvSpPr txBox="1"/>
           <p:nvPr/>
         </p:nvSpPr>
@@ -12477,7 +11208,7 @@
         <p:spPr>
           <a:xfrm>
             <a:off x="685800" y="256032"/>
-            <a:ext cx="756904" cy="749807"/>
+            <a:ext cx="387682" cy="384048"/>
           </a:xfrm>
           <a:prstGeom prst="rect">
             <a:avLst/>
@@ -12492,16 +11223,16 @@
         </p:nvSpPr>
         <p:spPr>
           <a:xfrm>
-            <a:off x="1570720" y="256032"/>
-            <a:ext cx="16031480" cy="868680"/>
-          </a:xfrm>
-          <a:prstGeom prst="rect">
-            <a:avLst/>
-          </a:prstGeom>
-          <a:noFill/>
-        </p:spPr>
-        <p:txBody>
-          <a:bodyPr wrap="square" lIns="109728" rIns="109728" tIns="73152" bIns="73152">
+            <a:off x="1201498" y="256032"/>
+            <a:ext cx="16400702" cy="384048"/>
+          </a:xfrm>
+          <a:prstGeom prst="rect">
+            <a:avLst/>
+          </a:prstGeom>
+          <a:noFill/>
+        </p:spPr>
+        <p:txBody>
+          <a:bodyPr wrap="square" lIns="109728" rIns="109728" tIns="73152" bIns="73152" anchor="ctr">
             <a:noAutofit/>
           </a:bodyPr>
           <a:lstStyle/>
@@ -12554,7 +11285,7 @@
               </a:defRPr>
             </a:pPr>
             <a:r>
-              <a:t>Amen.</a:t>
+              <a:t>We proclaim your Death, O Lord,</a:t>
             </a:r>
           </a:p>
           <a:p>
@@ -12562,6 +11293,38 @@
               <a:spcAft>
                 <a:spcPts val="500"/>
               </a:spcAft>
+              <a:defRPr sz="1900" b="0" i="0">
+                <a:solidFill>
+                  <a:srgbClr val="1A1A1E"/>
+                </a:solidFill>
+                <a:latin typeface="Calibri"/>
+              </a:defRPr>
+            </a:pPr>
+            <a:r>
+              <a:t>and profess your Resurrection</a:t>
+            </a:r>
+          </a:p>
+          <a:p>
+            <a:pPr>
+              <a:spcAft>
+                <a:spcPts val="500"/>
+              </a:spcAft>
+              <a:defRPr sz="1900" b="0" i="0">
+                <a:solidFill>
+                  <a:srgbClr val="1A1A1E"/>
+                </a:solidFill>
+                <a:latin typeface="Calibri"/>
+              </a:defRPr>
+            </a:pPr>
+            <a:r>
+              <a:t>until you come again.</a:t>
+            </a:r>
+          </a:p>
+          <a:p>
+            <a:pPr>
+              <a:spcAft>
+                <a:spcPts val="500"/>
+              </a:spcAft>
               <a:defRPr sz="1500" b="0" i="1">
                 <a:solidFill>
                   <a:srgbClr val="56515A"/>
@@ -12570,7 +11333,7 @@
               </a:defRPr>
             </a:pPr>
             <a:r>
-              <a:t>The people respond “Amen” once to the doxology at the end of the Eucharistic Prayer, unless local solemn custom repeats it.</a:t>
+              <a:t>(Alternate forms may be used as approved by the Conference of Bishops.)</a:t>
             </a:r>
           </a:p>
         </p:txBody>
@@ -12622,7 +11385,7 @@
               </a:defRPr>
             </a:pPr>
             <a:r>
-              <a:t>Great Amen</a:t>
+              <a:t>The Eucharistic Prayer</a:t>
             </a:r>
           </a:p>
         </p:txBody>
@@ -12670,7 +11433,7 @@
         <p:spPr>
           <a:xfrm>
             <a:off x="685800" y="256032"/>
-            <a:ext cx="756904" cy="749807"/>
+            <a:ext cx="387682" cy="384048"/>
           </a:xfrm>
           <a:prstGeom prst="rect">
             <a:avLst/>
@@ -12685,16 +11448,16 @@
         </p:nvSpPr>
         <p:spPr>
           <a:xfrm>
-            <a:off x="1570720" y="256032"/>
-            <a:ext cx="16031480" cy="868680"/>
-          </a:xfrm>
-          <a:prstGeom prst="rect">
-            <a:avLst/>
-          </a:prstGeom>
-          <a:noFill/>
-        </p:spPr>
-        <p:txBody>
-          <a:bodyPr wrap="square" lIns="109728" rIns="109728" tIns="73152" bIns="73152">
+            <a:off x="1201498" y="256032"/>
+            <a:ext cx="16400702" cy="384048"/>
+          </a:xfrm>
+          <a:prstGeom prst="rect">
+            <a:avLst/>
+          </a:prstGeom>
+          <a:noFill/>
+        </p:spPr>
+        <p:txBody>
+          <a:bodyPr wrap="square" lIns="109728" rIns="109728" tIns="73152" bIns="73152" anchor="ctr">
             <a:noAutofit/>
           </a:bodyPr>
           <a:lstStyle/>
@@ -12721,8 +11484,8 @@
         </p:nvSpPr>
         <p:spPr>
           <a:xfrm>
-            <a:off x="685800" y="1417320"/>
-            <a:ext cx="16916400" cy="7863840"/>
+            <a:off x="685800" y="1645920"/>
+            <a:ext cx="16916400" cy="4114800"/>
           </a:xfrm>
           <a:prstGeom prst="rect">
             <a:avLst/>
@@ -12735,131 +11498,20 @@
           </a:bodyPr>
           <a:lstStyle/>
           <a:p>
-            <a:pPr>
-              <a:spcAft>
-                <a:spcPts val="500"/>
-              </a:spcAft>
-              <a:defRPr sz="1900" b="1" i="0">
-                <a:solidFill>
-                  <a:srgbClr val="1A1A1E"/>
-                </a:solidFill>
-                <a:latin typeface="Calibri"/>
-              </a:defRPr>
-            </a:pPr>
-            <a:r>
-              <a:t>주님의 기도</a:t>
-            </a:r>
-          </a:p>
-          <a:p>
-            <a:pPr>
-              <a:spcAft>
-                <a:spcPts val="500"/>
-              </a:spcAft>
-              <a:defRPr sz="1900" b="0" i="0">
-                <a:solidFill>
-                  <a:srgbClr val="1A1A1E"/>
-                </a:solidFill>
-                <a:latin typeface="Calibri"/>
-              </a:defRPr>
-            </a:pPr>
-            <a:r>
-              <a:t>하늘에 계신 우리 아버지,</a:t>
-            </a:r>
-          </a:p>
-          <a:p>
-            <a:pPr>
-              <a:spcAft>
-                <a:spcPts val="500"/>
-              </a:spcAft>
-              <a:defRPr sz="1900" b="0" i="0">
-                <a:solidFill>
-                  <a:srgbClr val="1A1A1E"/>
-                </a:solidFill>
-                <a:latin typeface="Calibri"/>
-              </a:defRPr>
-            </a:pPr>
-            <a:r>
-              <a:t>아버지 이름 빛나시며</a:t>
-            </a:r>
-          </a:p>
-          <a:p>
-            <a:pPr>
-              <a:spcAft>
-                <a:spcPts val="500"/>
-              </a:spcAft>
-              <a:defRPr sz="1900" b="0" i="0">
-                <a:solidFill>
-                  <a:srgbClr val="1A1A1E"/>
-                </a:solidFill>
-                <a:latin typeface="Calibri"/>
-              </a:defRPr>
-            </a:pPr>
-            <a:r>
-              <a:t>아버지 뜻이 하늘에서와 같이 땅에서도 이루어지소서</a:t>
-            </a:r>
-          </a:p>
-          <a:p>
-            <a:pPr>
-              <a:spcAft>
-                <a:spcPts val="500"/>
-              </a:spcAft>
-              <a:defRPr sz="1900" b="0" i="0">
-                <a:solidFill>
-                  <a:srgbClr val="1A1A1E"/>
-                </a:solidFill>
-                <a:latin typeface="Calibri"/>
-              </a:defRPr>
-            </a:pPr>
-            <a:r>
-              <a:t>저희에게 일용할 양식 주시고,</a:t>
-            </a:r>
-          </a:p>
-          <a:p>
-            <a:pPr>
-              <a:spcAft>
-                <a:spcPts val="500"/>
-              </a:spcAft>
-              <a:defRPr sz="1900" b="0" i="0">
-                <a:solidFill>
-                  <a:srgbClr val="1A1A1E"/>
-                </a:solidFill>
-                <a:latin typeface="Calibri"/>
-              </a:defRPr>
-            </a:pPr>
-            <a:r>
-              <a:t>저희의 죄를 용서하시고</a:t>
-            </a:r>
-          </a:p>
-          <a:p>
-            <a:pPr>
-              <a:spcAft>
-                <a:spcPts val="500"/>
-              </a:spcAft>
-              <a:defRPr sz="1900" b="0" i="0">
-                <a:solidFill>
-                  <a:srgbClr val="1A1A1E"/>
-                </a:solidFill>
-                <a:latin typeface="Calibri"/>
-              </a:defRPr>
-            </a:pPr>
-            <a:r>
-              <a:t>유혹에 빠지지 않게 하시고,</a:t>
-            </a:r>
-          </a:p>
-          <a:p>
-            <a:pPr>
-              <a:spcAft>
-                <a:spcPts val="500"/>
-              </a:spcAft>
-              <a:defRPr sz="1900" b="0" i="0">
-                <a:solidFill>
-                  <a:srgbClr val="1A1A1E"/>
-                </a:solidFill>
-                <a:latin typeface="Calibri"/>
-              </a:defRPr>
-            </a:pPr>
-            <a:r>
-              <a:t>악에서도 저희 구하소서</a:t>
+            <a:pPr algn="ctr">
+              <a:defRPr sz="4400" b="1" i="0">
+                <a:solidFill>
+                  <a:srgbClr val="56515A"/>
+                </a:solidFill>
+                <a:latin typeface="Calibri"/>
+              </a:defRPr>
+            </a:pPr>
+            <a:r>
+              <a:t>LITURGY OF</a:t>
+            </a:r>
+            <a:br/>
+            <a:r>
+              <a:t>THE EUCHARIST</a:t>
             </a:r>
           </a:p>
         </p:txBody>
@@ -12911,7 +11563,7 @@
               </a:defRPr>
             </a:pPr>
             <a:r>
-              <a:t>Our Father</a:t>
+              <a:t>Liturgy of the Eucharist</a:t>
             </a:r>
           </a:p>
         </p:txBody>
@@ -12959,7 +11611,7 @@
         <p:spPr>
           <a:xfrm>
             <a:off x="685800" y="256032"/>
-            <a:ext cx="756904" cy="749807"/>
+            <a:ext cx="387682" cy="384048"/>
           </a:xfrm>
           <a:prstGeom prst="rect">
             <a:avLst/>
@@ -12974,16 +11626,16 @@
         </p:nvSpPr>
         <p:spPr>
           <a:xfrm>
-            <a:off x="1570720" y="256032"/>
-            <a:ext cx="16031480" cy="868680"/>
-          </a:xfrm>
-          <a:prstGeom prst="rect">
-            <a:avLst/>
-          </a:prstGeom>
-          <a:noFill/>
-        </p:spPr>
-        <p:txBody>
-          <a:bodyPr wrap="square" lIns="109728" rIns="109728" tIns="73152" bIns="73152">
+            <a:off x="1201498" y="256032"/>
+            <a:ext cx="16400702" cy="384048"/>
+          </a:xfrm>
+          <a:prstGeom prst="rect">
+            <a:avLst/>
+          </a:prstGeom>
+          <a:noFill/>
+        </p:spPr>
+        <p:txBody>
+          <a:bodyPr wrap="square" lIns="109728" rIns="109728" tIns="73152" bIns="73152" anchor="ctr">
             <a:noAutofit/>
           </a:bodyPr>
           <a:lstStyle/>
@@ -13028,15 +11680,15 @@
               <a:spcAft>
                 <a:spcPts val="500"/>
               </a:spcAft>
-              <a:defRPr sz="1900" b="1" i="0">
-                <a:solidFill>
-                  <a:srgbClr val="1A1A1E"/>
-                </a:solidFill>
-                <a:latin typeface="Calibri"/>
-              </a:defRPr>
-            </a:pPr>
-            <a:r>
-              <a:t>영광이 영원히 아버지의 것입니다.</a:t>
+              <a:defRPr sz="2000" b="1" i="0">
+                <a:solidFill>
+                  <a:srgbClr val="1A1A1E"/>
+                </a:solidFill>
+                <a:latin typeface="Calibri"/>
+              </a:defRPr>
+            </a:pPr>
+            <a:r>
+              <a:t>Amen.</a:t>
             </a:r>
           </a:p>
           <a:p>
@@ -13044,22 +11696,6 @@
               <a:spcAft>
                 <a:spcPts val="500"/>
               </a:spcAft>
-              <a:defRPr sz="1900" b="0" i="0">
-                <a:solidFill>
-                  <a:srgbClr val="1A1A1E"/>
-                </a:solidFill>
-                <a:latin typeface="Calibri"/>
-              </a:defRPr>
-            </a:pPr>
-            <a:r>
-              <a:t>아멘.</a:t>
-            </a:r>
-          </a:p>
-          <a:p>
-            <a:pPr>
-              <a:spcAft>
-                <a:spcPts val="500"/>
-              </a:spcAft>
               <a:defRPr sz="1500" b="0" i="1">
                 <a:solidFill>
                   <a:srgbClr val="56515A"/>
@@ -13068,7 +11704,7 @@
               </a:defRPr>
             </a:pPr>
             <a:r>
-              <a:t>Korean text of the Lord’s Prayer from approved diocesan or national use, spoken or sung in full.</a:t>
+              <a:t>The people respond “Amen” once to the doxology at the end of the Eucharistic Prayer, unless local solemn custom repeats it.</a:t>
             </a:r>
           </a:p>
         </p:txBody>
@@ -13120,7 +11756,7 @@
               </a:defRPr>
             </a:pPr>
             <a:r>
-              <a:t>Our Father</a:t>
+              <a:t>Great Amen</a:t>
             </a:r>
           </a:p>
         </p:txBody>
@@ -13168,7 +11804,7 @@
         <p:spPr>
           <a:xfrm>
             <a:off x="685800" y="256032"/>
-            <a:ext cx="756904" cy="749807"/>
+            <a:ext cx="387682" cy="384048"/>
           </a:xfrm>
           <a:prstGeom prst="rect">
             <a:avLst/>
@@ -13183,16 +11819,16 @@
         </p:nvSpPr>
         <p:spPr>
           <a:xfrm>
-            <a:off x="1570720" y="256032"/>
-            <a:ext cx="16031480" cy="868680"/>
-          </a:xfrm>
-          <a:prstGeom prst="rect">
-            <a:avLst/>
-          </a:prstGeom>
-          <a:noFill/>
-        </p:spPr>
-        <p:txBody>
-          <a:bodyPr wrap="square" lIns="109728" rIns="109728" tIns="73152" bIns="73152">
+            <a:off x="1201498" y="256032"/>
+            <a:ext cx="16400702" cy="384048"/>
+          </a:xfrm>
+          <a:prstGeom prst="rect">
+            <a:avLst/>
+          </a:prstGeom>
+          <a:noFill/>
+        </p:spPr>
+        <p:txBody>
+          <a:bodyPr wrap="square" lIns="109728" rIns="109728" tIns="73152" bIns="73152" anchor="ctr">
             <a:noAutofit/>
           </a:bodyPr>
           <a:lstStyle/>
@@ -13237,7 +11873,7 @@
               <a:spcAft>
                 <a:spcPts val="500"/>
               </a:spcAft>
-              <a:defRPr sz="1900" b="1" i="0">
+              <a:defRPr sz="2000" b="1" i="0">
                 <a:solidFill>
                   <a:srgbClr val="1A1A1E"/>
                 </a:solidFill>
@@ -13277,7 +11913,7 @@
               </a:defRPr>
             </a:pPr>
             <a:r>
-              <a:t>thy kingdom come;</a:t>
+              <a:t>thy kingdom come,</a:t>
             </a:r>
           </a:p>
           <a:p>
@@ -13293,7 +11929,7 @@
               </a:defRPr>
             </a:pPr>
             <a:r>
-              <a:t>thy will be done</a:t>
+              <a:t>thy will be done,</a:t>
             </a:r>
           </a:p>
           <a:p>
@@ -13397,7 +12033,7 @@
               <a:spcAft>
                 <a:spcPts val="500"/>
               </a:spcAft>
-              <a:defRPr sz="1500" b="0" i="1">
+              <a:defRPr sz="2000" b="1" i="0">
                 <a:solidFill>
                   <a:srgbClr val="56515A"/>
                 </a:solidFill>
@@ -13405,7 +12041,23 @@
               </a:defRPr>
             </a:pPr>
             <a:r>
-              <a:t>English text from the Roman Missal (The Order of Mass), in full, as used in this celebration.</a:t>
+              <a:t>Deliver us, Lord, we pray, from every evil, graciously grant peace in our days, that, by the help of your mercy, we may be always free from sin and safe from all distress, as we await the blessed hope and the coming of our Savior, Jesus Christ.</a:t>
+            </a:r>
+          </a:p>
+          <a:p>
+            <a:pPr>
+              <a:spcAft>
+                <a:spcPts val="500"/>
+              </a:spcAft>
+              <a:defRPr sz="2000" b="1" i="0">
+                <a:solidFill>
+                  <a:srgbClr val="1A1A1E"/>
+                </a:solidFill>
+                <a:latin typeface="Calibri"/>
+              </a:defRPr>
+            </a:pPr>
+            <a:r>
+              <a:t>For the kingdom, the power, and the glory are yours now and for ever.</a:t>
             </a:r>
           </a:p>
         </p:txBody>
@@ -13505,7 +12157,7 @@
         <p:spPr>
           <a:xfrm>
             <a:off x="685800" y="256032"/>
-            <a:ext cx="756904" cy="749807"/>
+            <a:ext cx="387682" cy="384048"/>
           </a:xfrm>
           <a:prstGeom prst="rect">
             <a:avLst/>
@@ -13520,16 +12172,16 @@
         </p:nvSpPr>
         <p:spPr>
           <a:xfrm>
-            <a:off x="1570720" y="256032"/>
-            <a:ext cx="16031480" cy="868680"/>
-          </a:xfrm>
-          <a:prstGeom prst="rect">
-            <a:avLst/>
-          </a:prstGeom>
-          <a:noFill/>
-        </p:spPr>
-        <p:txBody>
-          <a:bodyPr wrap="square" lIns="109728" rIns="109728" tIns="73152" bIns="73152">
+            <a:off x="1201498" y="256032"/>
+            <a:ext cx="16400702" cy="384048"/>
+          </a:xfrm>
+          <a:prstGeom prst="rect">
+            <a:avLst/>
+          </a:prstGeom>
+          <a:noFill/>
+        </p:spPr>
+        <p:txBody>
+          <a:bodyPr wrap="square" lIns="109728" rIns="109728" tIns="73152" bIns="73152" anchor="ctr">
             <a:noAutofit/>
           </a:bodyPr>
           <a:lstStyle/>
@@ -13598,7 +12250,7 @@
               </a:defRPr>
             </a:pPr>
             <a:r>
-              <a:t>Gabby</a:t>
+              <a:t>juju</a:t>
             </a:r>
           </a:p>
           <a:p>
@@ -13668,7 +12320,7 @@
               </a:defRPr>
             </a:pPr>
             <a:r>
-              <a:t>Gospel (John 14:15-21)</a:t>
+              <a:t>Gospel (John 15:26—16:4a)</a:t>
             </a:r>
           </a:p>
           <a:p>
@@ -13684,7 +12336,7 @@
               </a:defRPr>
             </a:pPr>
             <a:r>
-              <a:t>“I will pray to the Father, and he will give you another Counselor, that he may be with you forever,— the Spirit of truth, whom the world can't receive; for it doesn't see him, neither knows him.”</a:t>
+              <a:t>“When the Advocate comes whom I will send you from the Father, the Spirit of truth who proceeds from the Father, he will testify to me.”</a:t>
             </a:r>
           </a:p>
           <a:p>
@@ -13729,7 +12381,7 @@
               </a:defRPr>
             </a:pPr>
             <a:r>
-              <a:t>2026-05-10 · Eastertide</a:t>
+              <a:t>2026-05-11 · Eastertide</a:t>
             </a:r>
           </a:p>
         </p:txBody>
@@ -13829,7 +12481,7 @@
         <p:spPr>
           <a:xfrm>
             <a:off x="685800" y="256032"/>
-            <a:ext cx="756904" cy="749807"/>
+            <a:ext cx="387682" cy="384048"/>
           </a:xfrm>
           <a:prstGeom prst="rect">
             <a:avLst/>
@@ -13844,16 +12496,16 @@
         </p:nvSpPr>
         <p:spPr>
           <a:xfrm>
-            <a:off x="1570720" y="256032"/>
-            <a:ext cx="16031480" cy="868680"/>
-          </a:xfrm>
-          <a:prstGeom prst="rect">
-            <a:avLst/>
-          </a:prstGeom>
-          <a:noFill/>
-        </p:spPr>
-        <p:txBody>
-          <a:bodyPr wrap="square" lIns="109728" rIns="109728" tIns="73152" bIns="73152">
+            <a:off x="1201498" y="256032"/>
+            <a:ext cx="16400702" cy="384048"/>
+          </a:xfrm>
+          <a:prstGeom prst="rect">
+            <a:avLst/>
+          </a:prstGeom>
+          <a:noFill/>
+        </p:spPr>
+        <p:txBody>
+          <a:bodyPr wrap="square" lIns="109728" rIns="109728" tIns="73152" bIns="73152" anchor="ctr">
             <a:noAutofit/>
           </a:bodyPr>
           <a:lstStyle/>
@@ -14022,7 +12674,7 @@
         <p:spPr>
           <a:xfrm>
             <a:off x="685800" y="256032"/>
-            <a:ext cx="756904" cy="749807"/>
+            <a:ext cx="387682" cy="384048"/>
           </a:xfrm>
           <a:prstGeom prst="rect">
             <a:avLst/>
@@ -14037,16 +12689,16 @@
         </p:nvSpPr>
         <p:spPr>
           <a:xfrm>
-            <a:off x="1570720" y="256032"/>
-            <a:ext cx="16031480" cy="868680"/>
-          </a:xfrm>
-          <a:prstGeom prst="rect">
-            <a:avLst/>
-          </a:prstGeom>
-          <a:noFill/>
-        </p:spPr>
-        <p:txBody>
-          <a:bodyPr wrap="square" lIns="109728" rIns="109728" tIns="73152" bIns="73152">
+            <a:off x="1201498" y="256032"/>
+            <a:ext cx="16400702" cy="384048"/>
+          </a:xfrm>
+          <a:prstGeom prst="rect">
+            <a:avLst/>
+          </a:prstGeom>
+          <a:noFill/>
+        </p:spPr>
+        <p:txBody>
+          <a:bodyPr wrap="square" lIns="109728" rIns="109728" tIns="73152" bIns="73152" anchor="ctr">
             <a:noAutofit/>
           </a:bodyPr>
           <a:lstStyle/>
@@ -14115,7 +12767,7 @@
               </a:defRPr>
             </a:pPr>
             <a:r>
-              <a:t>Gabby</a:t>
+              <a:t>juju</a:t>
             </a:r>
           </a:p>
           <a:p>
@@ -14185,7 +12837,7 @@
               </a:defRPr>
             </a:pPr>
             <a:r>
-              <a:t>Gospel (John 14:15-21)</a:t>
+              <a:t>Gospel (John 15:26—16:4a)</a:t>
             </a:r>
           </a:p>
           <a:p>
@@ -14201,7 +12853,7 @@
               </a:defRPr>
             </a:pPr>
             <a:r>
-              <a:t>“I will pray to the Father, and he will give you another Counselor, that he may be with you forever,— the Spirit of truth, whom the world can't receive; for it doesn't see him, neither knows him.”</a:t>
+              <a:t>“When the Advocate comes whom I will send you from the Father, the Spirit of truth who proceeds from the Father, he will testify to me.”</a:t>
             </a:r>
           </a:p>
           <a:p>
@@ -14246,7 +12898,7 @@
               </a:defRPr>
             </a:pPr>
             <a:r>
-              <a:t>2026-05-10 · Eastertide</a:t>
+              <a:t>2026-05-11 · Eastertide</a:t>
             </a:r>
           </a:p>
         </p:txBody>
@@ -14346,7 +12998,7 @@
         <p:spPr>
           <a:xfrm>
             <a:off x="685800" y="256032"/>
-            <a:ext cx="756904" cy="749807"/>
+            <a:ext cx="387682" cy="384048"/>
           </a:xfrm>
           <a:prstGeom prst="rect">
             <a:avLst/>
@@ -14361,16 +13013,16 @@
         </p:nvSpPr>
         <p:spPr>
           <a:xfrm>
-            <a:off x="1570720" y="256032"/>
-            <a:ext cx="16031480" cy="868680"/>
-          </a:xfrm>
-          <a:prstGeom prst="rect">
-            <a:avLst/>
-          </a:prstGeom>
-          <a:noFill/>
-        </p:spPr>
-        <p:txBody>
-          <a:bodyPr wrap="square" lIns="109728" rIns="109728" tIns="73152" bIns="73152">
+            <a:off x="1201498" y="256032"/>
+            <a:ext cx="16400702" cy="384048"/>
+          </a:xfrm>
+          <a:prstGeom prst="rect">
+            <a:avLst/>
+          </a:prstGeom>
+          <a:noFill/>
+        </p:spPr>
+        <p:txBody>
+          <a:bodyPr wrap="square" lIns="109728" rIns="109728" tIns="73152" bIns="73152" anchor="ctr">
             <a:noAutofit/>
           </a:bodyPr>
           <a:lstStyle/>
@@ -14555,7 +13207,7 @@
         <p:spPr>
           <a:xfrm>
             <a:off x="685800" y="256032"/>
-            <a:ext cx="756904" cy="749807"/>
+            <a:ext cx="387682" cy="384048"/>
           </a:xfrm>
           <a:prstGeom prst="rect">
             <a:avLst/>
@@ -14570,16 +13222,16 @@
         </p:nvSpPr>
         <p:spPr>
           <a:xfrm>
-            <a:off x="1570720" y="256032"/>
-            <a:ext cx="16031480" cy="868680"/>
-          </a:xfrm>
-          <a:prstGeom prst="rect">
-            <a:avLst/>
-          </a:prstGeom>
-          <a:noFill/>
-        </p:spPr>
-        <p:txBody>
-          <a:bodyPr wrap="square" lIns="109728" rIns="109728" tIns="73152" bIns="73152">
+            <a:off x="1201498" y="256032"/>
+            <a:ext cx="16400702" cy="384048"/>
+          </a:xfrm>
+          <a:prstGeom prst="rect">
+            <a:avLst/>
+          </a:prstGeom>
+          <a:noFill/>
+        </p:spPr>
+        <p:txBody>
+          <a:bodyPr wrap="square" lIns="109728" rIns="109728" tIns="73152" bIns="73152" anchor="ctr">
             <a:noAutofit/>
           </a:bodyPr>
           <a:lstStyle/>
@@ -14624,7 +13276,7 @@
               <a:spcAft>
                 <a:spcPts val="500"/>
               </a:spcAft>
-              <a:defRPr sz="1900" b="1" i="0">
+              <a:defRPr sz="2000" b="1" i="0">
                 <a:solidFill>
                   <a:srgbClr val="1A1A1E"/>
                 </a:solidFill>
@@ -14860,7 +13512,7 @@
         <p:spPr>
           <a:xfrm>
             <a:off x="685800" y="256032"/>
-            <a:ext cx="756904" cy="749807"/>
+            <a:ext cx="387682" cy="384048"/>
           </a:xfrm>
           <a:prstGeom prst="rect">
             <a:avLst/>
@@ -14875,16 +13527,16 @@
         </p:nvSpPr>
         <p:spPr>
           <a:xfrm>
-            <a:off x="1570720" y="256032"/>
-            <a:ext cx="16031480" cy="868680"/>
-          </a:xfrm>
-          <a:prstGeom prst="rect">
-            <a:avLst/>
-          </a:prstGeom>
-          <a:noFill/>
-        </p:spPr>
-        <p:txBody>
-          <a:bodyPr wrap="square" lIns="109728" rIns="109728" tIns="73152" bIns="73152">
+            <a:off x="1201498" y="256032"/>
+            <a:ext cx="16400702" cy="384048"/>
+          </a:xfrm>
+          <a:prstGeom prst="rect">
+            <a:avLst/>
+          </a:prstGeom>
+          <a:noFill/>
+        </p:spPr>
+        <p:txBody>
+          <a:bodyPr wrap="square" lIns="109728" rIns="109728" tIns="73152" bIns="73152" anchor="ctr">
             <a:noAutofit/>
           </a:bodyPr>
           <a:lstStyle/>
@@ -15053,7 +13705,7 @@
         <p:spPr>
           <a:xfrm>
             <a:off x="685800" y="256032"/>
-            <a:ext cx="756904" cy="749807"/>
+            <a:ext cx="387682" cy="384048"/>
           </a:xfrm>
           <a:prstGeom prst="rect">
             <a:avLst/>
@@ -15068,16 +13720,16 @@
         </p:nvSpPr>
         <p:spPr>
           <a:xfrm>
-            <a:off x="1570720" y="256032"/>
-            <a:ext cx="16031480" cy="868680"/>
-          </a:xfrm>
-          <a:prstGeom prst="rect">
-            <a:avLst/>
-          </a:prstGeom>
-          <a:noFill/>
-        </p:spPr>
-        <p:txBody>
-          <a:bodyPr wrap="square" lIns="109728" rIns="109728" tIns="73152" bIns="73152">
+            <a:off x="1201498" y="256032"/>
+            <a:ext cx="16400702" cy="384048"/>
+          </a:xfrm>
+          <a:prstGeom prst="rect">
+            <a:avLst/>
+          </a:prstGeom>
+          <a:noFill/>
+        </p:spPr>
+        <p:txBody>
+          <a:bodyPr wrap="square" lIns="109728" rIns="109728" tIns="73152" bIns="73152" anchor="ctr">
             <a:noAutofit/>
           </a:bodyPr>
           <a:lstStyle/>
@@ -15146,7 +13798,7 @@
               </a:defRPr>
             </a:pPr>
             <a:r>
-              <a:t>Gabby</a:t>
+              <a:t>juju</a:t>
             </a:r>
           </a:p>
           <a:p>
@@ -15216,7 +13868,7 @@
               </a:defRPr>
             </a:pPr>
             <a:r>
-              <a:t>Gospel (John 14:15-21)</a:t>
+              <a:t>Gospel (John 15:26—16:4a)</a:t>
             </a:r>
           </a:p>
           <a:p>
@@ -15232,7 +13884,7 @@
               </a:defRPr>
             </a:pPr>
             <a:r>
-              <a:t>“I will pray to the Father, and he will give you another Counselor, that he may be with you forever,— the Spirit of truth, whom the world can't receive; for it doesn't see him, neither knows him.”</a:t>
+              <a:t>“When the Advocate comes whom I will send you from the Father, the Spirit of truth who proceeds from the Father, he will testify to me.”</a:t>
             </a:r>
           </a:p>
           <a:p>
@@ -15277,7 +13929,7 @@
               </a:defRPr>
             </a:pPr>
             <a:r>
-              <a:t>2026-05-10 · Eastertide</a:t>
+              <a:t>2026-05-11 · Eastertide</a:t>
             </a:r>
           </a:p>
         </p:txBody>
@@ -15377,7 +14029,7 @@
         <p:spPr>
           <a:xfrm>
             <a:off x="685800" y="256032"/>
-            <a:ext cx="756904" cy="749807"/>
+            <a:ext cx="387682" cy="384048"/>
           </a:xfrm>
           <a:prstGeom prst="rect">
             <a:avLst/>
@@ -15392,16 +14044,16 @@
         </p:nvSpPr>
         <p:spPr>
           <a:xfrm>
-            <a:off x="1570720" y="256032"/>
-            <a:ext cx="16031480" cy="868680"/>
-          </a:xfrm>
-          <a:prstGeom prst="rect">
-            <a:avLst/>
-          </a:prstGeom>
-          <a:noFill/>
-        </p:spPr>
-        <p:txBody>
-          <a:bodyPr wrap="square" lIns="109728" rIns="109728" tIns="73152" bIns="73152">
+            <a:off x="1201498" y="256032"/>
+            <a:ext cx="16400702" cy="384048"/>
+          </a:xfrm>
+          <a:prstGeom prst="rect">
+            <a:avLst/>
+          </a:prstGeom>
+          <a:noFill/>
+        </p:spPr>
+        <p:txBody>
+          <a:bodyPr wrap="square" lIns="109728" rIns="109728" tIns="73152" bIns="73152" anchor="ctr">
             <a:noAutofit/>
           </a:bodyPr>
           <a:lstStyle/>
@@ -15470,7 +14122,7 @@
               </a:defRPr>
             </a:pPr>
             <a:r>
-              <a:t>Gabby</a:t>
+              <a:t>juju</a:t>
             </a:r>
           </a:p>
           <a:p>
@@ -15540,7 +14192,7 @@
               </a:defRPr>
             </a:pPr>
             <a:r>
-              <a:t>Gospel (John 14:15-21)</a:t>
+              <a:t>Gospel (John 15:26—16:4a)</a:t>
             </a:r>
           </a:p>
           <a:p>
@@ -15556,7 +14208,7 @@
               </a:defRPr>
             </a:pPr>
             <a:r>
-              <a:t>“I will pray to the Father, and he will give you another Counselor, that he may be with you forever,— the Spirit of truth, whom the world can't receive; for it doesn't see him, neither knows him.”</a:t>
+              <a:t>“When the Advocate comes whom I will send you from the Father, the Spirit of truth who proceeds from the Father, he will testify to me.”</a:t>
             </a:r>
           </a:p>
           <a:p>
@@ -15601,7 +14253,7 @@
               </a:defRPr>
             </a:pPr>
             <a:r>
-              <a:t>2026-05-10 · Eastertide</a:t>
+              <a:t>2026-05-11 · Eastertide</a:t>
             </a:r>
           </a:p>
         </p:txBody>
@@ -15701,7 +14353,7 @@
         <p:spPr>
           <a:xfrm>
             <a:off x="685800" y="256032"/>
-            <a:ext cx="756904" cy="749807"/>
+            <a:ext cx="387682" cy="384048"/>
           </a:xfrm>
           <a:prstGeom prst="rect">
             <a:avLst/>
@@ -15716,16 +14368,16 @@
         </p:nvSpPr>
         <p:spPr>
           <a:xfrm>
-            <a:off x="1570720" y="256032"/>
-            <a:ext cx="16031480" cy="868680"/>
-          </a:xfrm>
-          <a:prstGeom prst="rect">
-            <a:avLst/>
-          </a:prstGeom>
-          <a:noFill/>
-        </p:spPr>
-        <p:txBody>
-          <a:bodyPr wrap="square" lIns="109728" rIns="109728" tIns="73152" bIns="73152">
+            <a:off x="1201498" y="256032"/>
+            <a:ext cx="16400702" cy="384048"/>
+          </a:xfrm>
+          <a:prstGeom prst="rect">
+            <a:avLst/>
+          </a:prstGeom>
+          <a:noFill/>
+        </p:spPr>
+        <p:txBody>
+          <a:bodyPr wrap="square" lIns="109728" rIns="109728" tIns="73152" bIns="73152" anchor="ctr">
             <a:noAutofit/>
           </a:bodyPr>
           <a:lstStyle/>
@@ -15775,7 +14427,7 @@
               </a:defRPr>
             </a:pPr>
             <a:r>
-              <a:t>One Bread, One Body</a:t>
+              <a:t>Halina Hesus Halina</a:t>
             </a:r>
           </a:p>
         </p:txBody>
@@ -15797,17 +14449,17 @@
           <a:noFill/>
         </p:spPr>
         <p:txBody>
-          <a:bodyPr wrap="square" lIns="109728" rIns="109728" tIns="73152" bIns="73152" anchor="t">
+          <a:bodyPr wrap="square" lIns="109728" rIns="109728" tIns="73152" bIns="73152" anchor="ctr">
             <a:noAutofit/>
           </a:bodyPr>
           <a:lstStyle/>
           <a:p>
             <a:pPr algn="ctr">
               <a:lnSpc>
-                <a:spcPct val="115000"/>
+                <a:spcPct val="105000"/>
               </a:lnSpc>
               <a:spcAft>
-                <a:spcPts val="1400"/>
+                <a:spcPts val="1000"/>
               </a:spcAft>
               <a:defRPr sz="3800" b="1" i="0">
                 <a:solidFill>
@@ -15817,254 +14469,7 @@
               </a:defRPr>
             </a:pPr>
             <a:r>
-              <a:t>ONE BREAD, ONE BODY, ONE LORD OF ALL,</a:t>
-            </a:r>
-          </a:p>
-          <a:p>
-            <a:pPr algn="ctr">
-              <a:lnSpc>
-                <a:spcPct val="115000"/>
-              </a:lnSpc>
-              <a:spcAft>
-                <a:spcPts val="1400"/>
-              </a:spcAft>
-              <a:defRPr sz="3800" b="1" i="0">
-                <a:solidFill>
-                  <a:srgbClr val="FFFFFF"/>
-                </a:solidFill>
-                <a:latin typeface="Arial Black"/>
-              </a:defRPr>
-            </a:pPr>
-            <a:r>
-              <a:t>ONE CUP OF BLESSING WHICH WE BLESS.</a:t>
-            </a:r>
-          </a:p>
-          <a:p>
-            <a:pPr algn="ctr">
-              <a:lnSpc>
-                <a:spcPct val="115000"/>
-              </a:lnSpc>
-              <a:spcAft>
-                <a:spcPts val="1400"/>
-              </a:spcAft>
-              <a:defRPr sz="3800" b="1" i="0">
-                <a:solidFill>
-                  <a:srgbClr val="FFFFFF"/>
-                </a:solidFill>
-                <a:latin typeface="Arial Black"/>
-              </a:defRPr>
-            </a:pPr>
-            <a:r>
-              <a:t>AND WE, THOUGH MANY, THROUGHOUT THE EARTH,</a:t>
-            </a:r>
-          </a:p>
-          <a:p>
-            <a:pPr algn="ctr">
-              <a:lnSpc>
-                <a:spcPct val="115000"/>
-              </a:lnSpc>
-              <a:spcAft>
-                <a:spcPts val="1400"/>
-              </a:spcAft>
-              <a:defRPr sz="3800" b="1" i="0">
-                <a:solidFill>
-                  <a:srgbClr val="FFFFFF"/>
-                </a:solidFill>
-                <a:latin typeface="Arial Black"/>
-              </a:defRPr>
-            </a:pPr>
-            <a:r>
-              <a:t>WE ARE ONE BODY IN THIS ONE LORD.</a:t>
-            </a:r>
-          </a:p>
-          <a:p>
-            <a:pPr algn="ctr">
-              <a:lnSpc>
-                <a:spcPct val="115000"/>
-              </a:lnSpc>
-              <a:spcAft>
-                <a:spcPts val="1400"/>
-              </a:spcAft>
-              <a:defRPr sz="3800" b="1" i="0">
-                <a:solidFill>
-                  <a:srgbClr val="FFFFFF"/>
-                </a:solidFill>
-                <a:latin typeface="Arial Black"/>
-              </a:defRPr>
-            </a:pPr>
-            <a:r>
-              <a:t>GENTILE OR JEW, SERVANT OR FREE,</a:t>
-            </a:r>
-          </a:p>
-          <a:p>
-            <a:pPr algn="ctr">
-              <a:lnSpc>
-                <a:spcPct val="115000"/>
-              </a:lnSpc>
-              <a:spcAft>
-                <a:spcPts val="1400"/>
-              </a:spcAft>
-              <a:defRPr sz="3800" b="1" i="0">
-                <a:solidFill>
-                  <a:srgbClr val="FFFFFF"/>
-                </a:solidFill>
-                <a:latin typeface="Arial Black"/>
-              </a:defRPr>
-            </a:pPr>
-            <a:r>
-              <a:t>WOMAN OR MAN, NO MORE.</a:t>
-            </a:r>
-          </a:p>
-          <a:p>
-            <a:pPr algn="ctr">
-              <a:lnSpc>
-                <a:spcPct val="115000"/>
-              </a:lnSpc>
-              <a:spcAft>
-                <a:spcPts val="1400"/>
-              </a:spcAft>
-              <a:defRPr sz="3800" b="1" i="0">
-                <a:solidFill>
-                  <a:srgbClr val="FFFFFF"/>
-                </a:solidFill>
-                <a:latin typeface="Arial Black"/>
-              </a:defRPr>
-            </a:pPr>
-            <a:r>
-              <a:t>MANY THE GIFTS, MANY THE WORKS,</a:t>
-            </a:r>
-          </a:p>
-          <a:p>
-            <a:pPr algn="ctr">
-              <a:lnSpc>
-                <a:spcPct val="115000"/>
-              </a:lnSpc>
-              <a:spcAft>
-                <a:spcPts val="1400"/>
-              </a:spcAft>
-              <a:defRPr sz="3800" b="1" i="0">
-                <a:solidFill>
-                  <a:srgbClr val="FFFFFF"/>
-                </a:solidFill>
-                <a:latin typeface="Arial Black"/>
-              </a:defRPr>
-            </a:pPr>
-            <a:r>
-              <a:t>MANY THE WAYS WE SERVE.</a:t>
-            </a:r>
-          </a:p>
-          <a:p>
-            <a:pPr algn="ctr">
-              <a:lnSpc>
-                <a:spcPct val="115000"/>
-              </a:lnSpc>
-              <a:spcAft>
-                <a:spcPts val="1400"/>
-              </a:spcAft>
-              <a:defRPr sz="3800" b="1" i="0">
-                <a:solidFill>
-                  <a:srgbClr val="FFFFFF"/>
-                </a:solidFill>
-                <a:latin typeface="Arial Black"/>
-              </a:defRPr>
-            </a:pPr>
-            <a:r>
-              <a:t>MANY THE MOMENTS, MANY THE HOURS,</a:t>
-            </a:r>
-          </a:p>
-          <a:p>
-            <a:pPr algn="ctr">
-              <a:lnSpc>
-                <a:spcPct val="115000"/>
-              </a:lnSpc>
-              <a:spcAft>
-                <a:spcPts val="1400"/>
-              </a:spcAft>
-              <a:defRPr sz="3800" b="1" i="0">
-                <a:solidFill>
-                  <a:srgbClr val="FFFFFF"/>
-                </a:solidFill>
-                <a:latin typeface="Arial Black"/>
-              </a:defRPr>
-            </a:pPr>
-            <a:r>
-              <a:t>MANY THE TALENTS SHARED.</a:t>
-            </a:r>
-          </a:p>
-          <a:p>
-            <a:pPr algn="ctr">
-              <a:lnSpc>
-                <a:spcPct val="115000"/>
-              </a:lnSpc>
-              <a:spcAft>
-                <a:spcPts val="1400"/>
-              </a:spcAft>
-              <a:defRPr sz="3800" b="1" i="0">
-                <a:solidFill>
-                  <a:srgbClr val="FFFFFF"/>
-                </a:solidFill>
-                <a:latin typeface="Arial Black"/>
-              </a:defRPr>
-            </a:pPr>
-            <a:r>
-              <a:t>ONE BREAD, ONE BODY, ONE LORD OF ALL,</a:t>
-            </a:r>
-          </a:p>
-          <a:p>
-            <a:pPr algn="ctr">
-              <a:lnSpc>
-                <a:spcPct val="115000"/>
-              </a:lnSpc>
-              <a:spcAft>
-                <a:spcPts val="1400"/>
-              </a:spcAft>
-              <a:defRPr sz="3800" b="1" i="0">
-                <a:solidFill>
-                  <a:srgbClr val="FFFFFF"/>
-                </a:solidFill>
-                <a:latin typeface="Arial Black"/>
-              </a:defRPr>
-            </a:pPr>
-            <a:r>
-              <a:t>ONE CUP OF BLESSING WHICH WE BLESS.</a:t>
-            </a:r>
-          </a:p>
-          <a:p>
-            <a:pPr algn="ctr">
-              <a:lnSpc>
-                <a:spcPct val="115000"/>
-              </a:lnSpc>
-              <a:spcAft>
-                <a:spcPts val="1400"/>
-              </a:spcAft>
-              <a:defRPr sz="3800" b="1" i="0">
-                <a:solidFill>
-                  <a:srgbClr val="FFFFFF"/>
-                </a:solidFill>
-                <a:latin typeface="Arial Black"/>
-              </a:defRPr>
-            </a:pPr>
-            <a:r>
-              <a:t>AND WE, THOUGH MANY, THROUGHOUT THE EARTH,</a:t>
-            </a:r>
-          </a:p>
-          <a:p>
-            <a:pPr algn="ctr">
-              <a:lnSpc>
-                <a:spcPct val="115000"/>
-              </a:lnSpc>
-              <a:spcAft>
-                <a:spcPts val="1400"/>
-              </a:spcAft>
-              <a:defRPr sz="3800" b="1" i="0">
-                <a:solidFill>
-                  <a:srgbClr val="FFFFFF"/>
-                </a:solidFill>
-                <a:latin typeface="Arial Black"/>
-              </a:defRPr>
-            </a:pPr>
-            <a:r>
-              <a:t>WE ARE ONE BODY IN THIS ONE LORD.</a:t>
+              <a:t>(NO LYRICS IN LIBRARY FOR THIS HYMN.)</a:t>
             </a:r>
           </a:p>
         </p:txBody>
@@ -16164,7 +14569,7 @@
         <p:spPr>
           <a:xfrm>
             <a:off x="685800" y="256032"/>
-            <a:ext cx="756904" cy="749807"/>
+            <a:ext cx="387682" cy="384048"/>
           </a:xfrm>
           <a:prstGeom prst="rect">
             <a:avLst/>
@@ -16179,16 +14584,16 @@
         </p:nvSpPr>
         <p:spPr>
           <a:xfrm>
-            <a:off x="1570720" y="256032"/>
-            <a:ext cx="16031480" cy="868680"/>
-          </a:xfrm>
-          <a:prstGeom prst="rect">
-            <a:avLst/>
-          </a:prstGeom>
-          <a:noFill/>
-        </p:spPr>
-        <p:txBody>
-          <a:bodyPr wrap="square" lIns="109728" rIns="109728" tIns="73152" bIns="73152">
+            <a:off x="1201498" y="256032"/>
+            <a:ext cx="16400702" cy="384048"/>
+          </a:xfrm>
+          <a:prstGeom prst="rect">
+            <a:avLst/>
+          </a:prstGeom>
+          <a:noFill/>
+        </p:spPr>
+        <p:txBody>
+          <a:bodyPr wrap="square" lIns="109728" rIns="109728" tIns="73152" bIns="73152" anchor="ctr">
             <a:noAutofit/>
           </a:bodyPr>
           <a:lstStyle/>
@@ -16238,7 +14643,7 @@
               </a:defRPr>
             </a:pPr>
             <a:r>
-              <a:t>Panis Angelicus</a:t>
+              <a:t>Huwag Kang Mangamba</a:t>
             </a:r>
           </a:p>
         </p:txBody>
@@ -16260,17 +14665,17 @@
           <a:noFill/>
         </p:spPr>
         <p:txBody>
-          <a:bodyPr wrap="square" lIns="109728" rIns="109728" tIns="73152" bIns="73152" anchor="t">
+          <a:bodyPr wrap="square" lIns="109728" rIns="109728" tIns="73152" bIns="73152" anchor="ctr">
             <a:noAutofit/>
           </a:bodyPr>
           <a:lstStyle/>
           <a:p>
             <a:pPr algn="ctr">
               <a:lnSpc>
-                <a:spcPct val="115000"/>
+                <a:spcPct val="105000"/>
               </a:lnSpc>
               <a:spcAft>
-                <a:spcPts val="1400"/>
+                <a:spcPts val="1000"/>
               </a:spcAft>
               <a:defRPr sz="3800" b="1" i="0">
                 <a:solidFill>
@@ -16280,349 +14685,7 @@
               </a:defRPr>
             </a:pPr>
             <a:r>
-              <a:t>PANIS ANGELICUS</a:t>
-            </a:r>
-          </a:p>
-          <a:p>
-            <a:pPr algn="ctr">
-              <a:lnSpc>
-                <a:spcPct val="115000"/>
-              </a:lnSpc>
-              <a:spcAft>
-                <a:spcPts val="1400"/>
-              </a:spcAft>
-              <a:defRPr sz="3800" b="1" i="0">
-                <a:solidFill>
-                  <a:srgbClr val="FFFFFF"/>
-                </a:solidFill>
-                <a:latin typeface="Arial Black"/>
-              </a:defRPr>
-            </a:pPr>
-            <a:r>
-              <a:t>FIT PANIS HOMINUM;</a:t>
-            </a:r>
-          </a:p>
-          <a:p>
-            <a:pPr algn="ctr">
-              <a:lnSpc>
-                <a:spcPct val="115000"/>
-              </a:lnSpc>
-              <a:spcAft>
-                <a:spcPts val="1400"/>
-              </a:spcAft>
-              <a:defRPr sz="3800" b="1" i="0">
-                <a:solidFill>
-                  <a:srgbClr val="FFFFFF"/>
-                </a:solidFill>
-                <a:latin typeface="Arial Black"/>
-              </a:defRPr>
-            </a:pPr>
-            <a:r>
-              <a:t>DAT PANIS CAELICUS</a:t>
-            </a:r>
-          </a:p>
-          <a:p>
-            <a:pPr algn="ctr">
-              <a:lnSpc>
-                <a:spcPct val="115000"/>
-              </a:lnSpc>
-              <a:spcAft>
-                <a:spcPts val="1400"/>
-              </a:spcAft>
-              <a:defRPr sz="3800" b="1" i="0">
-                <a:solidFill>
-                  <a:srgbClr val="FFFFFF"/>
-                </a:solidFill>
-                <a:latin typeface="Arial Black"/>
-              </a:defRPr>
-            </a:pPr>
-            <a:r>
-              <a:t>FIGURIS TERMINUM.</a:t>
-            </a:r>
-          </a:p>
-          <a:p>
-            <a:pPr algn="ctr">
-              <a:lnSpc>
-                <a:spcPct val="115000"/>
-              </a:lnSpc>
-              <a:spcAft>
-                <a:spcPts val="1400"/>
-              </a:spcAft>
-              <a:defRPr sz="3800" b="1" i="0">
-                <a:solidFill>
-                  <a:srgbClr val="FFFFFF"/>
-                </a:solidFill>
-                <a:latin typeface="Arial Black"/>
-              </a:defRPr>
-            </a:pPr>
-            <a:r>
-              <a:t>O RES MIRABILIS!</a:t>
-            </a:r>
-          </a:p>
-          <a:p>
-            <a:pPr algn="ctr">
-              <a:lnSpc>
-                <a:spcPct val="115000"/>
-              </a:lnSpc>
-              <a:spcAft>
-                <a:spcPts val="1400"/>
-              </a:spcAft>
-              <a:defRPr sz="3800" b="1" i="0">
-                <a:solidFill>
-                  <a:srgbClr val="FFFFFF"/>
-                </a:solidFill>
-                <a:latin typeface="Arial Black"/>
-              </a:defRPr>
-            </a:pPr>
-            <a:r>
-              <a:t>MANDUCAT DOMINUM</a:t>
-            </a:r>
-          </a:p>
-          <a:p>
-            <a:pPr algn="ctr">
-              <a:lnSpc>
-                <a:spcPct val="115000"/>
-              </a:lnSpc>
-              <a:spcAft>
-                <a:spcPts val="1400"/>
-              </a:spcAft>
-              <a:defRPr sz="3800" b="1" i="0">
-                <a:solidFill>
-                  <a:srgbClr val="FFFFFF"/>
-                </a:solidFill>
-                <a:latin typeface="Arial Black"/>
-              </a:defRPr>
-            </a:pPr>
-            <a:r>
-              <a:t>PAUPER, SERVUS ET HUMILIS.</a:t>
-            </a:r>
-          </a:p>
-          <a:p>
-            <a:pPr algn="ctr">
-              <a:lnSpc>
-                <a:spcPct val="115000"/>
-              </a:lnSpc>
-              <a:spcAft>
-                <a:spcPts val="1400"/>
-              </a:spcAft>
-              <a:defRPr sz="3800" b="1" i="0">
-                <a:solidFill>
-                  <a:srgbClr val="FFFFFF"/>
-                </a:solidFill>
-                <a:latin typeface="Arial Black"/>
-              </a:defRPr>
-            </a:pPr>
-            <a:r>
-              <a:t>TE TRINA DEITAS</a:t>
-            </a:r>
-          </a:p>
-          <a:p>
-            <a:pPr algn="ctr">
-              <a:lnSpc>
-                <a:spcPct val="115000"/>
-              </a:lnSpc>
-              <a:spcAft>
-                <a:spcPts val="1400"/>
-              </a:spcAft>
-              <a:defRPr sz="3800" b="1" i="0">
-                <a:solidFill>
-                  <a:srgbClr val="FFFFFF"/>
-                </a:solidFill>
-                <a:latin typeface="Arial Black"/>
-              </a:defRPr>
-            </a:pPr>
-            <a:r>
-              <a:t>UNAQUE POSCIMUS,</a:t>
-            </a:r>
-          </a:p>
-          <a:p>
-            <a:pPr algn="ctr">
-              <a:lnSpc>
-                <a:spcPct val="115000"/>
-              </a:lnSpc>
-              <a:spcAft>
-                <a:spcPts val="1400"/>
-              </a:spcAft>
-              <a:defRPr sz="3800" b="1" i="0">
-                <a:solidFill>
-                  <a:srgbClr val="FFFFFF"/>
-                </a:solidFill>
-                <a:latin typeface="Arial Black"/>
-              </a:defRPr>
-            </a:pPr>
-            <a:r>
-              <a:t>SIC NOS TU VISITA,</a:t>
-            </a:r>
-          </a:p>
-          <a:p>
-            <a:pPr algn="ctr">
-              <a:lnSpc>
-                <a:spcPct val="115000"/>
-              </a:lnSpc>
-              <a:spcAft>
-                <a:spcPts val="1400"/>
-              </a:spcAft>
-              <a:defRPr sz="3800" b="1" i="0">
-                <a:solidFill>
-                  <a:srgbClr val="FFFFFF"/>
-                </a:solidFill>
-                <a:latin typeface="Arial Black"/>
-              </a:defRPr>
-            </a:pPr>
-            <a:r>
-              <a:t>SICUT TE COLIMUS.</a:t>
-            </a:r>
-          </a:p>
-          <a:p>
-            <a:pPr algn="ctr">
-              <a:lnSpc>
-                <a:spcPct val="115000"/>
-              </a:lnSpc>
-              <a:spcAft>
-                <a:spcPts val="1400"/>
-              </a:spcAft>
-              <a:defRPr sz="3800" b="1" i="0">
-                <a:solidFill>
-                  <a:srgbClr val="FFFFFF"/>
-                </a:solidFill>
-                <a:latin typeface="Arial Black"/>
-              </a:defRPr>
-            </a:pPr>
-            <a:r>
-              <a:t>PER HUIUS VIAM DUCTUS</a:t>
-            </a:r>
-          </a:p>
-          <a:p>
-            <a:pPr algn="ctr">
-              <a:lnSpc>
-                <a:spcPct val="115000"/>
-              </a:lnSpc>
-              <a:spcAft>
-                <a:spcPts val="1400"/>
-              </a:spcAft>
-              <a:defRPr sz="3800" b="1" i="0">
-                <a:solidFill>
-                  <a:srgbClr val="FFFFFF"/>
-                </a:solidFill>
-                <a:latin typeface="Arial Black"/>
-              </a:defRPr>
-            </a:pPr>
-            <a:r>
-              <a:t>TENDIMUS AD LUCEM,</a:t>
-            </a:r>
-          </a:p>
-          <a:p>
-            <a:pPr algn="ctr">
-              <a:lnSpc>
-                <a:spcPct val="115000"/>
-              </a:lnSpc>
-              <a:spcAft>
-                <a:spcPts val="1400"/>
-              </a:spcAft>
-              <a:defRPr sz="3800" b="1" i="0">
-                <a:solidFill>
-                  <a:srgbClr val="FFFFFF"/>
-                </a:solidFill>
-                <a:latin typeface="Arial Black"/>
-              </a:defRPr>
-            </a:pPr>
-            <a:r>
-              <a:t>QUAM IN HABITATIONE</a:t>
-            </a:r>
-          </a:p>
-          <a:p>
-            <a:pPr algn="ctr">
-              <a:lnSpc>
-                <a:spcPct val="115000"/>
-              </a:lnSpc>
-              <a:spcAft>
-                <a:spcPts val="1400"/>
-              </a:spcAft>
-              <a:defRPr sz="3800" b="1" i="0">
-                <a:solidFill>
-                  <a:srgbClr val="FFFFFF"/>
-                </a:solidFill>
-                <a:latin typeface="Arial Black"/>
-              </a:defRPr>
-            </a:pPr>
-            <a:r>
-              <a:t>SANCTA TU INHABITAS.</a:t>
-            </a:r>
-          </a:p>
-          <a:p>
-            <a:pPr algn="ctr">
-              <a:lnSpc>
-                <a:spcPct val="115000"/>
-              </a:lnSpc>
-              <a:spcAft>
-                <a:spcPts val="1400"/>
-              </a:spcAft>
-              <a:defRPr sz="3800" b="1" i="0">
-                <a:solidFill>
-                  <a:srgbClr val="FFFFFF"/>
-                </a:solidFill>
-                <a:latin typeface="Arial Black"/>
-              </a:defRPr>
-            </a:pPr>
-            <a:r>
-              <a:t>(ENGLISH SINGING TRANSLATION, IF USED:</a:t>
-            </a:r>
-          </a:p>
-          <a:p>
-            <a:pPr algn="ctr">
-              <a:lnSpc>
-                <a:spcPct val="115000"/>
-              </a:lnSpc>
-              <a:spcAft>
-                <a:spcPts val="1400"/>
-              </a:spcAft>
-              <a:defRPr sz="3800" b="1" i="0">
-                <a:solidFill>
-                  <a:srgbClr val="FFFFFF"/>
-                </a:solidFill>
-                <a:latin typeface="Arial Black"/>
-              </a:defRPr>
-            </a:pPr>
-            <a:r>
-              <a:t>BREAD OF ANGELS, BECOME BREAD FOR MORTALS;</a:t>
-            </a:r>
-          </a:p>
-          <a:p>
-            <a:pPr algn="ctr">
-              <a:lnSpc>
-                <a:spcPct val="115000"/>
-              </a:lnSpc>
-              <a:spcAft>
-                <a:spcPts val="1400"/>
-              </a:spcAft>
-              <a:defRPr sz="3800" b="1" i="0">
-                <a:solidFill>
-                  <a:srgbClr val="FFFFFF"/>
-                </a:solidFill>
-                <a:latin typeface="Arial Black"/>
-              </a:defRPr>
-            </a:pPr>
-            <a:r>
-              <a:t>THIS HEAVENLY BREAD ENDS OUR SYMBOLS.</a:t>
-            </a:r>
-          </a:p>
-          <a:p>
-            <a:pPr algn="ctr">
-              <a:lnSpc>
-                <a:spcPct val="115000"/>
-              </a:lnSpc>
-              <a:spcAft>
-                <a:spcPts val="1400"/>
-              </a:spcAft>
-              <a:defRPr sz="3800" b="1" i="0">
-                <a:solidFill>
-                  <a:srgbClr val="FFFFFF"/>
-                </a:solidFill>
-                <a:latin typeface="Arial Black"/>
-              </a:defRPr>
-            </a:pPr>
-            <a:r>
-              <a:t>O WONDROUS THING! THE POOR, LOWLY SERVANT EATS THE LORD.)</a:t>
+              <a:t>(NO LYRICS IN LIBRARY FOR THIS HYMN.)</a:t>
             </a:r>
           </a:p>
         </p:txBody>
@@ -16722,7 +14785,7 @@
         <p:spPr>
           <a:xfrm>
             <a:off x="685800" y="256032"/>
-            <a:ext cx="756904" cy="749807"/>
+            <a:ext cx="387682" cy="384048"/>
           </a:xfrm>
           <a:prstGeom prst="rect">
             <a:avLst/>
@@ -16737,16 +14800,16 @@
         </p:nvSpPr>
         <p:spPr>
           <a:xfrm>
-            <a:off x="1570720" y="256032"/>
-            <a:ext cx="16031480" cy="868680"/>
-          </a:xfrm>
-          <a:prstGeom prst="rect">
-            <a:avLst/>
-          </a:prstGeom>
-          <a:noFill/>
-        </p:spPr>
-        <p:txBody>
-          <a:bodyPr wrap="square" lIns="109728" rIns="109728" tIns="73152" bIns="73152">
+            <a:off x="1201498" y="256032"/>
+            <a:ext cx="16400702" cy="384048"/>
+          </a:xfrm>
+          <a:prstGeom prst="rect">
+            <a:avLst/>
+          </a:prstGeom>
+          <a:noFill/>
+        </p:spPr>
+        <p:txBody>
+          <a:bodyPr wrap="square" lIns="109728" rIns="109728" tIns="73152" bIns="73152" anchor="ctr">
             <a:noAutofit/>
           </a:bodyPr>
           <a:lstStyle/>
@@ -16931,7 +14994,7 @@
         <p:spPr>
           <a:xfrm>
             <a:off x="685800" y="256032"/>
-            <a:ext cx="756904" cy="749807"/>
+            <a:ext cx="387682" cy="384048"/>
           </a:xfrm>
           <a:prstGeom prst="rect">
             <a:avLst/>
@@ -16946,16 +15009,16 @@
         </p:nvSpPr>
         <p:spPr>
           <a:xfrm>
-            <a:off x="1570720" y="256032"/>
-            <a:ext cx="16031480" cy="868680"/>
-          </a:xfrm>
-          <a:prstGeom prst="rect">
-            <a:avLst/>
-          </a:prstGeom>
-          <a:noFill/>
-        </p:spPr>
-        <p:txBody>
-          <a:bodyPr wrap="square" lIns="109728" rIns="109728" tIns="73152" bIns="73152">
+            <a:off x="1201498" y="256032"/>
+            <a:ext cx="16400702" cy="384048"/>
+          </a:xfrm>
+          <a:prstGeom prst="rect">
+            <a:avLst/>
+          </a:prstGeom>
+          <a:noFill/>
+        </p:spPr>
+        <p:txBody>
+          <a:bodyPr wrap="square" lIns="109728" rIns="109728" tIns="73152" bIns="73152" anchor="ctr">
             <a:noAutofit/>
           </a:bodyPr>
           <a:lstStyle/>
@@ -17024,7 +15087,7 @@
               </a:defRPr>
             </a:pPr>
             <a:r>
-              <a:t>Gabby</a:t>
+              <a:t>juju</a:t>
             </a:r>
           </a:p>
           <a:p>
@@ -17094,7 +15157,7 @@
               </a:defRPr>
             </a:pPr>
             <a:r>
-              <a:t>Gospel (John 14:15-21)</a:t>
+              <a:t>Gospel (John 15:26—16:4a)</a:t>
             </a:r>
           </a:p>
           <a:p>
@@ -17110,7 +15173,7 @@
               </a:defRPr>
             </a:pPr>
             <a:r>
-              <a:t>“I will pray to the Father, and he will give you another Counselor, that he may be with you forever,— the Spirit of truth, whom the world can't receive; for it doesn't see him, neither knows him.”</a:t>
+              <a:t>“When the Advocate comes whom I will send you from the Father, the Spirit of truth who proceeds from the Father, he will testify to me.”</a:t>
             </a:r>
           </a:p>
           <a:p>
@@ -17155,7 +15218,7 @@
               </a:defRPr>
             </a:pPr>
             <a:r>
-              <a:t>2026-05-10 · Eastertide</a:t>
+              <a:t>2026-05-11 · Eastertide</a:t>
             </a:r>
           </a:p>
         </p:txBody>
@@ -17255,7 +15318,7 @@
         <p:spPr>
           <a:xfrm>
             <a:off x="685800" y="256032"/>
-            <a:ext cx="756904" cy="749807"/>
+            <a:ext cx="387682" cy="384048"/>
           </a:xfrm>
           <a:prstGeom prst="rect">
             <a:avLst/>
@@ -17270,16 +15333,16 @@
         </p:nvSpPr>
         <p:spPr>
           <a:xfrm>
-            <a:off x="1570720" y="256032"/>
-            <a:ext cx="16031480" cy="868680"/>
-          </a:xfrm>
-          <a:prstGeom prst="rect">
-            <a:avLst/>
-          </a:prstGeom>
-          <a:noFill/>
-        </p:spPr>
-        <p:txBody>
-          <a:bodyPr wrap="square" lIns="109728" rIns="109728" tIns="73152" bIns="73152">
+            <a:off x="1201498" y="256032"/>
+            <a:ext cx="16400702" cy="384048"/>
+          </a:xfrm>
+          <a:prstGeom prst="rect">
+            <a:avLst/>
+          </a:prstGeom>
+          <a:noFill/>
+        </p:spPr>
+        <p:txBody>
+          <a:bodyPr wrap="square" lIns="109728" rIns="109728" tIns="73152" bIns="73152" anchor="ctr">
             <a:noAutofit/>
           </a:bodyPr>
           <a:lstStyle/>
@@ -17448,7 +15511,7 @@
         <p:spPr>
           <a:xfrm>
             <a:off x="685800" y="256032"/>
-            <a:ext cx="756904" cy="749807"/>
+            <a:ext cx="387682" cy="384048"/>
           </a:xfrm>
           <a:prstGeom prst="rect">
             <a:avLst/>
@@ -17463,16 +15526,16 @@
         </p:nvSpPr>
         <p:spPr>
           <a:xfrm>
-            <a:off x="1570720" y="256032"/>
-            <a:ext cx="16031480" cy="868680"/>
-          </a:xfrm>
-          <a:prstGeom prst="rect">
-            <a:avLst/>
-          </a:prstGeom>
-          <a:noFill/>
-        </p:spPr>
-        <p:txBody>
-          <a:bodyPr wrap="square" lIns="109728" rIns="109728" tIns="73152" bIns="73152">
+            <a:off x="1201498" y="256032"/>
+            <a:ext cx="16400702" cy="384048"/>
+          </a:xfrm>
+          <a:prstGeom prst="rect">
+            <a:avLst/>
+          </a:prstGeom>
+          <a:noFill/>
+        </p:spPr>
+        <p:txBody>
+          <a:bodyPr wrap="square" lIns="109728" rIns="109728" tIns="73152" bIns="73152" anchor="ctr">
             <a:noAutofit/>
           </a:bodyPr>
           <a:lstStyle/>
@@ -17641,7 +15704,7 @@
         <p:spPr>
           <a:xfrm>
             <a:off x="685800" y="256032"/>
-            <a:ext cx="756904" cy="749807"/>
+            <a:ext cx="387682" cy="384048"/>
           </a:xfrm>
           <a:prstGeom prst="rect">
             <a:avLst/>
@@ -17656,16 +15719,16 @@
         </p:nvSpPr>
         <p:spPr>
           <a:xfrm>
-            <a:off x="1570720" y="256032"/>
-            <a:ext cx="16031480" cy="868680"/>
-          </a:xfrm>
-          <a:prstGeom prst="rect">
-            <a:avLst/>
-          </a:prstGeom>
-          <a:noFill/>
-        </p:spPr>
-        <p:txBody>
-          <a:bodyPr wrap="square" lIns="109728" rIns="109728" tIns="73152" bIns="73152">
+            <a:off x="1201498" y="256032"/>
+            <a:ext cx="16400702" cy="384048"/>
+          </a:xfrm>
+          <a:prstGeom prst="rect">
+            <a:avLst/>
+          </a:prstGeom>
+          <a:noFill/>
+        </p:spPr>
+        <p:txBody>
+          <a:bodyPr wrap="square" lIns="109728" rIns="109728" tIns="73152" bIns="73152" anchor="ctr">
             <a:noAutofit/>
           </a:bodyPr>
           <a:lstStyle/>
@@ -17834,7 +15897,7 @@
         <p:spPr>
           <a:xfrm>
             <a:off x="685800" y="256032"/>
-            <a:ext cx="756904" cy="749807"/>
+            <a:ext cx="387682" cy="384048"/>
           </a:xfrm>
           <a:prstGeom prst="rect">
             <a:avLst/>
@@ -17849,16 +15912,16 @@
         </p:nvSpPr>
         <p:spPr>
           <a:xfrm>
-            <a:off x="1570720" y="256032"/>
-            <a:ext cx="16031480" cy="868680"/>
-          </a:xfrm>
-          <a:prstGeom prst="rect">
-            <a:avLst/>
-          </a:prstGeom>
-          <a:noFill/>
-        </p:spPr>
-        <p:txBody>
-          <a:bodyPr wrap="square" lIns="109728" rIns="109728" tIns="73152" bIns="73152">
+            <a:off x="1201498" y="256032"/>
+            <a:ext cx="16400702" cy="384048"/>
+          </a:xfrm>
+          <a:prstGeom prst="rect">
+            <a:avLst/>
+          </a:prstGeom>
+          <a:noFill/>
+        </p:spPr>
+        <p:txBody>
+          <a:bodyPr wrap="square" lIns="109728" rIns="109728" tIns="73152" bIns="73152" anchor="ctr">
             <a:noAutofit/>
           </a:bodyPr>
           <a:lstStyle/>
@@ -18027,7 +16090,7 @@
         <p:spPr>
           <a:xfrm>
             <a:off x="685800" y="256032"/>
-            <a:ext cx="756904" cy="749807"/>
+            <a:ext cx="387682" cy="384048"/>
           </a:xfrm>
           <a:prstGeom prst="rect">
             <a:avLst/>
@@ -18042,16 +16105,16 @@
         </p:nvSpPr>
         <p:spPr>
           <a:xfrm>
-            <a:off x="1570720" y="256032"/>
-            <a:ext cx="16031480" cy="868680"/>
-          </a:xfrm>
-          <a:prstGeom prst="rect">
-            <a:avLst/>
-          </a:prstGeom>
-          <a:noFill/>
-        </p:spPr>
-        <p:txBody>
-          <a:bodyPr wrap="square" lIns="109728" rIns="109728" tIns="73152" bIns="73152">
+            <a:off x="1201498" y="256032"/>
+            <a:ext cx="16400702" cy="384048"/>
+          </a:xfrm>
+          <a:prstGeom prst="rect">
+            <a:avLst/>
+          </a:prstGeom>
+          <a:noFill/>
+        </p:spPr>
+        <p:txBody>
+          <a:bodyPr wrap="square" lIns="109728" rIns="109728" tIns="73152" bIns="73152" anchor="ctr">
             <a:noAutofit/>
           </a:bodyPr>
           <a:lstStyle/>
@@ -18220,7 +16283,7 @@
         <p:spPr>
           <a:xfrm>
             <a:off x="685800" y="256032"/>
-            <a:ext cx="756904" cy="749807"/>
+            <a:ext cx="387682" cy="384048"/>
           </a:xfrm>
           <a:prstGeom prst="rect">
             <a:avLst/>
@@ -18235,16 +16298,16 @@
         </p:nvSpPr>
         <p:spPr>
           <a:xfrm>
-            <a:off x="1570720" y="256032"/>
-            <a:ext cx="16031480" cy="868680"/>
-          </a:xfrm>
-          <a:prstGeom prst="rect">
-            <a:avLst/>
-          </a:prstGeom>
-          <a:noFill/>
-        </p:spPr>
-        <p:txBody>
-          <a:bodyPr wrap="square" lIns="109728" rIns="109728" tIns="73152" bIns="73152">
+            <a:off x="1201498" y="256032"/>
+            <a:ext cx="16400702" cy="384048"/>
+          </a:xfrm>
+          <a:prstGeom prst="rect">
+            <a:avLst/>
+          </a:prstGeom>
+          <a:noFill/>
+        </p:spPr>
+        <p:txBody>
+          <a:bodyPr wrap="square" lIns="109728" rIns="109728" tIns="73152" bIns="73152" anchor="ctr">
             <a:noAutofit/>
           </a:bodyPr>
           <a:lstStyle/>
@@ -18445,7 +16508,7 @@
         <p:spPr>
           <a:xfrm>
             <a:off x="685800" y="256032"/>
-            <a:ext cx="756904" cy="749807"/>
+            <a:ext cx="387682" cy="384048"/>
           </a:xfrm>
           <a:prstGeom prst="rect">
             <a:avLst/>
@@ -18460,16 +16523,16 @@
         </p:nvSpPr>
         <p:spPr>
           <a:xfrm>
-            <a:off x="1570720" y="256032"/>
-            <a:ext cx="16031480" cy="868680"/>
-          </a:xfrm>
-          <a:prstGeom prst="rect">
-            <a:avLst/>
-          </a:prstGeom>
-          <a:noFill/>
-        </p:spPr>
-        <p:txBody>
-          <a:bodyPr wrap="square" lIns="109728" rIns="109728" tIns="73152" bIns="73152">
+            <a:off x="1201498" y="256032"/>
+            <a:ext cx="16400702" cy="384048"/>
+          </a:xfrm>
+          <a:prstGeom prst="rect">
+            <a:avLst/>
+          </a:prstGeom>
+          <a:noFill/>
+        </p:spPr>
+        <p:txBody>
+          <a:bodyPr wrap="square" lIns="109728" rIns="109728" tIns="73152" bIns="73152" anchor="ctr">
             <a:noAutofit/>
           </a:bodyPr>
           <a:lstStyle/>
@@ -18638,7 +16701,7 @@
         <p:spPr>
           <a:xfrm>
             <a:off x="685800" y="256032"/>
-            <a:ext cx="756904" cy="749807"/>
+            <a:ext cx="387682" cy="384048"/>
           </a:xfrm>
           <a:prstGeom prst="rect">
             <a:avLst/>
@@ -18653,16 +16716,16 @@
         </p:nvSpPr>
         <p:spPr>
           <a:xfrm>
-            <a:off x="1570720" y="256032"/>
-            <a:ext cx="16031480" cy="868680"/>
-          </a:xfrm>
-          <a:prstGeom prst="rect">
-            <a:avLst/>
-          </a:prstGeom>
-          <a:noFill/>
-        </p:spPr>
-        <p:txBody>
-          <a:bodyPr wrap="square" lIns="109728" rIns="109728" tIns="73152" bIns="73152">
+            <a:off x="1201498" y="256032"/>
+            <a:ext cx="16400702" cy="384048"/>
+          </a:xfrm>
+          <a:prstGeom prst="rect">
+            <a:avLst/>
+          </a:prstGeom>
+          <a:noFill/>
+        </p:spPr>
+        <p:txBody>
+          <a:bodyPr wrap="square" lIns="109728" rIns="109728" tIns="73152" bIns="73152" anchor="ctr">
             <a:noAutofit/>
           </a:bodyPr>
           <a:lstStyle/>
@@ -18895,7 +16958,7 @@
         <p:spPr>
           <a:xfrm>
             <a:off x="685800" y="256032"/>
-            <a:ext cx="756904" cy="749807"/>
+            <a:ext cx="387682" cy="384048"/>
           </a:xfrm>
           <a:prstGeom prst="rect">
             <a:avLst/>
@@ -18910,16 +16973,16 @@
         </p:nvSpPr>
         <p:spPr>
           <a:xfrm>
-            <a:off x="1570720" y="256032"/>
-            <a:ext cx="16031480" cy="868680"/>
-          </a:xfrm>
-          <a:prstGeom prst="rect">
-            <a:avLst/>
-          </a:prstGeom>
-          <a:noFill/>
-        </p:spPr>
-        <p:txBody>
-          <a:bodyPr wrap="square" lIns="109728" rIns="109728" tIns="73152" bIns="73152">
+            <a:off x="1201498" y="256032"/>
+            <a:ext cx="16400702" cy="384048"/>
+          </a:xfrm>
+          <a:prstGeom prst="rect">
+            <a:avLst/>
+          </a:prstGeom>
+          <a:noFill/>
+        </p:spPr>
+        <p:txBody>
+          <a:bodyPr wrap="square" lIns="109728" rIns="109728" tIns="73152" bIns="73152" anchor="ctr">
             <a:noAutofit/>
           </a:bodyPr>
           <a:lstStyle/>
@@ -18969,7 +17032,7 @@
               </a:defRPr>
             </a:pPr>
             <a:r>
-              <a:t>Go Make a Difference</a:t>
+              <a:t>Now Thank We All Our God</a:t>
             </a:r>
           </a:p>
         </p:txBody>
@@ -18991,17 +17054,17 @@
           <a:noFill/>
         </p:spPr>
         <p:txBody>
-          <a:bodyPr wrap="square" lIns="109728" rIns="109728" tIns="73152" bIns="73152" anchor="t">
+          <a:bodyPr wrap="square" lIns="109728" rIns="109728" tIns="73152" bIns="73152" anchor="ctr">
             <a:noAutofit/>
           </a:bodyPr>
           <a:lstStyle/>
           <a:p>
             <a:pPr algn="ctr">
               <a:lnSpc>
-                <a:spcPct val="115000"/>
+                <a:spcPct val="105000"/>
               </a:lnSpc>
               <a:spcAft>
-                <a:spcPts val="1400"/>
+                <a:spcPts val="1000"/>
               </a:spcAft>
               <a:defRPr sz="3800" b="1" i="0">
                 <a:solidFill>
@@ -19011,330 +17074,7 @@
               </a:defRPr>
             </a:pPr>
             <a:r>
-              <a:t>GO MAKE A DIFFERENCE;</a:t>
-            </a:r>
-          </a:p>
-          <a:p>
-            <a:pPr algn="ctr">
-              <a:lnSpc>
-                <a:spcPct val="115000"/>
-              </a:lnSpc>
-              <a:spcAft>
-                <a:spcPts val="1400"/>
-              </a:spcAft>
-              <a:defRPr sz="3800" b="1" i="0">
-                <a:solidFill>
-                  <a:srgbClr val="FFFFFF"/>
-                </a:solidFill>
-                <a:latin typeface="Arial Black"/>
-              </a:defRPr>
-            </a:pPr>
-            <a:r>
-              <a:t>WE CAN MAKE A DIFFERENCE</a:t>
-            </a:r>
-          </a:p>
-          <a:p>
-            <a:pPr algn="ctr">
-              <a:lnSpc>
-                <a:spcPct val="115000"/>
-              </a:lnSpc>
-              <a:spcAft>
-                <a:spcPts val="1400"/>
-              </a:spcAft>
-              <a:defRPr sz="3800" b="1" i="0">
-                <a:solidFill>
-                  <a:srgbClr val="FFFFFF"/>
-                </a:solidFill>
-                <a:latin typeface="Arial Black"/>
-              </a:defRPr>
-            </a:pPr>
-            <a:r>
-              <a:t>IN THE NAME OF THE LORD.</a:t>
-            </a:r>
-          </a:p>
-          <a:p>
-            <a:pPr algn="ctr">
-              <a:lnSpc>
-                <a:spcPct val="115000"/>
-              </a:lnSpc>
-              <a:spcAft>
-                <a:spcPts val="1400"/>
-              </a:spcAft>
-              <a:defRPr sz="3800" b="1" i="0">
-                <a:solidFill>
-                  <a:srgbClr val="FFFFFF"/>
-                </a:solidFill>
-                <a:latin typeface="Arial Black"/>
-              </a:defRPr>
-            </a:pPr>
-            <a:r>
-              <a:t>WE ARE SENT IN THE POWER OF LOVE,</a:t>
-            </a:r>
-          </a:p>
-          <a:p>
-            <a:pPr algn="ctr">
-              <a:lnSpc>
-                <a:spcPct val="115000"/>
-              </a:lnSpc>
-              <a:spcAft>
-                <a:spcPts val="1400"/>
-              </a:spcAft>
-              <a:defRPr sz="3800" b="1" i="0">
-                <a:solidFill>
-                  <a:srgbClr val="FFFFFF"/>
-                </a:solidFill>
-                <a:latin typeface="Arial Black"/>
-              </a:defRPr>
-            </a:pPr>
-            <a:r>
-              <a:t>BEARING PEACE LIKE A PURE, HOLY DOVE</a:t>
-            </a:r>
-          </a:p>
-          <a:p>
-            <a:pPr algn="ctr">
-              <a:lnSpc>
-                <a:spcPct val="115000"/>
-              </a:lnSpc>
-              <a:spcAft>
-                <a:spcPts val="1400"/>
-              </a:spcAft>
-              <a:defRPr sz="3800" b="1" i="0">
-                <a:solidFill>
-                  <a:srgbClr val="FFFFFF"/>
-                </a:solidFill>
-                <a:latin typeface="Arial Black"/>
-              </a:defRPr>
-            </a:pPr>
-            <a:r>
-              <a:t>TO EVERY NATION, EVERY LAND.</a:t>
-            </a:r>
-          </a:p>
-          <a:p>
-            <a:pPr algn="ctr">
-              <a:lnSpc>
-                <a:spcPct val="115000"/>
-              </a:lnSpc>
-              <a:spcAft>
-                <a:spcPts val="1400"/>
-              </a:spcAft>
-              <a:defRPr sz="3800" b="1" i="0">
-                <a:solidFill>
-                  <a:srgbClr val="FFFFFF"/>
-                </a:solidFill>
-                <a:latin typeface="Arial Black"/>
-              </a:defRPr>
-            </a:pPr>
-            <a:r>
-              <a:t>GO MAKE A DIFFERENCE.</a:t>
-            </a:r>
-          </a:p>
-          <a:p>
-            <a:pPr algn="ctr">
-              <a:lnSpc>
-                <a:spcPct val="115000"/>
-              </a:lnSpc>
-              <a:spcAft>
-                <a:spcPts val="1400"/>
-              </a:spcAft>
-              <a:defRPr sz="3800" b="1" i="0">
-                <a:solidFill>
-                  <a:srgbClr val="FFFFFF"/>
-                </a:solidFill>
-                <a:latin typeface="Arial Black"/>
-              </a:defRPr>
-            </a:pPr>
-            <a:r>
-              <a:t>GO MAKE A DIFFERENCE;</a:t>
-            </a:r>
-          </a:p>
-          <a:p>
-            <a:pPr algn="ctr">
-              <a:lnSpc>
-                <a:spcPct val="115000"/>
-              </a:lnSpc>
-              <a:spcAft>
-                <a:spcPts val="1400"/>
-              </a:spcAft>
-              <a:defRPr sz="3800" b="1" i="0">
-                <a:solidFill>
-                  <a:srgbClr val="FFFFFF"/>
-                </a:solidFill>
-                <a:latin typeface="Arial Black"/>
-              </a:defRPr>
-            </a:pPr>
-            <a:r>
-              <a:t>WE CAN MAKE A DIFFERENCE</a:t>
-            </a:r>
-          </a:p>
-          <a:p>
-            <a:pPr algn="ctr">
-              <a:lnSpc>
-                <a:spcPct val="115000"/>
-              </a:lnSpc>
-              <a:spcAft>
-                <a:spcPts val="1400"/>
-              </a:spcAft>
-              <a:defRPr sz="3800" b="1" i="0">
-                <a:solidFill>
-                  <a:srgbClr val="FFFFFF"/>
-                </a:solidFill>
-                <a:latin typeface="Arial Black"/>
-              </a:defRPr>
-            </a:pPr>
-            <a:r>
-              <a:t>IN THE NAME OF THE LORD.</a:t>
-            </a:r>
-          </a:p>
-          <a:p>
-            <a:pPr algn="ctr">
-              <a:lnSpc>
-                <a:spcPct val="115000"/>
-              </a:lnSpc>
-              <a:spcAft>
-                <a:spcPts val="1400"/>
-              </a:spcAft>
-              <a:defRPr sz="3800" b="1" i="0">
-                <a:solidFill>
-                  <a:srgbClr val="FFFFFF"/>
-                </a:solidFill>
-                <a:latin typeface="Arial Black"/>
-              </a:defRPr>
-            </a:pPr>
-            <a:r>
-              <a:t>WE ARE THE SALT OF THE EARTH,</a:t>
-            </a:r>
-          </a:p>
-          <a:p>
-            <a:pPr algn="ctr">
-              <a:lnSpc>
-                <a:spcPct val="115000"/>
-              </a:lnSpc>
-              <a:spcAft>
-                <a:spcPts val="1400"/>
-              </a:spcAft>
-              <a:defRPr sz="3800" b="1" i="0">
-                <a:solidFill>
-                  <a:srgbClr val="FFFFFF"/>
-                </a:solidFill>
-                <a:latin typeface="Arial Black"/>
-              </a:defRPr>
-            </a:pPr>
-            <a:r>
-              <a:t>CALLED TO GIVE THE WORLD A NEW TASTE:</a:t>
-            </a:r>
-          </a:p>
-          <a:p>
-            <a:pPr algn="ctr">
-              <a:lnSpc>
-                <a:spcPct val="115000"/>
-              </a:lnSpc>
-              <a:spcAft>
-                <a:spcPts val="1400"/>
-              </a:spcAft>
-              <a:defRPr sz="3800" b="1" i="0">
-                <a:solidFill>
-                  <a:srgbClr val="FFFFFF"/>
-                </a:solidFill>
-                <a:latin typeface="Arial Black"/>
-              </a:defRPr>
-            </a:pPr>
-            <a:r>
-              <a:t>LOVE, JUSTICE, MERCY, AND PRAISE.</a:t>
-            </a:r>
-          </a:p>
-          <a:p>
-            <a:pPr algn="ctr">
-              <a:lnSpc>
-                <a:spcPct val="115000"/>
-              </a:lnSpc>
-              <a:spcAft>
-                <a:spcPts val="1400"/>
-              </a:spcAft>
-              <a:defRPr sz="3800" b="1" i="0">
-                <a:solidFill>
-                  <a:srgbClr val="FFFFFF"/>
-                </a:solidFill>
-                <a:latin typeface="Arial Black"/>
-              </a:defRPr>
-            </a:pPr>
-            <a:r>
-              <a:t>GO MAKE A DIFFERENCE.</a:t>
-            </a:r>
-          </a:p>
-          <a:p>
-            <a:pPr algn="ctr">
-              <a:lnSpc>
-                <a:spcPct val="115000"/>
-              </a:lnSpc>
-              <a:spcAft>
-                <a:spcPts val="1400"/>
-              </a:spcAft>
-              <a:defRPr sz="3800" b="1" i="0">
-                <a:solidFill>
-                  <a:srgbClr val="FFFFFF"/>
-                </a:solidFill>
-                <a:latin typeface="Arial Black"/>
-              </a:defRPr>
-            </a:pPr>
-            <a:r>
-              <a:t>GO MAKE A DIFFERENCE;</a:t>
-            </a:r>
-          </a:p>
-          <a:p>
-            <a:pPr algn="ctr">
-              <a:lnSpc>
-                <a:spcPct val="115000"/>
-              </a:lnSpc>
-              <a:spcAft>
-                <a:spcPts val="1400"/>
-              </a:spcAft>
-              <a:defRPr sz="3800" b="1" i="0">
-                <a:solidFill>
-                  <a:srgbClr val="FFFFFF"/>
-                </a:solidFill>
-                <a:latin typeface="Arial Black"/>
-              </a:defRPr>
-            </a:pPr>
-            <a:r>
-              <a:t>WE CAN MAKE A DIFFERENCE</a:t>
-            </a:r>
-          </a:p>
-          <a:p>
-            <a:pPr algn="ctr">
-              <a:lnSpc>
-                <a:spcPct val="115000"/>
-              </a:lnSpc>
-              <a:spcAft>
-                <a:spcPts val="1400"/>
-              </a:spcAft>
-              <a:defRPr sz="3800" b="1" i="0">
-                <a:solidFill>
-                  <a:srgbClr val="FFFFFF"/>
-                </a:solidFill>
-                <a:latin typeface="Arial Black"/>
-              </a:defRPr>
-            </a:pPr>
-            <a:r>
-              <a:t>IN THE NAME OF THE LORD.</a:t>
-            </a:r>
-          </a:p>
-          <a:p>
-            <a:pPr algn="ctr">
-              <a:lnSpc>
-                <a:spcPct val="115000"/>
-              </a:lnSpc>
-              <a:spcAft>
-                <a:spcPts val="1400"/>
-              </a:spcAft>
-              <a:defRPr sz="3800" b="1" i="0">
-                <a:solidFill>
-                  <a:srgbClr val="FFFFFF"/>
-                </a:solidFill>
-                <a:latin typeface="Arial Black"/>
-              </a:defRPr>
-            </a:pPr>
-            <a:r>
-              <a:t>WE ARE A LIGHT ON THE HILL,</a:t>
+              <a:t>(NO LYRICS IN LIBRARY FOR THIS HYMN.)</a:t>
             </a:r>
           </a:p>
         </p:txBody>
@@ -19400,224 +17140,6 @@
 </file>
 
 <file path=ppt/slides/slide63.xml><?xml version="1.0" encoding="utf-8"?>
-<p:sld xmlns:a="http://schemas.openxmlformats.org/drawingml/2006/main" xmlns:p="http://schemas.openxmlformats.org/presentationml/2006/main" xmlns:r="http://schemas.openxmlformats.org/officeDocument/2006/relationships">
-  <p:cSld>
-    <p:bg>
-      <p:bgPr>
-        <a:solidFill>
-          <a:srgbClr val="000000"/>
-        </a:solidFill>
-        <a:effectLst/>
-      </p:bgPr>
-    </p:bg>
-    <p:spTree>
-      <p:nvGrpSpPr>
-        <p:cNvPr id="1" name=""/>
-        <p:cNvGrpSpPr/>
-        <p:nvPr/>
-      </p:nvGrpSpPr>
-      <p:grpSpPr/>
-      <p:pic>
-        <p:nvPicPr>
-          <p:cNvPr id="2" name="Picture 1" descr="community_logo.png"/>
-          <p:cNvPicPr>
-            <a:picLocks noChangeAspect="1"/>
-          </p:cNvPicPr>
-          <p:nvPr/>
-        </p:nvPicPr>
-        <p:blipFill>
-          <a:blip r:embed="rId2"/>
-          <a:stretch>
-            <a:fillRect/>
-          </a:stretch>
-        </p:blipFill>
-        <p:spPr>
-          <a:xfrm>
-            <a:off x="685800" y="256032"/>
-            <a:ext cx="756904" cy="749807"/>
-          </a:xfrm>
-          <a:prstGeom prst="rect">
-            <a:avLst/>
-          </a:prstGeom>
-        </p:spPr>
-      </p:pic>
-      <p:sp>
-        <p:nvSpPr>
-          <p:cNvPr id="3" name="TextBox 2"/>
-          <p:cNvSpPr txBox="1"/>
-          <p:nvPr/>
-        </p:nvSpPr>
-        <p:spPr>
-          <a:xfrm>
-            <a:off x="1570720" y="256032"/>
-            <a:ext cx="16031480" cy="868680"/>
-          </a:xfrm>
-          <a:prstGeom prst="rect">
-            <a:avLst/>
-          </a:prstGeom>
-          <a:noFill/>
-        </p:spPr>
-        <p:txBody>
-          <a:bodyPr wrap="square" lIns="109728" rIns="109728" tIns="73152" bIns="73152">
-            <a:noAutofit/>
-          </a:bodyPr>
-          <a:lstStyle/>
-          <a:p>
-            <a:pPr algn="l">
-              <a:defRPr sz="1500" b="1" i="0">
-                <a:solidFill>
-                  <a:srgbClr val="FFFFFF"/>
-                </a:solidFill>
-                <a:latin typeface="Calibri"/>
-              </a:defRPr>
-            </a:pPr>
-            <a:r>
-              <a:t>Gwangju Catholic Church Community</a:t>
-            </a:r>
-          </a:p>
-        </p:txBody>
-      </p:sp>
-      <p:sp>
-        <p:nvSpPr>
-          <p:cNvPr id="4" name="TextBox 3"/>
-          <p:cNvSpPr txBox="1"/>
-          <p:nvPr/>
-        </p:nvSpPr>
-        <p:spPr>
-          <a:xfrm>
-            <a:off x="685800" y="1417320"/>
-            <a:ext cx="16916400" cy="8001000"/>
-          </a:xfrm>
-          <a:prstGeom prst="rect">
-            <a:avLst/>
-          </a:prstGeom>
-          <a:noFill/>
-        </p:spPr>
-        <p:txBody>
-          <a:bodyPr wrap="square" lIns="109728" rIns="109728" tIns="73152" bIns="73152" anchor="ctr">
-            <a:noAutofit/>
-          </a:bodyPr>
-          <a:lstStyle/>
-          <a:p>
-            <a:pPr algn="ctr">
-              <a:lnSpc>
-                <a:spcPct val="115000"/>
-              </a:lnSpc>
-              <a:spcAft>
-                <a:spcPts val="1400"/>
-              </a:spcAft>
-              <a:defRPr sz="3800" b="1" i="0">
-                <a:solidFill>
-                  <a:srgbClr val="FFFFFF"/>
-                </a:solidFill>
-                <a:latin typeface="Arial Black"/>
-              </a:defRPr>
-            </a:pPr>
-            <a:r>
-              <a:t>MAY OUR GOOD DEEDS SHINE, LORD, UNTIL</a:t>
-            </a:r>
-          </a:p>
-          <a:p>
-            <a:pPr algn="ctr">
-              <a:lnSpc>
-                <a:spcPct val="115000"/>
-              </a:lnSpc>
-              <a:spcAft>
-                <a:spcPts val="1400"/>
-              </a:spcAft>
-              <a:defRPr sz="3800" b="1" i="0">
-                <a:solidFill>
-                  <a:srgbClr val="FFFFFF"/>
-                </a:solidFill>
-                <a:latin typeface="Arial Black"/>
-              </a:defRPr>
-            </a:pPr>
-            <a:r>
-              <a:t>ALL KNOW YOUR KINGDOM IS NEAR.</a:t>
-            </a:r>
-          </a:p>
-          <a:p>
-            <a:pPr algn="ctr">
-              <a:lnSpc>
-                <a:spcPct val="115000"/>
-              </a:lnSpc>
-              <a:spcAft>
-                <a:spcPts val="1400"/>
-              </a:spcAft>
-              <a:defRPr sz="3800" b="1" i="0">
-                <a:solidFill>
-                  <a:srgbClr val="FFFFFF"/>
-                </a:solidFill>
-                <a:latin typeface="Arial Black"/>
-              </a:defRPr>
-            </a:pPr>
-            <a:r>
-              <a:t>GO MAKE A DIFFERENCE.</a:t>
-            </a:r>
-          </a:p>
-        </p:txBody>
-      </p:sp>
-      <p:sp>
-        <p:nvSpPr>
-          <p:cNvPr id="5" name="TextBox 4"/>
-          <p:cNvSpPr txBox="1"/>
-          <p:nvPr/>
-        </p:nvSpPr>
-        <p:spPr>
-          <a:xfrm>
-            <a:off x="685800" y="9418320"/>
-            <a:ext cx="16916400" cy="777240"/>
-          </a:xfrm>
-          <a:prstGeom prst="rect">
-            <a:avLst/>
-          </a:prstGeom>
-          <a:noFill/>
-        </p:spPr>
-        <p:txBody>
-          <a:bodyPr wrap="square" lIns="109728" rIns="109728" tIns="73152" bIns="73152">
-            <a:noAutofit/>
-          </a:bodyPr>
-          <a:lstStyle/>
-          <a:p>
-            <a:pPr>
-              <a:defRPr sz="1300" b="1" i="0">
-                <a:solidFill>
-                  <a:srgbClr val="8C8C91"/>
-                </a:solidFill>
-                <a:latin typeface="Calibri"/>
-              </a:defRPr>
-            </a:pPr>
-            <a:r>
-              <a:t>Gwangju Catholic Church Community</a:t>
-            </a:r>
-          </a:p>
-          <a:p>
-            <a:pPr>
-              <a:spcBef>
-                <a:spcPts val="200"/>
-              </a:spcBef>
-              <a:defRPr sz="1200" b="0" i="0">
-                <a:solidFill>
-                  <a:srgbClr val="FFCC4D"/>
-                </a:solidFill>
-                <a:latin typeface="Calibri"/>
-              </a:defRPr>
-            </a:pPr>
-            <a:r>
-              <a:t>Recessional</a:t>
-            </a:r>
-          </a:p>
-        </p:txBody>
-      </p:sp>
-    </p:spTree>
-  </p:cSld>
-  <p:clrMapOvr>
-    <a:masterClrMapping/>
-  </p:clrMapOvr>
-</p:sld>
-</file>
-
-<file path=ppt/slides/slide64.xml><?xml version="1.0" encoding="utf-8"?>
 <p:sld xmlns:a="http://schemas.openxmlformats.org/drawingml/2006/main" xmlns:p="http://schemas.openxmlformats.org/presentationml/2006/main" xmlns:r="http://schemas.openxmlformats.org/officeDocument/2006/relationships">
   <p:cSld>
     <p:bg>
@@ -19652,7 +17174,7 @@
         <p:spPr>
           <a:xfrm>
             <a:off x="685800" y="256032"/>
-            <a:ext cx="756904" cy="749807"/>
+            <a:ext cx="387682" cy="384048"/>
           </a:xfrm>
           <a:prstGeom prst="rect">
             <a:avLst/>
@@ -19667,16 +17189,16 @@
         </p:nvSpPr>
         <p:spPr>
           <a:xfrm>
-            <a:off x="1570720" y="256032"/>
-            <a:ext cx="16031480" cy="868680"/>
-          </a:xfrm>
-          <a:prstGeom prst="rect">
-            <a:avLst/>
-          </a:prstGeom>
-          <a:noFill/>
-        </p:spPr>
-        <p:txBody>
-          <a:bodyPr wrap="square" lIns="109728" rIns="109728" tIns="73152" bIns="73152">
+            <a:off x="1201498" y="256032"/>
+            <a:ext cx="16400702" cy="384048"/>
+          </a:xfrm>
+          <a:prstGeom prst="rect">
+            <a:avLst/>
+          </a:prstGeom>
+          <a:noFill/>
+        </p:spPr>
+        <p:txBody>
+          <a:bodyPr wrap="square" lIns="109728" rIns="109728" tIns="73152" bIns="73152" anchor="ctr">
             <a:noAutofit/>
           </a:bodyPr>
           <a:lstStyle/>
@@ -19745,7 +17267,7 @@
               </a:defRPr>
             </a:pPr>
             <a:r>
-              <a:t>Gabby</a:t>
+              <a:t>juju</a:t>
             </a:r>
           </a:p>
           <a:p>
@@ -19815,7 +17337,7 @@
               </a:defRPr>
             </a:pPr>
             <a:r>
-              <a:t>Gospel (John 14:15-21)</a:t>
+              <a:t>Gospel (John 15:26—16:4a)</a:t>
             </a:r>
           </a:p>
           <a:p>
@@ -19831,7 +17353,7 @@
               </a:defRPr>
             </a:pPr>
             <a:r>
-              <a:t>“I will pray to the Father, and he will give you another Counselor, that he may be with you forever,— the Spirit of truth, whom the world can't receive; for it doesn't see him, neither knows him.”</a:t>
+              <a:t>“When the Advocate comes whom I will send you from the Father, the Spirit of truth who proceeds from the Father, he will testify to me.”</a:t>
             </a:r>
           </a:p>
           <a:p>
@@ -19876,7 +17398,7 @@
               </a:defRPr>
             </a:pPr>
             <a:r>
-              <a:t>2026-05-10 · Eastertide</a:t>
+              <a:t>2026-05-11 · Eastertide</a:t>
             </a:r>
           </a:p>
         </p:txBody>
@@ -19929,183 +17451,6 @@
             </a:pPr>
             <a:r>
               <a:t>Mass poster / divider</a:t>
-            </a:r>
-          </a:p>
-        </p:txBody>
-      </p:sp>
-    </p:spTree>
-  </p:cSld>
-  <p:clrMapOvr>
-    <a:masterClrMapping/>
-  </p:clrMapOvr>
-</p:sld>
-</file>
-
-<file path=ppt/slides/slide65.xml><?xml version="1.0" encoding="utf-8"?>
-<p:sld xmlns:a="http://schemas.openxmlformats.org/drawingml/2006/main" xmlns:p="http://schemas.openxmlformats.org/presentationml/2006/main" xmlns:r="http://schemas.openxmlformats.org/officeDocument/2006/relationships">
-  <p:cSld>
-    <p:bg>
-      <p:bgPr>
-        <a:solidFill>
-          <a:srgbClr val="F2F0E8"/>
-        </a:solidFill>
-        <a:effectLst/>
-      </p:bgPr>
-    </p:bg>
-    <p:spTree>
-      <p:nvGrpSpPr>
-        <p:cNvPr id="1" name=""/>
-        <p:cNvGrpSpPr/>
-        <p:nvPr/>
-      </p:nvGrpSpPr>
-      <p:grpSpPr/>
-      <p:pic>
-        <p:nvPicPr>
-          <p:cNvPr id="2" name="Picture 1" descr="community_logo.png"/>
-          <p:cNvPicPr>
-            <a:picLocks noChangeAspect="1"/>
-          </p:cNvPicPr>
-          <p:nvPr/>
-        </p:nvPicPr>
-        <p:blipFill>
-          <a:blip r:embed="rId2"/>
-          <a:stretch>
-            <a:fillRect/>
-          </a:stretch>
-        </p:blipFill>
-        <p:spPr>
-          <a:xfrm>
-            <a:off x="685800" y="256032"/>
-            <a:ext cx="756904" cy="749807"/>
-          </a:xfrm>
-          <a:prstGeom prst="rect">
-            <a:avLst/>
-          </a:prstGeom>
-        </p:spPr>
-      </p:pic>
-      <p:sp>
-        <p:nvSpPr>
-          <p:cNvPr id="3" name="TextBox 2"/>
-          <p:cNvSpPr txBox="1"/>
-          <p:nvPr/>
-        </p:nvSpPr>
-        <p:spPr>
-          <a:xfrm>
-            <a:off x="1570720" y="256032"/>
-            <a:ext cx="16031480" cy="868680"/>
-          </a:xfrm>
-          <a:prstGeom prst="rect">
-            <a:avLst/>
-          </a:prstGeom>
-          <a:noFill/>
-        </p:spPr>
-        <p:txBody>
-          <a:bodyPr wrap="square" lIns="109728" rIns="109728" tIns="73152" bIns="73152">
-            <a:noAutofit/>
-          </a:bodyPr>
-          <a:lstStyle/>
-          <a:p>
-            <a:pPr algn="l">
-              <a:defRPr sz="1500" b="1" i="0">
-                <a:solidFill>
-                  <a:srgbClr val="1A1A1E"/>
-                </a:solidFill>
-                <a:latin typeface="Calibri"/>
-              </a:defRPr>
-            </a:pPr>
-            <a:r>
-              <a:t>Gwangju Catholic Church Community</a:t>
-            </a:r>
-          </a:p>
-        </p:txBody>
-      </p:sp>
-      <p:sp>
-        <p:nvSpPr>
-          <p:cNvPr id="4" name="TextBox 3"/>
-          <p:cNvSpPr txBox="1"/>
-          <p:nvPr/>
-        </p:nvSpPr>
-        <p:spPr>
-          <a:xfrm>
-            <a:off x="685800" y="1417320"/>
-            <a:ext cx="16916400" cy="7863840"/>
-          </a:xfrm>
-          <a:prstGeom prst="rect">
-            <a:avLst/>
-          </a:prstGeom>
-          <a:noFill/>
-        </p:spPr>
-        <p:txBody>
-          <a:bodyPr wrap="square" lIns="109728" rIns="109728" tIns="73152" bIns="73152">
-            <a:noAutofit/>
-          </a:bodyPr>
-          <a:lstStyle/>
-          <a:p>
-            <a:pPr>
-              <a:spcAft>
-                <a:spcPts val="500"/>
-              </a:spcAft>
-              <a:defRPr sz="1500" b="0" i="1">
-                <a:solidFill>
-                  <a:srgbClr val="56515A"/>
-                </a:solidFill>
-                <a:latin typeface="Calibri"/>
-              </a:defRPr>
-            </a:pPr>
-            <a:r>
-              <a:t>Below: World English Bible (WEB) fallback — verify NABRE on bible.usccb.org.</a:t>
-            </a:r>
-          </a:p>
-        </p:txBody>
-      </p:sp>
-      <p:sp>
-        <p:nvSpPr>
-          <p:cNvPr id="5" name="TextBox 4"/>
-          <p:cNvSpPr txBox="1"/>
-          <p:nvPr/>
-        </p:nvSpPr>
-        <p:spPr>
-          <a:xfrm>
-            <a:off x="685800" y="9418320"/>
-            <a:ext cx="16916400" cy="777240"/>
-          </a:xfrm>
-          <a:prstGeom prst="rect">
-            <a:avLst/>
-          </a:prstGeom>
-          <a:noFill/>
-        </p:spPr>
-        <p:txBody>
-          <a:bodyPr wrap="square" lIns="109728" rIns="109728" tIns="73152" bIns="73152">
-            <a:noAutofit/>
-          </a:bodyPr>
-          <a:lstStyle/>
-          <a:p>
-            <a:pPr>
-              <a:defRPr sz="1300" b="1" i="0">
-                <a:solidFill>
-                  <a:srgbClr val="5F5D68"/>
-                </a:solidFill>
-                <a:latin typeface="Calibri"/>
-              </a:defRPr>
-            </a:pPr>
-            <a:r>
-              <a:t>Gwangju Catholic Church Community</a:t>
-            </a:r>
-          </a:p>
-          <a:p>
-            <a:pPr>
-              <a:spcBef>
-                <a:spcPts val="200"/>
-              </a:spcBef>
-              <a:defRPr sz="1200" b="0" i="0">
-                <a:solidFill>
-                  <a:srgbClr val="56515A"/>
-                </a:solidFill>
-                <a:latin typeface="Calibri"/>
-              </a:defRPr>
-            </a:pPr>
-            <a:r>
-              <a:t>Scripture note</a:t>
             </a:r>
           </a:p>
         </p:txBody>
@@ -20153,7 +17498,7 @@
         <p:spPr>
           <a:xfrm>
             <a:off x="685800" y="256032"/>
-            <a:ext cx="756904" cy="749807"/>
+            <a:ext cx="387682" cy="384048"/>
           </a:xfrm>
           <a:prstGeom prst="rect">
             <a:avLst/>
@@ -20168,16 +17513,16 @@
         </p:nvSpPr>
         <p:spPr>
           <a:xfrm>
-            <a:off x="1570720" y="256032"/>
-            <a:ext cx="16031480" cy="868680"/>
-          </a:xfrm>
-          <a:prstGeom prst="rect">
-            <a:avLst/>
-          </a:prstGeom>
-          <a:noFill/>
-        </p:spPr>
-        <p:txBody>
-          <a:bodyPr wrap="square" lIns="109728" rIns="109728" tIns="73152" bIns="73152">
+            <a:off x="1201498" y="256032"/>
+            <a:ext cx="16400702" cy="384048"/>
+          </a:xfrm>
+          <a:prstGeom prst="rect">
+            <a:avLst/>
+          </a:prstGeom>
+          <a:noFill/>
+        </p:spPr>
+        <p:txBody>
+          <a:bodyPr wrap="square" lIns="109728" rIns="109728" tIns="73152" bIns="73152" anchor="ctr">
             <a:noAutofit/>
           </a:bodyPr>
           <a:lstStyle/>
@@ -20230,7 +17575,215 @@
               </a:defRPr>
             </a:pPr>
             <a:r>
-              <a:t>Brothers and sisters, let us acknowledge our sins, and so prepare ourselves to celebrate the sacred mysteries.</a:t>
+              <a:t>Brethren (brothers and sisters), let us acknowledge our sins, and so prepare ourselves to celebrate the sacred mysteries.</a:t>
+            </a:r>
+          </a:p>
+          <a:p>
+            <a:pPr>
+              <a:spcAft>
+                <a:spcPts val="500"/>
+              </a:spcAft>
+              <a:defRPr sz="2000" b="1" i="0">
+                <a:solidFill>
+                  <a:srgbClr val="1A1A1E"/>
+                </a:solidFill>
+                <a:latin typeface="Calibri"/>
+              </a:defRPr>
+            </a:pPr>
+            <a:r>
+              <a:t>I confess to almighty God</a:t>
+            </a:r>
+          </a:p>
+          <a:p>
+            <a:pPr>
+              <a:spcAft>
+                <a:spcPts val="500"/>
+              </a:spcAft>
+              <a:defRPr sz="1900" b="0" i="0">
+                <a:solidFill>
+                  <a:srgbClr val="1A1A1E"/>
+                </a:solidFill>
+                <a:latin typeface="Calibri"/>
+              </a:defRPr>
+            </a:pPr>
+            <a:r>
+              <a:t>and to you, my brothers and sisters,</a:t>
+            </a:r>
+          </a:p>
+          <a:p>
+            <a:pPr>
+              <a:spcAft>
+                <a:spcPts val="500"/>
+              </a:spcAft>
+              <a:defRPr sz="1900" b="0" i="0">
+                <a:solidFill>
+                  <a:srgbClr val="1A1A1E"/>
+                </a:solidFill>
+                <a:latin typeface="Calibri"/>
+              </a:defRPr>
+            </a:pPr>
+            <a:r>
+              <a:t>that I have greatly sinned,</a:t>
+            </a:r>
+          </a:p>
+          <a:p>
+            <a:pPr>
+              <a:spcAft>
+                <a:spcPts val="500"/>
+              </a:spcAft>
+              <a:defRPr sz="1900" b="0" i="0">
+                <a:solidFill>
+                  <a:srgbClr val="1A1A1E"/>
+                </a:solidFill>
+                <a:latin typeface="Calibri"/>
+              </a:defRPr>
+            </a:pPr>
+            <a:r>
+              <a:t>in my thoughts and in my words,</a:t>
+            </a:r>
+          </a:p>
+          <a:p>
+            <a:pPr>
+              <a:spcAft>
+                <a:spcPts val="500"/>
+              </a:spcAft>
+              <a:defRPr sz="1900" b="0" i="0">
+                <a:solidFill>
+                  <a:srgbClr val="1A1A1E"/>
+                </a:solidFill>
+                <a:latin typeface="Calibri"/>
+              </a:defRPr>
+            </a:pPr>
+            <a:r>
+              <a:t>in what I have done and in what I have failed to do,</a:t>
+            </a:r>
+          </a:p>
+          <a:p>
+            <a:pPr>
+              <a:spcAft>
+                <a:spcPts val="500"/>
+              </a:spcAft>
+              <a:defRPr sz="1900" b="0" i="0">
+                <a:solidFill>
+                  <a:srgbClr val="1A1A1E"/>
+                </a:solidFill>
+                <a:latin typeface="Calibri"/>
+              </a:defRPr>
+            </a:pPr>
+            <a:r>
+              <a:t>through my fault, through my fault,</a:t>
+            </a:r>
+          </a:p>
+          <a:p>
+            <a:pPr>
+              <a:spcAft>
+                <a:spcPts val="500"/>
+              </a:spcAft>
+              <a:defRPr sz="1900" b="0" i="0">
+                <a:solidFill>
+                  <a:srgbClr val="1A1A1E"/>
+                </a:solidFill>
+                <a:latin typeface="Calibri"/>
+              </a:defRPr>
+            </a:pPr>
+            <a:r>
+              <a:t>through my most grievous fault;</a:t>
+            </a:r>
+          </a:p>
+          <a:p>
+            <a:pPr>
+              <a:spcAft>
+                <a:spcPts val="500"/>
+              </a:spcAft>
+              <a:defRPr sz="1900" b="0" i="0">
+                <a:solidFill>
+                  <a:srgbClr val="1A1A1E"/>
+                </a:solidFill>
+                <a:latin typeface="Calibri"/>
+              </a:defRPr>
+            </a:pPr>
+            <a:r>
+              <a:t>therefore I ask blessed Mary ever-Virgin,</a:t>
+            </a:r>
+          </a:p>
+          <a:p>
+            <a:pPr>
+              <a:spcAft>
+                <a:spcPts val="500"/>
+              </a:spcAft>
+              <a:defRPr sz="1900" b="0" i="0">
+                <a:solidFill>
+                  <a:srgbClr val="1A1A1E"/>
+                </a:solidFill>
+                <a:latin typeface="Calibri"/>
+              </a:defRPr>
+            </a:pPr>
+            <a:r>
+              <a:t>all the Angels and Saints,</a:t>
+            </a:r>
+          </a:p>
+          <a:p>
+            <a:pPr>
+              <a:spcAft>
+                <a:spcPts val="500"/>
+              </a:spcAft>
+              <a:defRPr sz="1900" b="0" i="0">
+                <a:solidFill>
+                  <a:srgbClr val="1A1A1E"/>
+                </a:solidFill>
+                <a:latin typeface="Calibri"/>
+              </a:defRPr>
+            </a:pPr>
+            <a:r>
+              <a:t>and you, my brothers and sisters,</a:t>
+            </a:r>
+          </a:p>
+          <a:p>
+            <a:pPr>
+              <a:spcAft>
+                <a:spcPts val="500"/>
+              </a:spcAft>
+              <a:defRPr sz="1900" b="0" i="0">
+                <a:solidFill>
+                  <a:srgbClr val="1A1A1E"/>
+                </a:solidFill>
+                <a:latin typeface="Calibri"/>
+              </a:defRPr>
+            </a:pPr>
+            <a:r>
+              <a:t>to pray for me to the Lord our God.</a:t>
+            </a:r>
+          </a:p>
+          <a:p>
+            <a:pPr>
+              <a:spcAft>
+                <a:spcPts val="500"/>
+              </a:spcAft>
+              <a:defRPr sz="2000" b="1" i="0">
+                <a:solidFill>
+                  <a:srgbClr val="56515A"/>
+                </a:solidFill>
+                <a:latin typeface="Calibri"/>
+              </a:defRPr>
+            </a:pPr>
+            <a:r>
+              <a:t>May almighty God have mercy on us, forgive us our sins, and bring us to everlasting life.</a:t>
+            </a:r>
+          </a:p>
+          <a:p>
+            <a:pPr>
+              <a:spcAft>
+                <a:spcPts val="500"/>
+              </a:spcAft>
+              <a:defRPr sz="2000" b="1" i="0">
+                <a:solidFill>
+                  <a:srgbClr val="1A1A1E"/>
+                </a:solidFill>
+                <a:latin typeface="Calibri"/>
+              </a:defRPr>
+            </a:pPr>
+            <a:r>
+              <a:t>Amen.</a:t>
             </a:r>
           </a:p>
         </p:txBody>
@@ -20330,7 +17883,7 @@
         <p:spPr>
           <a:xfrm>
             <a:off x="685800" y="256032"/>
-            <a:ext cx="756904" cy="749807"/>
+            <a:ext cx="387682" cy="384048"/>
           </a:xfrm>
           <a:prstGeom prst="rect">
             <a:avLst/>
@@ -20345,16 +17898,16 @@
         </p:nvSpPr>
         <p:spPr>
           <a:xfrm>
-            <a:off x="1570720" y="256032"/>
-            <a:ext cx="16031480" cy="868680"/>
-          </a:xfrm>
-          <a:prstGeom prst="rect">
-            <a:avLst/>
-          </a:prstGeom>
-          <a:noFill/>
-        </p:spPr>
-        <p:txBody>
-          <a:bodyPr wrap="square" lIns="109728" rIns="109728" tIns="73152" bIns="73152">
+            <a:off x="1201498" y="256032"/>
+            <a:ext cx="16400702" cy="384048"/>
+          </a:xfrm>
+          <a:prstGeom prst="rect">
+            <a:avLst/>
+          </a:prstGeom>
+          <a:noFill/>
+        </p:spPr>
+        <p:txBody>
+          <a:bodyPr wrap="square" lIns="109728" rIns="109728" tIns="73152" bIns="73152" anchor="ctr">
             <a:noAutofit/>
           </a:bodyPr>
           <a:lstStyle/>
@@ -20407,7 +17960,103 @@
               </a:defRPr>
             </a:pPr>
             <a:r>
-              <a:t>I confess to almighty God and to you, my brothers and sisters, that I have greatly sinned in my thoughts and in my words, in what I have done and in what I have failed to do; therefore I ask blessed Mary ever-Virgin, all the Angels and Saints, and you, my brothers and sisters, to pray for me to the Lord our God.</a:t>
+              <a:t>Lord, have mercy.</a:t>
+            </a:r>
+          </a:p>
+          <a:p>
+            <a:pPr>
+              <a:spcAft>
+                <a:spcPts val="500"/>
+              </a:spcAft>
+              <a:defRPr sz="2000" b="1" i="0">
+                <a:solidFill>
+                  <a:srgbClr val="1A1A1E"/>
+                </a:solidFill>
+                <a:latin typeface="Calibri"/>
+              </a:defRPr>
+            </a:pPr>
+            <a:r>
+              <a:t>Lord, have mercy.</a:t>
+            </a:r>
+          </a:p>
+          <a:p>
+            <a:pPr>
+              <a:spcAft>
+                <a:spcPts val="500"/>
+              </a:spcAft>
+              <a:defRPr sz="2000" b="1" i="0">
+                <a:solidFill>
+                  <a:srgbClr val="1A1A1E"/>
+                </a:solidFill>
+                <a:latin typeface="Calibri"/>
+              </a:defRPr>
+            </a:pPr>
+            <a:r>
+              <a:t>Christ, have mercy.</a:t>
+            </a:r>
+          </a:p>
+          <a:p>
+            <a:pPr>
+              <a:spcAft>
+                <a:spcPts val="500"/>
+              </a:spcAft>
+              <a:defRPr sz="2000" b="1" i="0">
+                <a:solidFill>
+                  <a:srgbClr val="1A1A1E"/>
+                </a:solidFill>
+                <a:latin typeface="Calibri"/>
+              </a:defRPr>
+            </a:pPr>
+            <a:r>
+              <a:t>Christ, have mercy.</a:t>
+            </a:r>
+          </a:p>
+          <a:p>
+            <a:pPr>
+              <a:spcAft>
+                <a:spcPts val="500"/>
+              </a:spcAft>
+              <a:defRPr sz="2000" b="1" i="0">
+                <a:solidFill>
+                  <a:srgbClr val="1A1A1E"/>
+                </a:solidFill>
+                <a:latin typeface="Calibri"/>
+              </a:defRPr>
+            </a:pPr>
+            <a:r>
+              <a:t>Lord, have mercy.</a:t>
+            </a:r>
+          </a:p>
+          <a:p>
+            <a:pPr>
+              <a:spcAft>
+                <a:spcPts val="500"/>
+              </a:spcAft>
+              <a:defRPr sz="2000" b="1" i="0">
+                <a:solidFill>
+                  <a:srgbClr val="1A1A1E"/>
+                </a:solidFill>
+                <a:latin typeface="Calibri"/>
+              </a:defRPr>
+            </a:pPr>
+            <a:r>
+              <a:t>Lord, have mercy.</a:t>
+            </a:r>
+          </a:p>
+          <a:p>
+            <a:pPr>
+              <a:spcAft>
+                <a:spcPts val="500"/>
+              </a:spcAft>
+              <a:defRPr sz="1500" b="0" i="1">
+                <a:solidFill>
+                  <a:srgbClr val="56515A"/>
+                </a:solidFill>
+                <a:latin typeface="Calibri"/>
+              </a:defRPr>
+            </a:pPr>
+            <a:r>
+              <a:t>This acclamation may also be sung, or the invocations from the Missal or approved pastoral practice may be used in full.</a:t>
             </a:r>
           </a:p>
         </p:txBody>
@@ -20459,7 +18108,7 @@
               </a:defRPr>
             </a:pPr>
             <a:r>
-              <a:t>Penitential Act</a:t>
+              <a:t>Kyrie Eleison</a:t>
             </a:r>
           </a:p>
         </p:txBody>
@@ -20507,7 +18156,7 @@
         <p:spPr>
           <a:xfrm>
             <a:off x="685800" y="256032"/>
-            <a:ext cx="756904" cy="749807"/>
+            <a:ext cx="387682" cy="384048"/>
           </a:xfrm>
           <a:prstGeom prst="rect">
             <a:avLst/>
@@ -20522,16 +18171,16 @@
         </p:nvSpPr>
         <p:spPr>
           <a:xfrm>
-            <a:off x="1570720" y="256032"/>
-            <a:ext cx="16031480" cy="868680"/>
-          </a:xfrm>
-          <a:prstGeom prst="rect">
-            <a:avLst/>
-          </a:prstGeom>
-          <a:noFill/>
-        </p:spPr>
-        <p:txBody>
-          <a:bodyPr wrap="square" lIns="109728" rIns="109728" tIns="73152" bIns="73152">
+            <a:off x="1201498" y="256032"/>
+            <a:ext cx="16400702" cy="384048"/>
+          </a:xfrm>
+          <a:prstGeom prst="rect">
+            <a:avLst/>
+          </a:prstGeom>
+          <a:noFill/>
+        </p:spPr>
+        <p:txBody>
+          <a:bodyPr wrap="square" lIns="109728" rIns="109728" tIns="73152" bIns="73152" anchor="ctr">
             <a:noAutofit/>
           </a:bodyPr>
           <a:lstStyle/>
@@ -20578,13 +18227,13 @@
               </a:spcAft>
               <a:defRPr sz="2000" b="1" i="0">
                 <a:solidFill>
-                  <a:srgbClr val="56515A"/>
-                </a:solidFill>
-                <a:latin typeface="Calibri"/>
-              </a:defRPr>
-            </a:pPr>
-            <a:r>
-              <a:t>May almighty God have mercy on us, forgive us our sins, and bring us to everlasting life.</a:t>
+                  <a:srgbClr val="1A1A1E"/>
+                </a:solidFill>
+                <a:latin typeface="Calibri"/>
+              </a:defRPr>
+            </a:pPr>
+            <a:r>
+              <a:t>Glory to God in the highest,</a:t>
             </a:r>
           </a:p>
           <a:p>
@@ -20592,7 +18241,263 @@
               <a:spcAft>
                 <a:spcPts val="500"/>
               </a:spcAft>
-              <a:defRPr sz="2000" b="1" i="0">
+              <a:defRPr sz="1900" b="0" i="0">
+                <a:solidFill>
+                  <a:srgbClr val="1A1A1E"/>
+                </a:solidFill>
+                <a:latin typeface="Calibri"/>
+              </a:defRPr>
+            </a:pPr>
+            <a:r>
+              <a:t>and on earth peace to people of good will.</a:t>
+            </a:r>
+          </a:p>
+          <a:p>
+            <a:pPr>
+              <a:spcAft>
+                <a:spcPts val="500"/>
+              </a:spcAft>
+              <a:defRPr sz="1900" b="0" i="0">
+                <a:solidFill>
+                  <a:srgbClr val="1A1A1E"/>
+                </a:solidFill>
+                <a:latin typeface="Calibri"/>
+              </a:defRPr>
+            </a:pPr>
+            <a:r>
+              <a:t>We praise you, we bless you, we adore you,</a:t>
+            </a:r>
+          </a:p>
+          <a:p>
+            <a:pPr>
+              <a:spcAft>
+                <a:spcPts val="500"/>
+              </a:spcAft>
+              <a:defRPr sz="1900" b="0" i="0">
+                <a:solidFill>
+                  <a:srgbClr val="1A1A1E"/>
+                </a:solidFill>
+                <a:latin typeface="Calibri"/>
+              </a:defRPr>
+            </a:pPr>
+            <a:r>
+              <a:t>we glorify you, we give you thanks</a:t>
+            </a:r>
+          </a:p>
+          <a:p>
+            <a:pPr>
+              <a:spcAft>
+                <a:spcPts val="500"/>
+              </a:spcAft>
+              <a:defRPr sz="1900" b="0" i="0">
+                <a:solidFill>
+                  <a:srgbClr val="1A1A1E"/>
+                </a:solidFill>
+                <a:latin typeface="Calibri"/>
+              </a:defRPr>
+            </a:pPr>
+            <a:r>
+              <a:t>for your great glory,</a:t>
+            </a:r>
+          </a:p>
+          <a:p>
+            <a:pPr>
+              <a:spcAft>
+                <a:spcPts val="500"/>
+              </a:spcAft>
+              <a:defRPr sz="1900" b="0" i="0">
+                <a:solidFill>
+                  <a:srgbClr val="1A1A1E"/>
+                </a:solidFill>
+                <a:latin typeface="Calibri"/>
+              </a:defRPr>
+            </a:pPr>
+            <a:r>
+              <a:t>Lord God, heavenly King, O God, almighty Father.</a:t>
+            </a:r>
+          </a:p>
+          <a:p>
+            <a:pPr>
+              <a:spcAft>
+                <a:spcPts val="500"/>
+              </a:spcAft>
+              <a:defRPr sz="1900" b="0" i="0">
+                <a:solidFill>
+                  <a:srgbClr val="1A1A1E"/>
+                </a:solidFill>
+                <a:latin typeface="Calibri"/>
+              </a:defRPr>
+            </a:pPr>
+            <a:r>
+              <a:t>Lord Jesus Christ, Only Begotten Son,</a:t>
+            </a:r>
+          </a:p>
+          <a:p>
+            <a:pPr>
+              <a:spcAft>
+                <a:spcPts val="500"/>
+              </a:spcAft>
+              <a:defRPr sz="1900" b="0" i="0">
+                <a:solidFill>
+                  <a:srgbClr val="1A1A1E"/>
+                </a:solidFill>
+                <a:latin typeface="Calibri"/>
+              </a:defRPr>
+            </a:pPr>
+            <a:r>
+              <a:t>Lord God, Lamb of God, Son of the Father,</a:t>
+            </a:r>
+          </a:p>
+          <a:p>
+            <a:pPr>
+              <a:spcAft>
+                <a:spcPts val="500"/>
+              </a:spcAft>
+              <a:defRPr sz="1900" b="0" i="0">
+                <a:solidFill>
+                  <a:srgbClr val="1A1A1E"/>
+                </a:solidFill>
+                <a:latin typeface="Calibri"/>
+              </a:defRPr>
+            </a:pPr>
+            <a:r>
+              <a:t>you take away the sins of the world, have mercy on us;</a:t>
+            </a:r>
+          </a:p>
+          <a:p>
+            <a:pPr>
+              <a:spcAft>
+                <a:spcPts val="500"/>
+              </a:spcAft>
+              <a:defRPr sz="1900" b="0" i="0">
+                <a:solidFill>
+                  <a:srgbClr val="1A1A1E"/>
+                </a:solidFill>
+                <a:latin typeface="Calibri"/>
+              </a:defRPr>
+            </a:pPr>
+            <a:r>
+              <a:t>you take away the sins of the world, receive our prayer;</a:t>
+            </a:r>
+          </a:p>
+          <a:p>
+            <a:pPr>
+              <a:spcAft>
+                <a:spcPts val="500"/>
+              </a:spcAft>
+              <a:defRPr sz="1900" b="0" i="0">
+                <a:solidFill>
+                  <a:srgbClr val="1A1A1E"/>
+                </a:solidFill>
+                <a:latin typeface="Calibri"/>
+              </a:defRPr>
+            </a:pPr>
+            <a:r>
+              <a:t>you are seated at the right hand of the Father, have mercy on us.</a:t>
+            </a:r>
+          </a:p>
+          <a:p>
+            <a:pPr>
+              <a:spcAft>
+                <a:spcPts val="500"/>
+              </a:spcAft>
+              <a:defRPr sz="1900" b="0" i="0">
+                <a:solidFill>
+                  <a:srgbClr val="1A1A1E"/>
+                </a:solidFill>
+                <a:latin typeface="Calibri"/>
+              </a:defRPr>
+            </a:pPr>
+            <a:r>
+              <a:t>For you alone are the Holy One,</a:t>
+            </a:r>
+          </a:p>
+          <a:p>
+            <a:pPr>
+              <a:spcAft>
+                <a:spcPts val="500"/>
+              </a:spcAft>
+              <a:defRPr sz="1900" b="0" i="0">
+                <a:solidFill>
+                  <a:srgbClr val="1A1A1E"/>
+                </a:solidFill>
+                <a:latin typeface="Calibri"/>
+              </a:defRPr>
+            </a:pPr>
+            <a:r>
+              <a:t>you alone are the Lord,</a:t>
+            </a:r>
+          </a:p>
+          <a:p>
+            <a:pPr>
+              <a:spcAft>
+                <a:spcPts val="500"/>
+              </a:spcAft>
+              <a:defRPr sz="1900" b="0" i="0">
+                <a:solidFill>
+                  <a:srgbClr val="1A1A1E"/>
+                </a:solidFill>
+                <a:latin typeface="Calibri"/>
+              </a:defRPr>
+            </a:pPr>
+            <a:r>
+              <a:t>you alone are the Most High,</a:t>
+            </a:r>
+          </a:p>
+          <a:p>
+            <a:pPr>
+              <a:spcAft>
+                <a:spcPts val="500"/>
+              </a:spcAft>
+              <a:defRPr sz="1900" b="0" i="0">
+                <a:solidFill>
+                  <a:srgbClr val="1A1A1E"/>
+                </a:solidFill>
+                <a:latin typeface="Calibri"/>
+              </a:defRPr>
+            </a:pPr>
+            <a:r>
+              <a:t>Jesus Christ,</a:t>
+            </a:r>
+          </a:p>
+          <a:p>
+            <a:pPr>
+              <a:spcAft>
+                <a:spcPts val="500"/>
+              </a:spcAft>
+              <a:defRPr sz="1900" b="0" i="0">
+                <a:solidFill>
+                  <a:srgbClr val="1A1A1E"/>
+                </a:solidFill>
+                <a:latin typeface="Calibri"/>
+              </a:defRPr>
+            </a:pPr>
+            <a:r>
+              <a:t>with the Holy Spirit,</a:t>
+            </a:r>
+          </a:p>
+          <a:p>
+            <a:pPr>
+              <a:spcAft>
+                <a:spcPts val="500"/>
+              </a:spcAft>
+              <a:defRPr sz="1900" b="0" i="0">
+                <a:solidFill>
+                  <a:srgbClr val="1A1A1E"/>
+                </a:solidFill>
+                <a:latin typeface="Calibri"/>
+              </a:defRPr>
+            </a:pPr>
+            <a:r>
+              <a:t>in the glory of God the Father.</a:t>
+            </a:r>
+          </a:p>
+          <a:p>
+            <a:pPr>
+              <a:spcAft>
+                <a:spcPts val="500"/>
+              </a:spcAft>
+              <a:defRPr sz="1900" b="0" i="0">
                 <a:solidFill>
                   <a:srgbClr val="1A1A1E"/>
                 </a:solidFill>
@@ -20652,7 +18557,7 @@
               </a:defRPr>
             </a:pPr>
             <a:r>
-              <a:t>Penitential Act</a:t>
+              <a:t>Gloria</a:t>
             </a:r>
           </a:p>
         </p:txBody>
